--- a/curso/semana-06-producto-unidad-1/nuestras-entregas/PPT_Producto_Unidad_1_NewBit/PPT_Producto_Unidad_1_NewBit.pptx
+++ b/curso/semana-06-producto-unidad-1/nuestras-entregas/PPT_Producto_Unidad_1_NewBit/PPT_Producto_Unidad_1_NewBit.pptx
@@ -32,9 +32,12 @@
     <p:sldId id="280" r:id="rId26"/>
     <p:sldId id="281" r:id="rId27"/>
     <p:sldId id="282" r:id="rId28"/>
+    <p:sldId id="283" r:id="rId29"/>
+    <p:sldId id="284" r:id="rId30"/>
+    <p:sldId id="285" r:id="rId31"/>
   </p:sldIdLst>
   <p:notesMasterIdLst>
-    <p:notesMasterId r:id="rId29"/>
+    <p:notesMasterId r:id="rId32"/>
   </p:notesMasterIdLst>
   <p:sldSz cx="12192000" cy="6858000"/>
   <p:notesSz cx="6858000" cy="12192000"/>
@@ -2112,7 +2115,7 @@
           <a:p>
             <a:r>
               <a:rPr lang="en-US" dirty="0"/>
-              <a:t>Hoy empieza el Sprint 1. Cada sprint entrega algo que el usuario puede ver. El Sprint 3 es el de mayor riesgo técnico: ahí se fijan las metas con la línea base.</a:t>
+              <a:t>Volver a los cuatro pasos de la lámina 6. Los dos primeros ya funcionan: subir el video y encontrar a las personas, descartando las imágenes vacías y armando clips solo con actividad. Son las historias de los sprints 1 y 2 del backlog, 15 de 31 puntos. Los pasos 3 y 4 son los sprints 3 y 4. Aclarar que el PO las acepta formalmente en la revisión del sprint, como manda la guía.</a:t>
             </a:r>
             <a:endParaRPr lang="en-US" dirty="0"/>
           </a:p>
@@ -2200,7 +2203,7 @@
           <a:p>
             <a:r>
               <a:rPr lang="en-US" dirty="0"/>
-              <a:t>Cerrar con la frase y abrir preguntas.</a:t>
+              <a:t>Capturas de la aplicación web funcionando. A la izquierda, el catálogo: se arrastra el video y el sistema lo valida. A la derecha, la ficha del video procesado: de 24 imágenes por segundo pasa a 5, conserva solo las que tienen operarios y arma un clip de 2,4 s a partir de 5 s. Decir con honestidad que es un clip de prueba sintético; la prueba con los videos reales del conjunto de datos viene ahora. Si preguntan: la aplicación todavía rotula las historias con la numeración interna del código, que se alineará con la del backlog.</a:t>
             </a:r>
             <a:endParaRPr lang="en-US" dirty="0"/>
           </a:p>
@@ -2224,6 +2227,182 @@
             <a:fld id="{F7021451-1387-4CA6-816F-3879F97B5CBC}" type="slidenum">
               <a:rPr lang="en-US"/>
               <a:t>27</a:t>
+            </a:fld>
+            <a:endParaRPr lang="en-US"/>
+          </a:p>
+        </p:txBody>
+      </p:sp>
+    </p:spTree>
+    <p:extLst>
+      <p:ext uri="{BB962C8B-B14F-4D97-AF65-F5344CB8AC3E}">
+        <p14:creationId xmlns:p14="http://schemas.microsoft.com/office/powerpoint/2010/main" val="1024086991"/>
+      </p:ext>
+    </p:extLst>
+  </p:cSld>
+  <p:clrMapOvr>
+    <a:masterClrMapping/>
+  </p:clrMapOvr>
+</p:notes>
+</file>
+
+<file path=ppt/notesSlides/notesSlide28.xml><?xml version="1.0" encoding="utf-8"?>
+<p:notes xmlns:a="http://schemas.openxmlformats.org/drawingml/2006/main" xmlns:r="http://schemas.openxmlformats.org/officeDocument/2006/relationships" xmlns:p="http://schemas.openxmlformats.org/presentationml/2006/main">
+  <p:cSld>
+    <p:spTree>
+      <p:nvGrpSpPr>
+        <p:cNvPr id="1" name=""/>
+        <p:cNvGrpSpPr/>
+        <p:nvPr/>
+      </p:nvGrpSpPr>
+      <p:grpSpPr>
+        <a:xfrm>
+          <a:off x="0" y="0"/>
+          <a:ext cx="0" cy="0"/>
+          <a:chOff x="0" y="0"/>
+          <a:chExt cx="0" cy="0"/>
+        </a:xfrm>
+      </p:grpSpPr>
+      <p:sp>
+        <p:nvSpPr>
+          <p:cNvPr id="2" name="Slide Image Placeholder 1"/>
+          <p:cNvSpPr>
+            <a:spLocks noGrp="1" noRot="1" noChangeAspect="1"/>
+          </p:cNvSpPr>
+          <p:nvPr>
+            <p:ph type="sldImg"/>
+          </p:nvPr>
+        </p:nvSpPr>
+        <p:spPr/>
+      </p:sp>
+      <p:sp>
+        <p:nvSpPr>
+          <p:cNvPr id="3" name="Notes Placeholder 2"/>
+          <p:cNvSpPr>
+            <a:spLocks noGrp="1"/>
+          </p:cNvSpPr>
+          <p:nvPr>
+            <p:ph type="body" idx="1"/>
+          </p:nvPr>
+        </p:nvSpPr>
+        <p:spPr/>
+        <p:txBody>
+          <a:bodyPr/>
+          <a:lstStyle/>
+          <a:p>
+            <a:r>
+              <a:rPr lang="en-US" dirty="0"/>
+              <a:t>El estado de las 12 historias del backlog. Seis están hechas y esperan la aceptación del PO. HU05 agrupa los clips, pero le falta el formato de entrada del modelo temporal; se cierra junto con HU07. A la derecha, lo que exigen los criterios de terminado (FGAP070) y lo que todavía falta registrar.</a:t>
+            </a:r>
+            <a:endParaRPr lang="en-US" dirty="0"/>
+          </a:p>
+        </p:txBody>
+      </p:sp>
+      <p:sp>
+        <p:nvSpPr>
+          <p:cNvPr id="4" name="Slide Number Placeholder 3"/>
+          <p:cNvSpPr>
+            <a:spLocks noGrp="1"/>
+          </p:cNvSpPr>
+          <p:nvPr>
+            <p:ph type="sldNum" sz="quarter" idx="10"/>
+          </p:nvPr>
+        </p:nvSpPr>
+        <p:spPr/>
+        <p:txBody>
+          <a:bodyPr/>
+          <a:lstStyle/>
+          <a:p>
+            <a:fld id="{F7021451-1387-4CA6-816F-3879F97B5CBC}" type="slidenum">
+              <a:rPr lang="en-US"/>
+              <a:t>28</a:t>
+            </a:fld>
+            <a:endParaRPr lang="en-US"/>
+          </a:p>
+        </p:txBody>
+      </p:sp>
+    </p:spTree>
+    <p:extLst>
+      <p:ext uri="{BB962C8B-B14F-4D97-AF65-F5344CB8AC3E}">
+        <p14:creationId xmlns:p14="http://schemas.microsoft.com/office/powerpoint/2010/main" val="1024086991"/>
+      </p:ext>
+    </p:extLst>
+  </p:cSld>
+  <p:clrMapOvr>
+    <a:masterClrMapping/>
+  </p:clrMapOvr>
+</p:notes>
+</file>
+
+<file path=ppt/notesSlides/notesSlide29.xml><?xml version="1.0" encoding="utf-8"?>
+<p:notes xmlns:a="http://schemas.openxmlformats.org/drawingml/2006/main" xmlns:r="http://schemas.openxmlformats.org/officeDocument/2006/relationships" xmlns:p="http://schemas.openxmlformats.org/presentationml/2006/main">
+  <p:cSld>
+    <p:spTree>
+      <p:nvGrpSpPr>
+        <p:cNvPr id="1" name=""/>
+        <p:cNvGrpSpPr/>
+        <p:nvPr/>
+      </p:nvGrpSpPr>
+      <p:grpSpPr>
+        <a:xfrm>
+          <a:off x="0" y="0"/>
+          <a:ext cx="0" cy="0"/>
+          <a:chOff x="0" y="0"/>
+          <a:chExt cx="0" cy="0"/>
+        </a:xfrm>
+      </p:grpSpPr>
+      <p:sp>
+        <p:nvSpPr>
+          <p:cNvPr id="2" name="Slide Image Placeholder 1"/>
+          <p:cNvSpPr>
+            <a:spLocks noGrp="1" noRot="1" noChangeAspect="1"/>
+          </p:cNvSpPr>
+          <p:nvPr>
+            <p:ph type="sldImg"/>
+          </p:nvPr>
+        </p:nvSpPr>
+        <p:spPr/>
+      </p:sp>
+      <p:sp>
+        <p:nvSpPr>
+          <p:cNvPr id="3" name="Notes Placeholder 2"/>
+          <p:cNvSpPr>
+            <a:spLocks noGrp="1"/>
+          </p:cNvSpPr>
+          <p:nvPr>
+            <p:ph type="body" idx="1"/>
+          </p:nvPr>
+        </p:nvSpPr>
+        <p:spPr/>
+        <p:txBody>
+          <a:bodyPr/>
+          <a:lstStyle/>
+          <a:p>
+            <a:r>
+              <a:rPr lang="en-US" dirty="0"/>
+              <a:t>Las fechas son las del acta. El alcance de los sprints 1 y 2 ya está construido. Proponemos al PO usar ese tiempo ganado en el Sprint 3, el de mayor riesgo técnico: entrenar y evaluar ConvLSTM. Es una propuesta; la decide el Product Owner en la planificación.</a:t>
+            </a:r>
+            <a:endParaRPr lang="en-US" dirty="0"/>
+          </a:p>
+        </p:txBody>
+      </p:sp>
+      <p:sp>
+        <p:nvSpPr>
+          <p:cNvPr id="4" name="Slide Number Placeholder 3"/>
+          <p:cNvSpPr>
+            <a:spLocks noGrp="1"/>
+          </p:cNvSpPr>
+          <p:nvPr>
+            <p:ph type="sldNum" sz="quarter" idx="10"/>
+          </p:nvPr>
+        </p:nvSpPr>
+        <p:spPr/>
+        <p:txBody>
+          <a:bodyPr/>
+          <a:lstStyle/>
+          <a:p>
+            <a:fld id="{F7021451-1387-4CA6-816F-3879F97B5CBC}" type="slidenum">
+              <a:rPr lang="en-US"/>
+              <a:t>29</a:t>
             </a:fld>
             <a:endParaRPr lang="en-US"/>
           </a:p>
@@ -2330,6 +2509,94 @@
 </p:notes>
 </file>
 
+<file path=ppt/notesSlides/notesSlide30.xml><?xml version="1.0" encoding="utf-8"?>
+<p:notes xmlns:a="http://schemas.openxmlformats.org/drawingml/2006/main" xmlns:r="http://schemas.openxmlformats.org/officeDocument/2006/relationships" xmlns:p="http://schemas.openxmlformats.org/presentationml/2006/main">
+  <p:cSld>
+    <p:spTree>
+      <p:nvGrpSpPr>
+        <p:cNvPr id="1" name=""/>
+        <p:cNvGrpSpPr/>
+        <p:nvPr/>
+      </p:nvGrpSpPr>
+      <p:grpSpPr>
+        <a:xfrm>
+          <a:off x="0" y="0"/>
+          <a:ext cx="0" cy="0"/>
+          <a:chOff x="0" y="0"/>
+          <a:chExt cx="0" cy="0"/>
+        </a:xfrm>
+      </p:grpSpPr>
+      <p:sp>
+        <p:nvSpPr>
+          <p:cNvPr id="2" name="Slide Image Placeholder 1"/>
+          <p:cNvSpPr>
+            <a:spLocks noGrp="1" noRot="1" noChangeAspect="1"/>
+          </p:cNvSpPr>
+          <p:nvPr>
+            <p:ph type="sldImg"/>
+          </p:nvPr>
+        </p:nvSpPr>
+        <p:spPr/>
+      </p:sp>
+      <p:sp>
+        <p:nvSpPr>
+          <p:cNvPr id="3" name="Notes Placeholder 2"/>
+          <p:cNvSpPr>
+            <a:spLocks noGrp="1"/>
+          </p:cNvSpPr>
+          <p:nvPr>
+            <p:ph type="body" idx="1"/>
+          </p:nvPr>
+        </p:nvSpPr>
+        <p:spPr/>
+        <p:txBody>
+          <a:bodyPr/>
+          <a:lstStyle/>
+          <a:p>
+            <a:r>
+              <a:rPr lang="en-US" dirty="0"/>
+              <a:t>Cerrar con la frase y abrir preguntas.</a:t>
+            </a:r>
+            <a:endParaRPr lang="en-US" dirty="0"/>
+          </a:p>
+        </p:txBody>
+      </p:sp>
+      <p:sp>
+        <p:nvSpPr>
+          <p:cNvPr id="4" name="Slide Number Placeholder 3"/>
+          <p:cNvSpPr>
+            <a:spLocks noGrp="1"/>
+          </p:cNvSpPr>
+          <p:nvPr>
+            <p:ph type="sldNum" sz="quarter" idx="10"/>
+          </p:nvPr>
+        </p:nvSpPr>
+        <p:spPr/>
+        <p:txBody>
+          <a:bodyPr/>
+          <a:lstStyle/>
+          <a:p>
+            <a:fld id="{F7021451-1387-4CA6-816F-3879F97B5CBC}" type="slidenum">
+              <a:rPr lang="en-US"/>
+              <a:t>30</a:t>
+            </a:fld>
+            <a:endParaRPr lang="en-US"/>
+          </a:p>
+        </p:txBody>
+      </p:sp>
+    </p:spTree>
+    <p:extLst>
+      <p:ext uri="{BB962C8B-B14F-4D97-AF65-F5344CB8AC3E}">
+        <p14:creationId xmlns:p14="http://schemas.microsoft.com/office/powerpoint/2010/main" val="1024086991"/>
+      </p:ext>
+    </p:extLst>
+  </p:cSld>
+  <p:clrMapOvr>
+    <a:masterClrMapping/>
+  </p:clrMapOvr>
+</p:notes>
+</file>
+
 <file path=ppt/notesSlides/notesSlide4.xml><?xml version="1.0" encoding="utf-8"?>
 <p:notes xmlns:a="http://schemas.openxmlformats.org/drawingml/2006/main" xmlns:r="http://schemas.openxmlformats.org/officeDocument/2006/relationships" xmlns:p="http://schemas.openxmlformats.org/presentationml/2006/main">
   <p:cSld>
@@ -2552,7 +2819,7 @@
           <a:p>
             <a:r>
               <a:rPr lang="en-US" dirty="0"/>
-              <a:t>Explicar cada paso como si fuera para alguien que no sabe de tecnología. Abajo, en gris, está el nombre técnico por si alguien pregunta. Cerrar con la analogía del asistente.</a:t>
+              <a:t>Explicar cada paso como si fuera para alguien que no sabe de tecnología. Abajo, en gris, está el nombre técnico por si alguien pregunta. Cerrar con la analogía del asistente. Adelantar que los pasos 1 y 2 ya funcionan: se muestran en la parte 4.</a:t>
             </a:r>
             <a:endParaRPr lang="en-US" dirty="0"/>
           </a:p>
@@ -18255,7 +18522,7 @@
                 <a:ea typeface="Calibri" pitchFamily="34" charset="-122"/>
                 <a:cs typeface="Calibri" pitchFamily="34" charset="-120"/>
               </a:rPr>
-              <a:t>PARTE 4 · LO QUE VIENE</a:t>
+              <a:t>PARTE 4 · AVANCE REAL</a:t>
             </a:r>
             <a:endParaRPr lang="en-US" sz="1100" dirty="0"/>
           </a:p>
@@ -18294,7 +18561,7 @@
                 <a:ea typeface="Calibri Light" pitchFamily="34" charset="-122"/>
                 <a:cs typeface="Calibri Light" pitchFamily="34" charset="-120"/>
               </a:rPr>
-              <a:t>Cuatro sprints hasta diciembre</a:t>
+              <a:t>La primera mitad ya funciona</a:t>
             </a:r>
             <a:endParaRPr lang="en-US" sz="3400" dirty="0"/>
           </a:p>
@@ -18425,59 +18692,75 @@
         </p:nvSpPr>
         <p:spPr>
           <a:xfrm>
-            <a:off x="365760" y="1737360"/>
-            <a:ext cx="914400" cy="274320"/>
-          </a:xfrm>
-          <a:prstGeom prst="rect">
-            <a:avLst/>
-          </a:prstGeom>
-          <a:noFill/>
-          <a:ln/>
-        </p:spPr>
-        <p:txBody>
-          <a:bodyPr wrap="square" lIns="0" tIns="0" rIns="0" bIns="0" rtlCol="0" anchor="t"/>
-          <a:lstStyle/>
-          <a:p>
-            <a:pPr algn="ctr" indent="0" marL="0">
-              <a:buNone/>
-            </a:pPr>
-            <a:r>
-              <a:rPr lang="en-US" sz="1100" dirty="0">
+            <a:off x="731520" y="1737360"/>
+            <a:ext cx="2011680" cy="1280160"/>
+          </a:xfrm>
+          <a:prstGeom prst="rect">
+            <a:avLst/>
+          </a:prstGeom>
+          <a:noFill/>
+          <a:ln/>
+        </p:spPr>
+        <p:txBody>
+          <a:bodyPr wrap="square" lIns="0" tIns="0" rIns="0" bIns="0" rtlCol="0" anchor="t"/>
+          <a:lstStyle/>
+          <a:p>
+            <a:pPr indent="0" marL="0">
+              <a:buNone/>
+            </a:pPr>
+            <a:r>
+              <a:rPr lang="en-US" sz="10400" dirty="0">
+                <a:solidFill>
+                  <a:srgbClr val="1A1A1A"/>
+                </a:solidFill>
+                <a:latin typeface="Calibri Light" pitchFamily="34" charset="0"/>
+                <a:ea typeface="Calibri Light" pitchFamily="34" charset="-122"/>
+                <a:cs typeface="Calibri Light" pitchFamily="34" charset="-120"/>
+              </a:rPr>
+              <a:t>15</a:t>
+            </a:r>
+            <a:endParaRPr lang="en-US" sz="10400" dirty="0"/>
+          </a:p>
+        </p:txBody>
+      </p:sp>
+      <p:sp>
+        <p:nvSpPr>
+          <p:cNvPr id="9" name="Text 6"/>
+          <p:cNvSpPr/>
+          <p:nvPr/>
+        </p:nvSpPr>
+        <p:spPr>
+          <a:xfrm>
+            <a:off x="2606040" y="2331720"/>
+            <a:ext cx="1463040" cy="640080"/>
+          </a:xfrm>
+          <a:prstGeom prst="rect">
+            <a:avLst/>
+          </a:prstGeom>
+          <a:noFill/>
+          <a:ln/>
+        </p:spPr>
+        <p:txBody>
+          <a:bodyPr wrap="square" lIns="0" tIns="0" rIns="0" bIns="0" rtlCol="0" anchor="t"/>
+          <a:lstStyle/>
+          <a:p>
+            <a:pPr indent="0" marL="0">
+              <a:buNone/>
+            </a:pPr>
+            <a:r>
+              <a:rPr lang="en-US" sz="3600" dirty="0">
                 <a:solidFill>
                   <a:srgbClr val="8A8984"/>
                 </a:solidFill>
-                <a:latin typeface="Calibri" pitchFamily="34" charset="0"/>
-                <a:ea typeface="Calibri" pitchFamily="34" charset="-122"/>
-                <a:cs typeface="Calibri" pitchFamily="34" charset="-120"/>
-              </a:rPr>
-              <a:t>05 oct</a:t>
-            </a:r>
-            <a:endParaRPr lang="en-US" sz="1100" dirty="0"/>
-          </a:p>
-        </p:txBody>
-      </p:sp>
-      <p:sp>
-        <p:nvSpPr>
-          <p:cNvPr id="9" name="Shape 6"/>
-          <p:cNvSpPr/>
-          <p:nvPr/>
-        </p:nvSpPr>
-        <p:spPr>
-          <a:xfrm>
-            <a:off x="822960" y="2057400"/>
-            <a:ext cx="0" cy="2971800"/>
-          </a:xfrm>
-          <a:prstGeom prst="line">
-            <a:avLst/>
-          </a:prstGeom>
-          <a:noFill/>
-          <a:ln w="9525">
-            <a:solidFill>
-              <a:srgbClr val="E7E5E4"/>
-            </a:solidFill>
-            <a:prstDash val="solid"/>
-          </a:ln>
-        </p:spPr>
+                <a:latin typeface="Calibri Light" pitchFamily="34" charset="0"/>
+                <a:ea typeface="Calibri Light" pitchFamily="34" charset="-122"/>
+                <a:cs typeface="Calibri Light" pitchFamily="34" charset="-120"/>
+              </a:rPr>
+              <a:t>/ 31</a:t>
+            </a:r>
+            <a:endParaRPr lang="en-US" sz="3600" dirty="0"/>
+          </a:p>
+        </p:txBody>
       </p:sp>
       <p:sp>
         <p:nvSpPr>
@@ -18487,34 +18770,34 @@
         </p:nvSpPr>
         <p:spPr>
           <a:xfrm>
-            <a:off x="2360907" y="1737360"/>
-            <a:ext cx="914400" cy="274320"/>
-          </a:xfrm>
-          <a:prstGeom prst="rect">
-            <a:avLst/>
-          </a:prstGeom>
-          <a:noFill/>
-          <a:ln/>
-        </p:spPr>
-        <p:txBody>
-          <a:bodyPr wrap="square" lIns="0" tIns="0" rIns="0" bIns="0" rtlCol="0" anchor="t"/>
-          <a:lstStyle/>
-          <a:p>
-            <a:pPr algn="ctr" indent="0" marL="0">
-              <a:buNone/>
-            </a:pPr>
-            <a:r>
-              <a:rPr lang="en-US" sz="1100" dirty="0">
-                <a:solidFill>
-                  <a:srgbClr val="8A8984"/>
-                </a:solidFill>
-                <a:latin typeface="Calibri" pitchFamily="34" charset="0"/>
-                <a:ea typeface="Calibri" pitchFamily="34" charset="-122"/>
-                <a:cs typeface="Calibri" pitchFamily="34" charset="-120"/>
-              </a:rPr>
-              <a:t>19 oct</a:t>
-            </a:r>
-            <a:endParaRPr lang="en-US" sz="1100" dirty="0"/>
+            <a:off x="731520" y="3154680"/>
+            <a:ext cx="4206240" cy="731520"/>
+          </a:xfrm>
+          <a:prstGeom prst="rect">
+            <a:avLst/>
+          </a:prstGeom>
+          <a:noFill/>
+          <a:ln/>
+        </p:spPr>
+        <p:txBody>
+          <a:bodyPr wrap="square" lIns="0" tIns="0" rIns="0" bIns="0" rtlCol="0" anchor="t"/>
+          <a:lstStyle/>
+          <a:p>
+            <a:pPr indent="0" marL="0">
+              <a:buNone/>
+            </a:pPr>
+            <a:r>
+              <a:rPr lang="en-US" sz="1600" dirty="0">
+                <a:solidFill>
+                  <a:srgbClr val="57534E"/>
+                </a:solidFill>
+                <a:latin typeface="Calibri" pitchFamily="34" charset="0"/>
+                <a:ea typeface="Calibri" pitchFamily="34" charset="-122"/>
+                <a:cs typeface="Calibri" pitchFamily="34" charset="-120"/>
+              </a:rPr>
+              <a:t>puntos de historia construidos: 7 de las 12 historias, las de los sprints 1 y 2 del backlog.</a:t>
+            </a:r>
+            <a:endParaRPr lang="en-US" sz="1600" dirty="0"/>
           </a:p>
         </p:txBody>
       </p:sp>
@@ -18526,364 +18809,11 @@
         </p:nvSpPr>
         <p:spPr>
           <a:xfrm>
-            <a:off x="2818107" y="2057400"/>
-            <a:ext cx="0" cy="2971800"/>
-          </a:xfrm>
-          <a:prstGeom prst="line">
-            <a:avLst/>
-          </a:prstGeom>
-          <a:noFill/>
-          <a:ln w="9525">
-            <a:solidFill>
-              <a:srgbClr val="E7E5E4"/>
-            </a:solidFill>
-            <a:prstDash val="solid"/>
-          </a:ln>
-        </p:spPr>
-      </p:sp>
-      <p:sp>
-        <p:nvSpPr>
-          <p:cNvPr id="12" name="Text 9"/>
-          <p:cNvSpPr/>
-          <p:nvPr/>
-        </p:nvSpPr>
-        <p:spPr>
-          <a:xfrm>
-            <a:off x="4356053" y="1737360"/>
-            <a:ext cx="914400" cy="274320"/>
-          </a:xfrm>
-          <a:prstGeom prst="rect">
-            <a:avLst/>
-          </a:prstGeom>
-          <a:noFill/>
-          <a:ln/>
-        </p:spPr>
-        <p:txBody>
-          <a:bodyPr wrap="square" lIns="0" tIns="0" rIns="0" bIns="0" rtlCol="0" anchor="t"/>
-          <a:lstStyle/>
-          <a:p>
-            <a:pPr algn="ctr" indent="0" marL="0">
-              <a:buNone/>
-            </a:pPr>
-            <a:r>
-              <a:rPr lang="en-US" sz="1100" dirty="0">
-                <a:solidFill>
-                  <a:srgbClr val="8A8984"/>
-                </a:solidFill>
-                <a:latin typeface="Calibri" pitchFamily="34" charset="0"/>
-                <a:ea typeface="Calibri" pitchFamily="34" charset="-122"/>
-                <a:cs typeface="Calibri" pitchFamily="34" charset="-120"/>
-              </a:rPr>
-              <a:t>02 nov</a:t>
-            </a:r>
-            <a:endParaRPr lang="en-US" sz="1100" dirty="0"/>
-          </a:p>
-        </p:txBody>
-      </p:sp>
-      <p:sp>
-        <p:nvSpPr>
-          <p:cNvPr id="13" name="Shape 10"/>
-          <p:cNvSpPr/>
-          <p:nvPr/>
-        </p:nvSpPr>
-        <p:spPr>
-          <a:xfrm>
-            <a:off x="4813253" y="2057400"/>
-            <a:ext cx="0" cy="2971800"/>
-          </a:xfrm>
-          <a:prstGeom prst="line">
-            <a:avLst/>
-          </a:prstGeom>
-          <a:noFill/>
-          <a:ln w="9525">
-            <a:solidFill>
-              <a:srgbClr val="E7E5E4"/>
-            </a:solidFill>
-            <a:prstDash val="solid"/>
-          </a:ln>
-        </p:spPr>
-      </p:sp>
-      <p:sp>
-        <p:nvSpPr>
-          <p:cNvPr id="14" name="Text 11"/>
-          <p:cNvSpPr/>
-          <p:nvPr/>
-        </p:nvSpPr>
-        <p:spPr>
-          <a:xfrm>
-            <a:off x="6351200" y="1737360"/>
-            <a:ext cx="914400" cy="274320"/>
-          </a:xfrm>
-          <a:prstGeom prst="rect">
-            <a:avLst/>
-          </a:prstGeom>
-          <a:noFill/>
-          <a:ln/>
-        </p:spPr>
-        <p:txBody>
-          <a:bodyPr wrap="square" lIns="0" tIns="0" rIns="0" bIns="0" rtlCol="0" anchor="t"/>
-          <a:lstStyle/>
-          <a:p>
-            <a:pPr algn="ctr" indent="0" marL="0">
-              <a:buNone/>
-            </a:pPr>
-            <a:r>
-              <a:rPr lang="en-US" sz="1100" dirty="0">
-                <a:solidFill>
-                  <a:srgbClr val="8A8984"/>
-                </a:solidFill>
-                <a:latin typeface="Calibri" pitchFamily="34" charset="0"/>
-                <a:ea typeface="Calibri" pitchFamily="34" charset="-122"/>
-                <a:cs typeface="Calibri" pitchFamily="34" charset="-120"/>
-              </a:rPr>
-              <a:t>16 nov</a:t>
-            </a:r>
-            <a:endParaRPr lang="en-US" sz="1100" dirty="0"/>
-          </a:p>
-        </p:txBody>
-      </p:sp>
-      <p:sp>
-        <p:nvSpPr>
-          <p:cNvPr id="15" name="Shape 12"/>
-          <p:cNvSpPr/>
-          <p:nvPr/>
-        </p:nvSpPr>
-        <p:spPr>
-          <a:xfrm>
-            <a:off x="6808400" y="2057400"/>
-            <a:ext cx="0" cy="2971800"/>
-          </a:xfrm>
-          <a:prstGeom prst="line">
-            <a:avLst/>
-          </a:prstGeom>
-          <a:noFill/>
-          <a:ln w="9525">
-            <a:solidFill>
-              <a:srgbClr val="E7E5E4"/>
-            </a:solidFill>
-            <a:prstDash val="solid"/>
-          </a:ln>
-        </p:spPr>
-      </p:sp>
-      <p:sp>
-        <p:nvSpPr>
-          <p:cNvPr id="16" name="Text 13"/>
-          <p:cNvSpPr/>
-          <p:nvPr/>
-        </p:nvSpPr>
-        <p:spPr>
-          <a:xfrm>
-            <a:off x="8346347" y="1737360"/>
-            <a:ext cx="914400" cy="274320"/>
-          </a:xfrm>
-          <a:prstGeom prst="rect">
-            <a:avLst/>
-          </a:prstGeom>
-          <a:noFill/>
-          <a:ln/>
-        </p:spPr>
-        <p:txBody>
-          <a:bodyPr wrap="square" lIns="0" tIns="0" rIns="0" bIns="0" rtlCol="0" anchor="t"/>
-          <a:lstStyle/>
-          <a:p>
-            <a:pPr algn="ctr" indent="0" marL="0">
-              <a:buNone/>
-            </a:pPr>
-            <a:r>
-              <a:rPr lang="en-US" sz="1100" dirty="0">
-                <a:solidFill>
-                  <a:srgbClr val="8A8984"/>
-                </a:solidFill>
-                <a:latin typeface="Calibri" pitchFamily="34" charset="0"/>
-                <a:ea typeface="Calibri" pitchFamily="34" charset="-122"/>
-                <a:cs typeface="Calibri" pitchFamily="34" charset="-120"/>
-              </a:rPr>
-              <a:t>30 nov</a:t>
-            </a:r>
-            <a:endParaRPr lang="en-US" sz="1100" dirty="0"/>
-          </a:p>
-        </p:txBody>
-      </p:sp>
-      <p:sp>
-        <p:nvSpPr>
-          <p:cNvPr id="17" name="Shape 14"/>
-          <p:cNvSpPr/>
-          <p:nvPr/>
-        </p:nvSpPr>
-        <p:spPr>
-          <a:xfrm>
-            <a:off x="8803547" y="2057400"/>
-            <a:ext cx="0" cy="2971800"/>
-          </a:xfrm>
-          <a:prstGeom prst="line">
-            <a:avLst/>
-          </a:prstGeom>
-          <a:noFill/>
-          <a:ln w="9525">
-            <a:solidFill>
-              <a:srgbClr val="E7E5E4"/>
-            </a:solidFill>
-            <a:prstDash val="solid"/>
-          </a:ln>
-        </p:spPr>
-      </p:sp>
-      <p:sp>
-        <p:nvSpPr>
-          <p:cNvPr id="18" name="Text 15"/>
-          <p:cNvSpPr/>
-          <p:nvPr/>
-        </p:nvSpPr>
-        <p:spPr>
-          <a:xfrm>
-            <a:off x="10341493" y="1737360"/>
-            <a:ext cx="914400" cy="274320"/>
-          </a:xfrm>
-          <a:prstGeom prst="rect">
-            <a:avLst/>
-          </a:prstGeom>
-          <a:noFill/>
-          <a:ln/>
-        </p:spPr>
-        <p:txBody>
-          <a:bodyPr wrap="square" lIns="0" tIns="0" rIns="0" bIns="0" rtlCol="0" anchor="t"/>
-          <a:lstStyle/>
-          <a:p>
-            <a:pPr algn="ctr" indent="0" marL="0">
-              <a:buNone/>
-            </a:pPr>
-            <a:r>
-              <a:rPr lang="en-US" sz="1100" dirty="0">
-                <a:solidFill>
-                  <a:srgbClr val="8A8984"/>
-                </a:solidFill>
-                <a:latin typeface="Calibri" pitchFamily="34" charset="0"/>
-                <a:ea typeface="Calibri" pitchFamily="34" charset="-122"/>
-                <a:cs typeface="Calibri" pitchFamily="34" charset="-120"/>
-              </a:rPr>
-              <a:t>14 dic</a:t>
-            </a:r>
-            <a:endParaRPr lang="en-US" sz="1100" dirty="0"/>
-          </a:p>
-        </p:txBody>
-      </p:sp>
-      <p:sp>
-        <p:nvSpPr>
-          <p:cNvPr id="19" name="Shape 16"/>
-          <p:cNvSpPr/>
-          <p:nvPr/>
-        </p:nvSpPr>
-        <p:spPr>
-          <a:xfrm>
-            <a:off x="10798693" y="2057400"/>
-            <a:ext cx="0" cy="2971800"/>
-          </a:xfrm>
-          <a:prstGeom prst="line">
-            <a:avLst/>
-          </a:prstGeom>
-          <a:noFill/>
-          <a:ln w="9525">
-            <a:solidFill>
-              <a:srgbClr val="E7E5E4"/>
-            </a:solidFill>
-            <a:prstDash val="solid"/>
-          </a:ln>
-        </p:spPr>
-      </p:sp>
-      <p:sp>
-        <p:nvSpPr>
-          <p:cNvPr id="20" name="Shape 17"/>
-          <p:cNvSpPr/>
-          <p:nvPr/>
-        </p:nvSpPr>
-        <p:spPr>
-          <a:xfrm>
-            <a:off x="822960" y="2148840"/>
-            <a:ext cx="1567615" cy="292608"/>
-          </a:xfrm>
-          <a:prstGeom prst="roundRect">
-            <a:avLst>
-              <a:gd name="adj" fmla="val 15625"/>
-            </a:avLst>
-          </a:prstGeom>
-          <a:solidFill>
-            <a:srgbClr val="8A8984"/>
-          </a:solidFill>
-          <a:ln w="12700">
-            <a:solidFill>
-              <a:srgbClr val="8A8984"/>
-            </a:solidFill>
-            <a:prstDash val="solid"/>
-          </a:ln>
-        </p:spPr>
-      </p:sp>
-      <p:sp>
-        <p:nvSpPr>
-          <p:cNvPr id="21" name="Text 18"/>
-          <p:cNvSpPr/>
-          <p:nvPr/>
-        </p:nvSpPr>
-        <p:spPr>
-          <a:xfrm>
-            <a:off x="2527735" y="2167128"/>
-            <a:ext cx="3200400" cy="274320"/>
-          </a:xfrm>
-          <a:prstGeom prst="rect">
-            <a:avLst/>
-          </a:prstGeom>
-          <a:noFill/>
-          <a:ln/>
-        </p:spPr>
-        <p:txBody>
-          <a:bodyPr wrap="square" lIns="0" tIns="0" rIns="0" bIns="0" rtlCol="0" anchor="t"/>
-          <a:lstStyle/>
-          <a:p>
-            <a:pPr algn="l" indent="0" marL="0">
-              <a:buNone/>
-            </a:pPr>
-            <a:r>
-              <a:rPr lang="en-US" sz="1300" b="1" dirty="0">
-                <a:solidFill>
-                  <a:srgbClr val="1A1A1A"/>
-                </a:solidFill>
-                <a:latin typeface="Calibri" pitchFamily="34" charset="0"/>
-                <a:ea typeface="Calibri" pitchFamily="34" charset="-122"/>
-                <a:cs typeface="Calibri" pitchFamily="34" charset="-120"/>
-              </a:rPr>
-              <a:t>Inicio  </a:t>
-            </a:r>
-            <a:pPr algn="l" indent="0" marL="0">
-              <a:buNone/>
-            </a:pPr>
-            <a:r>
-              <a:rPr lang="en-US" sz="1300" dirty="0">
-                <a:solidFill>
-                  <a:srgbClr val="57534E"/>
-                </a:solidFill>
-                <a:latin typeface="Calibri" pitchFamily="34" charset="0"/>
-                <a:ea typeface="Calibri" pitchFamily="34" charset="-122"/>
-                <a:cs typeface="Calibri" pitchFamily="34" charset="-120"/>
-              </a:rPr>
-              <a:t>Formatos de la Unidad I</a:t>
-            </a:r>
-            <a:endParaRPr lang="en-US" sz="1300" dirty="0"/>
-          </a:p>
-        </p:txBody>
-      </p:sp>
-      <p:sp>
-        <p:nvSpPr>
-          <p:cNvPr id="22" name="Shape 19"/>
-          <p:cNvSpPr/>
-          <p:nvPr/>
-        </p:nvSpPr>
-        <p:spPr>
-          <a:xfrm>
-            <a:off x="2818107" y="2624328"/>
-            <a:ext cx="1567615" cy="292608"/>
-          </a:xfrm>
-          <a:prstGeom prst="roundRect">
-            <a:avLst>
-              <a:gd name="adj" fmla="val 15625"/>
-            </a:avLst>
+            <a:off x="731520" y="4069080"/>
+            <a:ext cx="109728" cy="384048"/>
+          </a:xfrm>
+          <a:prstGeom prst="rect">
+            <a:avLst/>
           </a:prstGeom>
           <a:solidFill>
             <a:srgbClr val="3E63DD"/>
@@ -18898,72 +18828,17 @@
       </p:sp>
       <p:sp>
         <p:nvSpPr>
-          <p:cNvPr id="23" name="Text 20"/>
-          <p:cNvSpPr/>
-          <p:nvPr/>
-        </p:nvSpPr>
-        <p:spPr>
-          <a:xfrm>
-            <a:off x="4522882" y="2642616"/>
-            <a:ext cx="3200400" cy="274320"/>
-          </a:xfrm>
-          <a:prstGeom prst="rect">
-            <a:avLst/>
-          </a:prstGeom>
-          <a:noFill/>
-          <a:ln/>
-        </p:spPr>
-        <p:txBody>
-          <a:bodyPr wrap="square" lIns="0" tIns="0" rIns="0" bIns="0" rtlCol="0" anchor="t"/>
-          <a:lstStyle/>
-          <a:p>
-            <a:pPr algn="l" indent="0" marL="0">
-              <a:buNone/>
-            </a:pPr>
-            <a:r>
-              <a:rPr lang="en-US" sz="1300" b="1" dirty="0">
-                <a:solidFill>
-                  <a:srgbClr val="1A1A1A"/>
-                </a:solidFill>
-                <a:latin typeface="Calibri" pitchFamily="34" charset="0"/>
-                <a:ea typeface="Calibri" pitchFamily="34" charset="-122"/>
-                <a:cs typeface="Calibri" pitchFamily="34" charset="-120"/>
-              </a:rPr>
-              <a:t>Sprint 1  </a:t>
-            </a:r>
-            <a:pPr algn="l" indent="0" marL="0">
-              <a:buNone/>
-            </a:pPr>
-            <a:r>
-              <a:rPr lang="en-US" sz="1300" dirty="0">
-                <a:solidFill>
-                  <a:srgbClr val="57534E"/>
-                </a:solidFill>
-                <a:latin typeface="Calibri" pitchFamily="34" charset="0"/>
-                <a:ea typeface="Calibri" pitchFamily="34" charset="-122"/>
-                <a:cs typeface="Calibri" pitchFamily="34" charset="-120"/>
-              </a:rPr>
-              <a:t>Subir video y detectar personas</a:t>
-            </a:r>
-            <a:endParaRPr lang="en-US" sz="1300" dirty="0"/>
-          </a:p>
-        </p:txBody>
-      </p:sp>
-      <p:sp>
-        <p:nvSpPr>
-          <p:cNvPr id="24" name="Shape 21"/>
-          <p:cNvSpPr/>
-          <p:nvPr/>
-        </p:nvSpPr>
-        <p:spPr>
-          <a:xfrm>
-            <a:off x="4813253" y="3099816"/>
-            <a:ext cx="1567615" cy="292608"/>
-          </a:xfrm>
-          <a:prstGeom prst="roundRect">
-            <a:avLst>
-              <a:gd name="adj" fmla="val 15625"/>
-            </a:avLst>
+          <p:cNvPr id="12" name="Shape 9"/>
+          <p:cNvSpPr/>
+          <p:nvPr/>
+        </p:nvSpPr>
+        <p:spPr>
+          <a:xfrm>
+            <a:off x="866851" y="4069080"/>
+            <a:ext cx="109728" cy="384048"/>
+          </a:xfrm>
+          <a:prstGeom prst="rect">
+            <a:avLst/>
           </a:prstGeom>
           <a:solidFill>
             <a:srgbClr val="3E63DD"/>
@@ -18978,79 +18853,24 @@
       </p:sp>
       <p:sp>
         <p:nvSpPr>
-          <p:cNvPr id="25" name="Text 22"/>
-          <p:cNvSpPr/>
-          <p:nvPr/>
-        </p:nvSpPr>
-        <p:spPr>
-          <a:xfrm>
-            <a:off x="6518029" y="3118104"/>
-            <a:ext cx="3200400" cy="274320"/>
-          </a:xfrm>
-          <a:prstGeom prst="rect">
-            <a:avLst/>
-          </a:prstGeom>
-          <a:noFill/>
-          <a:ln/>
-        </p:spPr>
-        <p:txBody>
-          <a:bodyPr wrap="square" lIns="0" tIns="0" rIns="0" bIns="0" rtlCol="0" anchor="t"/>
-          <a:lstStyle/>
-          <a:p>
-            <a:pPr algn="l" indent="0" marL="0">
-              <a:buNone/>
-            </a:pPr>
-            <a:r>
-              <a:rPr lang="en-US" sz="1300" b="1" dirty="0">
-                <a:solidFill>
-                  <a:srgbClr val="1A1A1A"/>
-                </a:solidFill>
-                <a:latin typeface="Calibri" pitchFamily="34" charset="0"/>
-                <a:ea typeface="Calibri" pitchFamily="34" charset="-122"/>
-                <a:cs typeface="Calibri" pitchFamily="34" charset="-120"/>
-              </a:rPr>
-              <a:t>Sprint 2  </a:t>
-            </a:r>
-            <a:pPr algn="l" indent="0" marL="0">
-              <a:buNone/>
-            </a:pPr>
-            <a:r>
-              <a:rPr lang="en-US" sz="1300" dirty="0">
-                <a:solidFill>
-                  <a:srgbClr val="57534E"/>
-                </a:solidFill>
-                <a:latin typeface="Calibri" pitchFamily="34" charset="0"/>
-                <a:ea typeface="Calibri" pitchFamily="34" charset="-122"/>
-                <a:cs typeface="Calibri" pitchFamily="34" charset="-120"/>
-              </a:rPr>
-              <a:t>Filtrar fotogramas y armar clips</a:t>
-            </a:r>
-            <a:endParaRPr lang="en-US" sz="1300" dirty="0"/>
-          </a:p>
-        </p:txBody>
-      </p:sp>
-      <p:sp>
-        <p:nvSpPr>
-          <p:cNvPr id="26" name="Shape 23"/>
-          <p:cNvSpPr/>
-          <p:nvPr/>
-        </p:nvSpPr>
-        <p:spPr>
-          <a:xfrm>
-            <a:off x="6808400" y="3575304"/>
-            <a:ext cx="1567615" cy="292608"/>
-          </a:xfrm>
-          <a:prstGeom prst="roundRect">
-            <a:avLst>
-              <a:gd name="adj" fmla="val 15625"/>
-            </a:avLst>
+          <p:cNvPr id="13" name="Shape 10"/>
+          <p:cNvSpPr/>
+          <p:nvPr/>
+        </p:nvSpPr>
+        <p:spPr>
+          <a:xfrm>
+            <a:off x="1002182" y="4069080"/>
+            <a:ext cx="109728" cy="384048"/>
+          </a:xfrm>
+          <a:prstGeom prst="rect">
+            <a:avLst/>
           </a:prstGeom>
           <a:solidFill>
-            <a:srgbClr val="C2410C"/>
+            <a:srgbClr val="3E63DD"/>
           </a:solidFill>
           <a:ln w="12700">
             <a:solidFill>
-              <a:srgbClr val="C2410C"/>
+              <a:srgbClr val="3E63DD"/>
             </a:solidFill>
             <a:prstDash val="solid"/>
           </a:ln>
@@ -19058,79 +18878,24 @@
       </p:sp>
       <p:sp>
         <p:nvSpPr>
-          <p:cNvPr id="27" name="Text 24"/>
-          <p:cNvSpPr/>
-          <p:nvPr/>
-        </p:nvSpPr>
-        <p:spPr>
-          <a:xfrm>
-            <a:off x="8513175" y="3593592"/>
-            <a:ext cx="3200400" cy="274320"/>
-          </a:xfrm>
-          <a:prstGeom prst="rect">
-            <a:avLst/>
-          </a:prstGeom>
-          <a:noFill/>
-          <a:ln/>
-        </p:spPr>
-        <p:txBody>
-          <a:bodyPr wrap="square" lIns="0" tIns="0" rIns="0" bIns="0" rtlCol="0" anchor="t"/>
-          <a:lstStyle/>
-          <a:p>
-            <a:pPr algn="l" indent="0" marL="0">
-              <a:buNone/>
-            </a:pPr>
-            <a:r>
-              <a:rPr lang="en-US" sz="1300" b="1" dirty="0">
-                <a:solidFill>
-                  <a:srgbClr val="1A1A1A"/>
-                </a:solidFill>
-                <a:latin typeface="Calibri" pitchFamily="34" charset="0"/>
-                <a:ea typeface="Calibri" pitchFamily="34" charset="-122"/>
-                <a:cs typeface="Calibri" pitchFamily="34" charset="-120"/>
-              </a:rPr>
-              <a:t>Sprint 3  </a:t>
-            </a:r>
-            <a:pPr algn="l" indent="0" marL="0">
-              <a:buNone/>
-            </a:pPr>
-            <a:r>
-              <a:rPr lang="en-US" sz="1300" dirty="0">
-                <a:solidFill>
-                  <a:srgbClr val="57534E"/>
-                </a:solidFill>
-                <a:latin typeface="Calibri" pitchFamily="34" charset="0"/>
-                <a:ea typeface="Calibri" pitchFamily="34" charset="-122"/>
-                <a:cs typeface="Calibri" pitchFamily="34" charset="-120"/>
-              </a:rPr>
-              <a:t>Reconocer la conducta</a:t>
-            </a:r>
-            <a:endParaRPr lang="en-US" sz="1300" dirty="0"/>
-          </a:p>
-        </p:txBody>
-      </p:sp>
-      <p:sp>
-        <p:nvSpPr>
-          <p:cNvPr id="28" name="Shape 25"/>
-          <p:cNvSpPr/>
-          <p:nvPr/>
-        </p:nvSpPr>
-        <p:spPr>
-          <a:xfrm>
-            <a:off x="8803547" y="4050792"/>
-            <a:ext cx="1567615" cy="292608"/>
-          </a:xfrm>
-          <a:prstGeom prst="roundRect">
-            <a:avLst>
-              <a:gd name="adj" fmla="val 15625"/>
-            </a:avLst>
+          <p:cNvPr id="14" name="Shape 11"/>
+          <p:cNvSpPr/>
+          <p:nvPr/>
+        </p:nvSpPr>
+        <p:spPr>
+          <a:xfrm>
+            <a:off x="1137514" y="4069080"/>
+            <a:ext cx="109728" cy="384048"/>
+          </a:xfrm>
+          <a:prstGeom prst="rect">
+            <a:avLst/>
           </a:prstGeom>
           <a:solidFill>
-            <a:srgbClr val="C2410C"/>
+            <a:srgbClr val="3E63DD"/>
           </a:solidFill>
           <a:ln w="12700">
             <a:solidFill>
-              <a:srgbClr val="C2410C"/>
+              <a:srgbClr val="3E63DD"/>
             </a:solidFill>
             <a:prstDash val="solid"/>
           </a:ln>
@@ -19138,79 +18903,24 @@
       </p:sp>
       <p:sp>
         <p:nvSpPr>
-          <p:cNvPr id="29" name="Text 26"/>
-          <p:cNvSpPr/>
-          <p:nvPr/>
-        </p:nvSpPr>
-        <p:spPr>
-          <a:xfrm>
-            <a:off x="5511707" y="4069080"/>
-            <a:ext cx="3200400" cy="274320"/>
-          </a:xfrm>
-          <a:prstGeom prst="rect">
-            <a:avLst/>
-          </a:prstGeom>
-          <a:noFill/>
-          <a:ln/>
-        </p:spPr>
-        <p:txBody>
-          <a:bodyPr wrap="square" lIns="0" tIns="0" rIns="0" bIns="0" rtlCol="0" anchor="t"/>
-          <a:lstStyle/>
-          <a:p>
-            <a:pPr algn="r" indent="0" marL="0">
-              <a:buNone/>
-            </a:pPr>
-            <a:r>
-              <a:rPr lang="en-US" sz="1300" b="1" dirty="0">
-                <a:solidFill>
-                  <a:srgbClr val="1A1A1A"/>
-                </a:solidFill>
-                <a:latin typeface="Calibri" pitchFamily="34" charset="0"/>
-                <a:ea typeface="Calibri" pitchFamily="34" charset="-122"/>
-                <a:cs typeface="Calibri" pitchFamily="34" charset="-120"/>
-              </a:rPr>
-              <a:t>Sprint 4  </a:t>
-            </a:r>
-            <a:pPr algn="r" indent="0" marL="0">
-              <a:buNone/>
-            </a:pPr>
-            <a:r>
-              <a:rPr lang="en-US" sz="1300" dirty="0">
-                <a:solidFill>
-                  <a:srgbClr val="57534E"/>
-                </a:solidFill>
-                <a:latin typeface="Calibri" pitchFamily="34" charset="0"/>
-                <a:ea typeface="Calibri" pitchFamily="34" charset="-122"/>
-                <a:cs typeface="Calibri" pitchFamily="34" charset="-120"/>
-              </a:rPr>
-              <a:t>Alertas, recuadro de riesgo y reportes</a:t>
-            </a:r>
-            <a:endParaRPr lang="en-US" sz="1300" dirty="0"/>
-          </a:p>
-        </p:txBody>
-      </p:sp>
-      <p:sp>
-        <p:nvSpPr>
-          <p:cNvPr id="30" name="Shape 27"/>
-          <p:cNvSpPr/>
-          <p:nvPr/>
-        </p:nvSpPr>
-        <p:spPr>
-          <a:xfrm>
-            <a:off x="10798693" y="4526280"/>
-            <a:ext cx="570042" cy="292608"/>
-          </a:xfrm>
-          <a:prstGeom prst="roundRect">
-            <a:avLst>
-              <a:gd name="adj" fmla="val 15625"/>
-            </a:avLst>
+          <p:cNvPr id="15" name="Shape 12"/>
+          <p:cNvSpPr/>
+          <p:nvPr/>
+        </p:nvSpPr>
+        <p:spPr>
+          <a:xfrm>
+            <a:off x="1272845" y="4069080"/>
+            <a:ext cx="109728" cy="384048"/>
+          </a:xfrm>
+          <a:prstGeom prst="rect">
+            <a:avLst/>
           </a:prstGeom>
           <a:solidFill>
-            <a:srgbClr val="8A8984"/>
+            <a:srgbClr val="3E63DD"/>
           </a:solidFill>
           <a:ln w="12700">
             <a:solidFill>
-              <a:srgbClr val="8A8984"/>
+              <a:srgbClr val="3E63DD"/>
             </a:solidFill>
             <a:prstDash val="solid"/>
           </a:ln>
@@ -19218,75 +18928,24 @@
       </p:sp>
       <p:sp>
         <p:nvSpPr>
-          <p:cNvPr id="31" name="Text 28"/>
-          <p:cNvSpPr/>
-          <p:nvPr/>
-        </p:nvSpPr>
-        <p:spPr>
-          <a:xfrm>
-            <a:off x="7506853" y="4544568"/>
-            <a:ext cx="3200400" cy="274320"/>
-          </a:xfrm>
-          <a:prstGeom prst="rect">
-            <a:avLst/>
-          </a:prstGeom>
-          <a:noFill/>
-          <a:ln/>
-        </p:spPr>
-        <p:txBody>
-          <a:bodyPr wrap="square" lIns="0" tIns="0" rIns="0" bIns="0" rtlCol="0" anchor="t"/>
-          <a:lstStyle/>
-          <a:p>
-            <a:pPr algn="r" indent="0" marL="0">
-              <a:buNone/>
-            </a:pPr>
-            <a:r>
-              <a:rPr lang="en-US" sz="1300" b="1" dirty="0">
-                <a:solidFill>
-                  <a:srgbClr val="1A1A1A"/>
-                </a:solidFill>
-                <a:latin typeface="Calibri" pitchFamily="34" charset="0"/>
-                <a:ea typeface="Calibri" pitchFamily="34" charset="-122"/>
-                <a:cs typeface="Calibri" pitchFamily="34" charset="-120"/>
-              </a:rPr>
-              <a:t>Cierre  </a:t>
-            </a:r>
-            <a:pPr algn="r" indent="0" marL="0">
-              <a:buNone/>
-            </a:pPr>
-            <a:r>
-              <a:rPr lang="en-US" sz="1300" dirty="0">
-                <a:solidFill>
-                  <a:srgbClr val="57534E"/>
-                </a:solidFill>
-                <a:latin typeface="Calibri" pitchFamily="34" charset="0"/>
-                <a:ea typeface="Calibri" pitchFamily="34" charset="-122"/>
-                <a:cs typeface="Calibri" pitchFamily="34" charset="-120"/>
-              </a:rPr>
-              <a:t>FGAP090</a:t>
-            </a:r>
-            <a:endParaRPr lang="en-US" sz="1300" dirty="0"/>
-          </a:p>
-        </p:txBody>
-      </p:sp>
-      <p:sp>
-        <p:nvSpPr>
-          <p:cNvPr id="32" name="Shape 29"/>
-          <p:cNvSpPr/>
-          <p:nvPr/>
-        </p:nvSpPr>
-        <p:spPr>
-          <a:xfrm>
-            <a:off x="2818107" y="2560320"/>
-            <a:ext cx="0" cy="2514600"/>
-          </a:xfrm>
-          <a:prstGeom prst="line">
-            <a:avLst/>
-          </a:prstGeom>
-          <a:noFill/>
-          <a:ln w="22225">
+          <p:cNvPr id="16" name="Shape 13"/>
+          <p:cNvSpPr/>
+          <p:nvPr/>
+        </p:nvSpPr>
+        <p:spPr>
+          <a:xfrm>
+            <a:off x="1408176" y="4069080"/>
+            <a:ext cx="109728" cy="384048"/>
+          </a:xfrm>
+          <a:prstGeom prst="rect">
+            <a:avLst/>
+          </a:prstGeom>
+          <a:solidFill>
+            <a:srgbClr val="3E63DD"/>
+          </a:solidFill>
+          <a:ln w="12700">
             <a:solidFill>
-              <a:srgbClr val="1A1A1A"/>
+              <a:srgbClr val="3E63DD"/>
             </a:solidFill>
             <a:prstDash val="solid"/>
           </a:ln>
@@ -19294,30 +18953,757 @@
       </p:sp>
       <p:sp>
         <p:nvSpPr>
-          <p:cNvPr id="33" name="Text 30"/>
-          <p:cNvSpPr/>
-          <p:nvPr/>
-        </p:nvSpPr>
-        <p:spPr>
-          <a:xfrm>
-            <a:off x="2909547" y="4892040"/>
-            <a:ext cx="2286000" cy="274320"/>
-          </a:xfrm>
-          <a:prstGeom prst="rect">
-            <a:avLst/>
-          </a:prstGeom>
-          <a:noFill/>
-          <a:ln/>
-        </p:spPr>
-        <p:txBody>
-          <a:bodyPr wrap="square" lIns="0" tIns="0" rIns="0" bIns="0" rtlCol="0" anchor="t"/>
-          <a:lstStyle/>
-          <a:p>
-            <a:pPr indent="0" marL="0">
-              <a:buNone/>
-            </a:pPr>
-            <a:r>
-              <a:rPr lang="en-US" sz="1200" b="1" dirty="0">
+          <p:cNvPr id="17" name="Shape 14"/>
+          <p:cNvSpPr/>
+          <p:nvPr/>
+        </p:nvSpPr>
+        <p:spPr>
+          <a:xfrm>
+            <a:off x="1543507" y="4069080"/>
+            <a:ext cx="109728" cy="384048"/>
+          </a:xfrm>
+          <a:prstGeom prst="rect">
+            <a:avLst/>
+          </a:prstGeom>
+          <a:solidFill>
+            <a:srgbClr val="3E63DD"/>
+          </a:solidFill>
+          <a:ln w="12700">
+            <a:solidFill>
+              <a:srgbClr val="3E63DD"/>
+            </a:solidFill>
+            <a:prstDash val="solid"/>
+          </a:ln>
+        </p:spPr>
+      </p:sp>
+      <p:sp>
+        <p:nvSpPr>
+          <p:cNvPr id="18" name="Shape 15"/>
+          <p:cNvSpPr/>
+          <p:nvPr/>
+        </p:nvSpPr>
+        <p:spPr>
+          <a:xfrm>
+            <a:off x="1678838" y="4069080"/>
+            <a:ext cx="109728" cy="384048"/>
+          </a:xfrm>
+          <a:prstGeom prst="rect">
+            <a:avLst/>
+          </a:prstGeom>
+          <a:solidFill>
+            <a:srgbClr val="3E63DD"/>
+          </a:solidFill>
+          <a:ln w="12700">
+            <a:solidFill>
+              <a:srgbClr val="3E63DD"/>
+            </a:solidFill>
+            <a:prstDash val="solid"/>
+          </a:ln>
+        </p:spPr>
+      </p:sp>
+      <p:sp>
+        <p:nvSpPr>
+          <p:cNvPr id="19" name="Shape 16"/>
+          <p:cNvSpPr/>
+          <p:nvPr/>
+        </p:nvSpPr>
+        <p:spPr>
+          <a:xfrm>
+            <a:off x="1814170" y="4069080"/>
+            <a:ext cx="109728" cy="384048"/>
+          </a:xfrm>
+          <a:prstGeom prst="rect">
+            <a:avLst/>
+          </a:prstGeom>
+          <a:solidFill>
+            <a:srgbClr val="3E63DD"/>
+          </a:solidFill>
+          <a:ln w="12700">
+            <a:solidFill>
+              <a:srgbClr val="3E63DD"/>
+            </a:solidFill>
+            <a:prstDash val="solid"/>
+          </a:ln>
+        </p:spPr>
+      </p:sp>
+      <p:sp>
+        <p:nvSpPr>
+          <p:cNvPr id="20" name="Shape 17"/>
+          <p:cNvSpPr/>
+          <p:nvPr/>
+        </p:nvSpPr>
+        <p:spPr>
+          <a:xfrm>
+            <a:off x="1949501" y="4069080"/>
+            <a:ext cx="109728" cy="384048"/>
+          </a:xfrm>
+          <a:prstGeom prst="rect">
+            <a:avLst/>
+          </a:prstGeom>
+          <a:solidFill>
+            <a:srgbClr val="3E63DD"/>
+          </a:solidFill>
+          <a:ln w="12700">
+            <a:solidFill>
+              <a:srgbClr val="3E63DD"/>
+            </a:solidFill>
+            <a:prstDash val="solid"/>
+          </a:ln>
+        </p:spPr>
+      </p:sp>
+      <p:sp>
+        <p:nvSpPr>
+          <p:cNvPr id="21" name="Shape 18"/>
+          <p:cNvSpPr/>
+          <p:nvPr/>
+        </p:nvSpPr>
+        <p:spPr>
+          <a:xfrm>
+            <a:off x="2084832" y="4069080"/>
+            <a:ext cx="109728" cy="384048"/>
+          </a:xfrm>
+          <a:prstGeom prst="rect">
+            <a:avLst/>
+          </a:prstGeom>
+          <a:solidFill>
+            <a:srgbClr val="3E63DD"/>
+          </a:solidFill>
+          <a:ln w="12700">
+            <a:solidFill>
+              <a:srgbClr val="3E63DD"/>
+            </a:solidFill>
+            <a:prstDash val="solid"/>
+          </a:ln>
+        </p:spPr>
+      </p:sp>
+      <p:sp>
+        <p:nvSpPr>
+          <p:cNvPr id="22" name="Shape 19"/>
+          <p:cNvSpPr/>
+          <p:nvPr/>
+        </p:nvSpPr>
+        <p:spPr>
+          <a:xfrm>
+            <a:off x="2220163" y="4069080"/>
+            <a:ext cx="109728" cy="384048"/>
+          </a:xfrm>
+          <a:prstGeom prst="rect">
+            <a:avLst/>
+          </a:prstGeom>
+          <a:solidFill>
+            <a:srgbClr val="3E63DD"/>
+          </a:solidFill>
+          <a:ln w="12700">
+            <a:solidFill>
+              <a:srgbClr val="3E63DD"/>
+            </a:solidFill>
+            <a:prstDash val="solid"/>
+          </a:ln>
+        </p:spPr>
+      </p:sp>
+      <p:sp>
+        <p:nvSpPr>
+          <p:cNvPr id="23" name="Shape 20"/>
+          <p:cNvSpPr/>
+          <p:nvPr/>
+        </p:nvSpPr>
+        <p:spPr>
+          <a:xfrm>
+            <a:off x="2355494" y="4069080"/>
+            <a:ext cx="109728" cy="384048"/>
+          </a:xfrm>
+          <a:prstGeom prst="rect">
+            <a:avLst/>
+          </a:prstGeom>
+          <a:solidFill>
+            <a:srgbClr val="3E63DD"/>
+          </a:solidFill>
+          <a:ln w="12700">
+            <a:solidFill>
+              <a:srgbClr val="3E63DD"/>
+            </a:solidFill>
+            <a:prstDash val="solid"/>
+          </a:ln>
+        </p:spPr>
+      </p:sp>
+      <p:sp>
+        <p:nvSpPr>
+          <p:cNvPr id="24" name="Shape 21"/>
+          <p:cNvSpPr/>
+          <p:nvPr/>
+        </p:nvSpPr>
+        <p:spPr>
+          <a:xfrm>
+            <a:off x="2490826" y="4069080"/>
+            <a:ext cx="109728" cy="384048"/>
+          </a:xfrm>
+          <a:prstGeom prst="rect">
+            <a:avLst/>
+          </a:prstGeom>
+          <a:solidFill>
+            <a:srgbClr val="3E63DD"/>
+          </a:solidFill>
+          <a:ln w="12700">
+            <a:solidFill>
+              <a:srgbClr val="3E63DD"/>
+            </a:solidFill>
+            <a:prstDash val="solid"/>
+          </a:ln>
+        </p:spPr>
+      </p:sp>
+      <p:sp>
+        <p:nvSpPr>
+          <p:cNvPr id="25" name="Shape 22"/>
+          <p:cNvSpPr/>
+          <p:nvPr/>
+        </p:nvSpPr>
+        <p:spPr>
+          <a:xfrm>
+            <a:off x="2626157" y="4069080"/>
+            <a:ext cx="109728" cy="384048"/>
+          </a:xfrm>
+          <a:prstGeom prst="rect">
+            <a:avLst/>
+          </a:prstGeom>
+          <a:solidFill>
+            <a:srgbClr val="3E63DD"/>
+          </a:solidFill>
+          <a:ln w="12700">
+            <a:solidFill>
+              <a:srgbClr val="3E63DD"/>
+            </a:solidFill>
+            <a:prstDash val="solid"/>
+          </a:ln>
+        </p:spPr>
+      </p:sp>
+      <p:sp>
+        <p:nvSpPr>
+          <p:cNvPr id="26" name="Shape 23"/>
+          <p:cNvSpPr/>
+          <p:nvPr/>
+        </p:nvSpPr>
+        <p:spPr>
+          <a:xfrm>
+            <a:off x="2761488" y="4069080"/>
+            <a:ext cx="109728" cy="384048"/>
+          </a:xfrm>
+          <a:prstGeom prst="rect">
+            <a:avLst/>
+          </a:prstGeom>
+          <a:solidFill>
+            <a:srgbClr val="E7E5E4"/>
+          </a:solidFill>
+          <a:ln w="12700">
+            <a:solidFill>
+              <a:srgbClr val="E7E5E4"/>
+            </a:solidFill>
+            <a:prstDash val="solid"/>
+          </a:ln>
+        </p:spPr>
+      </p:sp>
+      <p:sp>
+        <p:nvSpPr>
+          <p:cNvPr id="27" name="Shape 24"/>
+          <p:cNvSpPr/>
+          <p:nvPr/>
+        </p:nvSpPr>
+        <p:spPr>
+          <a:xfrm>
+            <a:off x="2896819" y="4069080"/>
+            <a:ext cx="109728" cy="384048"/>
+          </a:xfrm>
+          <a:prstGeom prst="rect">
+            <a:avLst/>
+          </a:prstGeom>
+          <a:solidFill>
+            <a:srgbClr val="E7E5E4"/>
+          </a:solidFill>
+          <a:ln w="12700">
+            <a:solidFill>
+              <a:srgbClr val="E7E5E4"/>
+            </a:solidFill>
+            <a:prstDash val="solid"/>
+          </a:ln>
+        </p:spPr>
+      </p:sp>
+      <p:sp>
+        <p:nvSpPr>
+          <p:cNvPr id="28" name="Shape 25"/>
+          <p:cNvSpPr/>
+          <p:nvPr/>
+        </p:nvSpPr>
+        <p:spPr>
+          <a:xfrm>
+            <a:off x="3032150" y="4069080"/>
+            <a:ext cx="109728" cy="384048"/>
+          </a:xfrm>
+          <a:prstGeom prst="rect">
+            <a:avLst/>
+          </a:prstGeom>
+          <a:solidFill>
+            <a:srgbClr val="E7E5E4"/>
+          </a:solidFill>
+          <a:ln w="12700">
+            <a:solidFill>
+              <a:srgbClr val="E7E5E4"/>
+            </a:solidFill>
+            <a:prstDash val="solid"/>
+          </a:ln>
+        </p:spPr>
+      </p:sp>
+      <p:sp>
+        <p:nvSpPr>
+          <p:cNvPr id="29" name="Shape 26"/>
+          <p:cNvSpPr/>
+          <p:nvPr/>
+        </p:nvSpPr>
+        <p:spPr>
+          <a:xfrm>
+            <a:off x="3167482" y="4069080"/>
+            <a:ext cx="109728" cy="384048"/>
+          </a:xfrm>
+          <a:prstGeom prst="rect">
+            <a:avLst/>
+          </a:prstGeom>
+          <a:solidFill>
+            <a:srgbClr val="E7E5E4"/>
+          </a:solidFill>
+          <a:ln w="12700">
+            <a:solidFill>
+              <a:srgbClr val="E7E5E4"/>
+            </a:solidFill>
+            <a:prstDash val="solid"/>
+          </a:ln>
+        </p:spPr>
+      </p:sp>
+      <p:sp>
+        <p:nvSpPr>
+          <p:cNvPr id="30" name="Shape 27"/>
+          <p:cNvSpPr/>
+          <p:nvPr/>
+        </p:nvSpPr>
+        <p:spPr>
+          <a:xfrm>
+            <a:off x="3302813" y="4069080"/>
+            <a:ext cx="109728" cy="384048"/>
+          </a:xfrm>
+          <a:prstGeom prst="rect">
+            <a:avLst/>
+          </a:prstGeom>
+          <a:solidFill>
+            <a:srgbClr val="E7E5E4"/>
+          </a:solidFill>
+          <a:ln w="12700">
+            <a:solidFill>
+              <a:srgbClr val="E7E5E4"/>
+            </a:solidFill>
+            <a:prstDash val="solid"/>
+          </a:ln>
+        </p:spPr>
+      </p:sp>
+      <p:sp>
+        <p:nvSpPr>
+          <p:cNvPr id="31" name="Shape 28"/>
+          <p:cNvSpPr/>
+          <p:nvPr/>
+        </p:nvSpPr>
+        <p:spPr>
+          <a:xfrm>
+            <a:off x="3438144" y="4069080"/>
+            <a:ext cx="109728" cy="384048"/>
+          </a:xfrm>
+          <a:prstGeom prst="rect">
+            <a:avLst/>
+          </a:prstGeom>
+          <a:solidFill>
+            <a:srgbClr val="E7E5E4"/>
+          </a:solidFill>
+          <a:ln w="12700">
+            <a:solidFill>
+              <a:srgbClr val="E7E5E4"/>
+            </a:solidFill>
+            <a:prstDash val="solid"/>
+          </a:ln>
+        </p:spPr>
+      </p:sp>
+      <p:sp>
+        <p:nvSpPr>
+          <p:cNvPr id="32" name="Shape 29"/>
+          <p:cNvSpPr/>
+          <p:nvPr/>
+        </p:nvSpPr>
+        <p:spPr>
+          <a:xfrm>
+            <a:off x="3573475" y="4069080"/>
+            <a:ext cx="109728" cy="384048"/>
+          </a:xfrm>
+          <a:prstGeom prst="rect">
+            <a:avLst/>
+          </a:prstGeom>
+          <a:solidFill>
+            <a:srgbClr val="E7E5E4"/>
+          </a:solidFill>
+          <a:ln w="12700">
+            <a:solidFill>
+              <a:srgbClr val="E7E5E4"/>
+            </a:solidFill>
+            <a:prstDash val="solid"/>
+          </a:ln>
+        </p:spPr>
+      </p:sp>
+      <p:sp>
+        <p:nvSpPr>
+          <p:cNvPr id="33" name="Shape 30"/>
+          <p:cNvSpPr/>
+          <p:nvPr/>
+        </p:nvSpPr>
+        <p:spPr>
+          <a:xfrm>
+            <a:off x="3708806" y="4069080"/>
+            <a:ext cx="109728" cy="384048"/>
+          </a:xfrm>
+          <a:prstGeom prst="rect">
+            <a:avLst/>
+          </a:prstGeom>
+          <a:solidFill>
+            <a:srgbClr val="E7E5E4"/>
+          </a:solidFill>
+          <a:ln w="12700">
+            <a:solidFill>
+              <a:srgbClr val="E7E5E4"/>
+            </a:solidFill>
+            <a:prstDash val="solid"/>
+          </a:ln>
+        </p:spPr>
+      </p:sp>
+      <p:sp>
+        <p:nvSpPr>
+          <p:cNvPr id="34" name="Shape 31"/>
+          <p:cNvSpPr/>
+          <p:nvPr/>
+        </p:nvSpPr>
+        <p:spPr>
+          <a:xfrm>
+            <a:off x="3844138" y="4069080"/>
+            <a:ext cx="109728" cy="384048"/>
+          </a:xfrm>
+          <a:prstGeom prst="rect">
+            <a:avLst/>
+          </a:prstGeom>
+          <a:solidFill>
+            <a:srgbClr val="E7E5E4"/>
+          </a:solidFill>
+          <a:ln w="12700">
+            <a:solidFill>
+              <a:srgbClr val="E7E5E4"/>
+            </a:solidFill>
+            <a:prstDash val="solid"/>
+          </a:ln>
+        </p:spPr>
+      </p:sp>
+      <p:sp>
+        <p:nvSpPr>
+          <p:cNvPr id="35" name="Shape 32"/>
+          <p:cNvSpPr/>
+          <p:nvPr/>
+        </p:nvSpPr>
+        <p:spPr>
+          <a:xfrm>
+            <a:off x="3979469" y="4069080"/>
+            <a:ext cx="109728" cy="384048"/>
+          </a:xfrm>
+          <a:prstGeom prst="rect">
+            <a:avLst/>
+          </a:prstGeom>
+          <a:solidFill>
+            <a:srgbClr val="E7E5E4"/>
+          </a:solidFill>
+          <a:ln w="12700">
+            <a:solidFill>
+              <a:srgbClr val="E7E5E4"/>
+            </a:solidFill>
+            <a:prstDash val="solid"/>
+          </a:ln>
+        </p:spPr>
+      </p:sp>
+      <p:sp>
+        <p:nvSpPr>
+          <p:cNvPr id="36" name="Shape 33"/>
+          <p:cNvSpPr/>
+          <p:nvPr/>
+        </p:nvSpPr>
+        <p:spPr>
+          <a:xfrm>
+            <a:off x="4114800" y="4069080"/>
+            <a:ext cx="109728" cy="384048"/>
+          </a:xfrm>
+          <a:prstGeom prst="rect">
+            <a:avLst/>
+          </a:prstGeom>
+          <a:solidFill>
+            <a:srgbClr val="E7E5E4"/>
+          </a:solidFill>
+          <a:ln w="12700">
+            <a:solidFill>
+              <a:srgbClr val="E7E5E4"/>
+            </a:solidFill>
+            <a:prstDash val="solid"/>
+          </a:ln>
+        </p:spPr>
+      </p:sp>
+      <p:sp>
+        <p:nvSpPr>
+          <p:cNvPr id="37" name="Shape 34"/>
+          <p:cNvSpPr/>
+          <p:nvPr/>
+        </p:nvSpPr>
+        <p:spPr>
+          <a:xfrm>
+            <a:off x="4250131" y="4069080"/>
+            <a:ext cx="109728" cy="384048"/>
+          </a:xfrm>
+          <a:prstGeom prst="rect">
+            <a:avLst/>
+          </a:prstGeom>
+          <a:solidFill>
+            <a:srgbClr val="E7E5E4"/>
+          </a:solidFill>
+          <a:ln w="12700">
+            <a:solidFill>
+              <a:srgbClr val="E7E5E4"/>
+            </a:solidFill>
+            <a:prstDash val="solid"/>
+          </a:ln>
+        </p:spPr>
+      </p:sp>
+      <p:sp>
+        <p:nvSpPr>
+          <p:cNvPr id="38" name="Shape 35"/>
+          <p:cNvSpPr/>
+          <p:nvPr/>
+        </p:nvSpPr>
+        <p:spPr>
+          <a:xfrm>
+            <a:off x="4385462" y="4069080"/>
+            <a:ext cx="109728" cy="384048"/>
+          </a:xfrm>
+          <a:prstGeom prst="rect">
+            <a:avLst/>
+          </a:prstGeom>
+          <a:solidFill>
+            <a:srgbClr val="E7E5E4"/>
+          </a:solidFill>
+          <a:ln w="12700">
+            <a:solidFill>
+              <a:srgbClr val="E7E5E4"/>
+            </a:solidFill>
+            <a:prstDash val="solid"/>
+          </a:ln>
+        </p:spPr>
+      </p:sp>
+      <p:sp>
+        <p:nvSpPr>
+          <p:cNvPr id="39" name="Shape 36"/>
+          <p:cNvSpPr/>
+          <p:nvPr/>
+        </p:nvSpPr>
+        <p:spPr>
+          <a:xfrm>
+            <a:off x="4520794" y="4069080"/>
+            <a:ext cx="109728" cy="384048"/>
+          </a:xfrm>
+          <a:prstGeom prst="rect">
+            <a:avLst/>
+          </a:prstGeom>
+          <a:solidFill>
+            <a:srgbClr val="E7E5E4"/>
+          </a:solidFill>
+          <a:ln w="12700">
+            <a:solidFill>
+              <a:srgbClr val="E7E5E4"/>
+            </a:solidFill>
+            <a:prstDash val="solid"/>
+          </a:ln>
+        </p:spPr>
+      </p:sp>
+      <p:sp>
+        <p:nvSpPr>
+          <p:cNvPr id="40" name="Shape 37"/>
+          <p:cNvSpPr/>
+          <p:nvPr/>
+        </p:nvSpPr>
+        <p:spPr>
+          <a:xfrm>
+            <a:off x="4656125" y="4069080"/>
+            <a:ext cx="109728" cy="384048"/>
+          </a:xfrm>
+          <a:prstGeom prst="rect">
+            <a:avLst/>
+          </a:prstGeom>
+          <a:solidFill>
+            <a:srgbClr val="E7E5E4"/>
+          </a:solidFill>
+          <a:ln w="12700">
+            <a:solidFill>
+              <a:srgbClr val="E7E5E4"/>
+            </a:solidFill>
+            <a:prstDash val="solid"/>
+          </a:ln>
+        </p:spPr>
+      </p:sp>
+      <p:sp>
+        <p:nvSpPr>
+          <p:cNvPr id="41" name="Shape 38"/>
+          <p:cNvSpPr/>
+          <p:nvPr/>
+        </p:nvSpPr>
+        <p:spPr>
+          <a:xfrm>
+            <a:off x="4791456" y="4069080"/>
+            <a:ext cx="109728" cy="384048"/>
+          </a:xfrm>
+          <a:prstGeom prst="rect">
+            <a:avLst/>
+          </a:prstGeom>
+          <a:solidFill>
+            <a:srgbClr val="E7E5E4"/>
+          </a:solidFill>
+          <a:ln w="12700">
+            <a:solidFill>
+              <a:srgbClr val="E7E5E4"/>
+            </a:solidFill>
+            <a:prstDash val="solid"/>
+          </a:ln>
+        </p:spPr>
+      </p:sp>
+      <p:sp>
+        <p:nvSpPr>
+          <p:cNvPr id="42" name="Text 39"/>
+          <p:cNvSpPr/>
+          <p:nvPr/>
+        </p:nvSpPr>
+        <p:spPr>
+          <a:xfrm>
+            <a:off x="731520" y="4617720"/>
+            <a:ext cx="4389120" cy="274320"/>
+          </a:xfrm>
+          <a:prstGeom prst="rect">
+            <a:avLst/>
+          </a:prstGeom>
+          <a:noFill/>
+          <a:ln/>
+        </p:spPr>
+        <p:txBody>
+          <a:bodyPr wrap="square" lIns="0" tIns="0" rIns="0" bIns="0" rtlCol="0" anchor="t"/>
+          <a:lstStyle/>
+          <a:p>
+            <a:pPr indent="0" marL="0">
+              <a:buNone/>
+            </a:pPr>
+            <a:r>
+              <a:rPr lang="en-US" sz="1200" dirty="0">
+                <a:solidFill>
+                  <a:srgbClr val="8A8984"/>
+                </a:solidFill>
+                <a:latin typeface="Calibri" pitchFamily="34" charset="0"/>
+                <a:ea typeface="Calibri" pitchFamily="34" charset="-122"/>
+                <a:cs typeface="Calibri" pitchFamily="34" charset="-120"/>
+              </a:rPr>
+              <a:t>Construido el 17/10 · 43 pruebas automáticas en verde al 20/10</a:t>
+            </a:r>
+            <a:endParaRPr lang="en-US" sz="1200" dirty="0"/>
+          </a:p>
+        </p:txBody>
+      </p:sp>
+      <p:sp>
+        <p:nvSpPr>
+          <p:cNvPr id="43" name="Text 40"/>
+          <p:cNvSpPr/>
+          <p:nvPr/>
+        </p:nvSpPr>
+        <p:spPr>
+          <a:xfrm>
+            <a:off x="5760720" y="1828800"/>
+            <a:ext cx="457200" cy="274320"/>
+          </a:xfrm>
+          <a:prstGeom prst="rect">
+            <a:avLst/>
+          </a:prstGeom>
+          <a:noFill/>
+          <a:ln/>
+        </p:spPr>
+        <p:txBody>
+          <a:bodyPr wrap="square" lIns="0" tIns="0" rIns="0" bIns="0" rtlCol="0" anchor="t"/>
+          <a:lstStyle/>
+          <a:p>
+            <a:pPr indent="0" marL="0">
+              <a:buNone/>
+            </a:pPr>
+            <a:r>
+              <a:rPr lang="en-US" sz="1300" b="1" dirty="0">
+                <a:solidFill>
+                  <a:srgbClr val="3E63DD"/>
+                </a:solidFill>
+                <a:latin typeface="Calibri" pitchFamily="34" charset="0"/>
+                <a:ea typeface="Calibri" pitchFamily="34" charset="-122"/>
+                <a:cs typeface="Calibri" pitchFamily="34" charset="-120"/>
+              </a:rPr>
+              <a:t>01</a:t>
+            </a:r>
+            <a:endParaRPr lang="en-US" sz="1300" dirty="0"/>
+          </a:p>
+        </p:txBody>
+      </p:sp>
+      <p:pic>
+        <p:nvPicPr>
+          <p:cNvPr id="44" name="Image 0" descr="/Users/anthony/Documents/Projects/NewBit/curso/semana-06-producto-unidad-1/nuestras-entregas/PPT_Producto_Unidad_1_NewBit/img/iconos/video-ink.png">    </p:cNvPr>
+          <p:cNvPicPr>
+            <a:picLocks noChangeAspect="1"/>
+          </p:cNvPicPr>
+          <p:nvPr/>
+        </p:nvPicPr>
+        <p:blipFill>
+          <a:blip r:embed="rId1"/>
+          <a:stretch>
+            <a:fillRect/>
+          </a:stretch>
+        </p:blipFill>
+        <p:spPr>
+          <a:xfrm>
+            <a:off x="6263640" y="1783080"/>
+            <a:ext cx="365760" cy="365760"/>
+          </a:xfrm>
+          <a:prstGeom prst="rect">
+            <a:avLst/>
+          </a:prstGeom>
+        </p:spPr>
+      </p:pic>
+      <p:sp>
+        <p:nvSpPr>
+          <p:cNvPr id="45" name="Text 41"/>
+          <p:cNvSpPr/>
+          <p:nvPr/>
+        </p:nvSpPr>
+        <p:spPr>
+          <a:xfrm>
+            <a:off x="6812280" y="1783080"/>
+            <a:ext cx="3291840" cy="365760"/>
+          </a:xfrm>
+          <a:prstGeom prst="rect">
+            <a:avLst/>
+          </a:prstGeom>
+          <a:noFill/>
+          <a:ln/>
+        </p:spPr>
+        <p:txBody>
+          <a:bodyPr wrap="square" lIns="0" tIns="0" rIns="0" bIns="0" rtlCol="0" anchor="t"/>
+          <a:lstStyle/>
+          <a:p>
+            <a:pPr indent="0" marL="0">
+              <a:buNone/>
+            </a:pPr>
+            <a:r>
+              <a:rPr lang="en-US" sz="1800" b="1" dirty="0">
                 <a:solidFill>
                   <a:srgbClr val="1A1A1A"/>
                 </a:solidFill>
@@ -19325,15 +19711,810 @@
                 <a:ea typeface="Calibri" pitchFamily="34" charset="-122"/>
                 <a:cs typeface="Calibri" pitchFamily="34" charset="-120"/>
               </a:rPr>
-              <a:t>Hoy · 19 de octubre</a:t>
-            </a:r>
-            <a:endParaRPr lang="en-US" sz="1200" dirty="0"/>
-          </a:p>
-        </p:txBody>
-      </p:sp>
-      <p:sp>
-        <p:nvSpPr>
-          <p:cNvPr id="34" name="Text 31"/>
+              <a:t>Subes el video</a:t>
+            </a:r>
+            <a:endParaRPr lang="en-US" sz="1800" dirty="0"/>
+          </a:p>
+        </p:txBody>
+      </p:sp>
+      <p:sp>
+        <p:nvSpPr>
+          <p:cNvPr id="46" name="Text 42"/>
+          <p:cNvSpPr/>
+          <p:nvPr/>
+        </p:nvSpPr>
+        <p:spPr>
+          <a:xfrm>
+            <a:off x="6812280" y="2167128"/>
+            <a:ext cx="3429000" cy="457200"/>
+          </a:xfrm>
+          <a:prstGeom prst="rect">
+            <a:avLst/>
+          </a:prstGeom>
+          <a:noFill/>
+          <a:ln/>
+        </p:spPr>
+        <p:txBody>
+          <a:bodyPr wrap="square" lIns="0" tIns="0" rIns="0" bIns="0" rtlCol="0" anchor="t"/>
+          <a:lstStyle/>
+          <a:p>
+            <a:pPr indent="0" marL="0">
+              <a:buNone/>
+            </a:pPr>
+            <a:r>
+              <a:rPr lang="en-US" sz="1300" dirty="0">
+                <a:solidFill>
+                  <a:srgbClr val="57534E"/>
+                </a:solidFill>
+                <a:latin typeface="Calibri" pitchFamily="34" charset="0"/>
+                <a:ea typeface="Calibri" pitchFamily="34" charset="-122"/>
+                <a:cs typeface="Calibri" pitchFamily="34" charset="-120"/>
+              </a:rPr>
+              <a:t>Valida el archivo y muestra duración, resolución y FPS.</a:t>
+            </a:r>
+            <a:endParaRPr lang="en-US" sz="1300" dirty="0"/>
+          </a:p>
+        </p:txBody>
+      </p:sp>
+      <p:sp>
+        <p:nvSpPr>
+          <p:cNvPr id="47" name="Shape 43"/>
+          <p:cNvSpPr/>
+          <p:nvPr/>
+        </p:nvSpPr>
+        <p:spPr>
+          <a:xfrm>
+            <a:off x="10408615" y="1819656"/>
+            <a:ext cx="1051560" cy="292608"/>
+          </a:xfrm>
+          <a:prstGeom prst="roundRect">
+            <a:avLst>
+              <a:gd name="adj" fmla="val 50000"/>
+            </a:avLst>
+          </a:prstGeom>
+          <a:solidFill>
+            <a:srgbClr val="EEF8F2"/>
+          </a:solidFill>
+          <a:ln w="12700">
+            <a:solidFill>
+              <a:srgbClr val="EEF8F2"/>
+            </a:solidFill>
+            <a:prstDash val="solid"/>
+          </a:ln>
+        </p:spPr>
+      </p:sp>
+      <p:sp>
+        <p:nvSpPr>
+          <p:cNvPr id="48" name="Text 44"/>
+          <p:cNvSpPr/>
+          <p:nvPr/>
+        </p:nvSpPr>
+        <p:spPr>
+          <a:xfrm>
+            <a:off x="10408615" y="1865376"/>
+            <a:ext cx="1051560" cy="219456"/>
+          </a:xfrm>
+          <a:prstGeom prst="rect">
+            <a:avLst/>
+          </a:prstGeom>
+          <a:noFill/>
+          <a:ln/>
+        </p:spPr>
+        <p:txBody>
+          <a:bodyPr wrap="square" lIns="0" tIns="0" rIns="0" bIns="0" rtlCol="0" anchor="t"/>
+          <a:lstStyle/>
+          <a:p>
+            <a:pPr algn="ctr" indent="0" marL="0">
+              <a:buNone/>
+            </a:pPr>
+            <a:r>
+              <a:rPr lang="en-US" sz="1100" b="1" dirty="0">
+                <a:solidFill>
+                  <a:srgbClr val="2F855A"/>
+                </a:solidFill>
+                <a:latin typeface="Calibri" pitchFamily="34" charset="0"/>
+                <a:ea typeface="Calibri" pitchFamily="34" charset="-122"/>
+                <a:cs typeface="Calibri" pitchFamily="34" charset="-120"/>
+              </a:rPr>
+              <a:t>Funciona</a:t>
+            </a:r>
+            <a:endParaRPr lang="en-US" sz="1100" dirty="0"/>
+          </a:p>
+        </p:txBody>
+      </p:sp>
+      <p:sp>
+        <p:nvSpPr>
+          <p:cNvPr id="49" name="Shape 45"/>
+          <p:cNvSpPr/>
+          <p:nvPr/>
+        </p:nvSpPr>
+        <p:spPr>
+          <a:xfrm>
+            <a:off x="5760720" y="2642616"/>
+            <a:ext cx="5699455" cy="0"/>
+          </a:xfrm>
+          <a:prstGeom prst="line">
+            <a:avLst/>
+          </a:prstGeom>
+          <a:noFill/>
+          <a:ln w="9525">
+            <a:solidFill>
+              <a:srgbClr val="E7E5E4"/>
+            </a:solidFill>
+            <a:prstDash val="solid"/>
+          </a:ln>
+        </p:spPr>
+      </p:sp>
+      <p:sp>
+        <p:nvSpPr>
+          <p:cNvPr id="50" name="Text 46"/>
+          <p:cNvSpPr/>
+          <p:nvPr/>
+        </p:nvSpPr>
+        <p:spPr>
+          <a:xfrm>
+            <a:off x="5760720" y="2816352"/>
+            <a:ext cx="457200" cy="274320"/>
+          </a:xfrm>
+          <a:prstGeom prst="rect">
+            <a:avLst/>
+          </a:prstGeom>
+          <a:noFill/>
+          <a:ln/>
+        </p:spPr>
+        <p:txBody>
+          <a:bodyPr wrap="square" lIns="0" tIns="0" rIns="0" bIns="0" rtlCol="0" anchor="t"/>
+          <a:lstStyle/>
+          <a:p>
+            <a:pPr indent="0" marL="0">
+              <a:buNone/>
+            </a:pPr>
+            <a:r>
+              <a:rPr lang="en-US" sz="1300" b="1" dirty="0">
+                <a:solidFill>
+                  <a:srgbClr val="3E63DD"/>
+                </a:solidFill>
+                <a:latin typeface="Calibri" pitchFamily="34" charset="0"/>
+                <a:ea typeface="Calibri" pitchFamily="34" charset="-122"/>
+                <a:cs typeface="Calibri" pitchFamily="34" charset="-120"/>
+              </a:rPr>
+              <a:t>02</a:t>
+            </a:r>
+            <a:endParaRPr lang="en-US" sz="1300" dirty="0"/>
+          </a:p>
+        </p:txBody>
+      </p:sp>
+      <p:pic>
+        <p:nvPicPr>
+          <p:cNvPr id="51" name="Image 1" descr="/Users/anthony/Documents/Projects/NewBit/curso/semana-06-producto-unidad-1/nuestras-entregas/PPT_Producto_Unidad_1_NewBit/img/iconos/buscar-ink.png">    </p:cNvPr>
+          <p:cNvPicPr>
+            <a:picLocks noChangeAspect="1"/>
+          </p:cNvPicPr>
+          <p:nvPr/>
+        </p:nvPicPr>
+        <p:blipFill>
+          <a:blip r:embed="rId2"/>
+          <a:stretch>
+            <a:fillRect/>
+          </a:stretch>
+        </p:blipFill>
+        <p:spPr>
+          <a:xfrm>
+            <a:off x="6263640" y="2770632"/>
+            <a:ext cx="365760" cy="365760"/>
+          </a:xfrm>
+          <a:prstGeom prst="rect">
+            <a:avLst/>
+          </a:prstGeom>
+        </p:spPr>
+      </p:pic>
+      <p:sp>
+        <p:nvSpPr>
+          <p:cNvPr id="52" name="Text 47"/>
+          <p:cNvSpPr/>
+          <p:nvPr/>
+        </p:nvSpPr>
+        <p:spPr>
+          <a:xfrm>
+            <a:off x="6812280" y="2770632"/>
+            <a:ext cx="3291840" cy="365760"/>
+          </a:xfrm>
+          <a:prstGeom prst="rect">
+            <a:avLst/>
+          </a:prstGeom>
+          <a:noFill/>
+          <a:ln/>
+        </p:spPr>
+        <p:txBody>
+          <a:bodyPr wrap="square" lIns="0" tIns="0" rIns="0" bIns="0" rtlCol="0" anchor="t"/>
+          <a:lstStyle/>
+          <a:p>
+            <a:pPr indent="0" marL="0">
+              <a:buNone/>
+            </a:pPr>
+            <a:r>
+              <a:rPr lang="en-US" sz="1800" b="1" dirty="0">
+                <a:solidFill>
+                  <a:srgbClr val="1A1A1A"/>
+                </a:solidFill>
+                <a:latin typeface="Calibri" pitchFamily="34" charset="0"/>
+                <a:ea typeface="Calibri" pitchFamily="34" charset="-122"/>
+                <a:cs typeface="Calibri" pitchFamily="34" charset="-120"/>
+              </a:rPr>
+              <a:t>Encuentra a las personas</a:t>
+            </a:r>
+            <a:endParaRPr lang="en-US" sz="1800" dirty="0"/>
+          </a:p>
+        </p:txBody>
+      </p:sp>
+      <p:sp>
+        <p:nvSpPr>
+          <p:cNvPr id="53" name="Text 48"/>
+          <p:cNvSpPr/>
+          <p:nvPr/>
+        </p:nvSpPr>
+        <p:spPr>
+          <a:xfrm>
+            <a:off x="6812280" y="3154680"/>
+            <a:ext cx="3429000" cy="457200"/>
+          </a:xfrm>
+          <a:prstGeom prst="rect">
+            <a:avLst/>
+          </a:prstGeom>
+          <a:noFill/>
+          <a:ln/>
+        </p:spPr>
+        <p:txBody>
+          <a:bodyPr wrap="square" lIns="0" tIns="0" rIns="0" bIns="0" rtlCol="0" anchor="t"/>
+          <a:lstStyle/>
+          <a:p>
+            <a:pPr indent="0" marL="0">
+              <a:buNone/>
+            </a:pPr>
+            <a:r>
+              <a:rPr lang="en-US" sz="1300" dirty="0">
+                <a:solidFill>
+                  <a:srgbClr val="57534E"/>
+                </a:solidFill>
+                <a:latin typeface="Calibri" pitchFamily="34" charset="0"/>
+                <a:ea typeface="Calibri" pitchFamily="34" charset="-122"/>
+                <a:cs typeface="Calibri" pitchFamily="34" charset="-120"/>
+              </a:rPr>
+              <a:t>Descarta las imágenes vacías y arma clips solo con actividad.</a:t>
+            </a:r>
+            <a:endParaRPr lang="en-US" sz="1300" dirty="0"/>
+          </a:p>
+        </p:txBody>
+      </p:sp>
+      <p:sp>
+        <p:nvSpPr>
+          <p:cNvPr id="54" name="Shape 49"/>
+          <p:cNvSpPr/>
+          <p:nvPr/>
+        </p:nvSpPr>
+        <p:spPr>
+          <a:xfrm>
+            <a:off x="10408615" y="2807208"/>
+            <a:ext cx="1051560" cy="292608"/>
+          </a:xfrm>
+          <a:prstGeom prst="roundRect">
+            <a:avLst>
+              <a:gd name="adj" fmla="val 50000"/>
+            </a:avLst>
+          </a:prstGeom>
+          <a:solidFill>
+            <a:srgbClr val="EEF8F2"/>
+          </a:solidFill>
+          <a:ln w="12700">
+            <a:solidFill>
+              <a:srgbClr val="EEF8F2"/>
+            </a:solidFill>
+            <a:prstDash val="solid"/>
+          </a:ln>
+        </p:spPr>
+      </p:sp>
+      <p:sp>
+        <p:nvSpPr>
+          <p:cNvPr id="55" name="Text 50"/>
+          <p:cNvSpPr/>
+          <p:nvPr/>
+        </p:nvSpPr>
+        <p:spPr>
+          <a:xfrm>
+            <a:off x="10408615" y="2852928"/>
+            <a:ext cx="1051560" cy="219456"/>
+          </a:xfrm>
+          <a:prstGeom prst="rect">
+            <a:avLst/>
+          </a:prstGeom>
+          <a:noFill/>
+          <a:ln/>
+        </p:spPr>
+        <p:txBody>
+          <a:bodyPr wrap="square" lIns="0" tIns="0" rIns="0" bIns="0" rtlCol="0" anchor="t"/>
+          <a:lstStyle/>
+          <a:p>
+            <a:pPr algn="ctr" indent="0" marL="0">
+              <a:buNone/>
+            </a:pPr>
+            <a:r>
+              <a:rPr lang="en-US" sz="1100" b="1" dirty="0">
+                <a:solidFill>
+                  <a:srgbClr val="2F855A"/>
+                </a:solidFill>
+                <a:latin typeface="Calibri" pitchFamily="34" charset="0"/>
+                <a:ea typeface="Calibri" pitchFamily="34" charset="-122"/>
+                <a:cs typeface="Calibri" pitchFamily="34" charset="-120"/>
+              </a:rPr>
+              <a:t>Funciona</a:t>
+            </a:r>
+            <a:endParaRPr lang="en-US" sz="1100" dirty="0"/>
+          </a:p>
+        </p:txBody>
+      </p:sp>
+      <p:sp>
+        <p:nvSpPr>
+          <p:cNvPr id="56" name="Shape 51"/>
+          <p:cNvSpPr/>
+          <p:nvPr/>
+        </p:nvSpPr>
+        <p:spPr>
+          <a:xfrm>
+            <a:off x="5760720" y="3630168"/>
+            <a:ext cx="5699455" cy="0"/>
+          </a:xfrm>
+          <a:prstGeom prst="line">
+            <a:avLst/>
+          </a:prstGeom>
+          <a:noFill/>
+          <a:ln w="9525">
+            <a:solidFill>
+              <a:srgbClr val="E7E5E4"/>
+            </a:solidFill>
+            <a:prstDash val="solid"/>
+          </a:ln>
+        </p:spPr>
+      </p:sp>
+      <p:sp>
+        <p:nvSpPr>
+          <p:cNvPr id="57" name="Text 52"/>
+          <p:cNvSpPr/>
+          <p:nvPr/>
+        </p:nvSpPr>
+        <p:spPr>
+          <a:xfrm>
+            <a:off x="5760720" y="3803904"/>
+            <a:ext cx="457200" cy="274320"/>
+          </a:xfrm>
+          <a:prstGeom prst="rect">
+            <a:avLst/>
+          </a:prstGeom>
+          <a:noFill/>
+          <a:ln/>
+        </p:spPr>
+        <p:txBody>
+          <a:bodyPr wrap="square" lIns="0" tIns="0" rIns="0" bIns="0" rtlCol="0" anchor="t"/>
+          <a:lstStyle/>
+          <a:p>
+            <a:pPr indent="0" marL="0">
+              <a:buNone/>
+            </a:pPr>
+            <a:r>
+              <a:rPr lang="en-US" sz="1300" b="1" dirty="0">
+                <a:solidFill>
+                  <a:srgbClr val="3E63DD"/>
+                </a:solidFill>
+                <a:latin typeface="Calibri" pitchFamily="34" charset="0"/>
+                <a:ea typeface="Calibri" pitchFamily="34" charset="-122"/>
+                <a:cs typeface="Calibri" pitchFamily="34" charset="-120"/>
+              </a:rPr>
+              <a:t>03</a:t>
+            </a:r>
+            <a:endParaRPr lang="en-US" sz="1300" dirty="0"/>
+          </a:p>
+        </p:txBody>
+      </p:sp>
+      <p:pic>
+        <p:nvPicPr>
+          <p:cNvPr id="58" name="Image 2" descr="/Users/anthony/Documents/Projects/NewBit/curso/semana-06-producto-unidad-1/nuestras-entregas/PPT_Producto_Unidad_1_NewBit/img/iconos/secuencia-ink.png">    </p:cNvPr>
+          <p:cNvPicPr>
+            <a:picLocks noChangeAspect="1"/>
+          </p:cNvPicPr>
+          <p:nvPr/>
+        </p:nvPicPr>
+        <p:blipFill>
+          <a:blip r:embed="rId3"/>
+          <a:stretch>
+            <a:fillRect/>
+          </a:stretch>
+        </p:blipFill>
+        <p:spPr>
+          <a:xfrm>
+            <a:off x="6263640" y="3758184"/>
+            <a:ext cx="365760" cy="365760"/>
+          </a:xfrm>
+          <a:prstGeom prst="rect">
+            <a:avLst/>
+          </a:prstGeom>
+        </p:spPr>
+      </p:pic>
+      <p:sp>
+        <p:nvSpPr>
+          <p:cNvPr id="59" name="Text 53"/>
+          <p:cNvSpPr/>
+          <p:nvPr/>
+        </p:nvSpPr>
+        <p:spPr>
+          <a:xfrm>
+            <a:off x="6812280" y="3758184"/>
+            <a:ext cx="3291840" cy="365760"/>
+          </a:xfrm>
+          <a:prstGeom prst="rect">
+            <a:avLst/>
+          </a:prstGeom>
+          <a:noFill/>
+          <a:ln/>
+        </p:spPr>
+        <p:txBody>
+          <a:bodyPr wrap="square" lIns="0" tIns="0" rIns="0" bIns="0" rtlCol="0" anchor="t"/>
+          <a:lstStyle/>
+          <a:p>
+            <a:pPr indent="0" marL="0">
+              <a:buNone/>
+            </a:pPr>
+            <a:r>
+              <a:rPr lang="en-US" sz="1800" b="1" dirty="0">
+                <a:solidFill>
+                  <a:srgbClr val="1A1A1A"/>
+                </a:solidFill>
+                <a:latin typeface="Calibri" pitchFamily="34" charset="0"/>
+                <a:ea typeface="Calibri" pitchFamily="34" charset="-122"/>
+                <a:cs typeface="Calibri" pitchFamily="34" charset="-120"/>
+              </a:rPr>
+              <a:t>Entiende lo que hacen</a:t>
+            </a:r>
+            <a:endParaRPr lang="en-US" sz="1800" dirty="0"/>
+          </a:p>
+        </p:txBody>
+      </p:sp>
+      <p:sp>
+        <p:nvSpPr>
+          <p:cNvPr id="60" name="Text 54"/>
+          <p:cNvSpPr/>
+          <p:nvPr/>
+        </p:nvSpPr>
+        <p:spPr>
+          <a:xfrm>
+            <a:off x="6812280" y="4142232"/>
+            <a:ext cx="3429000" cy="457200"/>
+          </a:xfrm>
+          <a:prstGeom prst="rect">
+            <a:avLst/>
+          </a:prstGeom>
+          <a:noFill/>
+          <a:ln/>
+        </p:spPr>
+        <p:txBody>
+          <a:bodyPr wrap="square" lIns="0" tIns="0" rIns="0" bIns="0" rtlCol="0" anchor="t"/>
+          <a:lstStyle/>
+          <a:p>
+            <a:pPr indent="0" marL="0">
+              <a:buNone/>
+            </a:pPr>
+            <a:r>
+              <a:rPr lang="en-US" sz="1300" dirty="0">
+                <a:solidFill>
+                  <a:srgbClr val="57534E"/>
+                </a:solidFill>
+                <a:latin typeface="Calibri" pitchFamily="34" charset="0"/>
+                <a:ea typeface="Calibri" pitchFamily="34" charset="-122"/>
+                <a:cs typeface="Calibri" pitchFamily="34" charset="-120"/>
+              </a:rPr>
+              <a:t>Clasifica la conducta con ConvLSTM.</a:t>
+            </a:r>
+            <a:endParaRPr lang="en-US" sz="1300" dirty="0"/>
+          </a:p>
+        </p:txBody>
+      </p:sp>
+      <p:sp>
+        <p:nvSpPr>
+          <p:cNvPr id="61" name="Shape 55"/>
+          <p:cNvSpPr/>
+          <p:nvPr/>
+        </p:nvSpPr>
+        <p:spPr>
+          <a:xfrm>
+            <a:off x="10408615" y="3794760"/>
+            <a:ext cx="1051560" cy="292608"/>
+          </a:xfrm>
+          <a:prstGeom prst="roundRect">
+            <a:avLst>
+              <a:gd name="adj" fmla="val 50000"/>
+            </a:avLst>
+          </a:prstGeom>
+          <a:solidFill>
+            <a:srgbClr val="FFF4ED"/>
+          </a:solidFill>
+          <a:ln w="12700">
+            <a:solidFill>
+              <a:srgbClr val="FFF4ED"/>
+            </a:solidFill>
+            <a:prstDash val="solid"/>
+          </a:ln>
+        </p:spPr>
+      </p:sp>
+      <p:sp>
+        <p:nvSpPr>
+          <p:cNvPr id="62" name="Text 56"/>
+          <p:cNvSpPr/>
+          <p:nvPr/>
+        </p:nvSpPr>
+        <p:spPr>
+          <a:xfrm>
+            <a:off x="10408615" y="3840480"/>
+            <a:ext cx="1051560" cy="219456"/>
+          </a:xfrm>
+          <a:prstGeom prst="rect">
+            <a:avLst/>
+          </a:prstGeom>
+          <a:noFill/>
+          <a:ln/>
+        </p:spPr>
+        <p:txBody>
+          <a:bodyPr wrap="square" lIns="0" tIns="0" rIns="0" bIns="0" rtlCol="0" anchor="t"/>
+          <a:lstStyle/>
+          <a:p>
+            <a:pPr algn="ctr" indent="0" marL="0">
+              <a:buNone/>
+            </a:pPr>
+            <a:r>
+              <a:rPr lang="en-US" sz="1100" b="1" dirty="0">
+                <a:solidFill>
+                  <a:srgbClr val="C2410C"/>
+                </a:solidFill>
+                <a:latin typeface="Calibri" pitchFamily="34" charset="0"/>
+                <a:ea typeface="Calibri" pitchFamily="34" charset="-122"/>
+                <a:cs typeface="Calibri" pitchFamily="34" charset="-120"/>
+              </a:rPr>
+              <a:t>Sprint 3</a:t>
+            </a:r>
+            <a:endParaRPr lang="en-US" sz="1100" dirty="0"/>
+          </a:p>
+        </p:txBody>
+      </p:sp>
+      <p:sp>
+        <p:nvSpPr>
+          <p:cNvPr id="63" name="Shape 57"/>
+          <p:cNvSpPr/>
+          <p:nvPr/>
+        </p:nvSpPr>
+        <p:spPr>
+          <a:xfrm>
+            <a:off x="5760720" y="4617720"/>
+            <a:ext cx="5699455" cy="0"/>
+          </a:xfrm>
+          <a:prstGeom prst="line">
+            <a:avLst/>
+          </a:prstGeom>
+          <a:noFill/>
+          <a:ln w="9525">
+            <a:solidFill>
+              <a:srgbClr val="E7E5E4"/>
+            </a:solidFill>
+            <a:prstDash val="solid"/>
+          </a:ln>
+        </p:spPr>
+      </p:sp>
+      <p:sp>
+        <p:nvSpPr>
+          <p:cNvPr id="64" name="Text 58"/>
+          <p:cNvSpPr/>
+          <p:nvPr/>
+        </p:nvSpPr>
+        <p:spPr>
+          <a:xfrm>
+            <a:off x="5760720" y="4791456"/>
+            <a:ext cx="457200" cy="274320"/>
+          </a:xfrm>
+          <a:prstGeom prst="rect">
+            <a:avLst/>
+          </a:prstGeom>
+          <a:noFill/>
+          <a:ln/>
+        </p:spPr>
+        <p:txBody>
+          <a:bodyPr wrap="square" lIns="0" tIns="0" rIns="0" bIns="0" rtlCol="0" anchor="t"/>
+          <a:lstStyle/>
+          <a:p>
+            <a:pPr indent="0" marL="0">
+              <a:buNone/>
+            </a:pPr>
+            <a:r>
+              <a:rPr lang="en-US" sz="1300" b="1" dirty="0">
+                <a:solidFill>
+                  <a:srgbClr val="3E63DD"/>
+                </a:solidFill>
+                <a:latin typeface="Calibri" pitchFamily="34" charset="0"/>
+                <a:ea typeface="Calibri" pitchFamily="34" charset="-122"/>
+                <a:cs typeface="Calibri" pitchFamily="34" charset="-120"/>
+              </a:rPr>
+              <a:t>04</a:t>
+            </a:r>
+            <a:endParaRPr lang="en-US" sz="1300" dirty="0"/>
+          </a:p>
+        </p:txBody>
+      </p:sp>
+      <p:pic>
+        <p:nvPicPr>
+          <p:cNvPr id="65" name="Image 3" descr="/Users/anthony/Documents/Projects/NewBit/curso/semana-06-producto-unidad-1/nuestras-entregas/PPT_Producto_Unidad_1_NewBit/img/iconos/alerta-ink.png">    </p:cNvPr>
+          <p:cNvPicPr>
+            <a:picLocks noChangeAspect="1"/>
+          </p:cNvPicPr>
+          <p:nvPr/>
+        </p:nvPicPr>
+        <p:blipFill>
+          <a:blip r:embed="rId4"/>
+          <a:stretch>
+            <a:fillRect/>
+          </a:stretch>
+        </p:blipFill>
+        <p:spPr>
+          <a:xfrm>
+            <a:off x="6263640" y="4745736"/>
+            <a:ext cx="365760" cy="365760"/>
+          </a:xfrm>
+          <a:prstGeom prst="rect">
+            <a:avLst/>
+          </a:prstGeom>
+        </p:spPr>
+      </p:pic>
+      <p:sp>
+        <p:nvSpPr>
+          <p:cNvPr id="66" name="Text 59"/>
+          <p:cNvSpPr/>
+          <p:nvPr/>
+        </p:nvSpPr>
+        <p:spPr>
+          <a:xfrm>
+            <a:off x="6812280" y="4745736"/>
+            <a:ext cx="3291840" cy="365760"/>
+          </a:xfrm>
+          <a:prstGeom prst="rect">
+            <a:avLst/>
+          </a:prstGeom>
+          <a:noFill/>
+          <a:ln/>
+        </p:spPr>
+        <p:txBody>
+          <a:bodyPr wrap="square" lIns="0" tIns="0" rIns="0" bIns="0" rtlCol="0" anchor="t"/>
+          <a:lstStyle/>
+          <a:p>
+            <a:pPr indent="0" marL="0">
+              <a:buNone/>
+            </a:pPr>
+            <a:r>
+              <a:rPr lang="en-US" sz="1800" b="1" dirty="0">
+                <a:solidFill>
+                  <a:srgbClr val="1A1A1A"/>
+                </a:solidFill>
+                <a:latin typeface="Calibri" pitchFamily="34" charset="0"/>
+                <a:ea typeface="Calibri" pitchFamily="34" charset="-122"/>
+                <a:cs typeface="Calibri" pitchFamily="34" charset="-120"/>
+              </a:rPr>
+              <a:t>Te avisa con la prueba</a:t>
+            </a:r>
+            <a:endParaRPr lang="en-US" sz="1800" dirty="0"/>
+          </a:p>
+        </p:txBody>
+      </p:sp>
+      <p:sp>
+        <p:nvSpPr>
+          <p:cNvPr id="67" name="Text 60"/>
+          <p:cNvSpPr/>
+          <p:nvPr/>
+        </p:nvSpPr>
+        <p:spPr>
+          <a:xfrm>
+            <a:off x="6812280" y="5129784"/>
+            <a:ext cx="3429000" cy="457200"/>
+          </a:xfrm>
+          <a:prstGeom prst="rect">
+            <a:avLst/>
+          </a:prstGeom>
+          <a:noFill/>
+          <a:ln/>
+        </p:spPr>
+        <p:txBody>
+          <a:bodyPr wrap="square" lIns="0" tIns="0" rIns="0" bIns="0" rtlCol="0" anchor="t"/>
+          <a:lstStyle/>
+          <a:p>
+            <a:pPr indent="0" marL="0">
+              <a:buNone/>
+            </a:pPr>
+            <a:r>
+              <a:rPr lang="en-US" sz="1300" dirty="0">
+                <a:solidFill>
+                  <a:srgbClr val="57534E"/>
+                </a:solidFill>
+                <a:latin typeface="Calibri" pitchFamily="34" charset="0"/>
+                <a:ea typeface="Calibri" pitchFamily="34" charset="-122"/>
+                <a:cs typeface="Calibri" pitchFamily="34" charset="-120"/>
+              </a:rPr>
+              <a:t>Alerta, recuadro de riesgo y registro.</a:t>
+            </a:r>
+            <a:endParaRPr lang="en-US" sz="1300" dirty="0"/>
+          </a:p>
+        </p:txBody>
+      </p:sp>
+      <p:sp>
+        <p:nvSpPr>
+          <p:cNvPr id="68" name="Shape 61"/>
+          <p:cNvSpPr/>
+          <p:nvPr/>
+        </p:nvSpPr>
+        <p:spPr>
+          <a:xfrm>
+            <a:off x="10408615" y="4782312"/>
+            <a:ext cx="1051560" cy="292608"/>
+          </a:xfrm>
+          <a:prstGeom prst="roundRect">
+            <a:avLst>
+              <a:gd name="adj" fmla="val 50000"/>
+            </a:avLst>
+          </a:prstGeom>
+          <a:solidFill>
+            <a:srgbClr val="FFF4ED"/>
+          </a:solidFill>
+          <a:ln w="12700">
+            <a:solidFill>
+              <a:srgbClr val="FFF4ED"/>
+            </a:solidFill>
+            <a:prstDash val="solid"/>
+          </a:ln>
+        </p:spPr>
+      </p:sp>
+      <p:sp>
+        <p:nvSpPr>
+          <p:cNvPr id="69" name="Text 62"/>
+          <p:cNvSpPr/>
+          <p:nvPr/>
+        </p:nvSpPr>
+        <p:spPr>
+          <a:xfrm>
+            <a:off x="10408615" y="4828032"/>
+            <a:ext cx="1051560" cy="219456"/>
+          </a:xfrm>
+          <a:prstGeom prst="rect">
+            <a:avLst/>
+          </a:prstGeom>
+          <a:noFill/>
+          <a:ln/>
+        </p:spPr>
+        <p:txBody>
+          <a:bodyPr wrap="square" lIns="0" tIns="0" rIns="0" bIns="0" rtlCol="0" anchor="t"/>
+          <a:lstStyle/>
+          <a:p>
+            <a:pPr algn="ctr" indent="0" marL="0">
+              <a:buNone/>
+            </a:pPr>
+            <a:r>
+              <a:rPr lang="en-US" sz="1100" b="1" dirty="0">
+                <a:solidFill>
+                  <a:srgbClr val="C2410C"/>
+                </a:solidFill>
+                <a:latin typeface="Calibri" pitchFamily="34" charset="0"/>
+                <a:ea typeface="Calibri" pitchFamily="34" charset="-122"/>
+                <a:cs typeface="Calibri" pitchFamily="34" charset="-120"/>
+              </a:rPr>
+              <a:t>Sprint 4</a:t>
+            </a:r>
+            <a:endParaRPr lang="en-US" sz="1100" dirty="0"/>
+          </a:p>
+        </p:txBody>
+      </p:sp>
+      <p:sp>
+        <p:nvSpPr>
+          <p:cNvPr id="70" name="Text 63"/>
           <p:cNvSpPr/>
           <p:nvPr/>
         </p:nvSpPr>
@@ -19364,7 +20545,7 @@
                 <a:ea typeface="Calibri" pitchFamily="34" charset="-122"/>
                 <a:cs typeface="Calibri" pitchFamily="34" charset="-120"/>
               </a:rPr>
-              <a:t>Fechas del acta (FGAP010). Cada sprint: planificación 4 h · Daily 15 min · revisión 2 h · retrospectiva 2 h.</a:t>
+              <a:t>Las historias se dan por aceptadas solo cuando el Product Owner las valida en la revisión del sprint (SCRUMstudy, 2022, p. 248).</a:t>
             </a:r>
             <a:endParaRPr lang="en-US" sz="1000" dirty="0"/>
           </a:p>
@@ -19384,7 +20565,7 @@
     <p:bg>
       <p:bgPr>
         <a:solidFill>
-          <a:srgbClr val="111111"/>
+          <a:srgbClr val="FAFAF9"/>
         </a:solidFill>
       </p:bgPr>
     </p:bg>
@@ -19404,139 +20585,891 @@
       </p:grpSpPr>
       <p:sp>
         <p:nvSpPr>
-          <p:cNvPr id="3" name="Text 0"/>
-          <p:cNvSpPr/>
-          <p:nvPr/>
-        </p:nvSpPr>
-        <p:spPr>
-          <a:xfrm>
-            <a:off x="731520" y="1828800"/>
-            <a:ext cx="10515600" cy="914400"/>
-          </a:xfrm>
-          <a:prstGeom prst="rect">
-            <a:avLst/>
-          </a:prstGeom>
-          <a:noFill/>
-          <a:ln/>
-        </p:spPr>
-        <p:txBody>
-          <a:bodyPr wrap="square" lIns="0" tIns="0" rIns="0" bIns="0" rtlCol="0" anchor="t"/>
-          <a:lstStyle/>
-          <a:p>
-            <a:pPr indent="0" marL="0">
-              <a:buNone/>
-            </a:pPr>
-            <a:r>
-              <a:rPr lang="en-US" sz="5400" dirty="0">
-                <a:solidFill>
-                  <a:srgbClr val="F5F5F4"/>
+          <p:cNvPr id="2" name="Text 0"/>
+          <p:cNvSpPr/>
+          <p:nvPr/>
+        </p:nvSpPr>
+        <p:spPr>
+          <a:xfrm>
+            <a:off x="731520" y="502920"/>
+            <a:ext cx="10058400" cy="274320"/>
+          </a:xfrm>
+          <a:prstGeom prst="rect">
+            <a:avLst/>
+          </a:prstGeom>
+          <a:noFill/>
+          <a:ln/>
+        </p:spPr>
+        <p:txBody>
+          <a:bodyPr wrap="square" lIns="0" tIns="0" rIns="0" bIns="0" rtlCol="0" anchor="t"/>
+          <a:lstStyle/>
+          <a:p>
+            <a:pPr indent="0" marL="0">
+              <a:buNone/>
+            </a:pPr>
+            <a:r>
+              <a:rPr lang="en-US" sz="1100" b="1" spc="150" kern="0" dirty="0">
+                <a:solidFill>
+                  <a:srgbClr val="3E63DD"/>
+                </a:solidFill>
+                <a:latin typeface="Calibri" pitchFamily="34" charset="0"/>
+                <a:ea typeface="Calibri" pitchFamily="34" charset="-122"/>
+                <a:cs typeface="Calibri" pitchFamily="34" charset="-120"/>
+              </a:rPr>
+              <a:t>PARTE 4 · AVANCE REAL</a:t>
+            </a:r>
+            <a:endParaRPr lang="en-US" sz="1100" dirty="0"/>
+          </a:p>
+        </p:txBody>
+      </p:sp>
+      <p:sp>
+        <p:nvSpPr>
+          <p:cNvPr id="3" name="Text 1"/>
+          <p:cNvSpPr/>
+          <p:nvPr/>
+        </p:nvSpPr>
+        <p:spPr>
+          <a:xfrm>
+            <a:off x="731520" y="777240"/>
+            <a:ext cx="10698480" cy="822960"/>
+          </a:xfrm>
+          <a:prstGeom prst="rect">
+            <a:avLst/>
+          </a:prstGeom>
+          <a:noFill/>
+          <a:ln/>
+        </p:spPr>
+        <p:txBody>
+          <a:bodyPr wrap="square" lIns="0" tIns="0" rIns="0" bIns="0" rtlCol="0" anchor="t"/>
+          <a:lstStyle/>
+          <a:p>
+            <a:pPr indent="0" marL="0">
+              <a:buNone/>
+            </a:pPr>
+            <a:r>
+              <a:rPr lang="en-US" sz="3400" dirty="0">
+                <a:solidFill>
+                  <a:srgbClr val="1A1A1A"/>
                 </a:solidFill>
                 <a:latin typeface="Calibri Light" pitchFamily="34" charset="0"/>
                 <a:ea typeface="Calibri Light" pitchFamily="34" charset="-122"/>
                 <a:cs typeface="Calibri Light" pitchFamily="34" charset="-120"/>
               </a:rPr>
-              <a:t>Menos horas mirando video.</a:t>
-            </a:r>
-            <a:endParaRPr lang="en-US" sz="5400" dirty="0"/>
-          </a:p>
-        </p:txBody>
-      </p:sp>
-      <p:sp>
-        <p:nvSpPr>
-          <p:cNvPr id="4" name="Text 1"/>
-          <p:cNvSpPr/>
-          <p:nvPr/>
-        </p:nvSpPr>
-        <p:spPr>
-          <a:xfrm>
-            <a:off x="731520" y="2743200"/>
-            <a:ext cx="10515600" cy="914400"/>
-          </a:xfrm>
-          <a:prstGeom prst="rect">
-            <a:avLst/>
-          </a:prstGeom>
-          <a:noFill/>
-          <a:ln/>
-        </p:spPr>
-        <p:txBody>
-          <a:bodyPr wrap="square" lIns="0" tIns="0" rIns="0" bIns="0" rtlCol="0" anchor="t"/>
-          <a:lstStyle/>
-          <a:p>
-            <a:pPr indent="0" marL="0">
-              <a:buNone/>
-            </a:pPr>
-            <a:r>
-              <a:rPr lang="en-US" sz="5400" dirty="0">
-                <a:solidFill>
-                  <a:srgbClr val="A8A29E"/>
+              <a:t>Lo que ya se puede ver</a:t>
+            </a:r>
+            <a:endParaRPr lang="en-US" sz="3400" dirty="0"/>
+          </a:p>
+        </p:txBody>
+      </p:sp>
+      <p:sp>
+        <p:nvSpPr>
+          <p:cNvPr id="4" name="Text 2"/>
+          <p:cNvSpPr/>
+          <p:nvPr/>
+        </p:nvSpPr>
+        <p:spPr>
+          <a:xfrm>
+            <a:off x="731520" y="6355080"/>
+            <a:ext cx="2743200" cy="228600"/>
+          </a:xfrm>
+          <a:prstGeom prst="rect">
+            <a:avLst/>
+          </a:prstGeom>
+          <a:noFill/>
+          <a:ln/>
+        </p:spPr>
+        <p:txBody>
+          <a:bodyPr wrap="square" lIns="0" tIns="0" rIns="0" bIns="0" rtlCol="0" anchor="t"/>
+          <a:lstStyle/>
+          <a:p>
+            <a:pPr indent="0" marL="0">
+              <a:buNone/>
+            </a:pPr>
+            <a:r>
+              <a:rPr lang="en-US" sz="1000" b="1" dirty="0">
+                <a:solidFill>
+                  <a:srgbClr val="8A8984"/>
+                </a:solidFill>
+                <a:latin typeface="Calibri" pitchFamily="34" charset="0"/>
+                <a:ea typeface="Calibri" pitchFamily="34" charset="-122"/>
+                <a:cs typeface="Calibri" pitchFamily="34" charset="-120"/>
+              </a:rPr>
+              <a:t>NewBit</a:t>
+            </a:r>
+            <a:endParaRPr lang="en-US" sz="1000" dirty="0"/>
+          </a:p>
+        </p:txBody>
+      </p:sp>
+      <p:sp>
+        <p:nvSpPr>
+          <p:cNvPr id="5" name="Text 3"/>
+          <p:cNvSpPr/>
+          <p:nvPr/>
+        </p:nvSpPr>
+        <p:spPr>
+          <a:xfrm>
+            <a:off x="1371600" y="6355080"/>
+            <a:ext cx="4572000" cy="228600"/>
+          </a:xfrm>
+          <a:prstGeom prst="rect">
+            <a:avLst/>
+          </a:prstGeom>
+          <a:noFill/>
+          <a:ln/>
+        </p:spPr>
+        <p:txBody>
+          <a:bodyPr wrap="square" lIns="0" tIns="0" rIns="0" bIns="0" rtlCol="0" anchor="t"/>
+          <a:lstStyle/>
+          <a:p>
+            <a:pPr indent="0" marL="0">
+              <a:buNone/>
+            </a:pPr>
+            <a:r>
+              <a:rPr lang="en-US" sz="1000" dirty="0">
+                <a:solidFill>
+                  <a:srgbClr val="8A8984"/>
+                </a:solidFill>
+                <a:latin typeface="Calibri" pitchFamily="34" charset="0"/>
+                <a:ea typeface="Calibri" pitchFamily="34" charset="-122"/>
+                <a:cs typeface="Calibri" pitchFamily="34" charset="-120"/>
+              </a:rPr>
+              <a:t>Producto de la Unidad I · Grupo D3</a:t>
+            </a:r>
+            <a:endParaRPr lang="en-US" sz="1000" dirty="0"/>
+          </a:p>
+        </p:txBody>
+      </p:sp>
+      <p:sp>
+        <p:nvSpPr>
+          <p:cNvPr id="6" name="Text 4"/>
+          <p:cNvSpPr/>
+          <p:nvPr/>
+        </p:nvSpPr>
+        <p:spPr>
+          <a:xfrm>
+            <a:off x="10728655" y="6355080"/>
+            <a:ext cx="731520" cy="228600"/>
+          </a:xfrm>
+          <a:prstGeom prst="rect">
+            <a:avLst/>
+          </a:prstGeom>
+          <a:noFill/>
+          <a:ln/>
+        </p:spPr>
+        <p:txBody>
+          <a:bodyPr wrap="square" lIns="0" tIns="0" rIns="0" bIns="0" rtlCol="0" anchor="t"/>
+          <a:lstStyle/>
+          <a:p>
+            <a:pPr algn="r" indent="0" marL="0">
+              <a:buNone/>
+            </a:pPr>
+            <a:r>
+              <a:rPr lang="en-US" sz="1000" dirty="0">
+                <a:solidFill>
+                  <a:srgbClr val="8A8984"/>
+                </a:solidFill>
+                <a:latin typeface="Calibri" pitchFamily="34" charset="0"/>
+                <a:ea typeface="Calibri" pitchFamily="34" charset="-122"/>
+                <a:cs typeface="Calibri" pitchFamily="34" charset="-120"/>
+              </a:rPr>
+              <a:t>27</a:t>
+            </a:r>
+            <a:endParaRPr lang="en-US" sz="1000" dirty="0"/>
+          </a:p>
+        </p:txBody>
+      </p:sp>
+      <p:pic>
+        <p:nvPicPr>
+          <p:cNvPr id="8" name="Image 0" descr="/Users/anthony/Documents/Projects/NewBit/curso/semana-06-producto-unidad-1/nuestras-entregas/PPT_Producto_Unidad_1_NewBit/img/app-catalogo.png">    </p:cNvPr>
+          <p:cNvPicPr>
+            <a:picLocks noChangeAspect="1"/>
+          </p:cNvPicPr>
+          <p:nvPr/>
+        </p:nvPicPr>
+        <p:blipFill>
+          <a:blip r:embed="rId1"/>
+          <a:stretch>
+            <a:fillRect/>
+          </a:stretch>
+        </p:blipFill>
+        <p:spPr>
+          <a:xfrm>
+            <a:off x="1788416" y="1783080"/>
+            <a:ext cx="6207470" cy="3017520"/>
+          </a:xfrm>
+          <a:prstGeom prst="rect">
+            <a:avLst/>
+          </a:prstGeom>
+        </p:spPr>
+      </p:pic>
+      <p:sp>
+        <p:nvSpPr>
+          <p:cNvPr id="9" name="Shape 5"/>
+          <p:cNvSpPr/>
+          <p:nvPr/>
+        </p:nvSpPr>
+        <p:spPr>
+          <a:xfrm>
+            <a:off x="1788416" y="1783080"/>
+            <a:ext cx="6207470" cy="3017520"/>
+          </a:xfrm>
+          <a:prstGeom prst="rect">
+            <a:avLst/>
+          </a:prstGeom>
+          <a:ln w="9525">
+            <a:solidFill>
+              <a:srgbClr val="E7E5E4"/>
+            </a:solidFill>
+            <a:prstDash val="solid"/>
+          </a:ln>
+        </p:spPr>
+      </p:sp>
+      <p:pic>
+        <p:nvPicPr>
+          <p:cNvPr id="10" name="Image 1" descr="/Users/anthony/Documents/Projects/NewBit/curso/semana-06-producto-unidad-1/nuestras-entregas/PPT_Producto_Unidad_1_NewBit/img/app-ficha.png">    </p:cNvPr>
+          <p:cNvPicPr>
+            <a:picLocks noChangeAspect="1"/>
+          </p:cNvPicPr>
+          <p:nvPr/>
+        </p:nvPicPr>
+        <p:blipFill>
+          <a:blip r:embed="rId2"/>
+          <a:stretch>
+            <a:fillRect/>
+          </a:stretch>
+        </p:blipFill>
+        <p:spPr>
+          <a:xfrm>
+            <a:off x="8270205" y="1783080"/>
+            <a:ext cx="2133074" cy="3017520"/>
+          </a:xfrm>
+          <a:prstGeom prst="rect">
+            <a:avLst/>
+          </a:prstGeom>
+        </p:spPr>
+      </p:pic>
+      <p:sp>
+        <p:nvSpPr>
+          <p:cNvPr id="11" name="Shape 6"/>
+          <p:cNvSpPr/>
+          <p:nvPr/>
+        </p:nvSpPr>
+        <p:spPr>
+          <a:xfrm>
+            <a:off x="8270205" y="1783080"/>
+            <a:ext cx="2133074" cy="3017520"/>
+          </a:xfrm>
+          <a:prstGeom prst="rect">
+            <a:avLst/>
+          </a:prstGeom>
+          <a:ln w="9525">
+            <a:solidFill>
+              <a:srgbClr val="E7E5E4"/>
+            </a:solidFill>
+            <a:prstDash val="solid"/>
+          </a:ln>
+        </p:spPr>
+      </p:sp>
+      <p:sp>
+        <p:nvSpPr>
+          <p:cNvPr id="12" name="Text 7"/>
+          <p:cNvSpPr/>
+          <p:nvPr/>
+        </p:nvSpPr>
+        <p:spPr>
+          <a:xfrm>
+            <a:off x="731520" y="4937760"/>
+            <a:ext cx="3383280" cy="411480"/>
+          </a:xfrm>
+          <a:prstGeom prst="rect">
+            <a:avLst/>
+          </a:prstGeom>
+          <a:noFill/>
+          <a:ln/>
+        </p:spPr>
+        <p:txBody>
+          <a:bodyPr wrap="square" lIns="0" tIns="0" rIns="0" bIns="0" rtlCol="0" anchor="t"/>
+          <a:lstStyle/>
+          <a:p>
+            <a:pPr indent="0" marL="0">
+              <a:buNone/>
+            </a:pPr>
+            <a:r>
+              <a:rPr lang="en-US" sz="2600" dirty="0">
+                <a:solidFill>
+                  <a:srgbClr val="1A1A1A"/>
                 </a:solidFill>
                 <a:latin typeface="Calibri Light" pitchFamily="34" charset="0"/>
                 <a:ea typeface="Calibri Light" pitchFamily="34" charset="-122"/>
                 <a:cs typeface="Calibri Light" pitchFamily="34" charset="-120"/>
               </a:rPr>
-              <a:t>Más tiempo para prevenir.</a:t>
-            </a:r>
-            <a:endParaRPr lang="en-US" sz="5400" dirty="0"/>
-          </a:p>
-        </p:txBody>
-      </p:sp>
-      <p:sp>
-        <p:nvSpPr>
-          <p:cNvPr id="5" name="Text 2"/>
-          <p:cNvSpPr/>
-          <p:nvPr/>
-        </p:nvSpPr>
-        <p:spPr>
-          <a:xfrm>
-            <a:off x="731520" y="4206240"/>
-            <a:ext cx="7315200" cy="457200"/>
-          </a:xfrm>
-          <a:prstGeom prst="rect">
-            <a:avLst/>
-          </a:prstGeom>
-          <a:noFill/>
-          <a:ln/>
-        </p:spPr>
-        <p:txBody>
-          <a:bodyPr wrap="square" lIns="0" tIns="0" rIns="0" bIns="0" rtlCol="0" anchor="t"/>
-          <a:lstStyle/>
-          <a:p>
-            <a:pPr indent="0" marL="0">
-              <a:buNone/>
-            </a:pPr>
-            <a:r>
-              <a:rPr lang="en-US" sz="2000" dirty="0">
-                <a:solidFill>
-                  <a:srgbClr val="F5F5F4"/>
-                </a:solidFill>
-                <a:latin typeface="Calibri" pitchFamily="34" charset="0"/>
-                <a:ea typeface="Calibri" pitchFamily="34" charset="-122"/>
-                <a:cs typeface="Calibri" pitchFamily="34" charset="-120"/>
-              </a:rPr>
-              <a:t>Gracias · ¿Preguntas?</a:t>
-            </a:r>
-            <a:endParaRPr lang="en-US" sz="2000" dirty="0"/>
-          </a:p>
-        </p:txBody>
-      </p:sp>
-      <p:sp>
-        <p:nvSpPr>
-          <p:cNvPr id="6" name="Shape 3"/>
-          <p:cNvSpPr/>
-          <p:nvPr/>
-        </p:nvSpPr>
-        <p:spPr>
-          <a:xfrm>
-            <a:off x="731520" y="5257800"/>
-            <a:ext cx="10728655" cy="0"/>
-          </a:xfrm>
-          <a:prstGeom prst="line">
-            <a:avLst/>
-          </a:prstGeom>
-          <a:noFill/>
-          <a:ln w="12700">
+              <a:t>43 / 43</a:t>
+            </a:r>
+            <a:endParaRPr lang="en-US" sz="2600" dirty="0"/>
+          </a:p>
+        </p:txBody>
+      </p:sp>
+      <p:sp>
+        <p:nvSpPr>
+          <p:cNvPr id="13" name="Text 8"/>
+          <p:cNvSpPr/>
+          <p:nvPr/>
+        </p:nvSpPr>
+        <p:spPr>
+          <a:xfrm>
+            <a:off x="731520" y="5349240"/>
+            <a:ext cx="3291840" cy="457200"/>
+          </a:xfrm>
+          <a:prstGeom prst="rect">
+            <a:avLst/>
+          </a:prstGeom>
+          <a:noFill/>
+          <a:ln/>
+        </p:spPr>
+        <p:txBody>
+          <a:bodyPr wrap="square" lIns="0" tIns="0" rIns="0" bIns="0" rtlCol="0" anchor="t"/>
+          <a:lstStyle/>
+          <a:p>
+            <a:pPr indent="0" marL="0">
+              <a:buNone/>
+            </a:pPr>
+            <a:r>
+              <a:rPr lang="en-US" sz="1200" dirty="0">
+                <a:solidFill>
+                  <a:srgbClr val="57534E"/>
+                </a:solidFill>
+                <a:latin typeface="Calibri" pitchFamily="34" charset="0"/>
+                <a:ea typeface="Calibri" pitchFamily="34" charset="-122"/>
+                <a:cs typeface="Calibri" pitchFamily="34" charset="-120"/>
+              </a:rPr>
+              <a:t>pruebas automáticas en verde, incluida una de punta a punta</a:t>
+            </a:r>
+            <a:endParaRPr lang="en-US" sz="1200" dirty="0"/>
+          </a:p>
+        </p:txBody>
+      </p:sp>
+      <p:sp>
+        <p:nvSpPr>
+          <p:cNvPr id="14" name="Text 9"/>
+          <p:cNvSpPr/>
+          <p:nvPr/>
+        </p:nvSpPr>
+        <p:spPr>
+          <a:xfrm>
+            <a:off x="4343400" y="4937760"/>
+            <a:ext cx="3383280" cy="411480"/>
+          </a:xfrm>
+          <a:prstGeom prst="rect">
+            <a:avLst/>
+          </a:prstGeom>
+          <a:noFill/>
+          <a:ln/>
+        </p:spPr>
+        <p:txBody>
+          <a:bodyPr wrap="square" lIns="0" tIns="0" rIns="0" bIns="0" rtlCol="0" anchor="t"/>
+          <a:lstStyle/>
+          <a:p>
+            <a:pPr indent="0" marL="0">
+              <a:buNone/>
+            </a:pPr>
+            <a:r>
+              <a:rPr lang="en-US" sz="2600" dirty="0">
+                <a:solidFill>
+                  <a:srgbClr val="1A1A1A"/>
+                </a:solidFill>
+                <a:latin typeface="Calibri Light" pitchFamily="34" charset="0"/>
+                <a:ea typeface="Calibri Light" pitchFamily="34" charset="-122"/>
+                <a:cs typeface="Calibri Light" pitchFamily="34" charset="-120"/>
+              </a:rPr>
+              <a:t>24 → 5</a:t>
+            </a:r>
+            <a:endParaRPr lang="en-US" sz="2600" dirty="0"/>
+          </a:p>
+        </p:txBody>
+      </p:sp>
+      <p:sp>
+        <p:nvSpPr>
+          <p:cNvPr id="15" name="Text 10"/>
+          <p:cNvSpPr/>
+          <p:nvPr/>
+        </p:nvSpPr>
+        <p:spPr>
+          <a:xfrm>
+            <a:off x="4343400" y="5349240"/>
+            <a:ext cx="3291840" cy="457200"/>
+          </a:xfrm>
+          <a:prstGeom prst="rect">
+            <a:avLst/>
+          </a:prstGeom>
+          <a:noFill/>
+          <a:ln/>
+        </p:spPr>
+        <p:txBody>
+          <a:bodyPr wrap="square" lIns="0" tIns="0" rIns="0" bIns="0" rtlCol="0" anchor="t"/>
+          <a:lstStyle/>
+          <a:p>
+            <a:pPr indent="0" marL="0">
+              <a:buNone/>
+            </a:pPr>
+            <a:r>
+              <a:rPr lang="en-US" sz="1200" dirty="0">
+                <a:solidFill>
+                  <a:srgbClr val="57534E"/>
+                </a:solidFill>
+                <a:latin typeface="Calibri" pitchFamily="34" charset="0"/>
+                <a:ea typeface="Calibri" pitchFamily="34" charset="-122"/>
+                <a:cs typeface="Calibri" pitchFamily="34" charset="-120"/>
+              </a:rPr>
+              <a:t>imágenes por segundo que se analizan: 80 % menos trabajo</a:t>
+            </a:r>
+            <a:endParaRPr lang="en-US" sz="1200" dirty="0"/>
+          </a:p>
+        </p:txBody>
+      </p:sp>
+      <p:sp>
+        <p:nvSpPr>
+          <p:cNvPr id="16" name="Text 11"/>
+          <p:cNvSpPr/>
+          <p:nvPr/>
+        </p:nvSpPr>
+        <p:spPr>
+          <a:xfrm>
+            <a:off x="7955280" y="4937760"/>
+            <a:ext cx="3383280" cy="411480"/>
+          </a:xfrm>
+          <a:prstGeom prst="rect">
+            <a:avLst/>
+          </a:prstGeom>
+          <a:noFill/>
+          <a:ln/>
+        </p:spPr>
+        <p:txBody>
+          <a:bodyPr wrap="square" lIns="0" tIns="0" rIns="0" bIns="0" rtlCol="0" anchor="t"/>
+          <a:lstStyle/>
+          <a:p>
+            <a:pPr indent="0" marL="0">
+              <a:buNone/>
+            </a:pPr>
+            <a:r>
+              <a:rPr lang="en-US" sz="2600" dirty="0">
+                <a:solidFill>
+                  <a:srgbClr val="1A1A1A"/>
+                </a:solidFill>
+                <a:latin typeface="Calibri Light" pitchFamily="34" charset="0"/>
+                <a:ea typeface="Calibri Light" pitchFamily="34" charset="-122"/>
+                <a:cs typeface="Calibri Light" pitchFamily="34" charset="-120"/>
+              </a:rPr>
+              <a:t>5 s → 2,4 s</a:t>
+            </a:r>
+            <a:endParaRPr lang="en-US" sz="2600" dirty="0"/>
+          </a:p>
+        </p:txBody>
+      </p:sp>
+      <p:sp>
+        <p:nvSpPr>
+          <p:cNvPr id="17" name="Text 12"/>
+          <p:cNvSpPr/>
+          <p:nvPr/>
+        </p:nvSpPr>
+        <p:spPr>
+          <a:xfrm>
+            <a:off x="7955280" y="5349240"/>
+            <a:ext cx="3291840" cy="457200"/>
+          </a:xfrm>
+          <a:prstGeom prst="rect">
+            <a:avLst/>
+          </a:prstGeom>
+          <a:noFill/>
+          <a:ln/>
+        </p:spPr>
+        <p:txBody>
+          <a:bodyPr wrap="square" lIns="0" tIns="0" rIns="0" bIns="0" rtlCol="0" anchor="t"/>
+          <a:lstStyle/>
+          <a:p>
+            <a:pPr indent="0" marL="0">
+              <a:buNone/>
+            </a:pPr>
+            <a:r>
+              <a:rPr lang="en-US" sz="1200" dirty="0">
+                <a:solidFill>
+                  <a:srgbClr val="57534E"/>
+                </a:solidFill>
+                <a:latin typeface="Calibri" pitchFamily="34" charset="0"/>
+                <a:ea typeface="Calibri" pitchFamily="34" charset="-122"/>
+                <a:cs typeface="Calibri" pitchFamily="34" charset="-120"/>
+              </a:rPr>
+              <a:t>el clip final conserva solo los segundos con operarios</a:t>
+            </a:r>
+            <a:endParaRPr lang="en-US" sz="1200" dirty="0"/>
+          </a:p>
+        </p:txBody>
+      </p:sp>
+      <p:sp>
+        <p:nvSpPr>
+          <p:cNvPr id="18" name="Text 13"/>
+          <p:cNvSpPr/>
+          <p:nvPr/>
+        </p:nvSpPr>
+        <p:spPr>
+          <a:xfrm>
+            <a:off x="731520" y="5989320"/>
+            <a:ext cx="10728655" cy="274320"/>
+          </a:xfrm>
+          <a:prstGeom prst="rect">
+            <a:avLst/>
+          </a:prstGeom>
+          <a:noFill/>
+          <a:ln/>
+        </p:spPr>
+        <p:txBody>
+          <a:bodyPr wrap="square" lIns="0" tIns="0" rIns="0" bIns="0" rtlCol="0" anchor="t"/>
+          <a:lstStyle/>
+          <a:p>
+            <a:pPr indent="0" marL="0">
+              <a:buNone/>
+            </a:pPr>
+            <a:r>
+              <a:rPr lang="en-US" sz="1000" dirty="0">
+                <a:solidFill>
+                  <a:srgbClr val="8A8984"/>
+                </a:solidFill>
+                <a:latin typeface="Calibri" pitchFamily="34" charset="0"/>
+                <a:ea typeface="Calibri" pitchFamily="34" charset="-122"/>
+                <a:cs typeface="Calibri" pitchFamily="34" charset="-120"/>
+              </a:rPr>
+              <a:t>Aplicación local, 20/10/2026, con un clip de prueba sintético de 5 s. Aún no se prueba con los videos del conjunto de datos de Önal y Dandıl (2024).</a:t>
+            </a:r>
+            <a:endParaRPr lang="en-US" sz="1000" dirty="0"/>
+          </a:p>
+        </p:txBody>
+      </p:sp>
+    </p:spTree>
+  </p:cSld>
+  <p:clrMapOvr>
+    <a:masterClrMapping/>
+  </p:clrMapOvr>
+</p:sld>
+</file>
+
+<file path=ppt/slides/slide28.xml><?xml version="1.0" encoding="utf-8"?>
+<p:sld xmlns:a="http://schemas.openxmlformats.org/drawingml/2006/main" xmlns:r="http://schemas.openxmlformats.org/officeDocument/2006/relationships" xmlns:p="http://schemas.openxmlformats.org/presentationml/2006/main">
+  <p:cSld name="Slide 28">
+    <p:bg>
+      <p:bgPr>
+        <a:solidFill>
+          <a:srgbClr val="FAFAF9"/>
+        </a:solidFill>
+      </p:bgPr>
+    </p:bg>
+    <p:spTree>
+      <p:nvGrpSpPr>
+        <p:cNvPr id="1" name=""/>
+        <p:cNvGrpSpPr/>
+        <p:nvPr/>
+      </p:nvGrpSpPr>
+      <p:grpSpPr>
+        <a:xfrm>
+          <a:off x="0" y="0"/>
+          <a:ext cx="0" cy="0"/>
+          <a:chOff x="0" y="0"/>
+          <a:chExt cx="0" cy="0"/>
+        </a:xfrm>
+      </p:grpSpPr>
+      <p:sp>
+        <p:nvSpPr>
+          <p:cNvPr id="2" name="Text 0"/>
+          <p:cNvSpPr/>
+          <p:nvPr/>
+        </p:nvSpPr>
+        <p:spPr>
+          <a:xfrm>
+            <a:off x="731520" y="502920"/>
+            <a:ext cx="10058400" cy="274320"/>
+          </a:xfrm>
+          <a:prstGeom prst="rect">
+            <a:avLst/>
+          </a:prstGeom>
+          <a:noFill/>
+          <a:ln/>
+        </p:spPr>
+        <p:txBody>
+          <a:bodyPr wrap="square" lIns="0" tIns="0" rIns="0" bIns="0" rtlCol="0" anchor="t"/>
+          <a:lstStyle/>
+          <a:p>
+            <a:pPr indent="0" marL="0">
+              <a:buNone/>
+            </a:pPr>
+            <a:r>
+              <a:rPr lang="en-US" sz="1100" b="1" spc="150" kern="0" dirty="0">
+                <a:solidFill>
+                  <a:srgbClr val="3E63DD"/>
+                </a:solidFill>
+                <a:latin typeface="Calibri" pitchFamily="34" charset="0"/>
+                <a:ea typeface="Calibri" pitchFamily="34" charset="-122"/>
+                <a:cs typeface="Calibri" pitchFamily="34" charset="-120"/>
+              </a:rPr>
+              <a:t>PARTE 4 · AVANCE REAL</a:t>
+            </a:r>
+            <a:endParaRPr lang="en-US" sz="1100" dirty="0"/>
+          </a:p>
+        </p:txBody>
+      </p:sp>
+      <p:sp>
+        <p:nvSpPr>
+          <p:cNvPr id="3" name="Text 1"/>
+          <p:cNvSpPr/>
+          <p:nvPr/>
+        </p:nvSpPr>
+        <p:spPr>
+          <a:xfrm>
+            <a:off x="731520" y="777240"/>
+            <a:ext cx="10698480" cy="822960"/>
+          </a:xfrm>
+          <a:prstGeom prst="rect">
+            <a:avLst/>
+          </a:prstGeom>
+          <a:noFill/>
+          <a:ln/>
+        </p:spPr>
+        <p:txBody>
+          <a:bodyPr wrap="square" lIns="0" tIns="0" rIns="0" bIns="0" rtlCol="0" anchor="t"/>
+          <a:lstStyle/>
+          <a:p>
+            <a:pPr indent="0" marL="0">
+              <a:buNone/>
+            </a:pPr>
+            <a:r>
+              <a:rPr lang="en-US" sz="3400" dirty="0">
+                <a:solidFill>
+                  <a:srgbClr val="1A1A1A"/>
+                </a:solidFill>
+                <a:latin typeface="Calibri Light" pitchFamily="34" charset="0"/>
+                <a:ea typeface="Calibri Light" pitchFamily="34" charset="-122"/>
+                <a:cs typeface="Calibri Light" pitchFamily="34" charset="-120"/>
+              </a:rPr>
+              <a:t>El tablero, hoy</a:t>
+            </a:r>
+            <a:endParaRPr lang="en-US" sz="3400" dirty="0"/>
+          </a:p>
+        </p:txBody>
+      </p:sp>
+      <p:sp>
+        <p:nvSpPr>
+          <p:cNvPr id="4" name="Text 2"/>
+          <p:cNvSpPr/>
+          <p:nvPr/>
+        </p:nvSpPr>
+        <p:spPr>
+          <a:xfrm>
+            <a:off x="731520" y="6355080"/>
+            <a:ext cx="2743200" cy="228600"/>
+          </a:xfrm>
+          <a:prstGeom prst="rect">
+            <a:avLst/>
+          </a:prstGeom>
+          <a:noFill/>
+          <a:ln/>
+        </p:spPr>
+        <p:txBody>
+          <a:bodyPr wrap="square" lIns="0" tIns="0" rIns="0" bIns="0" rtlCol="0" anchor="t"/>
+          <a:lstStyle/>
+          <a:p>
+            <a:pPr indent="0" marL="0">
+              <a:buNone/>
+            </a:pPr>
+            <a:r>
+              <a:rPr lang="en-US" sz="1000" b="1" dirty="0">
+                <a:solidFill>
+                  <a:srgbClr val="8A8984"/>
+                </a:solidFill>
+                <a:latin typeface="Calibri" pitchFamily="34" charset="0"/>
+                <a:ea typeface="Calibri" pitchFamily="34" charset="-122"/>
+                <a:cs typeface="Calibri" pitchFamily="34" charset="-120"/>
+              </a:rPr>
+              <a:t>NewBit</a:t>
+            </a:r>
+            <a:endParaRPr lang="en-US" sz="1000" dirty="0"/>
+          </a:p>
+        </p:txBody>
+      </p:sp>
+      <p:sp>
+        <p:nvSpPr>
+          <p:cNvPr id="5" name="Text 3"/>
+          <p:cNvSpPr/>
+          <p:nvPr/>
+        </p:nvSpPr>
+        <p:spPr>
+          <a:xfrm>
+            <a:off x="1371600" y="6355080"/>
+            <a:ext cx="4572000" cy="228600"/>
+          </a:xfrm>
+          <a:prstGeom prst="rect">
+            <a:avLst/>
+          </a:prstGeom>
+          <a:noFill/>
+          <a:ln/>
+        </p:spPr>
+        <p:txBody>
+          <a:bodyPr wrap="square" lIns="0" tIns="0" rIns="0" bIns="0" rtlCol="0" anchor="t"/>
+          <a:lstStyle/>
+          <a:p>
+            <a:pPr indent="0" marL="0">
+              <a:buNone/>
+            </a:pPr>
+            <a:r>
+              <a:rPr lang="en-US" sz="1000" dirty="0">
+                <a:solidFill>
+                  <a:srgbClr val="8A8984"/>
+                </a:solidFill>
+                <a:latin typeface="Calibri" pitchFamily="34" charset="0"/>
+                <a:ea typeface="Calibri" pitchFamily="34" charset="-122"/>
+                <a:cs typeface="Calibri" pitchFamily="34" charset="-120"/>
+              </a:rPr>
+              <a:t>Producto de la Unidad I · Grupo D3</a:t>
+            </a:r>
+            <a:endParaRPr lang="en-US" sz="1000" dirty="0"/>
+          </a:p>
+        </p:txBody>
+      </p:sp>
+      <p:sp>
+        <p:nvSpPr>
+          <p:cNvPr id="6" name="Text 4"/>
+          <p:cNvSpPr/>
+          <p:nvPr/>
+        </p:nvSpPr>
+        <p:spPr>
+          <a:xfrm>
+            <a:off x="10728655" y="6355080"/>
+            <a:ext cx="731520" cy="228600"/>
+          </a:xfrm>
+          <a:prstGeom prst="rect">
+            <a:avLst/>
+          </a:prstGeom>
+          <a:noFill/>
+          <a:ln/>
+        </p:spPr>
+        <p:txBody>
+          <a:bodyPr wrap="square" lIns="0" tIns="0" rIns="0" bIns="0" rtlCol="0" anchor="t"/>
+          <a:lstStyle/>
+          <a:p>
+            <a:pPr algn="r" indent="0" marL="0">
+              <a:buNone/>
+            </a:pPr>
+            <a:r>
+              <a:rPr lang="en-US" sz="1000" dirty="0">
+                <a:solidFill>
+                  <a:srgbClr val="8A8984"/>
+                </a:solidFill>
+                <a:latin typeface="Calibri" pitchFamily="34" charset="0"/>
+                <a:ea typeface="Calibri" pitchFamily="34" charset="-122"/>
+                <a:cs typeface="Calibri" pitchFamily="34" charset="-120"/>
+              </a:rPr>
+              <a:t>28</a:t>
+            </a:r>
+            <a:endParaRPr lang="en-US" sz="1000" dirty="0"/>
+          </a:p>
+        </p:txBody>
+      </p:sp>
+      <p:sp>
+        <p:nvSpPr>
+          <p:cNvPr id="8" name="Text 5"/>
+          <p:cNvSpPr/>
+          <p:nvPr/>
+        </p:nvSpPr>
+        <p:spPr>
+          <a:xfrm>
+            <a:off x="731520" y="1783080"/>
+            <a:ext cx="1828800" cy="274320"/>
+          </a:xfrm>
+          <a:prstGeom prst="rect">
+            <a:avLst/>
+          </a:prstGeom>
+          <a:noFill/>
+          <a:ln/>
+        </p:spPr>
+        <p:txBody>
+          <a:bodyPr wrap="square" lIns="0" tIns="0" rIns="0" bIns="0" rtlCol="0" anchor="t"/>
+          <a:lstStyle/>
+          <a:p>
+            <a:pPr indent="0" marL="0">
+              <a:buNone/>
+            </a:pPr>
+            <a:r>
+              <a:rPr lang="en-US" sz="1100" b="1" spc="100" kern="0" dirty="0">
+                <a:solidFill>
+                  <a:srgbClr val="2F855A"/>
+                </a:solidFill>
+                <a:latin typeface="Calibri" pitchFamily="34" charset="0"/>
+                <a:ea typeface="Calibri" pitchFamily="34" charset="-122"/>
+                <a:cs typeface="Calibri" pitchFamily="34" charset="-120"/>
+              </a:rPr>
+              <a:t>HECHO · POR ACEPTAR</a:t>
+            </a:r>
+            <a:endParaRPr lang="en-US" sz="1100" dirty="0"/>
+          </a:p>
+        </p:txBody>
+      </p:sp>
+      <p:sp>
+        <p:nvSpPr>
+          <p:cNvPr id="9" name="Text 6"/>
+          <p:cNvSpPr/>
+          <p:nvPr/>
+        </p:nvSpPr>
+        <p:spPr>
+          <a:xfrm>
+            <a:off x="2331720" y="1783080"/>
+            <a:ext cx="731520" cy="274320"/>
+          </a:xfrm>
+          <a:prstGeom prst="rect">
+            <a:avLst/>
+          </a:prstGeom>
+          <a:noFill/>
+          <a:ln/>
+        </p:spPr>
+        <p:txBody>
+          <a:bodyPr wrap="square" lIns="0" tIns="0" rIns="0" bIns="0" rtlCol="0" anchor="t"/>
+          <a:lstStyle/>
+          <a:p>
+            <a:pPr algn="r" indent="0" marL="0">
+              <a:buNone/>
+            </a:pPr>
+            <a:r>
+              <a:rPr lang="en-US" sz="1100" dirty="0">
+                <a:solidFill>
+                  <a:srgbClr val="8A8984"/>
+                </a:solidFill>
+                <a:latin typeface="Calibri" pitchFamily="34" charset="0"/>
+                <a:ea typeface="Calibri" pitchFamily="34" charset="-122"/>
+                <a:cs typeface="Calibri" pitchFamily="34" charset="-120"/>
+              </a:rPr>
+              <a:t>12 pts</a:t>
+            </a:r>
+            <a:endParaRPr lang="en-US" sz="1100" dirty="0"/>
+          </a:p>
+        </p:txBody>
+      </p:sp>
+      <p:sp>
+        <p:nvSpPr>
+          <p:cNvPr id="10" name="Shape 7"/>
+          <p:cNvSpPr/>
+          <p:nvPr/>
+        </p:nvSpPr>
+        <p:spPr>
+          <a:xfrm>
+            <a:off x="731520" y="2148840"/>
+            <a:ext cx="2331720" cy="475488"/>
+          </a:xfrm>
+          <a:prstGeom prst="roundRect">
+            <a:avLst>
+              <a:gd name="adj" fmla="val 15385"/>
+            </a:avLst>
+          </a:prstGeom>
+          <a:solidFill>
+            <a:srgbClr val="EEF8F2"/>
+          </a:solidFill>
+          <a:ln w="9525">
             <a:solidFill>
-              <a:srgbClr val="2B2B2A"/>
+              <a:srgbClr val="C7E6D4"/>
             </a:solidFill>
             <a:prstDash val="solid"/>
           </a:ln>
@@ -19544,40 +21477,3500 @@
       </p:sp>
       <p:sp>
         <p:nvSpPr>
-          <p:cNvPr id="7" name="Text 4"/>
-          <p:cNvSpPr/>
-          <p:nvPr/>
-        </p:nvSpPr>
-        <p:spPr>
-          <a:xfrm>
-            <a:off x="731520" y="5440680"/>
-            <a:ext cx="10728655" cy="365760"/>
-          </a:xfrm>
-          <a:prstGeom prst="rect">
-            <a:avLst/>
-          </a:prstGeom>
-          <a:noFill/>
-          <a:ln/>
-        </p:spPr>
-        <p:txBody>
-          <a:bodyPr wrap="square" lIns="0" tIns="0" rIns="0" bIns="0" rtlCol="0" anchor="t"/>
-          <a:lstStyle/>
-          <a:p>
+          <p:cNvPr id="11" name="Text 8"/>
+          <p:cNvSpPr/>
+          <p:nvPr/>
+        </p:nvSpPr>
+        <p:spPr>
+          <a:xfrm>
+            <a:off x="868680" y="2276856"/>
+            <a:ext cx="1920240" cy="274320"/>
+          </a:xfrm>
+          <a:prstGeom prst="rect">
+            <a:avLst/>
+          </a:prstGeom>
+          <a:noFill/>
+          <a:ln/>
+        </p:spPr>
+        <p:txBody>
+          <a:bodyPr wrap="square" lIns="0" tIns="0" rIns="0" bIns="0" rtlCol="0" anchor="t"/>
+          <a:lstStyle/>
+          <a:p>
+            <a:pPr indent="0" marL="0">
+              <a:buNone/>
+            </a:pPr>
+            <a:r>
+              <a:rPr lang="en-US" sz="1200" b="1" dirty="0">
+                <a:solidFill>
+                  <a:srgbClr val="1A1A1A"/>
+                </a:solidFill>
+                <a:latin typeface="Calibri" pitchFamily="34" charset="0"/>
+                <a:ea typeface="Calibri" pitchFamily="34" charset="-122"/>
+                <a:cs typeface="Calibri" pitchFamily="34" charset="-120"/>
+              </a:rPr>
+              <a:t>HU01  </a:t>
+            </a:r>
             <a:pPr indent="0" marL="0">
               <a:buNone/>
             </a:pPr>
             <a:r>
               <a:rPr lang="en-US" sz="1200" dirty="0">
                 <a:solidFill>
-                  <a:srgbClr val="A8A29E"/>
-                </a:solidFill>
-                <a:latin typeface="Calibri" pitchFamily="34" charset="0"/>
-                <a:ea typeface="Calibri" pitchFamily="34" charset="-122"/>
-                <a:cs typeface="Calibri" pitchFamily="34" charset="-120"/>
-              </a:rPr>
-              <a:t>NewBit · Grupo D3 · Albert Chumacero · Anthony Lopez · Luis Salazar · Ingeniería de Software II · UNS · 2026-II</a:t>
+                  <a:srgbClr val="1A1A1A"/>
+                </a:solidFill>
+                <a:latin typeface="Calibri" pitchFamily="34" charset="0"/>
+                <a:ea typeface="Calibri" pitchFamily="34" charset="-122"/>
+                <a:cs typeface="Calibri" pitchFamily="34" charset="-120"/>
+              </a:rPr>
+              <a:t>Cargar video</a:t>
             </a:r>
             <a:endParaRPr lang="en-US" sz="1200" dirty="0"/>
+          </a:p>
+        </p:txBody>
+      </p:sp>
+      <p:sp>
+        <p:nvSpPr>
+          <p:cNvPr id="12" name="Text 9"/>
+          <p:cNvSpPr/>
+          <p:nvPr/>
+        </p:nvSpPr>
+        <p:spPr>
+          <a:xfrm>
+            <a:off x="2697480" y="2276856"/>
+            <a:ext cx="256032" cy="274320"/>
+          </a:xfrm>
+          <a:prstGeom prst="rect">
+            <a:avLst/>
+          </a:prstGeom>
+          <a:noFill/>
+          <a:ln/>
+        </p:spPr>
+        <p:txBody>
+          <a:bodyPr wrap="square" lIns="0" tIns="0" rIns="0" bIns="0" rtlCol="0" anchor="t"/>
+          <a:lstStyle/>
+          <a:p>
+            <a:pPr algn="r" indent="0" marL="0">
+              <a:buNone/>
+            </a:pPr>
+            <a:r>
+              <a:rPr lang="en-US" sz="1200" dirty="0">
+                <a:solidFill>
+                  <a:srgbClr val="8A8984"/>
+                </a:solidFill>
+                <a:latin typeface="Calibri" pitchFamily="34" charset="0"/>
+                <a:ea typeface="Calibri" pitchFamily="34" charset="-122"/>
+                <a:cs typeface="Calibri" pitchFamily="34" charset="-120"/>
+              </a:rPr>
+              <a:t>1</a:t>
+            </a:r>
+            <a:endParaRPr lang="en-US" sz="1200" dirty="0"/>
+          </a:p>
+        </p:txBody>
+      </p:sp>
+      <p:sp>
+        <p:nvSpPr>
+          <p:cNvPr id="13" name="Shape 10"/>
+          <p:cNvSpPr/>
+          <p:nvPr/>
+        </p:nvSpPr>
+        <p:spPr>
+          <a:xfrm>
+            <a:off x="731520" y="2715768"/>
+            <a:ext cx="2331720" cy="475488"/>
+          </a:xfrm>
+          <a:prstGeom prst="roundRect">
+            <a:avLst>
+              <a:gd name="adj" fmla="val 15385"/>
+            </a:avLst>
+          </a:prstGeom>
+          <a:solidFill>
+            <a:srgbClr val="EEF8F2"/>
+          </a:solidFill>
+          <a:ln w="9525">
+            <a:solidFill>
+              <a:srgbClr val="C7E6D4"/>
+            </a:solidFill>
+            <a:prstDash val="solid"/>
+          </a:ln>
+        </p:spPr>
+      </p:sp>
+      <p:sp>
+        <p:nvSpPr>
+          <p:cNvPr id="14" name="Text 11"/>
+          <p:cNvSpPr/>
+          <p:nvPr/>
+        </p:nvSpPr>
+        <p:spPr>
+          <a:xfrm>
+            <a:off x="868680" y="2843784"/>
+            <a:ext cx="1920240" cy="274320"/>
+          </a:xfrm>
+          <a:prstGeom prst="rect">
+            <a:avLst/>
+          </a:prstGeom>
+          <a:noFill/>
+          <a:ln/>
+        </p:spPr>
+        <p:txBody>
+          <a:bodyPr wrap="square" lIns="0" tIns="0" rIns="0" bIns="0" rtlCol="0" anchor="t"/>
+          <a:lstStyle/>
+          <a:p>
+            <a:pPr indent="0" marL="0">
+              <a:buNone/>
+            </a:pPr>
+            <a:r>
+              <a:rPr lang="en-US" sz="1200" b="1" dirty="0">
+                <a:solidFill>
+                  <a:srgbClr val="1A1A1A"/>
+                </a:solidFill>
+                <a:latin typeface="Calibri" pitchFamily="34" charset="0"/>
+                <a:ea typeface="Calibri" pitchFamily="34" charset="-122"/>
+                <a:cs typeface="Calibri" pitchFamily="34" charset="-120"/>
+              </a:rPr>
+              <a:t>HU02  </a:t>
+            </a:r>
+            <a:pPr indent="0" marL="0">
+              <a:buNone/>
+            </a:pPr>
+            <a:r>
+              <a:rPr lang="en-US" sz="1200" dirty="0">
+                <a:solidFill>
+                  <a:srgbClr val="1A1A1A"/>
+                </a:solidFill>
+                <a:latin typeface="Calibri" pitchFamily="34" charset="0"/>
+                <a:ea typeface="Calibri" pitchFamily="34" charset="-122"/>
+                <a:cs typeface="Calibri" pitchFamily="34" charset="-120"/>
+              </a:rPr>
+              <a:t>Extraer fotogramas</a:t>
+            </a:r>
+            <a:endParaRPr lang="en-US" sz="1200" dirty="0"/>
+          </a:p>
+        </p:txBody>
+      </p:sp>
+      <p:sp>
+        <p:nvSpPr>
+          <p:cNvPr id="15" name="Text 12"/>
+          <p:cNvSpPr/>
+          <p:nvPr/>
+        </p:nvSpPr>
+        <p:spPr>
+          <a:xfrm>
+            <a:off x="2697480" y="2843784"/>
+            <a:ext cx="256032" cy="274320"/>
+          </a:xfrm>
+          <a:prstGeom prst="rect">
+            <a:avLst/>
+          </a:prstGeom>
+          <a:noFill/>
+          <a:ln/>
+        </p:spPr>
+        <p:txBody>
+          <a:bodyPr wrap="square" lIns="0" tIns="0" rIns="0" bIns="0" rtlCol="0" anchor="t"/>
+          <a:lstStyle/>
+          <a:p>
+            <a:pPr algn="r" indent="0" marL="0">
+              <a:buNone/>
+            </a:pPr>
+            <a:r>
+              <a:rPr lang="en-US" sz="1200" dirty="0">
+                <a:solidFill>
+                  <a:srgbClr val="8A8984"/>
+                </a:solidFill>
+                <a:latin typeface="Calibri" pitchFamily="34" charset="0"/>
+                <a:ea typeface="Calibri" pitchFamily="34" charset="-122"/>
+                <a:cs typeface="Calibri" pitchFamily="34" charset="-120"/>
+              </a:rPr>
+              <a:t>2</a:t>
+            </a:r>
+            <a:endParaRPr lang="en-US" sz="1200" dirty="0"/>
+          </a:p>
+        </p:txBody>
+      </p:sp>
+      <p:sp>
+        <p:nvSpPr>
+          <p:cNvPr id="16" name="Shape 13"/>
+          <p:cNvSpPr/>
+          <p:nvPr/>
+        </p:nvSpPr>
+        <p:spPr>
+          <a:xfrm>
+            <a:off x="731520" y="3282696"/>
+            <a:ext cx="2331720" cy="475488"/>
+          </a:xfrm>
+          <a:prstGeom prst="roundRect">
+            <a:avLst>
+              <a:gd name="adj" fmla="val 15385"/>
+            </a:avLst>
+          </a:prstGeom>
+          <a:solidFill>
+            <a:srgbClr val="EEF8F2"/>
+          </a:solidFill>
+          <a:ln w="9525">
+            <a:solidFill>
+              <a:srgbClr val="C7E6D4"/>
+            </a:solidFill>
+            <a:prstDash val="solid"/>
+          </a:ln>
+        </p:spPr>
+      </p:sp>
+      <p:sp>
+        <p:nvSpPr>
+          <p:cNvPr id="17" name="Text 14"/>
+          <p:cNvSpPr/>
+          <p:nvPr/>
+        </p:nvSpPr>
+        <p:spPr>
+          <a:xfrm>
+            <a:off x="868680" y="3410712"/>
+            <a:ext cx="1920240" cy="274320"/>
+          </a:xfrm>
+          <a:prstGeom prst="rect">
+            <a:avLst/>
+          </a:prstGeom>
+          <a:noFill/>
+          <a:ln/>
+        </p:spPr>
+        <p:txBody>
+          <a:bodyPr wrap="square" lIns="0" tIns="0" rIns="0" bIns="0" rtlCol="0" anchor="t"/>
+          <a:lstStyle/>
+          <a:p>
+            <a:pPr indent="0" marL="0">
+              <a:buNone/>
+            </a:pPr>
+            <a:r>
+              <a:rPr lang="en-US" sz="1200" b="1" dirty="0">
+                <a:solidFill>
+                  <a:srgbClr val="1A1A1A"/>
+                </a:solidFill>
+                <a:latin typeface="Calibri" pitchFamily="34" charset="0"/>
+                <a:ea typeface="Calibri" pitchFamily="34" charset="-122"/>
+                <a:cs typeface="Calibri" pitchFamily="34" charset="-120"/>
+              </a:rPr>
+              <a:t>HU03  </a:t>
+            </a:r>
+            <a:pPr indent="0" marL="0">
+              <a:buNone/>
+            </a:pPr>
+            <a:r>
+              <a:rPr lang="en-US" sz="1200" dirty="0">
+                <a:solidFill>
+                  <a:srgbClr val="1A1A1A"/>
+                </a:solidFill>
+                <a:latin typeface="Calibri" pitchFamily="34" charset="0"/>
+                <a:ea typeface="Calibri" pitchFamily="34" charset="-122"/>
+                <a:cs typeface="Calibri" pitchFamily="34" charset="-120"/>
+              </a:rPr>
+              <a:t>Detectar operarios</a:t>
+            </a:r>
+            <a:endParaRPr lang="en-US" sz="1200" dirty="0"/>
+          </a:p>
+        </p:txBody>
+      </p:sp>
+      <p:sp>
+        <p:nvSpPr>
+          <p:cNvPr id="18" name="Text 15"/>
+          <p:cNvSpPr/>
+          <p:nvPr/>
+        </p:nvSpPr>
+        <p:spPr>
+          <a:xfrm>
+            <a:off x="2697480" y="3410712"/>
+            <a:ext cx="256032" cy="274320"/>
+          </a:xfrm>
+          <a:prstGeom prst="rect">
+            <a:avLst/>
+          </a:prstGeom>
+          <a:noFill/>
+          <a:ln/>
+        </p:spPr>
+        <p:txBody>
+          <a:bodyPr wrap="square" lIns="0" tIns="0" rIns="0" bIns="0" rtlCol="0" anchor="t"/>
+          <a:lstStyle/>
+          <a:p>
+            <a:pPr algn="r" indent="0" marL="0">
+              <a:buNone/>
+            </a:pPr>
+            <a:r>
+              <a:rPr lang="en-US" sz="1200" dirty="0">
+                <a:solidFill>
+                  <a:srgbClr val="8A8984"/>
+                </a:solidFill>
+                <a:latin typeface="Calibri" pitchFamily="34" charset="0"/>
+                <a:ea typeface="Calibri" pitchFamily="34" charset="-122"/>
+                <a:cs typeface="Calibri" pitchFamily="34" charset="-120"/>
+              </a:rPr>
+              <a:t>4</a:t>
+            </a:r>
+            <a:endParaRPr lang="en-US" sz="1200" dirty="0"/>
+          </a:p>
+        </p:txBody>
+      </p:sp>
+      <p:sp>
+        <p:nvSpPr>
+          <p:cNvPr id="19" name="Shape 16"/>
+          <p:cNvSpPr/>
+          <p:nvPr/>
+        </p:nvSpPr>
+        <p:spPr>
+          <a:xfrm>
+            <a:off x="731520" y="3849624"/>
+            <a:ext cx="2331720" cy="475488"/>
+          </a:xfrm>
+          <a:prstGeom prst="roundRect">
+            <a:avLst>
+              <a:gd name="adj" fmla="val 15385"/>
+            </a:avLst>
+          </a:prstGeom>
+          <a:solidFill>
+            <a:srgbClr val="EEF8F2"/>
+          </a:solidFill>
+          <a:ln w="9525">
+            <a:solidFill>
+              <a:srgbClr val="C7E6D4"/>
+            </a:solidFill>
+            <a:prstDash val="solid"/>
+          </a:ln>
+        </p:spPr>
+      </p:sp>
+      <p:sp>
+        <p:nvSpPr>
+          <p:cNvPr id="20" name="Text 17"/>
+          <p:cNvSpPr/>
+          <p:nvPr/>
+        </p:nvSpPr>
+        <p:spPr>
+          <a:xfrm>
+            <a:off x="868680" y="3977640"/>
+            <a:ext cx="1920240" cy="274320"/>
+          </a:xfrm>
+          <a:prstGeom prst="rect">
+            <a:avLst/>
+          </a:prstGeom>
+          <a:noFill/>
+          <a:ln/>
+        </p:spPr>
+        <p:txBody>
+          <a:bodyPr wrap="square" lIns="0" tIns="0" rIns="0" bIns="0" rtlCol="0" anchor="t"/>
+          <a:lstStyle/>
+          <a:p>
+            <a:pPr indent="0" marL="0">
+              <a:buNone/>
+            </a:pPr>
+            <a:r>
+              <a:rPr lang="en-US" sz="1200" b="1" dirty="0">
+                <a:solidFill>
+                  <a:srgbClr val="1A1A1A"/>
+                </a:solidFill>
+                <a:latin typeface="Calibri" pitchFamily="34" charset="0"/>
+                <a:ea typeface="Calibri" pitchFamily="34" charset="-122"/>
+                <a:cs typeface="Calibri" pitchFamily="34" charset="-120"/>
+              </a:rPr>
+              <a:t>HU04  </a:t>
+            </a:r>
+            <a:pPr indent="0" marL="0">
+              <a:buNone/>
+            </a:pPr>
+            <a:r>
+              <a:rPr lang="en-US" sz="1200" dirty="0">
+                <a:solidFill>
+                  <a:srgbClr val="1A1A1A"/>
+                </a:solidFill>
+                <a:latin typeface="Calibri" pitchFamily="34" charset="0"/>
+                <a:ea typeface="Calibri" pitchFamily="34" charset="-122"/>
+                <a:cs typeface="Calibri" pitchFamily="34" charset="-120"/>
+              </a:rPr>
+              <a:t>Quitar imágenes vacías</a:t>
+            </a:r>
+            <a:endParaRPr lang="en-US" sz="1200" dirty="0"/>
+          </a:p>
+        </p:txBody>
+      </p:sp>
+      <p:sp>
+        <p:nvSpPr>
+          <p:cNvPr id="21" name="Text 18"/>
+          <p:cNvSpPr/>
+          <p:nvPr/>
+        </p:nvSpPr>
+        <p:spPr>
+          <a:xfrm>
+            <a:off x="2697480" y="3977640"/>
+            <a:ext cx="256032" cy="274320"/>
+          </a:xfrm>
+          <a:prstGeom prst="rect">
+            <a:avLst/>
+          </a:prstGeom>
+          <a:noFill/>
+          <a:ln/>
+        </p:spPr>
+        <p:txBody>
+          <a:bodyPr wrap="square" lIns="0" tIns="0" rIns="0" bIns="0" rtlCol="0" anchor="t"/>
+          <a:lstStyle/>
+          <a:p>
+            <a:pPr algn="r" indent="0" marL="0">
+              <a:buNone/>
+            </a:pPr>
+            <a:r>
+              <a:rPr lang="en-US" sz="1200" dirty="0">
+                <a:solidFill>
+                  <a:srgbClr val="8A8984"/>
+                </a:solidFill>
+                <a:latin typeface="Calibri" pitchFamily="34" charset="0"/>
+                <a:ea typeface="Calibri" pitchFamily="34" charset="-122"/>
+                <a:cs typeface="Calibri" pitchFamily="34" charset="-120"/>
+              </a:rPr>
+              <a:t>2</a:t>
+            </a:r>
+            <a:endParaRPr lang="en-US" sz="1200" dirty="0"/>
+          </a:p>
+        </p:txBody>
+      </p:sp>
+      <p:sp>
+        <p:nvSpPr>
+          <p:cNvPr id="22" name="Shape 19"/>
+          <p:cNvSpPr/>
+          <p:nvPr/>
+        </p:nvSpPr>
+        <p:spPr>
+          <a:xfrm>
+            <a:off x="731520" y="4416552"/>
+            <a:ext cx="2331720" cy="475488"/>
+          </a:xfrm>
+          <a:prstGeom prst="roundRect">
+            <a:avLst>
+              <a:gd name="adj" fmla="val 15385"/>
+            </a:avLst>
+          </a:prstGeom>
+          <a:solidFill>
+            <a:srgbClr val="EEF8F2"/>
+          </a:solidFill>
+          <a:ln w="9525">
+            <a:solidFill>
+              <a:srgbClr val="C7E6D4"/>
+            </a:solidFill>
+            <a:prstDash val="solid"/>
+          </a:ln>
+        </p:spPr>
+      </p:sp>
+      <p:sp>
+        <p:nvSpPr>
+          <p:cNvPr id="23" name="Text 20"/>
+          <p:cNvSpPr/>
+          <p:nvPr/>
+        </p:nvSpPr>
+        <p:spPr>
+          <a:xfrm>
+            <a:off x="868680" y="4544568"/>
+            <a:ext cx="1920240" cy="274320"/>
+          </a:xfrm>
+          <a:prstGeom prst="rect">
+            <a:avLst/>
+          </a:prstGeom>
+          <a:noFill/>
+          <a:ln/>
+        </p:spPr>
+        <p:txBody>
+          <a:bodyPr wrap="square" lIns="0" tIns="0" rIns="0" bIns="0" rtlCol="0" anchor="t"/>
+          <a:lstStyle/>
+          <a:p>
+            <a:pPr indent="0" marL="0">
+              <a:buNone/>
+            </a:pPr>
+            <a:r>
+              <a:rPr lang="en-US" sz="1200" b="1" dirty="0">
+                <a:solidFill>
+                  <a:srgbClr val="1A1A1A"/>
+                </a:solidFill>
+                <a:latin typeface="Calibri" pitchFamily="34" charset="0"/>
+                <a:ea typeface="Calibri" pitchFamily="34" charset="-122"/>
+                <a:cs typeface="Calibri" pitchFamily="34" charset="-120"/>
+              </a:rPr>
+              <a:t>HU06  </a:t>
+            </a:r>
+            <a:pPr indent="0" marL="0">
+              <a:buNone/>
+            </a:pPr>
+            <a:r>
+              <a:rPr lang="en-US" sz="1200" dirty="0">
+                <a:solidFill>
+                  <a:srgbClr val="1A1A1A"/>
+                </a:solidFill>
+                <a:latin typeface="Calibri" pitchFamily="34" charset="0"/>
+                <a:ea typeface="Calibri" pitchFamily="34" charset="-122"/>
+                <a:cs typeface="Calibri" pitchFamily="34" charset="-120"/>
+              </a:rPr>
+              <a:t>Descartar clips cortos</a:t>
+            </a:r>
+            <a:endParaRPr lang="en-US" sz="1200" dirty="0"/>
+          </a:p>
+        </p:txBody>
+      </p:sp>
+      <p:sp>
+        <p:nvSpPr>
+          <p:cNvPr id="24" name="Text 21"/>
+          <p:cNvSpPr/>
+          <p:nvPr/>
+        </p:nvSpPr>
+        <p:spPr>
+          <a:xfrm>
+            <a:off x="2697480" y="4544568"/>
+            <a:ext cx="256032" cy="274320"/>
+          </a:xfrm>
+          <a:prstGeom prst="rect">
+            <a:avLst/>
+          </a:prstGeom>
+          <a:noFill/>
+          <a:ln/>
+        </p:spPr>
+        <p:txBody>
+          <a:bodyPr wrap="square" lIns="0" tIns="0" rIns="0" bIns="0" rtlCol="0" anchor="t"/>
+          <a:lstStyle/>
+          <a:p>
+            <a:pPr algn="r" indent="0" marL="0">
+              <a:buNone/>
+            </a:pPr>
+            <a:r>
+              <a:rPr lang="en-US" sz="1200" dirty="0">
+                <a:solidFill>
+                  <a:srgbClr val="8A8984"/>
+                </a:solidFill>
+                <a:latin typeface="Calibri" pitchFamily="34" charset="0"/>
+                <a:ea typeface="Calibri" pitchFamily="34" charset="-122"/>
+                <a:cs typeface="Calibri" pitchFamily="34" charset="-120"/>
+              </a:rPr>
+              <a:t>2</a:t>
+            </a:r>
+            <a:endParaRPr lang="en-US" sz="1200" dirty="0"/>
+          </a:p>
+        </p:txBody>
+      </p:sp>
+      <p:sp>
+        <p:nvSpPr>
+          <p:cNvPr id="25" name="Shape 22"/>
+          <p:cNvSpPr/>
+          <p:nvPr/>
+        </p:nvSpPr>
+        <p:spPr>
+          <a:xfrm>
+            <a:off x="731520" y="4983480"/>
+            <a:ext cx="2331720" cy="475488"/>
+          </a:xfrm>
+          <a:prstGeom prst="roundRect">
+            <a:avLst>
+              <a:gd name="adj" fmla="val 15385"/>
+            </a:avLst>
+          </a:prstGeom>
+          <a:solidFill>
+            <a:srgbClr val="EEF8F2"/>
+          </a:solidFill>
+          <a:ln w="9525">
+            <a:solidFill>
+              <a:srgbClr val="C7E6D4"/>
+            </a:solidFill>
+            <a:prstDash val="solid"/>
+          </a:ln>
+        </p:spPr>
+      </p:sp>
+      <p:sp>
+        <p:nvSpPr>
+          <p:cNvPr id="26" name="Text 23"/>
+          <p:cNvSpPr/>
+          <p:nvPr/>
+        </p:nvSpPr>
+        <p:spPr>
+          <a:xfrm>
+            <a:off x="868680" y="5111496"/>
+            <a:ext cx="1920240" cy="274320"/>
+          </a:xfrm>
+          <a:prstGeom prst="rect">
+            <a:avLst/>
+          </a:prstGeom>
+          <a:noFill/>
+          <a:ln/>
+        </p:spPr>
+        <p:txBody>
+          <a:bodyPr wrap="square" lIns="0" tIns="0" rIns="0" bIns="0" rtlCol="0" anchor="t"/>
+          <a:lstStyle/>
+          <a:p>
+            <a:pPr indent="0" marL="0">
+              <a:buNone/>
+            </a:pPr>
+            <a:r>
+              <a:rPr lang="en-US" sz="1200" b="1" dirty="0">
+                <a:solidFill>
+                  <a:srgbClr val="1A1A1A"/>
+                </a:solidFill>
+                <a:latin typeface="Calibri" pitchFamily="34" charset="0"/>
+                <a:ea typeface="Calibri" pitchFamily="34" charset="-122"/>
+                <a:cs typeface="Calibri" pitchFamily="34" charset="-120"/>
+              </a:rPr>
+              <a:t>HU11  </a:t>
+            </a:r>
+            <a:pPr indent="0" marL="0">
+              <a:buNone/>
+            </a:pPr>
+            <a:r>
+              <a:rPr lang="en-US" sz="1200" dirty="0">
+                <a:solidFill>
+                  <a:srgbClr val="1A1A1A"/>
+                </a:solidFill>
+                <a:latin typeface="Calibri" pitchFamily="34" charset="0"/>
+                <a:ea typeface="Calibri" pitchFamily="34" charset="-122"/>
+                <a:cs typeface="Calibri" pitchFamily="34" charset="-120"/>
+              </a:rPr>
+              <a:t>Calibrar sensibilidad</a:t>
+            </a:r>
+            <a:endParaRPr lang="en-US" sz="1200" dirty="0"/>
+          </a:p>
+        </p:txBody>
+      </p:sp>
+      <p:sp>
+        <p:nvSpPr>
+          <p:cNvPr id="27" name="Text 24"/>
+          <p:cNvSpPr/>
+          <p:nvPr/>
+        </p:nvSpPr>
+        <p:spPr>
+          <a:xfrm>
+            <a:off x="2697480" y="5111496"/>
+            <a:ext cx="256032" cy="274320"/>
+          </a:xfrm>
+          <a:prstGeom prst="rect">
+            <a:avLst/>
+          </a:prstGeom>
+          <a:noFill/>
+          <a:ln/>
+        </p:spPr>
+        <p:txBody>
+          <a:bodyPr wrap="square" lIns="0" tIns="0" rIns="0" bIns="0" rtlCol="0" anchor="t"/>
+          <a:lstStyle/>
+          <a:p>
+            <a:pPr algn="r" indent="0" marL="0">
+              <a:buNone/>
+            </a:pPr>
+            <a:r>
+              <a:rPr lang="en-US" sz="1200" dirty="0">
+                <a:solidFill>
+                  <a:srgbClr val="8A8984"/>
+                </a:solidFill>
+                <a:latin typeface="Calibri" pitchFamily="34" charset="0"/>
+                <a:ea typeface="Calibri" pitchFamily="34" charset="-122"/>
+                <a:cs typeface="Calibri" pitchFamily="34" charset="-120"/>
+              </a:rPr>
+              <a:t>1</a:t>
+            </a:r>
+            <a:endParaRPr lang="en-US" sz="1200" dirty="0"/>
+          </a:p>
+        </p:txBody>
+      </p:sp>
+      <p:sp>
+        <p:nvSpPr>
+          <p:cNvPr id="28" name="Text 25"/>
+          <p:cNvSpPr/>
+          <p:nvPr/>
+        </p:nvSpPr>
+        <p:spPr>
+          <a:xfrm>
+            <a:off x="3200400" y="1783080"/>
+            <a:ext cx="1828800" cy="274320"/>
+          </a:xfrm>
+          <a:prstGeom prst="rect">
+            <a:avLst/>
+          </a:prstGeom>
+          <a:noFill/>
+          <a:ln/>
+        </p:spPr>
+        <p:txBody>
+          <a:bodyPr wrap="square" lIns="0" tIns="0" rIns="0" bIns="0" rtlCol="0" anchor="t"/>
+          <a:lstStyle/>
+          <a:p>
+            <a:pPr indent="0" marL="0">
+              <a:buNone/>
+            </a:pPr>
+            <a:r>
+              <a:rPr lang="en-US" sz="1100" b="1" spc="100" kern="0" dirty="0">
+                <a:solidFill>
+                  <a:srgbClr val="C2410C"/>
+                </a:solidFill>
+                <a:latin typeface="Calibri" pitchFamily="34" charset="0"/>
+                <a:ea typeface="Calibri" pitchFamily="34" charset="-122"/>
+                <a:cs typeface="Calibri" pitchFamily="34" charset="-120"/>
+              </a:rPr>
+              <a:t>EN CIERRE</a:t>
+            </a:r>
+            <a:endParaRPr lang="en-US" sz="1100" dirty="0"/>
+          </a:p>
+        </p:txBody>
+      </p:sp>
+      <p:sp>
+        <p:nvSpPr>
+          <p:cNvPr id="29" name="Text 26"/>
+          <p:cNvSpPr/>
+          <p:nvPr/>
+        </p:nvSpPr>
+        <p:spPr>
+          <a:xfrm>
+            <a:off x="4800600" y="1783080"/>
+            <a:ext cx="731520" cy="274320"/>
+          </a:xfrm>
+          <a:prstGeom prst="rect">
+            <a:avLst/>
+          </a:prstGeom>
+          <a:noFill/>
+          <a:ln/>
+        </p:spPr>
+        <p:txBody>
+          <a:bodyPr wrap="square" lIns="0" tIns="0" rIns="0" bIns="0" rtlCol="0" anchor="t"/>
+          <a:lstStyle/>
+          <a:p>
+            <a:pPr algn="r" indent="0" marL="0">
+              <a:buNone/>
+            </a:pPr>
+            <a:r>
+              <a:rPr lang="en-US" sz="1100" dirty="0">
+                <a:solidFill>
+                  <a:srgbClr val="8A8984"/>
+                </a:solidFill>
+                <a:latin typeface="Calibri" pitchFamily="34" charset="0"/>
+                <a:ea typeface="Calibri" pitchFamily="34" charset="-122"/>
+                <a:cs typeface="Calibri" pitchFamily="34" charset="-120"/>
+              </a:rPr>
+              <a:t>3 pts</a:t>
+            </a:r>
+            <a:endParaRPr lang="en-US" sz="1100" dirty="0"/>
+          </a:p>
+        </p:txBody>
+      </p:sp>
+      <p:sp>
+        <p:nvSpPr>
+          <p:cNvPr id="30" name="Shape 27"/>
+          <p:cNvSpPr/>
+          <p:nvPr/>
+        </p:nvSpPr>
+        <p:spPr>
+          <a:xfrm>
+            <a:off x="3200400" y="2148840"/>
+            <a:ext cx="2331720" cy="475488"/>
+          </a:xfrm>
+          <a:prstGeom prst="roundRect">
+            <a:avLst>
+              <a:gd name="adj" fmla="val 15385"/>
+            </a:avLst>
+          </a:prstGeom>
+          <a:solidFill>
+            <a:srgbClr val="FFF4ED"/>
+          </a:solidFill>
+          <a:ln w="9525">
+            <a:solidFill>
+              <a:srgbClr val="F5D0BD"/>
+            </a:solidFill>
+            <a:prstDash val="solid"/>
+          </a:ln>
+        </p:spPr>
+      </p:sp>
+      <p:sp>
+        <p:nvSpPr>
+          <p:cNvPr id="31" name="Text 28"/>
+          <p:cNvSpPr/>
+          <p:nvPr/>
+        </p:nvSpPr>
+        <p:spPr>
+          <a:xfrm>
+            <a:off x="3337560" y="2276856"/>
+            <a:ext cx="1920240" cy="274320"/>
+          </a:xfrm>
+          <a:prstGeom prst="rect">
+            <a:avLst/>
+          </a:prstGeom>
+          <a:noFill/>
+          <a:ln/>
+        </p:spPr>
+        <p:txBody>
+          <a:bodyPr wrap="square" lIns="0" tIns="0" rIns="0" bIns="0" rtlCol="0" anchor="t"/>
+          <a:lstStyle/>
+          <a:p>
+            <a:pPr indent="0" marL="0">
+              <a:buNone/>
+            </a:pPr>
+            <a:r>
+              <a:rPr lang="en-US" sz="1200" b="1" dirty="0">
+                <a:solidFill>
+                  <a:srgbClr val="1A1A1A"/>
+                </a:solidFill>
+                <a:latin typeface="Calibri" pitchFamily="34" charset="0"/>
+                <a:ea typeface="Calibri" pitchFamily="34" charset="-122"/>
+                <a:cs typeface="Calibri" pitchFamily="34" charset="-120"/>
+              </a:rPr>
+              <a:t>HU05  </a:t>
+            </a:r>
+            <a:pPr indent="0" marL="0">
+              <a:buNone/>
+            </a:pPr>
+            <a:r>
+              <a:rPr lang="en-US" sz="1200" dirty="0">
+                <a:solidFill>
+                  <a:srgbClr val="1A1A1A"/>
+                </a:solidFill>
+                <a:latin typeface="Calibri" pitchFamily="34" charset="0"/>
+                <a:ea typeface="Calibri" pitchFamily="34" charset="-122"/>
+                <a:cs typeface="Calibri" pitchFamily="34" charset="-120"/>
+              </a:rPr>
+              <a:t>Agrupar en clips</a:t>
+            </a:r>
+            <a:endParaRPr lang="en-US" sz="1200" dirty="0"/>
+          </a:p>
+        </p:txBody>
+      </p:sp>
+      <p:sp>
+        <p:nvSpPr>
+          <p:cNvPr id="32" name="Text 29"/>
+          <p:cNvSpPr/>
+          <p:nvPr/>
+        </p:nvSpPr>
+        <p:spPr>
+          <a:xfrm>
+            <a:off x="5166360" y="2276856"/>
+            <a:ext cx="256032" cy="274320"/>
+          </a:xfrm>
+          <a:prstGeom prst="rect">
+            <a:avLst/>
+          </a:prstGeom>
+          <a:noFill/>
+          <a:ln/>
+        </p:spPr>
+        <p:txBody>
+          <a:bodyPr wrap="square" lIns="0" tIns="0" rIns="0" bIns="0" rtlCol="0" anchor="t"/>
+          <a:lstStyle/>
+          <a:p>
+            <a:pPr algn="r" indent="0" marL="0">
+              <a:buNone/>
+            </a:pPr>
+            <a:r>
+              <a:rPr lang="en-US" sz="1200" dirty="0">
+                <a:solidFill>
+                  <a:srgbClr val="8A8984"/>
+                </a:solidFill>
+                <a:latin typeface="Calibri" pitchFamily="34" charset="0"/>
+                <a:ea typeface="Calibri" pitchFamily="34" charset="-122"/>
+                <a:cs typeface="Calibri" pitchFamily="34" charset="-120"/>
+              </a:rPr>
+              <a:t>3</a:t>
+            </a:r>
+            <a:endParaRPr lang="en-US" sz="1200" dirty="0"/>
+          </a:p>
+        </p:txBody>
+      </p:sp>
+      <p:sp>
+        <p:nvSpPr>
+          <p:cNvPr id="33" name="Text 30"/>
+          <p:cNvSpPr/>
+          <p:nvPr/>
+        </p:nvSpPr>
+        <p:spPr>
+          <a:xfrm>
+            <a:off x="3200400" y="2743200"/>
+            <a:ext cx="2331720" cy="1097280"/>
+          </a:xfrm>
+          <a:prstGeom prst="rect">
+            <a:avLst/>
+          </a:prstGeom>
+          <a:noFill/>
+          <a:ln/>
+        </p:spPr>
+        <p:txBody>
+          <a:bodyPr wrap="square" lIns="0" tIns="0" rIns="0" bIns="0" rtlCol="0" anchor="t"/>
+          <a:lstStyle/>
+          <a:p>
+            <a:pPr indent="0" marL="0">
+              <a:buNone/>
+            </a:pPr>
+            <a:r>
+              <a:rPr lang="en-US" sz="1200" dirty="0">
+                <a:solidFill>
+                  <a:srgbClr val="57534E"/>
+                </a:solidFill>
+                <a:latin typeface="Calibri" pitchFamily="34" charset="0"/>
+                <a:ea typeface="Calibri" pitchFamily="34" charset="-122"/>
+                <a:cs typeface="Calibri" pitchFamily="34" charset="-120"/>
+              </a:rPr>
+              <a:t>Agrupa los clips; falta darles el formato de entrada del modelo temporal. Se cierra con HU07.</a:t>
+            </a:r>
+            <a:endParaRPr lang="en-US" sz="1200" dirty="0"/>
+          </a:p>
+        </p:txBody>
+      </p:sp>
+      <p:sp>
+        <p:nvSpPr>
+          <p:cNvPr id="34" name="Text 31"/>
+          <p:cNvSpPr/>
+          <p:nvPr/>
+        </p:nvSpPr>
+        <p:spPr>
+          <a:xfrm>
+            <a:off x="5669280" y="1783080"/>
+            <a:ext cx="1828800" cy="274320"/>
+          </a:xfrm>
+          <a:prstGeom prst="rect">
+            <a:avLst/>
+          </a:prstGeom>
+          <a:noFill/>
+          <a:ln/>
+        </p:spPr>
+        <p:txBody>
+          <a:bodyPr wrap="square" lIns="0" tIns="0" rIns="0" bIns="0" rtlCol="0" anchor="t"/>
+          <a:lstStyle/>
+          <a:p>
+            <a:pPr indent="0" marL="0">
+              <a:buNone/>
+            </a:pPr>
+            <a:r>
+              <a:rPr lang="en-US" sz="1100" b="1" spc="100" kern="0" dirty="0">
+                <a:solidFill>
+                  <a:srgbClr val="8A8984"/>
+                </a:solidFill>
+                <a:latin typeface="Calibri" pitchFamily="34" charset="0"/>
+                <a:ea typeface="Calibri" pitchFamily="34" charset="-122"/>
+                <a:cs typeface="Calibri" pitchFamily="34" charset="-120"/>
+              </a:rPr>
+              <a:t>POR HACER</a:t>
+            </a:r>
+            <a:endParaRPr lang="en-US" sz="1100" dirty="0"/>
+          </a:p>
+        </p:txBody>
+      </p:sp>
+      <p:sp>
+        <p:nvSpPr>
+          <p:cNvPr id="35" name="Text 32"/>
+          <p:cNvSpPr/>
+          <p:nvPr/>
+        </p:nvSpPr>
+        <p:spPr>
+          <a:xfrm>
+            <a:off x="7269480" y="1783080"/>
+            <a:ext cx="731520" cy="274320"/>
+          </a:xfrm>
+          <a:prstGeom prst="rect">
+            <a:avLst/>
+          </a:prstGeom>
+          <a:noFill/>
+          <a:ln/>
+        </p:spPr>
+        <p:txBody>
+          <a:bodyPr wrap="square" lIns="0" tIns="0" rIns="0" bIns="0" rtlCol="0" anchor="t"/>
+          <a:lstStyle/>
+          <a:p>
+            <a:pPr algn="r" indent="0" marL="0">
+              <a:buNone/>
+            </a:pPr>
+            <a:r>
+              <a:rPr lang="en-US" sz="1100" dirty="0">
+                <a:solidFill>
+                  <a:srgbClr val="8A8984"/>
+                </a:solidFill>
+                <a:latin typeface="Calibri" pitchFamily="34" charset="0"/>
+                <a:ea typeface="Calibri" pitchFamily="34" charset="-122"/>
+                <a:cs typeface="Calibri" pitchFamily="34" charset="-120"/>
+              </a:rPr>
+              <a:t>16 pts</a:t>
+            </a:r>
+            <a:endParaRPr lang="en-US" sz="1100" dirty="0"/>
+          </a:p>
+        </p:txBody>
+      </p:sp>
+      <p:sp>
+        <p:nvSpPr>
+          <p:cNvPr id="36" name="Shape 33"/>
+          <p:cNvSpPr/>
+          <p:nvPr/>
+        </p:nvSpPr>
+        <p:spPr>
+          <a:xfrm>
+            <a:off x="5669280" y="2148840"/>
+            <a:ext cx="2331720" cy="475488"/>
+          </a:xfrm>
+          <a:prstGeom prst="roundRect">
+            <a:avLst>
+              <a:gd name="adj" fmla="val 15385"/>
+            </a:avLst>
+          </a:prstGeom>
+          <a:solidFill>
+            <a:srgbClr val="FFFFFF"/>
+          </a:solidFill>
+          <a:ln w="9525">
+            <a:solidFill>
+              <a:srgbClr val="E7E5E4"/>
+            </a:solidFill>
+            <a:prstDash val="solid"/>
+          </a:ln>
+        </p:spPr>
+      </p:sp>
+      <p:sp>
+        <p:nvSpPr>
+          <p:cNvPr id="37" name="Text 34"/>
+          <p:cNvSpPr/>
+          <p:nvPr/>
+        </p:nvSpPr>
+        <p:spPr>
+          <a:xfrm>
+            <a:off x="5806440" y="2276856"/>
+            <a:ext cx="1920240" cy="274320"/>
+          </a:xfrm>
+          <a:prstGeom prst="rect">
+            <a:avLst/>
+          </a:prstGeom>
+          <a:noFill/>
+          <a:ln/>
+        </p:spPr>
+        <p:txBody>
+          <a:bodyPr wrap="square" lIns="0" tIns="0" rIns="0" bIns="0" rtlCol="0" anchor="t"/>
+          <a:lstStyle/>
+          <a:p>
+            <a:pPr indent="0" marL="0">
+              <a:buNone/>
+            </a:pPr>
+            <a:r>
+              <a:rPr lang="en-US" sz="1200" b="1" dirty="0">
+                <a:solidFill>
+                  <a:srgbClr val="1A1A1A"/>
+                </a:solidFill>
+                <a:latin typeface="Calibri" pitchFamily="34" charset="0"/>
+                <a:ea typeface="Calibri" pitchFamily="34" charset="-122"/>
+                <a:cs typeface="Calibri" pitchFamily="34" charset="-120"/>
+              </a:rPr>
+              <a:t>HU07  </a:t>
+            </a:r>
+            <a:pPr indent="0" marL="0">
+              <a:buNone/>
+            </a:pPr>
+            <a:r>
+              <a:rPr lang="en-US" sz="1200" dirty="0">
+                <a:solidFill>
+                  <a:srgbClr val="1A1A1A"/>
+                </a:solidFill>
+                <a:latin typeface="Calibri" pitchFamily="34" charset="0"/>
+                <a:ea typeface="Calibri" pitchFamily="34" charset="-122"/>
+                <a:cs typeface="Calibri" pitchFamily="34" charset="-120"/>
+              </a:rPr>
+              <a:t>Procesar con ConvLSTM</a:t>
+            </a:r>
+            <a:endParaRPr lang="en-US" sz="1200" dirty="0"/>
+          </a:p>
+        </p:txBody>
+      </p:sp>
+      <p:sp>
+        <p:nvSpPr>
+          <p:cNvPr id="38" name="Text 35"/>
+          <p:cNvSpPr/>
+          <p:nvPr/>
+        </p:nvSpPr>
+        <p:spPr>
+          <a:xfrm>
+            <a:off x="7635240" y="2276856"/>
+            <a:ext cx="256032" cy="274320"/>
+          </a:xfrm>
+          <a:prstGeom prst="rect">
+            <a:avLst/>
+          </a:prstGeom>
+          <a:noFill/>
+          <a:ln/>
+        </p:spPr>
+        <p:txBody>
+          <a:bodyPr wrap="square" lIns="0" tIns="0" rIns="0" bIns="0" rtlCol="0" anchor="t"/>
+          <a:lstStyle/>
+          <a:p>
+            <a:pPr algn="r" indent="0" marL="0">
+              <a:buNone/>
+            </a:pPr>
+            <a:r>
+              <a:rPr lang="en-US" sz="1200" dirty="0">
+                <a:solidFill>
+                  <a:srgbClr val="8A8984"/>
+                </a:solidFill>
+                <a:latin typeface="Calibri" pitchFamily="34" charset="0"/>
+                <a:ea typeface="Calibri" pitchFamily="34" charset="-122"/>
+                <a:cs typeface="Calibri" pitchFamily="34" charset="-120"/>
+              </a:rPr>
+              <a:t>5</a:t>
+            </a:r>
+            <a:endParaRPr lang="en-US" sz="1200" dirty="0"/>
+          </a:p>
+        </p:txBody>
+      </p:sp>
+      <p:sp>
+        <p:nvSpPr>
+          <p:cNvPr id="39" name="Shape 36"/>
+          <p:cNvSpPr/>
+          <p:nvPr/>
+        </p:nvSpPr>
+        <p:spPr>
+          <a:xfrm>
+            <a:off x="5669280" y="2715768"/>
+            <a:ext cx="2331720" cy="475488"/>
+          </a:xfrm>
+          <a:prstGeom prst="roundRect">
+            <a:avLst>
+              <a:gd name="adj" fmla="val 15385"/>
+            </a:avLst>
+          </a:prstGeom>
+          <a:solidFill>
+            <a:srgbClr val="FFFFFF"/>
+          </a:solidFill>
+          <a:ln w="9525">
+            <a:solidFill>
+              <a:srgbClr val="E7E5E4"/>
+            </a:solidFill>
+            <a:prstDash val="solid"/>
+          </a:ln>
+        </p:spPr>
+      </p:sp>
+      <p:sp>
+        <p:nvSpPr>
+          <p:cNvPr id="40" name="Text 37"/>
+          <p:cNvSpPr/>
+          <p:nvPr/>
+        </p:nvSpPr>
+        <p:spPr>
+          <a:xfrm>
+            <a:off x="5806440" y="2843784"/>
+            <a:ext cx="1920240" cy="274320"/>
+          </a:xfrm>
+          <a:prstGeom prst="rect">
+            <a:avLst/>
+          </a:prstGeom>
+          <a:noFill/>
+          <a:ln/>
+        </p:spPr>
+        <p:txBody>
+          <a:bodyPr wrap="square" lIns="0" tIns="0" rIns="0" bIns="0" rtlCol="0" anchor="t"/>
+          <a:lstStyle/>
+          <a:p>
+            <a:pPr indent="0" marL="0">
+              <a:buNone/>
+            </a:pPr>
+            <a:r>
+              <a:rPr lang="en-US" sz="1200" b="1" dirty="0">
+                <a:solidFill>
+                  <a:srgbClr val="1A1A1A"/>
+                </a:solidFill>
+                <a:latin typeface="Calibri" pitchFamily="34" charset="0"/>
+                <a:ea typeface="Calibri" pitchFamily="34" charset="-122"/>
+                <a:cs typeface="Calibri" pitchFamily="34" charset="-120"/>
+              </a:rPr>
+              <a:t>HU08  </a:t>
+            </a:r>
+            <a:pPr indent="0" marL="0">
+              <a:buNone/>
+            </a:pPr>
+            <a:r>
+              <a:rPr lang="en-US" sz="1200" dirty="0">
+                <a:solidFill>
+                  <a:srgbClr val="1A1A1A"/>
+                </a:solidFill>
+                <a:latin typeface="Calibri" pitchFamily="34" charset="0"/>
+                <a:ea typeface="Calibri" pitchFamily="34" charset="-122"/>
+                <a:cs typeface="Calibri" pitchFamily="34" charset="-120"/>
+              </a:rPr>
+              <a:t>Clasificar la conducta</a:t>
+            </a:r>
+            <a:endParaRPr lang="en-US" sz="1200" dirty="0"/>
+          </a:p>
+        </p:txBody>
+      </p:sp>
+      <p:sp>
+        <p:nvSpPr>
+          <p:cNvPr id="41" name="Text 38"/>
+          <p:cNvSpPr/>
+          <p:nvPr/>
+        </p:nvSpPr>
+        <p:spPr>
+          <a:xfrm>
+            <a:off x="7635240" y="2843784"/>
+            <a:ext cx="256032" cy="274320"/>
+          </a:xfrm>
+          <a:prstGeom prst="rect">
+            <a:avLst/>
+          </a:prstGeom>
+          <a:noFill/>
+          <a:ln/>
+        </p:spPr>
+        <p:txBody>
+          <a:bodyPr wrap="square" lIns="0" tIns="0" rIns="0" bIns="0" rtlCol="0" anchor="t"/>
+          <a:lstStyle/>
+          <a:p>
+            <a:pPr algn="r" indent="0" marL="0">
+              <a:buNone/>
+            </a:pPr>
+            <a:r>
+              <a:rPr lang="en-US" sz="1200" dirty="0">
+                <a:solidFill>
+                  <a:srgbClr val="8A8984"/>
+                </a:solidFill>
+                <a:latin typeface="Calibri" pitchFamily="34" charset="0"/>
+                <a:ea typeface="Calibri" pitchFamily="34" charset="-122"/>
+                <a:cs typeface="Calibri" pitchFamily="34" charset="-120"/>
+              </a:rPr>
+              <a:t>3</a:t>
+            </a:r>
+            <a:endParaRPr lang="en-US" sz="1200" dirty="0"/>
+          </a:p>
+        </p:txBody>
+      </p:sp>
+      <p:sp>
+        <p:nvSpPr>
+          <p:cNvPr id="42" name="Shape 39"/>
+          <p:cNvSpPr/>
+          <p:nvPr/>
+        </p:nvSpPr>
+        <p:spPr>
+          <a:xfrm>
+            <a:off x="5669280" y="3282696"/>
+            <a:ext cx="2331720" cy="475488"/>
+          </a:xfrm>
+          <a:prstGeom prst="roundRect">
+            <a:avLst>
+              <a:gd name="adj" fmla="val 15385"/>
+            </a:avLst>
+          </a:prstGeom>
+          <a:solidFill>
+            <a:srgbClr val="FFFFFF"/>
+          </a:solidFill>
+          <a:ln w="9525">
+            <a:solidFill>
+              <a:srgbClr val="E7E5E4"/>
+            </a:solidFill>
+            <a:prstDash val="solid"/>
+          </a:ln>
+        </p:spPr>
+      </p:sp>
+      <p:sp>
+        <p:nvSpPr>
+          <p:cNvPr id="43" name="Text 40"/>
+          <p:cNvSpPr/>
+          <p:nvPr/>
+        </p:nvSpPr>
+        <p:spPr>
+          <a:xfrm>
+            <a:off x="5806440" y="3410712"/>
+            <a:ext cx="1920240" cy="274320"/>
+          </a:xfrm>
+          <a:prstGeom prst="rect">
+            <a:avLst/>
+          </a:prstGeom>
+          <a:noFill/>
+          <a:ln/>
+        </p:spPr>
+        <p:txBody>
+          <a:bodyPr wrap="square" lIns="0" tIns="0" rIns="0" bIns="0" rtlCol="0" anchor="t"/>
+          <a:lstStyle/>
+          <a:p>
+            <a:pPr indent="0" marL="0">
+              <a:buNone/>
+            </a:pPr>
+            <a:r>
+              <a:rPr lang="en-US" sz="1200" b="1" dirty="0">
+                <a:solidFill>
+                  <a:srgbClr val="1A1A1A"/>
+                </a:solidFill>
+                <a:latin typeface="Calibri" pitchFamily="34" charset="0"/>
+                <a:ea typeface="Calibri" pitchFamily="34" charset="-122"/>
+                <a:cs typeface="Calibri" pitchFamily="34" charset="-120"/>
+              </a:rPr>
+              <a:t>HU09  </a:t>
+            </a:r>
+            <a:pPr indent="0" marL="0">
+              <a:buNone/>
+            </a:pPr>
+            <a:r>
+              <a:rPr lang="en-US" sz="1200" dirty="0">
+                <a:solidFill>
+                  <a:srgbClr val="1A1A1A"/>
+                </a:solidFill>
+                <a:latin typeface="Calibri" pitchFamily="34" charset="0"/>
+                <a:ea typeface="Calibri" pitchFamily="34" charset="-122"/>
+                <a:cs typeface="Calibri" pitchFamily="34" charset="-120"/>
+              </a:rPr>
+              <a:t>Recuadro de riesgo</a:t>
+            </a:r>
+            <a:endParaRPr lang="en-US" sz="1200" dirty="0"/>
+          </a:p>
+        </p:txBody>
+      </p:sp>
+      <p:sp>
+        <p:nvSpPr>
+          <p:cNvPr id="44" name="Text 41"/>
+          <p:cNvSpPr/>
+          <p:nvPr/>
+        </p:nvSpPr>
+        <p:spPr>
+          <a:xfrm>
+            <a:off x="7635240" y="3410712"/>
+            <a:ext cx="256032" cy="274320"/>
+          </a:xfrm>
+          <a:prstGeom prst="rect">
+            <a:avLst/>
+          </a:prstGeom>
+          <a:noFill/>
+          <a:ln/>
+        </p:spPr>
+        <p:txBody>
+          <a:bodyPr wrap="square" lIns="0" tIns="0" rIns="0" bIns="0" rtlCol="0" anchor="t"/>
+          <a:lstStyle/>
+          <a:p>
+            <a:pPr algn="r" indent="0" marL="0">
+              <a:buNone/>
+            </a:pPr>
+            <a:r>
+              <a:rPr lang="en-US" sz="1200" dirty="0">
+                <a:solidFill>
+                  <a:srgbClr val="8A8984"/>
+                </a:solidFill>
+                <a:latin typeface="Calibri" pitchFamily="34" charset="0"/>
+                <a:ea typeface="Calibri" pitchFamily="34" charset="-122"/>
+                <a:cs typeface="Calibri" pitchFamily="34" charset="-120"/>
+              </a:rPr>
+              <a:t>4</a:t>
+            </a:r>
+            <a:endParaRPr lang="en-US" sz="1200" dirty="0"/>
+          </a:p>
+        </p:txBody>
+      </p:sp>
+      <p:sp>
+        <p:nvSpPr>
+          <p:cNvPr id="45" name="Shape 42"/>
+          <p:cNvSpPr/>
+          <p:nvPr/>
+        </p:nvSpPr>
+        <p:spPr>
+          <a:xfrm>
+            <a:off x="5669280" y="3849624"/>
+            <a:ext cx="2331720" cy="475488"/>
+          </a:xfrm>
+          <a:prstGeom prst="roundRect">
+            <a:avLst>
+              <a:gd name="adj" fmla="val 15385"/>
+            </a:avLst>
+          </a:prstGeom>
+          <a:solidFill>
+            <a:srgbClr val="FFFFFF"/>
+          </a:solidFill>
+          <a:ln w="9525">
+            <a:solidFill>
+              <a:srgbClr val="E7E5E4"/>
+            </a:solidFill>
+            <a:prstDash val="solid"/>
+          </a:ln>
+        </p:spPr>
+      </p:sp>
+      <p:sp>
+        <p:nvSpPr>
+          <p:cNvPr id="46" name="Text 43"/>
+          <p:cNvSpPr/>
+          <p:nvPr/>
+        </p:nvSpPr>
+        <p:spPr>
+          <a:xfrm>
+            <a:off x="5806440" y="3977640"/>
+            <a:ext cx="1920240" cy="274320"/>
+          </a:xfrm>
+          <a:prstGeom prst="rect">
+            <a:avLst/>
+          </a:prstGeom>
+          <a:noFill/>
+          <a:ln/>
+        </p:spPr>
+        <p:txBody>
+          <a:bodyPr wrap="square" lIns="0" tIns="0" rIns="0" bIns="0" rtlCol="0" anchor="t"/>
+          <a:lstStyle/>
+          <a:p>
+            <a:pPr indent="0" marL="0">
+              <a:buNone/>
+            </a:pPr>
+            <a:r>
+              <a:rPr lang="en-US" sz="1200" b="1" dirty="0">
+                <a:solidFill>
+                  <a:srgbClr val="1A1A1A"/>
+                </a:solidFill>
+                <a:latin typeface="Calibri" pitchFamily="34" charset="0"/>
+                <a:ea typeface="Calibri" pitchFamily="34" charset="-122"/>
+                <a:cs typeface="Calibri" pitchFamily="34" charset="-120"/>
+              </a:rPr>
+              <a:t>HU10  </a:t>
+            </a:r>
+            <a:pPr indent="0" marL="0">
+              <a:buNone/>
+            </a:pPr>
+            <a:r>
+              <a:rPr lang="en-US" sz="1200" dirty="0">
+                <a:solidFill>
+                  <a:srgbClr val="1A1A1A"/>
+                </a:solidFill>
+                <a:latin typeface="Calibri" pitchFamily="34" charset="0"/>
+                <a:ea typeface="Calibri" pitchFamily="34" charset="-122"/>
+                <a:cs typeface="Calibri" pitchFamily="34" charset="-120"/>
+              </a:rPr>
+              <a:t>Alerta de riesgo</a:t>
+            </a:r>
+            <a:endParaRPr lang="en-US" sz="1200" dirty="0"/>
+          </a:p>
+        </p:txBody>
+      </p:sp>
+      <p:sp>
+        <p:nvSpPr>
+          <p:cNvPr id="47" name="Text 44"/>
+          <p:cNvSpPr/>
+          <p:nvPr/>
+        </p:nvSpPr>
+        <p:spPr>
+          <a:xfrm>
+            <a:off x="7635240" y="3977640"/>
+            <a:ext cx="256032" cy="274320"/>
+          </a:xfrm>
+          <a:prstGeom prst="rect">
+            <a:avLst/>
+          </a:prstGeom>
+          <a:noFill/>
+          <a:ln/>
+        </p:spPr>
+        <p:txBody>
+          <a:bodyPr wrap="square" lIns="0" tIns="0" rIns="0" bIns="0" rtlCol="0" anchor="t"/>
+          <a:lstStyle/>
+          <a:p>
+            <a:pPr algn="r" indent="0" marL="0">
+              <a:buNone/>
+            </a:pPr>
+            <a:r>
+              <a:rPr lang="en-US" sz="1200" dirty="0">
+                <a:solidFill>
+                  <a:srgbClr val="8A8984"/>
+                </a:solidFill>
+                <a:latin typeface="Calibri" pitchFamily="34" charset="0"/>
+                <a:ea typeface="Calibri" pitchFamily="34" charset="-122"/>
+                <a:cs typeface="Calibri" pitchFamily="34" charset="-120"/>
+              </a:rPr>
+              <a:t>2</a:t>
+            </a:r>
+            <a:endParaRPr lang="en-US" sz="1200" dirty="0"/>
+          </a:p>
+        </p:txBody>
+      </p:sp>
+      <p:sp>
+        <p:nvSpPr>
+          <p:cNvPr id="48" name="Shape 45"/>
+          <p:cNvSpPr/>
+          <p:nvPr/>
+        </p:nvSpPr>
+        <p:spPr>
+          <a:xfrm>
+            <a:off x="5669280" y="4416552"/>
+            <a:ext cx="2331720" cy="475488"/>
+          </a:xfrm>
+          <a:prstGeom prst="roundRect">
+            <a:avLst>
+              <a:gd name="adj" fmla="val 15385"/>
+            </a:avLst>
+          </a:prstGeom>
+          <a:solidFill>
+            <a:srgbClr val="FFFFFF"/>
+          </a:solidFill>
+          <a:ln w="9525">
+            <a:solidFill>
+              <a:srgbClr val="E7E5E4"/>
+            </a:solidFill>
+            <a:prstDash val="solid"/>
+          </a:ln>
+        </p:spPr>
+      </p:sp>
+      <p:sp>
+        <p:nvSpPr>
+          <p:cNvPr id="49" name="Text 46"/>
+          <p:cNvSpPr/>
+          <p:nvPr/>
+        </p:nvSpPr>
+        <p:spPr>
+          <a:xfrm>
+            <a:off x="5806440" y="4544568"/>
+            <a:ext cx="1920240" cy="274320"/>
+          </a:xfrm>
+          <a:prstGeom prst="rect">
+            <a:avLst/>
+          </a:prstGeom>
+          <a:noFill/>
+          <a:ln/>
+        </p:spPr>
+        <p:txBody>
+          <a:bodyPr wrap="square" lIns="0" tIns="0" rIns="0" bIns="0" rtlCol="0" anchor="t"/>
+          <a:lstStyle/>
+          <a:p>
+            <a:pPr indent="0" marL="0">
+              <a:buNone/>
+            </a:pPr>
+            <a:r>
+              <a:rPr lang="en-US" sz="1200" b="1" dirty="0">
+                <a:solidFill>
+                  <a:srgbClr val="1A1A1A"/>
+                </a:solidFill>
+                <a:latin typeface="Calibri" pitchFamily="34" charset="0"/>
+                <a:ea typeface="Calibri" pitchFamily="34" charset="-122"/>
+                <a:cs typeface="Calibri" pitchFamily="34" charset="-120"/>
+              </a:rPr>
+              <a:t>HU12  </a:t>
+            </a:r>
+            <a:pPr indent="0" marL="0">
+              <a:buNone/>
+            </a:pPr>
+            <a:r>
+              <a:rPr lang="en-US" sz="1200" dirty="0">
+                <a:solidFill>
+                  <a:srgbClr val="1A1A1A"/>
+                </a:solidFill>
+                <a:latin typeface="Calibri" pitchFamily="34" charset="0"/>
+                <a:ea typeface="Calibri" pitchFamily="34" charset="-122"/>
+                <a:cs typeface="Calibri" pitchFamily="34" charset="-120"/>
+              </a:rPr>
+              <a:t>Log de tiempos</a:t>
+            </a:r>
+            <a:endParaRPr lang="en-US" sz="1200" dirty="0"/>
+          </a:p>
+        </p:txBody>
+      </p:sp>
+      <p:sp>
+        <p:nvSpPr>
+          <p:cNvPr id="50" name="Text 47"/>
+          <p:cNvSpPr/>
+          <p:nvPr/>
+        </p:nvSpPr>
+        <p:spPr>
+          <a:xfrm>
+            <a:off x="7635240" y="4544568"/>
+            <a:ext cx="256032" cy="274320"/>
+          </a:xfrm>
+          <a:prstGeom prst="rect">
+            <a:avLst/>
+          </a:prstGeom>
+          <a:noFill/>
+          <a:ln/>
+        </p:spPr>
+        <p:txBody>
+          <a:bodyPr wrap="square" lIns="0" tIns="0" rIns="0" bIns="0" rtlCol="0" anchor="t"/>
+          <a:lstStyle/>
+          <a:p>
+            <a:pPr algn="r" indent="0" marL="0">
+              <a:buNone/>
+            </a:pPr>
+            <a:r>
+              <a:rPr lang="en-US" sz="1200" dirty="0">
+                <a:solidFill>
+                  <a:srgbClr val="8A8984"/>
+                </a:solidFill>
+                <a:latin typeface="Calibri" pitchFamily="34" charset="0"/>
+                <a:ea typeface="Calibri" pitchFamily="34" charset="-122"/>
+                <a:cs typeface="Calibri" pitchFamily="34" charset="-120"/>
+              </a:rPr>
+              <a:t>2</a:t>
+            </a:r>
+            <a:endParaRPr lang="en-US" sz="1200" dirty="0"/>
+          </a:p>
+        </p:txBody>
+      </p:sp>
+      <p:sp>
+        <p:nvSpPr>
+          <p:cNvPr id="51" name="Shape 48"/>
+          <p:cNvSpPr/>
+          <p:nvPr/>
+        </p:nvSpPr>
+        <p:spPr>
+          <a:xfrm>
+            <a:off x="8229600" y="1783080"/>
+            <a:ext cx="3230575" cy="3886200"/>
+          </a:xfrm>
+          <a:prstGeom prst="roundRect">
+            <a:avLst>
+              <a:gd name="adj" fmla="val 2264"/>
+            </a:avLst>
+          </a:prstGeom>
+          <a:solidFill>
+            <a:srgbClr val="FFFFFF"/>
+          </a:solidFill>
+          <a:ln w="9525">
+            <a:solidFill>
+              <a:srgbClr val="E7E5E4"/>
+            </a:solidFill>
+            <a:prstDash val="solid"/>
+          </a:ln>
+        </p:spPr>
+      </p:sp>
+      <p:sp>
+        <p:nvSpPr>
+          <p:cNvPr id="52" name="Text 49"/>
+          <p:cNvSpPr/>
+          <p:nvPr/>
+        </p:nvSpPr>
+        <p:spPr>
+          <a:xfrm>
+            <a:off x="8503920" y="2011680"/>
+            <a:ext cx="3200400" cy="274320"/>
+          </a:xfrm>
+          <a:prstGeom prst="rect">
+            <a:avLst/>
+          </a:prstGeom>
+          <a:noFill/>
+          <a:ln/>
+        </p:spPr>
+        <p:txBody>
+          <a:bodyPr wrap="square" lIns="0" tIns="0" rIns="0" bIns="0" rtlCol="0" anchor="t"/>
+          <a:lstStyle/>
+          <a:p>
+            <a:pPr indent="0" marL="0">
+              <a:buNone/>
+            </a:pPr>
+            <a:r>
+              <a:rPr lang="en-US" sz="1100" b="1" spc="100" kern="0" dirty="0">
+                <a:solidFill>
+                  <a:srgbClr val="3E63DD"/>
+                </a:solidFill>
+                <a:latin typeface="Calibri" pitchFamily="34" charset="0"/>
+                <a:ea typeface="Calibri" pitchFamily="34" charset="-122"/>
+                <a:cs typeface="Calibri" pitchFamily="34" charset="-120"/>
+              </a:rPr>
+              <a:t>PARA DARLAS POR TERMINADAS</a:t>
+            </a:r>
+            <a:endParaRPr lang="en-US" sz="1100" dirty="0"/>
+          </a:p>
+        </p:txBody>
+      </p:sp>
+      <p:pic>
+        <p:nvPicPr>
+          <p:cNvPr id="53" name="Image 0" descr="/Users/anthony/Documents/Projects/NewBit/curso/semana-06-producto-unidad-1/nuestras-entregas/PPT_Producto_Unidad_1_NewBit/img/iconos/seguro-verde.png">    </p:cNvPr>
+          <p:cNvPicPr>
+            <a:picLocks noChangeAspect="1"/>
+          </p:cNvPicPr>
+          <p:nvPr/>
+        </p:nvPicPr>
+        <p:blipFill>
+          <a:blip r:embed="rId1"/>
+          <a:stretch>
+            <a:fillRect/>
+          </a:stretch>
+        </p:blipFill>
+        <p:spPr>
+          <a:xfrm>
+            <a:off x="8503920" y="2487168"/>
+            <a:ext cx="274320" cy="274320"/>
+          </a:xfrm>
+          <a:prstGeom prst="rect">
+            <a:avLst/>
+          </a:prstGeom>
+        </p:spPr>
+      </p:pic>
+      <p:sp>
+        <p:nvSpPr>
+          <p:cNvPr id="54" name="Text 50"/>
+          <p:cNvSpPr/>
+          <p:nvPr/>
+        </p:nvSpPr>
+        <p:spPr>
+          <a:xfrm>
+            <a:off x="8915400" y="2468880"/>
+            <a:ext cx="2743200" cy="274320"/>
+          </a:xfrm>
+          <a:prstGeom prst="rect">
+            <a:avLst/>
+          </a:prstGeom>
+          <a:noFill/>
+          <a:ln/>
+        </p:spPr>
+        <p:txBody>
+          <a:bodyPr wrap="square" lIns="0" tIns="0" rIns="0" bIns="0" rtlCol="0" anchor="t"/>
+          <a:lstStyle/>
+          <a:p>
+            <a:pPr indent="0" marL="0">
+              <a:buNone/>
+            </a:pPr>
+            <a:r>
+              <a:rPr lang="en-US" sz="1350" b="1" dirty="0">
+                <a:solidFill>
+                  <a:srgbClr val="1A1A1A"/>
+                </a:solidFill>
+                <a:latin typeface="Calibri" pitchFamily="34" charset="0"/>
+                <a:ea typeface="Calibri" pitchFamily="34" charset="-122"/>
+                <a:cs typeface="Calibri" pitchFamily="34" charset="-120"/>
+              </a:rPr>
+              <a:t>Pruebas unitarias e integradas</a:t>
+            </a:r>
+            <a:endParaRPr lang="en-US" sz="1350" dirty="0"/>
+          </a:p>
+        </p:txBody>
+      </p:sp>
+      <p:sp>
+        <p:nvSpPr>
+          <p:cNvPr id="55" name="Text 51"/>
+          <p:cNvSpPr/>
+          <p:nvPr/>
+        </p:nvSpPr>
+        <p:spPr>
+          <a:xfrm>
+            <a:off x="8915400" y="2743200"/>
+            <a:ext cx="2743200" cy="274320"/>
+          </a:xfrm>
+          <a:prstGeom prst="rect">
+            <a:avLst/>
+          </a:prstGeom>
+          <a:noFill/>
+          <a:ln/>
+        </p:spPr>
+        <p:txBody>
+          <a:bodyPr wrap="square" lIns="0" tIns="0" rIns="0" bIns="0" rtlCol="0" anchor="t"/>
+          <a:lstStyle/>
+          <a:p>
+            <a:pPr indent="0" marL="0">
+              <a:buNone/>
+            </a:pPr>
+            <a:r>
+              <a:rPr lang="en-US" sz="1200" dirty="0">
+                <a:solidFill>
+                  <a:srgbClr val="8A8984"/>
+                </a:solidFill>
+                <a:latin typeface="Calibri" pitchFamily="34" charset="0"/>
+                <a:ea typeface="Calibri" pitchFamily="34" charset="-122"/>
+                <a:cs typeface="Calibri" pitchFamily="34" charset="-120"/>
+              </a:rPr>
+              <a:t>43 en verde</a:t>
+            </a:r>
+            <a:endParaRPr lang="en-US" sz="1200" dirty="0"/>
+          </a:p>
+        </p:txBody>
+      </p:sp>
+      <p:pic>
+        <p:nvPicPr>
+          <p:cNvPr id="56" name="Image 1" descr="/Users/anthony/Documents/Projects/NewBit/curso/semana-06-producto-unidad-1/nuestras-entregas/PPT_Producto_Unidad_1_NewBit/img/iconos/seguro-verde.png">    </p:cNvPr>
+          <p:cNvPicPr>
+            <a:picLocks noChangeAspect="1"/>
+          </p:cNvPicPr>
+          <p:nvPr/>
+        </p:nvPicPr>
+        <p:blipFill>
+          <a:blip r:embed="rId2"/>
+          <a:stretch>
+            <a:fillRect/>
+          </a:stretch>
+        </p:blipFill>
+        <p:spPr>
+          <a:xfrm>
+            <a:off x="8503920" y="3108960"/>
+            <a:ext cx="274320" cy="274320"/>
+          </a:xfrm>
+          <a:prstGeom prst="rect">
+            <a:avLst/>
+          </a:prstGeom>
+        </p:spPr>
+      </p:pic>
+      <p:sp>
+        <p:nvSpPr>
+          <p:cNvPr id="57" name="Text 52"/>
+          <p:cNvSpPr/>
+          <p:nvPr/>
+        </p:nvSpPr>
+        <p:spPr>
+          <a:xfrm>
+            <a:off x="8915400" y="3090672"/>
+            <a:ext cx="2743200" cy="274320"/>
+          </a:xfrm>
+          <a:prstGeom prst="rect">
+            <a:avLst/>
+          </a:prstGeom>
+          <a:noFill/>
+          <a:ln/>
+        </p:spPr>
+        <p:txBody>
+          <a:bodyPr wrap="square" lIns="0" tIns="0" rIns="0" bIns="0" rtlCol="0" anchor="t"/>
+          <a:lstStyle/>
+          <a:p>
+            <a:pPr indent="0" marL="0">
+              <a:buNone/>
+            </a:pPr>
+            <a:r>
+              <a:rPr lang="en-US" sz="1350" b="1" dirty="0">
+                <a:solidFill>
+                  <a:srgbClr val="1A1A1A"/>
+                </a:solidFill>
+                <a:latin typeface="Calibri" pitchFamily="34" charset="0"/>
+                <a:ea typeface="Calibri" pitchFamily="34" charset="-122"/>
+                <a:cs typeface="Calibri" pitchFamily="34" charset="-120"/>
+              </a:rPr>
+              <a:t>Documentación y guía de arranque</a:t>
+            </a:r>
+            <a:endParaRPr lang="en-US" sz="1350" dirty="0"/>
+          </a:p>
+        </p:txBody>
+      </p:sp>
+      <p:sp>
+        <p:nvSpPr>
+          <p:cNvPr id="58" name="Text 53"/>
+          <p:cNvSpPr/>
+          <p:nvPr/>
+        </p:nvSpPr>
+        <p:spPr>
+          <a:xfrm>
+            <a:off x="8915400" y="3364992"/>
+            <a:ext cx="2743200" cy="274320"/>
+          </a:xfrm>
+          <a:prstGeom prst="rect">
+            <a:avLst/>
+          </a:prstGeom>
+          <a:noFill/>
+          <a:ln/>
+        </p:spPr>
+        <p:txBody>
+          <a:bodyPr wrap="square" lIns="0" tIns="0" rIns="0" bIns="0" rtlCol="0" anchor="t"/>
+          <a:lstStyle/>
+          <a:p>
+            <a:pPr indent="0" marL="0">
+              <a:buNone/>
+            </a:pPr>
+            <a:r>
+              <a:rPr lang="en-US" sz="1200" dirty="0">
+                <a:solidFill>
+                  <a:srgbClr val="8A8984"/>
+                </a:solidFill>
+                <a:latin typeface="Calibri" pitchFamily="34" charset="0"/>
+                <a:ea typeface="Calibri" pitchFamily="34" charset="-122"/>
+                <a:cs typeface="Calibri" pitchFamily="34" charset="-120"/>
+              </a:rPr>
+              <a:t>en el repositorio</a:t>
+            </a:r>
+            <a:endParaRPr lang="en-US" sz="1200" dirty="0"/>
+          </a:p>
+        </p:txBody>
+      </p:sp>
+      <p:pic>
+        <p:nvPicPr>
+          <p:cNvPr id="59" name="Image 2" descr="/Users/anthony/Documents/Projects/NewBit/curso/semana-06-producto-unidad-1/nuestras-entregas/PPT_Producto_Unidad_1_NewBit/img/iconos/reloj-ambar.png">    </p:cNvPr>
+          <p:cNvPicPr>
+            <a:picLocks noChangeAspect="1"/>
+          </p:cNvPicPr>
+          <p:nvPr/>
+        </p:nvPicPr>
+        <p:blipFill>
+          <a:blip r:embed="rId3"/>
+          <a:stretch>
+            <a:fillRect/>
+          </a:stretch>
+        </p:blipFill>
+        <p:spPr>
+          <a:xfrm>
+            <a:off x="8503920" y="3730752"/>
+            <a:ext cx="274320" cy="274320"/>
+          </a:xfrm>
+          <a:prstGeom prst="rect">
+            <a:avLst/>
+          </a:prstGeom>
+        </p:spPr>
+      </p:pic>
+      <p:sp>
+        <p:nvSpPr>
+          <p:cNvPr id="60" name="Text 54"/>
+          <p:cNvSpPr/>
+          <p:nvPr/>
+        </p:nvSpPr>
+        <p:spPr>
+          <a:xfrm>
+            <a:off x="8915400" y="3712464"/>
+            <a:ext cx="2743200" cy="274320"/>
+          </a:xfrm>
+          <a:prstGeom prst="rect">
+            <a:avLst/>
+          </a:prstGeom>
+          <a:noFill/>
+          <a:ln/>
+        </p:spPr>
+        <p:txBody>
+          <a:bodyPr wrap="square" lIns="0" tIns="0" rIns="0" bIns="0" rtlCol="0" anchor="t"/>
+          <a:lstStyle/>
+          <a:p>
+            <a:pPr indent="0" marL="0">
+              <a:buNone/>
+            </a:pPr>
+            <a:r>
+              <a:rPr lang="en-US" sz="1350" b="1" dirty="0">
+                <a:solidFill>
+                  <a:srgbClr val="1A1A1A"/>
+                </a:solidFill>
+                <a:latin typeface="Calibri" pitchFamily="34" charset="0"/>
+                <a:ea typeface="Calibri" pitchFamily="34" charset="-122"/>
+                <a:cs typeface="Calibri" pitchFamily="34" charset="-120"/>
+              </a:rPr>
+              <a:t>Revisión de código entre pares</a:t>
+            </a:r>
+            <a:endParaRPr lang="en-US" sz="1350" dirty="0"/>
+          </a:p>
+        </p:txBody>
+      </p:sp>
+      <p:sp>
+        <p:nvSpPr>
+          <p:cNvPr id="61" name="Text 55"/>
+          <p:cNvSpPr/>
+          <p:nvPr/>
+        </p:nvSpPr>
+        <p:spPr>
+          <a:xfrm>
+            <a:off x="8915400" y="3986784"/>
+            <a:ext cx="2743200" cy="274320"/>
+          </a:xfrm>
+          <a:prstGeom prst="rect">
+            <a:avLst/>
+          </a:prstGeom>
+          <a:noFill/>
+          <a:ln/>
+        </p:spPr>
+        <p:txBody>
+          <a:bodyPr wrap="square" lIns="0" tIns="0" rIns="0" bIns="0" rtlCol="0" anchor="t"/>
+          <a:lstStyle/>
+          <a:p>
+            <a:pPr indent="0" marL="0">
+              <a:buNone/>
+            </a:pPr>
+            <a:r>
+              <a:rPr lang="en-US" sz="1200" dirty="0">
+                <a:solidFill>
+                  <a:srgbClr val="8A8984"/>
+                </a:solidFill>
+                <a:latin typeface="Calibri" pitchFamily="34" charset="0"/>
+                <a:ea typeface="Calibri" pitchFamily="34" charset="-122"/>
+                <a:cs typeface="Calibri" pitchFamily="34" charset="-120"/>
+              </a:rPr>
+              <a:t>por registrar</a:t>
+            </a:r>
+            <a:endParaRPr lang="en-US" sz="1200" dirty="0"/>
+          </a:p>
+        </p:txBody>
+      </p:sp>
+      <p:pic>
+        <p:nvPicPr>
+          <p:cNvPr id="62" name="Image 3" descr="/Users/anthony/Documents/Projects/NewBit/curso/semana-06-producto-unidad-1/nuestras-entregas/PPT_Producto_Unidad_1_NewBit/img/iconos/reloj-ambar.png">    </p:cNvPr>
+          <p:cNvPicPr>
+            <a:picLocks noChangeAspect="1"/>
+          </p:cNvPicPr>
+          <p:nvPr/>
+        </p:nvPicPr>
+        <p:blipFill>
+          <a:blip r:embed="rId4"/>
+          <a:stretch>
+            <a:fillRect/>
+          </a:stretch>
+        </p:blipFill>
+        <p:spPr>
+          <a:xfrm>
+            <a:off x="8503920" y="4352544"/>
+            <a:ext cx="274320" cy="274320"/>
+          </a:xfrm>
+          <a:prstGeom prst="rect">
+            <a:avLst/>
+          </a:prstGeom>
+        </p:spPr>
+      </p:pic>
+      <p:sp>
+        <p:nvSpPr>
+          <p:cNvPr id="63" name="Text 56"/>
+          <p:cNvSpPr/>
+          <p:nvPr/>
+        </p:nvSpPr>
+        <p:spPr>
+          <a:xfrm>
+            <a:off x="8915400" y="4334256"/>
+            <a:ext cx="2743200" cy="274320"/>
+          </a:xfrm>
+          <a:prstGeom prst="rect">
+            <a:avLst/>
+          </a:prstGeom>
+          <a:noFill/>
+          <a:ln/>
+        </p:spPr>
+        <p:txBody>
+          <a:bodyPr wrap="square" lIns="0" tIns="0" rIns="0" bIns="0" rtlCol="0" anchor="t"/>
+          <a:lstStyle/>
+          <a:p>
+            <a:pPr indent="0" marL="0">
+              <a:buNone/>
+            </a:pPr>
+            <a:r>
+              <a:rPr lang="en-US" sz="1350" b="1" dirty="0">
+                <a:solidFill>
+                  <a:srgbClr val="1A1A1A"/>
+                </a:solidFill>
+                <a:latin typeface="Calibri" pitchFamily="34" charset="0"/>
+                <a:ea typeface="Calibri" pitchFamily="34" charset="-122"/>
+                <a:cs typeface="Calibri" pitchFamily="34" charset="-120"/>
+              </a:rPr>
+              <a:t>Prueba con video real</a:t>
+            </a:r>
+            <a:endParaRPr lang="en-US" sz="1350" dirty="0"/>
+          </a:p>
+        </p:txBody>
+      </p:sp>
+      <p:sp>
+        <p:nvSpPr>
+          <p:cNvPr id="64" name="Text 57"/>
+          <p:cNvSpPr/>
+          <p:nvPr/>
+        </p:nvSpPr>
+        <p:spPr>
+          <a:xfrm>
+            <a:off x="8915400" y="4608576"/>
+            <a:ext cx="2743200" cy="274320"/>
+          </a:xfrm>
+          <a:prstGeom prst="rect">
+            <a:avLst/>
+          </a:prstGeom>
+          <a:noFill/>
+          <a:ln/>
+        </p:spPr>
+        <p:txBody>
+          <a:bodyPr wrap="square" lIns="0" tIns="0" rIns="0" bIns="0" rtlCol="0" anchor="t"/>
+          <a:lstStyle/>
+          <a:p>
+            <a:pPr indent="0" marL="0">
+              <a:buNone/>
+            </a:pPr>
+            <a:r>
+              <a:rPr lang="en-US" sz="1200" dirty="0">
+                <a:solidFill>
+                  <a:srgbClr val="8A8984"/>
+                </a:solidFill>
+                <a:latin typeface="Calibri" pitchFamily="34" charset="0"/>
+                <a:ea typeface="Calibri" pitchFamily="34" charset="-122"/>
+                <a:cs typeface="Calibri" pitchFamily="34" charset="-120"/>
+              </a:rPr>
+              <a:t>del conjunto de datos público</a:t>
+            </a:r>
+            <a:endParaRPr lang="en-US" sz="1200" dirty="0"/>
+          </a:p>
+        </p:txBody>
+      </p:sp>
+      <p:pic>
+        <p:nvPicPr>
+          <p:cNvPr id="65" name="Image 4" descr="/Users/anthony/Documents/Projects/NewBit/curso/semana-06-producto-unidad-1/nuestras-entregas/PPT_Producto_Unidad_1_NewBit/img/iconos/reloj-ambar.png">    </p:cNvPr>
+          <p:cNvPicPr>
+            <a:picLocks noChangeAspect="1"/>
+          </p:cNvPicPr>
+          <p:nvPr/>
+        </p:nvPicPr>
+        <p:blipFill>
+          <a:blip r:embed="rId5"/>
+          <a:stretch>
+            <a:fillRect/>
+          </a:stretch>
+        </p:blipFill>
+        <p:spPr>
+          <a:xfrm>
+            <a:off x="8503920" y="4974336"/>
+            <a:ext cx="274320" cy="274320"/>
+          </a:xfrm>
+          <a:prstGeom prst="rect">
+            <a:avLst/>
+          </a:prstGeom>
+        </p:spPr>
+      </p:pic>
+      <p:sp>
+        <p:nvSpPr>
+          <p:cNvPr id="66" name="Text 58"/>
+          <p:cNvSpPr/>
+          <p:nvPr/>
+        </p:nvSpPr>
+        <p:spPr>
+          <a:xfrm>
+            <a:off x="8915400" y="4956048"/>
+            <a:ext cx="2743200" cy="274320"/>
+          </a:xfrm>
+          <a:prstGeom prst="rect">
+            <a:avLst/>
+          </a:prstGeom>
+          <a:noFill/>
+          <a:ln/>
+        </p:spPr>
+        <p:txBody>
+          <a:bodyPr wrap="square" lIns="0" tIns="0" rIns="0" bIns="0" rtlCol="0" anchor="t"/>
+          <a:lstStyle/>
+          <a:p>
+            <a:pPr indent="0" marL="0">
+              <a:buNone/>
+            </a:pPr>
+            <a:r>
+              <a:rPr lang="en-US" sz="1350" b="1" dirty="0">
+                <a:solidFill>
+                  <a:srgbClr val="1A1A1A"/>
+                </a:solidFill>
+                <a:latin typeface="Calibri" pitchFamily="34" charset="0"/>
+                <a:ea typeface="Calibri" pitchFamily="34" charset="-122"/>
+                <a:cs typeface="Calibri" pitchFamily="34" charset="-120"/>
+              </a:rPr>
+              <a:t>Aceptación del Product Owner</a:t>
+            </a:r>
+            <a:endParaRPr lang="en-US" sz="1350" dirty="0"/>
+          </a:p>
+        </p:txBody>
+      </p:sp>
+      <p:sp>
+        <p:nvSpPr>
+          <p:cNvPr id="67" name="Text 59"/>
+          <p:cNvSpPr/>
+          <p:nvPr/>
+        </p:nvSpPr>
+        <p:spPr>
+          <a:xfrm>
+            <a:off x="8915400" y="5230368"/>
+            <a:ext cx="2743200" cy="274320"/>
+          </a:xfrm>
+          <a:prstGeom prst="rect">
+            <a:avLst/>
+          </a:prstGeom>
+          <a:noFill/>
+          <a:ln/>
+        </p:spPr>
+        <p:txBody>
+          <a:bodyPr wrap="square" lIns="0" tIns="0" rIns="0" bIns="0" rtlCol="0" anchor="t"/>
+          <a:lstStyle/>
+          <a:p>
+            <a:pPr indent="0" marL="0">
+              <a:buNone/>
+            </a:pPr>
+            <a:r>
+              <a:rPr lang="en-US" sz="1200" dirty="0">
+                <a:solidFill>
+                  <a:srgbClr val="8A8984"/>
+                </a:solidFill>
+                <a:latin typeface="Calibri" pitchFamily="34" charset="0"/>
+                <a:ea typeface="Calibri" pitchFamily="34" charset="-122"/>
+                <a:cs typeface="Calibri" pitchFamily="34" charset="-120"/>
+              </a:rPr>
+              <a:t>revisión del sprint</a:t>
+            </a:r>
+            <a:endParaRPr lang="en-US" sz="1200" dirty="0"/>
+          </a:p>
+        </p:txBody>
+      </p:sp>
+      <p:sp>
+        <p:nvSpPr>
+          <p:cNvPr id="68" name="Text 60"/>
+          <p:cNvSpPr/>
+          <p:nvPr/>
+        </p:nvSpPr>
+        <p:spPr>
+          <a:xfrm>
+            <a:off x="731520" y="5989320"/>
+            <a:ext cx="10728655" cy="274320"/>
+          </a:xfrm>
+          <a:prstGeom prst="rect">
+            <a:avLst/>
+          </a:prstGeom>
+          <a:noFill/>
+          <a:ln/>
+        </p:spPr>
+        <p:txBody>
+          <a:bodyPr wrap="square" lIns="0" tIns="0" rIns="0" bIns="0" rtlCol="0" anchor="t"/>
+          <a:lstStyle/>
+          <a:p>
+            <a:pPr indent="0" marL="0">
+              <a:buNone/>
+            </a:pPr>
+            <a:r>
+              <a:rPr lang="en-US" sz="1000" dirty="0">
+                <a:solidFill>
+                  <a:srgbClr val="8A8984"/>
+                </a:solidFill>
+                <a:latin typeface="Calibri" pitchFamily="34" charset="0"/>
+                <a:ea typeface="Calibri" pitchFamily="34" charset="-122"/>
+                <a:cs typeface="Calibri" pitchFamily="34" charset="-120"/>
+              </a:rPr>
+              <a:t>Historias y puntos del backlog priorizado (FGAP060). Criterios de terminado del FGAP070. Estado al 20/10/2026.</a:t>
+            </a:r>
+            <a:endParaRPr lang="en-US" sz="1000" dirty="0"/>
+          </a:p>
+        </p:txBody>
+      </p:sp>
+    </p:spTree>
+  </p:cSld>
+  <p:clrMapOvr>
+    <a:masterClrMapping/>
+  </p:clrMapOvr>
+</p:sld>
+</file>
+
+<file path=ppt/slides/slide29.xml><?xml version="1.0" encoding="utf-8"?>
+<p:sld xmlns:a="http://schemas.openxmlformats.org/drawingml/2006/main" xmlns:r="http://schemas.openxmlformats.org/officeDocument/2006/relationships" xmlns:p="http://schemas.openxmlformats.org/presentationml/2006/main">
+  <p:cSld name="Slide 29">
+    <p:bg>
+      <p:bgPr>
+        <a:solidFill>
+          <a:srgbClr val="FAFAF9"/>
+        </a:solidFill>
+      </p:bgPr>
+    </p:bg>
+    <p:spTree>
+      <p:nvGrpSpPr>
+        <p:cNvPr id="1" name=""/>
+        <p:cNvGrpSpPr/>
+        <p:nvPr/>
+      </p:nvGrpSpPr>
+      <p:grpSpPr>
+        <a:xfrm>
+          <a:off x="0" y="0"/>
+          <a:ext cx="0" cy="0"/>
+          <a:chOff x="0" y="0"/>
+          <a:chExt cx="0" cy="0"/>
+        </a:xfrm>
+      </p:grpSpPr>
+      <p:sp>
+        <p:nvSpPr>
+          <p:cNvPr id="2" name="Text 0"/>
+          <p:cNvSpPr/>
+          <p:nvPr/>
+        </p:nvSpPr>
+        <p:spPr>
+          <a:xfrm>
+            <a:off x="731520" y="502920"/>
+            <a:ext cx="10058400" cy="274320"/>
+          </a:xfrm>
+          <a:prstGeom prst="rect">
+            <a:avLst/>
+          </a:prstGeom>
+          <a:noFill/>
+          <a:ln/>
+        </p:spPr>
+        <p:txBody>
+          <a:bodyPr wrap="square" lIns="0" tIns="0" rIns="0" bIns="0" rtlCol="0" anchor="t"/>
+          <a:lstStyle/>
+          <a:p>
+            <a:pPr indent="0" marL="0">
+              <a:buNone/>
+            </a:pPr>
+            <a:r>
+              <a:rPr lang="en-US" sz="1100" b="1" spc="150" kern="0" dirty="0">
+                <a:solidFill>
+                  <a:srgbClr val="3E63DD"/>
+                </a:solidFill>
+                <a:latin typeface="Calibri" pitchFamily="34" charset="0"/>
+                <a:ea typeface="Calibri" pitchFamily="34" charset="-122"/>
+                <a:cs typeface="Calibri" pitchFamily="34" charset="-120"/>
+              </a:rPr>
+              <a:t>PARTE 4 · LO QUE VIENE</a:t>
+            </a:r>
+            <a:endParaRPr lang="en-US" sz="1100" dirty="0"/>
+          </a:p>
+        </p:txBody>
+      </p:sp>
+      <p:sp>
+        <p:nvSpPr>
+          <p:cNvPr id="3" name="Text 1"/>
+          <p:cNvSpPr/>
+          <p:nvPr/>
+        </p:nvSpPr>
+        <p:spPr>
+          <a:xfrm>
+            <a:off x="731520" y="777240"/>
+            <a:ext cx="10698480" cy="822960"/>
+          </a:xfrm>
+          <a:prstGeom prst="rect">
+            <a:avLst/>
+          </a:prstGeom>
+          <a:noFill/>
+          <a:ln/>
+        </p:spPr>
+        <p:txBody>
+          <a:bodyPr wrap="square" lIns="0" tIns="0" rIns="0" bIns="0" rtlCol="0" anchor="t"/>
+          <a:lstStyle/>
+          <a:p>
+            <a:pPr indent="0" marL="0">
+              <a:buNone/>
+            </a:pPr>
+            <a:r>
+              <a:rPr lang="en-US" sz="3400" dirty="0">
+                <a:solidFill>
+                  <a:srgbClr val="1A1A1A"/>
+                </a:solidFill>
+                <a:latin typeface="Calibri Light" pitchFamily="34" charset="0"/>
+                <a:ea typeface="Calibri Light" pitchFamily="34" charset="-122"/>
+                <a:cs typeface="Calibri Light" pitchFamily="34" charset="-120"/>
+              </a:rPr>
+              <a:t>Vamos adelantados al calendario</a:t>
+            </a:r>
+            <a:endParaRPr lang="en-US" sz="3400" dirty="0"/>
+          </a:p>
+        </p:txBody>
+      </p:sp>
+      <p:sp>
+        <p:nvSpPr>
+          <p:cNvPr id="4" name="Text 2"/>
+          <p:cNvSpPr/>
+          <p:nvPr/>
+        </p:nvSpPr>
+        <p:spPr>
+          <a:xfrm>
+            <a:off x="731520" y="6355080"/>
+            <a:ext cx="2743200" cy="228600"/>
+          </a:xfrm>
+          <a:prstGeom prst="rect">
+            <a:avLst/>
+          </a:prstGeom>
+          <a:noFill/>
+          <a:ln/>
+        </p:spPr>
+        <p:txBody>
+          <a:bodyPr wrap="square" lIns="0" tIns="0" rIns="0" bIns="0" rtlCol="0" anchor="t"/>
+          <a:lstStyle/>
+          <a:p>
+            <a:pPr indent="0" marL="0">
+              <a:buNone/>
+            </a:pPr>
+            <a:r>
+              <a:rPr lang="en-US" sz="1000" b="1" dirty="0">
+                <a:solidFill>
+                  <a:srgbClr val="8A8984"/>
+                </a:solidFill>
+                <a:latin typeface="Calibri" pitchFamily="34" charset="0"/>
+                <a:ea typeface="Calibri" pitchFamily="34" charset="-122"/>
+                <a:cs typeface="Calibri" pitchFamily="34" charset="-120"/>
+              </a:rPr>
+              <a:t>NewBit</a:t>
+            </a:r>
+            <a:endParaRPr lang="en-US" sz="1000" dirty="0"/>
+          </a:p>
+        </p:txBody>
+      </p:sp>
+      <p:sp>
+        <p:nvSpPr>
+          <p:cNvPr id="5" name="Text 3"/>
+          <p:cNvSpPr/>
+          <p:nvPr/>
+        </p:nvSpPr>
+        <p:spPr>
+          <a:xfrm>
+            <a:off x="1371600" y="6355080"/>
+            <a:ext cx="4572000" cy="228600"/>
+          </a:xfrm>
+          <a:prstGeom prst="rect">
+            <a:avLst/>
+          </a:prstGeom>
+          <a:noFill/>
+          <a:ln/>
+        </p:spPr>
+        <p:txBody>
+          <a:bodyPr wrap="square" lIns="0" tIns="0" rIns="0" bIns="0" rtlCol="0" anchor="t"/>
+          <a:lstStyle/>
+          <a:p>
+            <a:pPr indent="0" marL="0">
+              <a:buNone/>
+            </a:pPr>
+            <a:r>
+              <a:rPr lang="en-US" sz="1000" dirty="0">
+                <a:solidFill>
+                  <a:srgbClr val="8A8984"/>
+                </a:solidFill>
+                <a:latin typeface="Calibri" pitchFamily="34" charset="0"/>
+                <a:ea typeface="Calibri" pitchFamily="34" charset="-122"/>
+                <a:cs typeface="Calibri" pitchFamily="34" charset="-120"/>
+              </a:rPr>
+              <a:t>Producto de la Unidad I · Grupo D3</a:t>
+            </a:r>
+            <a:endParaRPr lang="en-US" sz="1000" dirty="0"/>
+          </a:p>
+        </p:txBody>
+      </p:sp>
+      <p:sp>
+        <p:nvSpPr>
+          <p:cNvPr id="6" name="Text 4"/>
+          <p:cNvSpPr/>
+          <p:nvPr/>
+        </p:nvSpPr>
+        <p:spPr>
+          <a:xfrm>
+            <a:off x="10728655" y="6355080"/>
+            <a:ext cx="731520" cy="228600"/>
+          </a:xfrm>
+          <a:prstGeom prst="rect">
+            <a:avLst/>
+          </a:prstGeom>
+          <a:noFill/>
+          <a:ln/>
+        </p:spPr>
+        <p:txBody>
+          <a:bodyPr wrap="square" lIns="0" tIns="0" rIns="0" bIns="0" rtlCol="0" anchor="t"/>
+          <a:lstStyle/>
+          <a:p>
+            <a:pPr algn="r" indent="0" marL="0">
+              <a:buNone/>
+            </a:pPr>
+            <a:r>
+              <a:rPr lang="en-US" sz="1000" dirty="0">
+                <a:solidFill>
+                  <a:srgbClr val="8A8984"/>
+                </a:solidFill>
+                <a:latin typeface="Calibri" pitchFamily="34" charset="0"/>
+                <a:ea typeface="Calibri" pitchFamily="34" charset="-122"/>
+                <a:cs typeface="Calibri" pitchFamily="34" charset="-120"/>
+              </a:rPr>
+              <a:t>29</a:t>
+            </a:r>
+            <a:endParaRPr lang="en-US" sz="1000" dirty="0"/>
+          </a:p>
+        </p:txBody>
+      </p:sp>
+      <p:sp>
+        <p:nvSpPr>
+          <p:cNvPr id="8" name="Text 5"/>
+          <p:cNvSpPr/>
+          <p:nvPr/>
+        </p:nvSpPr>
+        <p:spPr>
+          <a:xfrm>
+            <a:off x="365760" y="1737360"/>
+            <a:ext cx="914400" cy="274320"/>
+          </a:xfrm>
+          <a:prstGeom prst="rect">
+            <a:avLst/>
+          </a:prstGeom>
+          <a:noFill/>
+          <a:ln/>
+        </p:spPr>
+        <p:txBody>
+          <a:bodyPr wrap="square" lIns="0" tIns="0" rIns="0" bIns="0" rtlCol="0" anchor="t"/>
+          <a:lstStyle/>
+          <a:p>
+            <a:pPr algn="ctr" indent="0" marL="0">
+              <a:buNone/>
+            </a:pPr>
+            <a:r>
+              <a:rPr lang="en-US" sz="1100" dirty="0">
+                <a:solidFill>
+                  <a:srgbClr val="8A8984"/>
+                </a:solidFill>
+                <a:latin typeface="Calibri" pitchFamily="34" charset="0"/>
+                <a:ea typeface="Calibri" pitchFamily="34" charset="-122"/>
+                <a:cs typeface="Calibri" pitchFamily="34" charset="-120"/>
+              </a:rPr>
+              <a:t>05 oct</a:t>
+            </a:r>
+            <a:endParaRPr lang="en-US" sz="1100" dirty="0"/>
+          </a:p>
+        </p:txBody>
+      </p:sp>
+      <p:sp>
+        <p:nvSpPr>
+          <p:cNvPr id="9" name="Shape 6"/>
+          <p:cNvSpPr/>
+          <p:nvPr/>
+        </p:nvSpPr>
+        <p:spPr>
+          <a:xfrm>
+            <a:off x="822960" y="2057400"/>
+            <a:ext cx="0" cy="2788920"/>
+          </a:xfrm>
+          <a:prstGeom prst="line">
+            <a:avLst/>
+          </a:prstGeom>
+          <a:noFill/>
+          <a:ln w="9525">
+            <a:solidFill>
+              <a:srgbClr val="E7E5E4"/>
+            </a:solidFill>
+            <a:prstDash val="solid"/>
+          </a:ln>
+        </p:spPr>
+      </p:sp>
+      <p:sp>
+        <p:nvSpPr>
+          <p:cNvPr id="10" name="Text 7"/>
+          <p:cNvSpPr/>
+          <p:nvPr/>
+        </p:nvSpPr>
+        <p:spPr>
+          <a:xfrm>
+            <a:off x="2360907" y="1737360"/>
+            <a:ext cx="914400" cy="274320"/>
+          </a:xfrm>
+          <a:prstGeom prst="rect">
+            <a:avLst/>
+          </a:prstGeom>
+          <a:noFill/>
+          <a:ln/>
+        </p:spPr>
+        <p:txBody>
+          <a:bodyPr wrap="square" lIns="0" tIns="0" rIns="0" bIns="0" rtlCol="0" anchor="t"/>
+          <a:lstStyle/>
+          <a:p>
+            <a:pPr algn="ctr" indent="0" marL="0">
+              <a:buNone/>
+            </a:pPr>
+            <a:r>
+              <a:rPr lang="en-US" sz="1100" dirty="0">
+                <a:solidFill>
+                  <a:srgbClr val="8A8984"/>
+                </a:solidFill>
+                <a:latin typeface="Calibri" pitchFamily="34" charset="0"/>
+                <a:ea typeface="Calibri" pitchFamily="34" charset="-122"/>
+                <a:cs typeface="Calibri" pitchFamily="34" charset="-120"/>
+              </a:rPr>
+              <a:t>19 oct</a:t>
+            </a:r>
+            <a:endParaRPr lang="en-US" sz="1100" dirty="0"/>
+          </a:p>
+        </p:txBody>
+      </p:sp>
+      <p:sp>
+        <p:nvSpPr>
+          <p:cNvPr id="11" name="Shape 8"/>
+          <p:cNvSpPr/>
+          <p:nvPr/>
+        </p:nvSpPr>
+        <p:spPr>
+          <a:xfrm>
+            <a:off x="2818107" y="2057400"/>
+            <a:ext cx="0" cy="2788920"/>
+          </a:xfrm>
+          <a:prstGeom prst="line">
+            <a:avLst/>
+          </a:prstGeom>
+          <a:noFill/>
+          <a:ln w="9525">
+            <a:solidFill>
+              <a:srgbClr val="E7E5E4"/>
+            </a:solidFill>
+            <a:prstDash val="solid"/>
+          </a:ln>
+        </p:spPr>
+      </p:sp>
+      <p:sp>
+        <p:nvSpPr>
+          <p:cNvPr id="12" name="Text 9"/>
+          <p:cNvSpPr/>
+          <p:nvPr/>
+        </p:nvSpPr>
+        <p:spPr>
+          <a:xfrm>
+            <a:off x="4356053" y="1737360"/>
+            <a:ext cx="914400" cy="274320"/>
+          </a:xfrm>
+          <a:prstGeom prst="rect">
+            <a:avLst/>
+          </a:prstGeom>
+          <a:noFill/>
+          <a:ln/>
+        </p:spPr>
+        <p:txBody>
+          <a:bodyPr wrap="square" lIns="0" tIns="0" rIns="0" bIns="0" rtlCol="0" anchor="t"/>
+          <a:lstStyle/>
+          <a:p>
+            <a:pPr algn="ctr" indent="0" marL="0">
+              <a:buNone/>
+            </a:pPr>
+            <a:r>
+              <a:rPr lang="en-US" sz="1100" dirty="0">
+                <a:solidFill>
+                  <a:srgbClr val="8A8984"/>
+                </a:solidFill>
+                <a:latin typeface="Calibri" pitchFamily="34" charset="0"/>
+                <a:ea typeface="Calibri" pitchFamily="34" charset="-122"/>
+                <a:cs typeface="Calibri" pitchFamily="34" charset="-120"/>
+              </a:rPr>
+              <a:t>02 nov</a:t>
+            </a:r>
+            <a:endParaRPr lang="en-US" sz="1100" dirty="0"/>
+          </a:p>
+        </p:txBody>
+      </p:sp>
+      <p:sp>
+        <p:nvSpPr>
+          <p:cNvPr id="13" name="Shape 10"/>
+          <p:cNvSpPr/>
+          <p:nvPr/>
+        </p:nvSpPr>
+        <p:spPr>
+          <a:xfrm>
+            <a:off x="4813253" y="2057400"/>
+            <a:ext cx="0" cy="2788920"/>
+          </a:xfrm>
+          <a:prstGeom prst="line">
+            <a:avLst/>
+          </a:prstGeom>
+          <a:noFill/>
+          <a:ln w="9525">
+            <a:solidFill>
+              <a:srgbClr val="E7E5E4"/>
+            </a:solidFill>
+            <a:prstDash val="solid"/>
+          </a:ln>
+        </p:spPr>
+      </p:sp>
+      <p:sp>
+        <p:nvSpPr>
+          <p:cNvPr id="14" name="Text 11"/>
+          <p:cNvSpPr/>
+          <p:nvPr/>
+        </p:nvSpPr>
+        <p:spPr>
+          <a:xfrm>
+            <a:off x="6351200" y="1737360"/>
+            <a:ext cx="914400" cy="274320"/>
+          </a:xfrm>
+          <a:prstGeom prst="rect">
+            <a:avLst/>
+          </a:prstGeom>
+          <a:noFill/>
+          <a:ln/>
+        </p:spPr>
+        <p:txBody>
+          <a:bodyPr wrap="square" lIns="0" tIns="0" rIns="0" bIns="0" rtlCol="0" anchor="t"/>
+          <a:lstStyle/>
+          <a:p>
+            <a:pPr algn="ctr" indent="0" marL="0">
+              <a:buNone/>
+            </a:pPr>
+            <a:r>
+              <a:rPr lang="en-US" sz="1100" dirty="0">
+                <a:solidFill>
+                  <a:srgbClr val="8A8984"/>
+                </a:solidFill>
+                <a:latin typeface="Calibri" pitchFamily="34" charset="0"/>
+                <a:ea typeface="Calibri" pitchFamily="34" charset="-122"/>
+                <a:cs typeface="Calibri" pitchFamily="34" charset="-120"/>
+              </a:rPr>
+              <a:t>16 nov</a:t>
+            </a:r>
+            <a:endParaRPr lang="en-US" sz="1100" dirty="0"/>
+          </a:p>
+        </p:txBody>
+      </p:sp>
+      <p:sp>
+        <p:nvSpPr>
+          <p:cNvPr id="15" name="Shape 12"/>
+          <p:cNvSpPr/>
+          <p:nvPr/>
+        </p:nvSpPr>
+        <p:spPr>
+          <a:xfrm>
+            <a:off x="6808400" y="2057400"/>
+            <a:ext cx="0" cy="2788920"/>
+          </a:xfrm>
+          <a:prstGeom prst="line">
+            <a:avLst/>
+          </a:prstGeom>
+          <a:noFill/>
+          <a:ln w="9525">
+            <a:solidFill>
+              <a:srgbClr val="E7E5E4"/>
+            </a:solidFill>
+            <a:prstDash val="solid"/>
+          </a:ln>
+        </p:spPr>
+      </p:sp>
+      <p:sp>
+        <p:nvSpPr>
+          <p:cNvPr id="16" name="Text 13"/>
+          <p:cNvSpPr/>
+          <p:nvPr/>
+        </p:nvSpPr>
+        <p:spPr>
+          <a:xfrm>
+            <a:off x="8346347" y="1737360"/>
+            <a:ext cx="914400" cy="274320"/>
+          </a:xfrm>
+          <a:prstGeom prst="rect">
+            <a:avLst/>
+          </a:prstGeom>
+          <a:noFill/>
+          <a:ln/>
+        </p:spPr>
+        <p:txBody>
+          <a:bodyPr wrap="square" lIns="0" tIns="0" rIns="0" bIns="0" rtlCol="0" anchor="t"/>
+          <a:lstStyle/>
+          <a:p>
+            <a:pPr algn="ctr" indent="0" marL="0">
+              <a:buNone/>
+            </a:pPr>
+            <a:r>
+              <a:rPr lang="en-US" sz="1100" dirty="0">
+                <a:solidFill>
+                  <a:srgbClr val="8A8984"/>
+                </a:solidFill>
+                <a:latin typeface="Calibri" pitchFamily="34" charset="0"/>
+                <a:ea typeface="Calibri" pitchFamily="34" charset="-122"/>
+                <a:cs typeface="Calibri" pitchFamily="34" charset="-120"/>
+              </a:rPr>
+              <a:t>30 nov</a:t>
+            </a:r>
+            <a:endParaRPr lang="en-US" sz="1100" dirty="0"/>
+          </a:p>
+        </p:txBody>
+      </p:sp>
+      <p:sp>
+        <p:nvSpPr>
+          <p:cNvPr id="17" name="Shape 14"/>
+          <p:cNvSpPr/>
+          <p:nvPr/>
+        </p:nvSpPr>
+        <p:spPr>
+          <a:xfrm>
+            <a:off x="8803547" y="2057400"/>
+            <a:ext cx="0" cy="2788920"/>
+          </a:xfrm>
+          <a:prstGeom prst="line">
+            <a:avLst/>
+          </a:prstGeom>
+          <a:noFill/>
+          <a:ln w="9525">
+            <a:solidFill>
+              <a:srgbClr val="E7E5E4"/>
+            </a:solidFill>
+            <a:prstDash val="solid"/>
+          </a:ln>
+        </p:spPr>
+      </p:sp>
+      <p:sp>
+        <p:nvSpPr>
+          <p:cNvPr id="18" name="Text 15"/>
+          <p:cNvSpPr/>
+          <p:nvPr/>
+        </p:nvSpPr>
+        <p:spPr>
+          <a:xfrm>
+            <a:off x="10341493" y="1737360"/>
+            <a:ext cx="914400" cy="274320"/>
+          </a:xfrm>
+          <a:prstGeom prst="rect">
+            <a:avLst/>
+          </a:prstGeom>
+          <a:noFill/>
+          <a:ln/>
+        </p:spPr>
+        <p:txBody>
+          <a:bodyPr wrap="square" lIns="0" tIns="0" rIns="0" bIns="0" rtlCol="0" anchor="t"/>
+          <a:lstStyle/>
+          <a:p>
+            <a:pPr algn="ctr" indent="0" marL="0">
+              <a:buNone/>
+            </a:pPr>
+            <a:r>
+              <a:rPr lang="en-US" sz="1100" dirty="0">
+                <a:solidFill>
+                  <a:srgbClr val="8A8984"/>
+                </a:solidFill>
+                <a:latin typeface="Calibri" pitchFamily="34" charset="0"/>
+                <a:ea typeface="Calibri" pitchFamily="34" charset="-122"/>
+                <a:cs typeface="Calibri" pitchFamily="34" charset="-120"/>
+              </a:rPr>
+              <a:t>14 dic</a:t>
+            </a:r>
+            <a:endParaRPr lang="en-US" sz="1100" dirty="0"/>
+          </a:p>
+        </p:txBody>
+      </p:sp>
+      <p:sp>
+        <p:nvSpPr>
+          <p:cNvPr id="19" name="Shape 16"/>
+          <p:cNvSpPr/>
+          <p:nvPr/>
+        </p:nvSpPr>
+        <p:spPr>
+          <a:xfrm>
+            <a:off x="10798693" y="2057400"/>
+            <a:ext cx="0" cy="2788920"/>
+          </a:xfrm>
+          <a:prstGeom prst="line">
+            <a:avLst/>
+          </a:prstGeom>
+          <a:noFill/>
+          <a:ln w="9525">
+            <a:solidFill>
+              <a:srgbClr val="E7E5E4"/>
+            </a:solidFill>
+            <a:prstDash val="solid"/>
+          </a:ln>
+        </p:spPr>
+      </p:sp>
+      <p:sp>
+        <p:nvSpPr>
+          <p:cNvPr id="20" name="Shape 17"/>
+          <p:cNvSpPr/>
+          <p:nvPr/>
+        </p:nvSpPr>
+        <p:spPr>
+          <a:xfrm>
+            <a:off x="822960" y="2148840"/>
+            <a:ext cx="1567615" cy="292608"/>
+          </a:xfrm>
+          <a:prstGeom prst="roundRect">
+            <a:avLst>
+              <a:gd name="adj" fmla="val 15625"/>
+            </a:avLst>
+          </a:prstGeom>
+          <a:solidFill>
+            <a:srgbClr val="8A8984"/>
+          </a:solidFill>
+          <a:ln w="12700">
+            <a:solidFill>
+              <a:srgbClr val="8A8984"/>
+            </a:solidFill>
+            <a:prstDash val="solid"/>
+          </a:ln>
+        </p:spPr>
+      </p:sp>
+      <p:sp>
+        <p:nvSpPr>
+          <p:cNvPr id="21" name="Text 18"/>
+          <p:cNvSpPr/>
+          <p:nvPr/>
+        </p:nvSpPr>
+        <p:spPr>
+          <a:xfrm>
+            <a:off x="2527735" y="2167128"/>
+            <a:ext cx="4846320" cy="274320"/>
+          </a:xfrm>
+          <a:prstGeom prst="rect">
+            <a:avLst/>
+          </a:prstGeom>
+          <a:noFill/>
+          <a:ln/>
+        </p:spPr>
+        <p:txBody>
+          <a:bodyPr wrap="square" lIns="0" tIns="0" rIns="0" bIns="0" rtlCol="0" anchor="t"/>
+          <a:lstStyle/>
+          <a:p>
+            <a:pPr algn="l" indent="0" marL="0">
+              <a:buNone/>
+            </a:pPr>
+            <a:r>
+              <a:rPr lang="en-US" sz="1300" b="1" dirty="0">
+                <a:solidFill>
+                  <a:srgbClr val="1A1A1A"/>
+                </a:solidFill>
+                <a:latin typeface="Calibri" pitchFamily="34" charset="0"/>
+                <a:ea typeface="Calibri" pitchFamily="34" charset="-122"/>
+                <a:cs typeface="Calibri" pitchFamily="34" charset="-120"/>
+              </a:rPr>
+              <a:t>Inicio  </a:t>
+            </a:r>
+            <a:pPr algn="l" indent="0" marL="0">
+              <a:buNone/>
+            </a:pPr>
+            <a:r>
+              <a:rPr lang="en-US" sz="1300" dirty="0">
+                <a:solidFill>
+                  <a:srgbClr val="57534E"/>
+                </a:solidFill>
+                <a:latin typeface="Calibri" pitchFamily="34" charset="0"/>
+                <a:ea typeface="Calibri" pitchFamily="34" charset="-122"/>
+                <a:cs typeface="Calibri" pitchFamily="34" charset="-120"/>
+              </a:rPr>
+              <a:t>Formatos de la Unidad I</a:t>
+            </a:r>
+            <a:endParaRPr lang="en-US" sz="1300" dirty="0"/>
+          </a:p>
+        </p:txBody>
+      </p:sp>
+      <p:sp>
+        <p:nvSpPr>
+          <p:cNvPr id="22" name="Shape 19"/>
+          <p:cNvSpPr/>
+          <p:nvPr/>
+        </p:nvSpPr>
+        <p:spPr>
+          <a:xfrm>
+            <a:off x="2818107" y="2624328"/>
+            <a:ext cx="1567615" cy="292608"/>
+          </a:xfrm>
+          <a:prstGeom prst="roundRect">
+            <a:avLst>
+              <a:gd name="adj" fmla="val 15625"/>
+            </a:avLst>
+          </a:prstGeom>
+          <a:solidFill>
+            <a:srgbClr val="3E63DD"/>
+          </a:solidFill>
+          <a:ln w="12700">
+            <a:solidFill>
+              <a:srgbClr val="3E63DD"/>
+            </a:solidFill>
+            <a:prstDash val="solid"/>
+          </a:ln>
+        </p:spPr>
+      </p:sp>
+      <p:sp>
+        <p:nvSpPr>
+          <p:cNvPr id="23" name="Text 20"/>
+          <p:cNvSpPr/>
+          <p:nvPr/>
+        </p:nvSpPr>
+        <p:spPr>
+          <a:xfrm>
+            <a:off x="4522882" y="2642616"/>
+            <a:ext cx="4846320" cy="274320"/>
+          </a:xfrm>
+          <a:prstGeom prst="rect">
+            <a:avLst/>
+          </a:prstGeom>
+          <a:noFill/>
+          <a:ln/>
+        </p:spPr>
+        <p:txBody>
+          <a:bodyPr wrap="square" lIns="0" tIns="0" rIns="0" bIns="0" rtlCol="0" anchor="t"/>
+          <a:lstStyle/>
+          <a:p>
+            <a:pPr algn="l" indent="0" marL="0">
+              <a:buNone/>
+            </a:pPr>
+            <a:r>
+              <a:rPr lang="en-US" sz="1300" b="1" dirty="0">
+                <a:solidFill>
+                  <a:srgbClr val="1A1A1A"/>
+                </a:solidFill>
+                <a:latin typeface="Calibri" pitchFamily="34" charset="0"/>
+                <a:ea typeface="Calibri" pitchFamily="34" charset="-122"/>
+                <a:cs typeface="Calibri" pitchFamily="34" charset="-120"/>
+              </a:rPr>
+              <a:t>Sprint 1  </a:t>
+            </a:r>
+            <a:pPr algn="l" indent="0" marL="0">
+              <a:buNone/>
+            </a:pPr>
+            <a:r>
+              <a:rPr lang="en-US" sz="1300" dirty="0">
+                <a:solidFill>
+                  <a:srgbClr val="57534E"/>
+                </a:solidFill>
+                <a:latin typeface="Calibri" pitchFamily="34" charset="0"/>
+                <a:ea typeface="Calibri" pitchFamily="34" charset="-122"/>
+                <a:cs typeface="Calibri" pitchFamily="34" charset="-120"/>
+              </a:rPr>
+              <a:t>Subir video y detectar personas</a:t>
+            </a:r>
+            <a:pPr algn="l" indent="0" marL="0">
+              <a:buNone/>
+            </a:pPr>
+            <a:r>
+              <a:rPr lang="en-US" sz="1300" b="1" dirty="0">
+                <a:solidFill>
+                  <a:srgbClr val="2F855A"/>
+                </a:solidFill>
+                <a:latin typeface="Calibri" pitchFamily="34" charset="0"/>
+                <a:ea typeface="Calibri" pitchFamily="34" charset="-122"/>
+                <a:cs typeface="Calibri" pitchFamily="34" charset="-120"/>
+              </a:rPr>
+              <a:t>  · ya construido</a:t>
+            </a:r>
+            <a:endParaRPr lang="en-US" sz="1300" dirty="0"/>
+          </a:p>
+        </p:txBody>
+      </p:sp>
+      <p:sp>
+        <p:nvSpPr>
+          <p:cNvPr id="24" name="Shape 21"/>
+          <p:cNvSpPr/>
+          <p:nvPr/>
+        </p:nvSpPr>
+        <p:spPr>
+          <a:xfrm>
+            <a:off x="4813253" y="3099816"/>
+            <a:ext cx="1567615" cy="292608"/>
+          </a:xfrm>
+          <a:prstGeom prst="roundRect">
+            <a:avLst>
+              <a:gd name="adj" fmla="val 15625"/>
+            </a:avLst>
+          </a:prstGeom>
+          <a:solidFill>
+            <a:srgbClr val="3E63DD"/>
+          </a:solidFill>
+          <a:ln w="12700">
+            <a:solidFill>
+              <a:srgbClr val="3E63DD"/>
+            </a:solidFill>
+            <a:prstDash val="solid"/>
+          </a:ln>
+        </p:spPr>
+      </p:sp>
+      <p:sp>
+        <p:nvSpPr>
+          <p:cNvPr id="25" name="Text 22"/>
+          <p:cNvSpPr/>
+          <p:nvPr/>
+        </p:nvSpPr>
+        <p:spPr>
+          <a:xfrm>
+            <a:off x="6518029" y="3118104"/>
+            <a:ext cx="4846320" cy="274320"/>
+          </a:xfrm>
+          <a:prstGeom prst="rect">
+            <a:avLst/>
+          </a:prstGeom>
+          <a:noFill/>
+          <a:ln/>
+        </p:spPr>
+        <p:txBody>
+          <a:bodyPr wrap="square" lIns="0" tIns="0" rIns="0" bIns="0" rtlCol="0" anchor="t"/>
+          <a:lstStyle/>
+          <a:p>
+            <a:pPr algn="l" indent="0" marL="0">
+              <a:buNone/>
+            </a:pPr>
+            <a:r>
+              <a:rPr lang="en-US" sz="1300" b="1" dirty="0">
+                <a:solidFill>
+                  <a:srgbClr val="1A1A1A"/>
+                </a:solidFill>
+                <a:latin typeface="Calibri" pitchFamily="34" charset="0"/>
+                <a:ea typeface="Calibri" pitchFamily="34" charset="-122"/>
+                <a:cs typeface="Calibri" pitchFamily="34" charset="-120"/>
+              </a:rPr>
+              <a:t>Sprint 2  </a:t>
+            </a:r>
+            <a:pPr algn="l" indent="0" marL="0">
+              <a:buNone/>
+            </a:pPr>
+            <a:r>
+              <a:rPr lang="en-US" sz="1300" dirty="0">
+                <a:solidFill>
+                  <a:srgbClr val="57534E"/>
+                </a:solidFill>
+                <a:latin typeface="Calibri" pitchFamily="34" charset="0"/>
+                <a:ea typeface="Calibri" pitchFamily="34" charset="-122"/>
+                <a:cs typeface="Calibri" pitchFamily="34" charset="-120"/>
+              </a:rPr>
+              <a:t>Filtrar imágenes y armar clips</a:t>
+            </a:r>
+            <a:pPr algn="l" indent="0" marL="0">
+              <a:buNone/>
+            </a:pPr>
+            <a:r>
+              <a:rPr lang="en-US" sz="1300" b="1" dirty="0">
+                <a:solidFill>
+                  <a:srgbClr val="2F855A"/>
+                </a:solidFill>
+                <a:latin typeface="Calibri" pitchFamily="34" charset="0"/>
+                <a:ea typeface="Calibri" pitchFamily="34" charset="-122"/>
+                <a:cs typeface="Calibri" pitchFamily="34" charset="-120"/>
+              </a:rPr>
+              <a:t>  · ya construido</a:t>
+            </a:r>
+            <a:endParaRPr lang="en-US" sz="1300" dirty="0"/>
+          </a:p>
+        </p:txBody>
+      </p:sp>
+      <p:sp>
+        <p:nvSpPr>
+          <p:cNvPr id="26" name="Shape 23"/>
+          <p:cNvSpPr/>
+          <p:nvPr/>
+        </p:nvSpPr>
+        <p:spPr>
+          <a:xfrm>
+            <a:off x="6808400" y="3575304"/>
+            <a:ext cx="1567615" cy="292608"/>
+          </a:xfrm>
+          <a:prstGeom prst="roundRect">
+            <a:avLst>
+              <a:gd name="adj" fmla="val 15625"/>
+            </a:avLst>
+          </a:prstGeom>
+          <a:solidFill>
+            <a:srgbClr val="C2410C"/>
+          </a:solidFill>
+          <a:ln w="12700">
+            <a:solidFill>
+              <a:srgbClr val="C2410C"/>
+            </a:solidFill>
+            <a:prstDash val="solid"/>
+          </a:ln>
+        </p:spPr>
+      </p:sp>
+      <p:sp>
+        <p:nvSpPr>
+          <p:cNvPr id="27" name="Text 24"/>
+          <p:cNvSpPr/>
+          <p:nvPr/>
+        </p:nvSpPr>
+        <p:spPr>
+          <a:xfrm>
+            <a:off x="8513175" y="3593592"/>
+            <a:ext cx="4846320" cy="274320"/>
+          </a:xfrm>
+          <a:prstGeom prst="rect">
+            <a:avLst/>
+          </a:prstGeom>
+          <a:noFill/>
+          <a:ln/>
+        </p:spPr>
+        <p:txBody>
+          <a:bodyPr wrap="square" lIns="0" tIns="0" rIns="0" bIns="0" rtlCol="0" anchor="t"/>
+          <a:lstStyle/>
+          <a:p>
+            <a:pPr algn="l" indent="0" marL="0">
+              <a:buNone/>
+            </a:pPr>
+            <a:r>
+              <a:rPr lang="en-US" sz="1300" b="1" dirty="0">
+                <a:solidFill>
+                  <a:srgbClr val="1A1A1A"/>
+                </a:solidFill>
+                <a:latin typeface="Calibri" pitchFamily="34" charset="0"/>
+                <a:ea typeface="Calibri" pitchFamily="34" charset="-122"/>
+                <a:cs typeface="Calibri" pitchFamily="34" charset="-120"/>
+              </a:rPr>
+              <a:t>Sprint 3  </a:t>
+            </a:r>
+            <a:pPr algn="l" indent="0" marL="0">
+              <a:buNone/>
+            </a:pPr>
+            <a:r>
+              <a:rPr lang="en-US" sz="1300" dirty="0">
+                <a:solidFill>
+                  <a:srgbClr val="57534E"/>
+                </a:solidFill>
+                <a:latin typeface="Calibri" pitchFamily="34" charset="0"/>
+                <a:ea typeface="Calibri" pitchFamily="34" charset="-122"/>
+                <a:cs typeface="Calibri" pitchFamily="34" charset="-120"/>
+              </a:rPr>
+              <a:t>Reconocer la conducta</a:t>
+            </a:r>
+            <a:endParaRPr lang="en-US" sz="1300" dirty="0"/>
+          </a:p>
+        </p:txBody>
+      </p:sp>
+      <p:sp>
+        <p:nvSpPr>
+          <p:cNvPr id="28" name="Shape 25"/>
+          <p:cNvSpPr/>
+          <p:nvPr/>
+        </p:nvSpPr>
+        <p:spPr>
+          <a:xfrm>
+            <a:off x="8803547" y="4050792"/>
+            <a:ext cx="1567615" cy="292608"/>
+          </a:xfrm>
+          <a:prstGeom prst="roundRect">
+            <a:avLst>
+              <a:gd name="adj" fmla="val 15625"/>
+            </a:avLst>
+          </a:prstGeom>
+          <a:solidFill>
+            <a:srgbClr val="C2410C"/>
+          </a:solidFill>
+          <a:ln w="12700">
+            <a:solidFill>
+              <a:srgbClr val="C2410C"/>
+            </a:solidFill>
+            <a:prstDash val="solid"/>
+          </a:ln>
+        </p:spPr>
+      </p:sp>
+      <p:sp>
+        <p:nvSpPr>
+          <p:cNvPr id="29" name="Text 26"/>
+          <p:cNvSpPr/>
+          <p:nvPr/>
+        </p:nvSpPr>
+        <p:spPr>
+          <a:xfrm>
+            <a:off x="5511707" y="4069080"/>
+            <a:ext cx="3200400" cy="274320"/>
+          </a:xfrm>
+          <a:prstGeom prst="rect">
+            <a:avLst/>
+          </a:prstGeom>
+          <a:noFill/>
+          <a:ln/>
+        </p:spPr>
+        <p:txBody>
+          <a:bodyPr wrap="square" lIns="0" tIns="0" rIns="0" bIns="0" rtlCol="0" anchor="t"/>
+          <a:lstStyle/>
+          <a:p>
+            <a:pPr algn="r" indent="0" marL="0">
+              <a:buNone/>
+            </a:pPr>
+            <a:r>
+              <a:rPr lang="en-US" sz="1300" b="1" dirty="0">
+                <a:solidFill>
+                  <a:srgbClr val="1A1A1A"/>
+                </a:solidFill>
+                <a:latin typeface="Calibri" pitchFamily="34" charset="0"/>
+                <a:ea typeface="Calibri" pitchFamily="34" charset="-122"/>
+                <a:cs typeface="Calibri" pitchFamily="34" charset="-120"/>
+              </a:rPr>
+              <a:t>Sprint 4  </a:t>
+            </a:r>
+            <a:pPr algn="r" indent="0" marL="0">
+              <a:buNone/>
+            </a:pPr>
+            <a:r>
+              <a:rPr lang="en-US" sz="1300" dirty="0">
+                <a:solidFill>
+                  <a:srgbClr val="57534E"/>
+                </a:solidFill>
+                <a:latin typeface="Calibri" pitchFamily="34" charset="0"/>
+                <a:ea typeface="Calibri" pitchFamily="34" charset="-122"/>
+                <a:cs typeface="Calibri" pitchFamily="34" charset="-120"/>
+              </a:rPr>
+              <a:t>Alertas, recuadro de riesgo y reportes</a:t>
+            </a:r>
+            <a:endParaRPr lang="en-US" sz="1300" dirty="0"/>
+          </a:p>
+        </p:txBody>
+      </p:sp>
+      <p:sp>
+        <p:nvSpPr>
+          <p:cNvPr id="30" name="Shape 27"/>
+          <p:cNvSpPr/>
+          <p:nvPr/>
+        </p:nvSpPr>
+        <p:spPr>
+          <a:xfrm>
+            <a:off x="10798693" y="4526280"/>
+            <a:ext cx="570042" cy="292608"/>
+          </a:xfrm>
+          <a:prstGeom prst="roundRect">
+            <a:avLst>
+              <a:gd name="adj" fmla="val 15625"/>
+            </a:avLst>
+          </a:prstGeom>
+          <a:solidFill>
+            <a:srgbClr val="8A8984"/>
+          </a:solidFill>
+          <a:ln w="12700">
+            <a:solidFill>
+              <a:srgbClr val="8A8984"/>
+            </a:solidFill>
+            <a:prstDash val="solid"/>
+          </a:ln>
+        </p:spPr>
+      </p:sp>
+      <p:sp>
+        <p:nvSpPr>
+          <p:cNvPr id="31" name="Text 28"/>
+          <p:cNvSpPr/>
+          <p:nvPr/>
+        </p:nvSpPr>
+        <p:spPr>
+          <a:xfrm>
+            <a:off x="7506853" y="4544568"/>
+            <a:ext cx="3200400" cy="274320"/>
+          </a:xfrm>
+          <a:prstGeom prst="rect">
+            <a:avLst/>
+          </a:prstGeom>
+          <a:noFill/>
+          <a:ln/>
+        </p:spPr>
+        <p:txBody>
+          <a:bodyPr wrap="square" lIns="0" tIns="0" rIns="0" bIns="0" rtlCol="0" anchor="t"/>
+          <a:lstStyle/>
+          <a:p>
+            <a:pPr algn="r" indent="0" marL="0">
+              <a:buNone/>
+            </a:pPr>
+            <a:r>
+              <a:rPr lang="en-US" sz="1300" b="1" dirty="0">
+                <a:solidFill>
+                  <a:srgbClr val="1A1A1A"/>
+                </a:solidFill>
+                <a:latin typeface="Calibri" pitchFamily="34" charset="0"/>
+                <a:ea typeface="Calibri" pitchFamily="34" charset="-122"/>
+                <a:cs typeface="Calibri" pitchFamily="34" charset="-120"/>
+              </a:rPr>
+              <a:t>Cierre  </a:t>
+            </a:r>
+            <a:pPr algn="r" indent="0" marL="0">
+              <a:buNone/>
+            </a:pPr>
+            <a:r>
+              <a:rPr lang="en-US" sz="1300" dirty="0">
+                <a:solidFill>
+                  <a:srgbClr val="57534E"/>
+                </a:solidFill>
+                <a:latin typeface="Calibri" pitchFamily="34" charset="0"/>
+                <a:ea typeface="Calibri" pitchFamily="34" charset="-122"/>
+                <a:cs typeface="Calibri" pitchFamily="34" charset="-120"/>
+              </a:rPr>
+              <a:t>FGAP090</a:t>
+            </a:r>
+            <a:endParaRPr lang="en-US" sz="1300" dirty="0"/>
+          </a:p>
+        </p:txBody>
+      </p:sp>
+      <p:sp>
+        <p:nvSpPr>
+          <p:cNvPr id="32" name="Shape 29"/>
+          <p:cNvSpPr/>
+          <p:nvPr/>
+        </p:nvSpPr>
+        <p:spPr>
+          <a:xfrm>
+            <a:off x="2960617" y="2560320"/>
+            <a:ext cx="0" cy="2331720"/>
+          </a:xfrm>
+          <a:prstGeom prst="line">
+            <a:avLst/>
+          </a:prstGeom>
+          <a:noFill/>
+          <a:ln w="22225">
+            <a:solidFill>
+              <a:srgbClr val="1A1A1A"/>
+            </a:solidFill>
+            <a:prstDash val="solid"/>
+          </a:ln>
+        </p:spPr>
+      </p:sp>
+      <p:sp>
+        <p:nvSpPr>
+          <p:cNvPr id="33" name="Text 30"/>
+          <p:cNvSpPr/>
+          <p:nvPr/>
+        </p:nvSpPr>
+        <p:spPr>
+          <a:xfrm>
+            <a:off x="3052057" y="4663440"/>
+            <a:ext cx="2286000" cy="274320"/>
+          </a:xfrm>
+          <a:prstGeom prst="rect">
+            <a:avLst/>
+          </a:prstGeom>
+          <a:noFill/>
+          <a:ln/>
+        </p:spPr>
+        <p:txBody>
+          <a:bodyPr wrap="square" lIns="0" tIns="0" rIns="0" bIns="0" rtlCol="0" anchor="t"/>
+          <a:lstStyle/>
+          <a:p>
+            <a:pPr indent="0" marL="0">
+              <a:buNone/>
+            </a:pPr>
+            <a:r>
+              <a:rPr lang="en-US" sz="1200" b="1" dirty="0">
+                <a:solidFill>
+                  <a:srgbClr val="1A1A1A"/>
+                </a:solidFill>
+                <a:latin typeface="Calibri" pitchFamily="34" charset="0"/>
+                <a:ea typeface="Calibri" pitchFamily="34" charset="-122"/>
+                <a:cs typeface="Calibri" pitchFamily="34" charset="-120"/>
+              </a:rPr>
+              <a:t>Hoy · 20 de octubre</a:t>
+            </a:r>
+            <a:endParaRPr lang="en-US" sz="1200" dirty="0"/>
+          </a:p>
+        </p:txBody>
+      </p:sp>
+      <p:sp>
+        <p:nvSpPr>
+          <p:cNvPr id="34" name="Shape 31"/>
+          <p:cNvSpPr/>
+          <p:nvPr/>
+        </p:nvSpPr>
+        <p:spPr>
+          <a:xfrm>
+            <a:off x="731520" y="5074920"/>
+            <a:ext cx="10728655" cy="777240"/>
+          </a:xfrm>
+          <a:prstGeom prst="roundRect">
+            <a:avLst>
+              <a:gd name="adj" fmla="val 9412"/>
+            </a:avLst>
+          </a:prstGeom>
+          <a:solidFill>
+            <a:srgbClr val="EEF2FF"/>
+          </a:solidFill>
+          <a:ln w="9525">
+            <a:solidFill>
+              <a:srgbClr val="C7D2FE"/>
+            </a:solidFill>
+            <a:prstDash val="solid"/>
+          </a:ln>
+        </p:spPr>
+      </p:sp>
+      <p:sp>
+        <p:nvSpPr>
+          <p:cNvPr id="35" name="Text 32"/>
+          <p:cNvSpPr/>
+          <p:nvPr/>
+        </p:nvSpPr>
+        <p:spPr>
+          <a:xfrm>
+            <a:off x="1051560" y="5285232"/>
+            <a:ext cx="10088575" cy="411480"/>
+          </a:xfrm>
+          <a:prstGeom prst="rect">
+            <a:avLst/>
+          </a:prstGeom>
+          <a:noFill/>
+          <a:ln/>
+        </p:spPr>
+        <p:txBody>
+          <a:bodyPr wrap="square" lIns="0" tIns="0" rIns="0" bIns="0" rtlCol="0" anchor="t"/>
+          <a:lstStyle/>
+          <a:p>
+            <a:pPr indent="0" marL="0">
+              <a:buNone/>
+            </a:pPr>
+            <a:r>
+              <a:rPr lang="en-US" sz="1500" b="1" dirty="0">
+                <a:solidFill>
+                  <a:srgbClr val="1A1A1A"/>
+                </a:solidFill>
+                <a:latin typeface="Calibri" pitchFamily="34" charset="0"/>
+                <a:ea typeface="Calibri" pitchFamily="34" charset="-122"/>
+                <a:cs typeface="Calibri" pitchFamily="34" charset="-120"/>
+              </a:rPr>
+              <a:t>Propuesta para el Product Owner:</a:t>
+            </a:r>
+            <a:pPr indent="0" marL="0">
+              <a:buNone/>
+            </a:pPr>
+            <a:r>
+              <a:rPr lang="en-US" sz="1500" dirty="0">
+                <a:solidFill>
+                  <a:srgbClr val="1A1A1A"/>
+                </a:solidFill>
+                <a:latin typeface="Calibri" pitchFamily="34" charset="0"/>
+                <a:ea typeface="Calibri" pitchFamily="34" charset="-122"/>
+                <a:cs typeface="Calibri" pitchFamily="34" charset="-120"/>
+              </a:rPr>
+              <a:t> validar ya lo construido, con video real, y empezar antes el Sprint 3, el de mayor riesgo técnico.</a:t>
+            </a:r>
+            <a:endParaRPr lang="en-US" sz="1500" dirty="0"/>
+          </a:p>
+        </p:txBody>
+      </p:sp>
+      <p:sp>
+        <p:nvSpPr>
+          <p:cNvPr id="36" name="Text 33"/>
+          <p:cNvSpPr/>
+          <p:nvPr/>
+        </p:nvSpPr>
+        <p:spPr>
+          <a:xfrm>
+            <a:off x="731520" y="5989320"/>
+            <a:ext cx="10728655" cy="274320"/>
+          </a:xfrm>
+          <a:prstGeom prst="rect">
+            <a:avLst/>
+          </a:prstGeom>
+          <a:noFill/>
+          <a:ln/>
+        </p:spPr>
+        <p:txBody>
+          <a:bodyPr wrap="square" lIns="0" tIns="0" rIns="0" bIns="0" rtlCol="0" anchor="t"/>
+          <a:lstStyle/>
+          <a:p>
+            <a:pPr indent="0" marL="0">
+              <a:buNone/>
+            </a:pPr>
+            <a:r>
+              <a:rPr lang="en-US" sz="1000" dirty="0">
+                <a:solidFill>
+                  <a:srgbClr val="8A8984"/>
+                </a:solidFill>
+                <a:latin typeface="Calibri" pitchFamily="34" charset="0"/>
+                <a:ea typeface="Calibri" pitchFamily="34" charset="-122"/>
+                <a:cs typeface="Calibri" pitchFamily="34" charset="-120"/>
+              </a:rPr>
+              <a:t>Fechas del acta (FGAP010). Cada sprint: planificación 4 h · Daily 15 min · revisión 2 h · retrospectiva 2 h.</a:t>
+            </a:r>
+            <a:endParaRPr lang="en-US" sz="1000" dirty="0"/>
           </a:p>
         </p:txBody>
       </p:sp>
@@ -20374,6 +25767,217 @@
               <a:t>Escena ilustrativa. Conductas tomadas del conjunto de datos de Önal y Dandıl (2024).</a:t>
             </a:r>
             <a:endParaRPr lang="en-US" sz="1000" dirty="0"/>
+          </a:p>
+        </p:txBody>
+      </p:sp>
+    </p:spTree>
+  </p:cSld>
+  <p:clrMapOvr>
+    <a:masterClrMapping/>
+  </p:clrMapOvr>
+</p:sld>
+</file>
+
+<file path=ppt/slides/slide30.xml><?xml version="1.0" encoding="utf-8"?>
+<p:sld xmlns:a="http://schemas.openxmlformats.org/drawingml/2006/main" xmlns:r="http://schemas.openxmlformats.org/officeDocument/2006/relationships" xmlns:p="http://schemas.openxmlformats.org/presentationml/2006/main">
+  <p:cSld name="Slide 30">
+    <p:bg>
+      <p:bgPr>
+        <a:solidFill>
+          <a:srgbClr val="111111"/>
+        </a:solidFill>
+      </p:bgPr>
+    </p:bg>
+    <p:spTree>
+      <p:nvGrpSpPr>
+        <p:cNvPr id="1" name=""/>
+        <p:cNvGrpSpPr/>
+        <p:nvPr/>
+      </p:nvGrpSpPr>
+      <p:grpSpPr>
+        <a:xfrm>
+          <a:off x="0" y="0"/>
+          <a:ext cx="0" cy="0"/>
+          <a:chOff x="0" y="0"/>
+          <a:chExt cx="0" cy="0"/>
+        </a:xfrm>
+      </p:grpSpPr>
+      <p:sp>
+        <p:nvSpPr>
+          <p:cNvPr id="3" name="Text 0"/>
+          <p:cNvSpPr/>
+          <p:nvPr/>
+        </p:nvSpPr>
+        <p:spPr>
+          <a:xfrm>
+            <a:off x="731520" y="1828800"/>
+            <a:ext cx="10515600" cy="914400"/>
+          </a:xfrm>
+          <a:prstGeom prst="rect">
+            <a:avLst/>
+          </a:prstGeom>
+          <a:noFill/>
+          <a:ln/>
+        </p:spPr>
+        <p:txBody>
+          <a:bodyPr wrap="square" lIns="0" tIns="0" rIns="0" bIns="0" rtlCol="0" anchor="t"/>
+          <a:lstStyle/>
+          <a:p>
+            <a:pPr indent="0" marL="0">
+              <a:buNone/>
+            </a:pPr>
+            <a:r>
+              <a:rPr lang="en-US" sz="5400" dirty="0">
+                <a:solidFill>
+                  <a:srgbClr val="F5F5F4"/>
+                </a:solidFill>
+                <a:latin typeface="Calibri Light" pitchFamily="34" charset="0"/>
+                <a:ea typeface="Calibri Light" pitchFamily="34" charset="-122"/>
+                <a:cs typeface="Calibri Light" pitchFamily="34" charset="-120"/>
+              </a:rPr>
+              <a:t>Menos horas mirando video.</a:t>
+            </a:r>
+            <a:endParaRPr lang="en-US" sz="5400" dirty="0"/>
+          </a:p>
+        </p:txBody>
+      </p:sp>
+      <p:sp>
+        <p:nvSpPr>
+          <p:cNvPr id="4" name="Text 1"/>
+          <p:cNvSpPr/>
+          <p:nvPr/>
+        </p:nvSpPr>
+        <p:spPr>
+          <a:xfrm>
+            <a:off x="731520" y="2743200"/>
+            <a:ext cx="10515600" cy="914400"/>
+          </a:xfrm>
+          <a:prstGeom prst="rect">
+            <a:avLst/>
+          </a:prstGeom>
+          <a:noFill/>
+          <a:ln/>
+        </p:spPr>
+        <p:txBody>
+          <a:bodyPr wrap="square" lIns="0" tIns="0" rIns="0" bIns="0" rtlCol="0" anchor="t"/>
+          <a:lstStyle/>
+          <a:p>
+            <a:pPr indent="0" marL="0">
+              <a:buNone/>
+            </a:pPr>
+            <a:r>
+              <a:rPr lang="en-US" sz="5400" dirty="0">
+                <a:solidFill>
+                  <a:srgbClr val="A8A29E"/>
+                </a:solidFill>
+                <a:latin typeface="Calibri Light" pitchFamily="34" charset="0"/>
+                <a:ea typeface="Calibri Light" pitchFamily="34" charset="-122"/>
+                <a:cs typeface="Calibri Light" pitchFamily="34" charset="-120"/>
+              </a:rPr>
+              <a:t>Más tiempo para prevenir.</a:t>
+            </a:r>
+            <a:endParaRPr lang="en-US" sz="5400" dirty="0"/>
+          </a:p>
+        </p:txBody>
+      </p:sp>
+      <p:sp>
+        <p:nvSpPr>
+          <p:cNvPr id="5" name="Text 2"/>
+          <p:cNvSpPr/>
+          <p:nvPr/>
+        </p:nvSpPr>
+        <p:spPr>
+          <a:xfrm>
+            <a:off x="731520" y="4206240"/>
+            <a:ext cx="7315200" cy="457200"/>
+          </a:xfrm>
+          <a:prstGeom prst="rect">
+            <a:avLst/>
+          </a:prstGeom>
+          <a:noFill/>
+          <a:ln/>
+        </p:spPr>
+        <p:txBody>
+          <a:bodyPr wrap="square" lIns="0" tIns="0" rIns="0" bIns="0" rtlCol="0" anchor="t"/>
+          <a:lstStyle/>
+          <a:p>
+            <a:pPr indent="0" marL="0">
+              <a:buNone/>
+            </a:pPr>
+            <a:r>
+              <a:rPr lang="en-US" sz="2000" dirty="0">
+                <a:solidFill>
+                  <a:srgbClr val="F5F5F4"/>
+                </a:solidFill>
+                <a:latin typeface="Calibri" pitchFamily="34" charset="0"/>
+                <a:ea typeface="Calibri" pitchFamily="34" charset="-122"/>
+                <a:cs typeface="Calibri" pitchFamily="34" charset="-120"/>
+              </a:rPr>
+              <a:t>Gracias · ¿Preguntas?</a:t>
+            </a:r>
+            <a:endParaRPr lang="en-US" sz="2000" dirty="0"/>
+          </a:p>
+        </p:txBody>
+      </p:sp>
+      <p:sp>
+        <p:nvSpPr>
+          <p:cNvPr id="6" name="Shape 3"/>
+          <p:cNvSpPr/>
+          <p:nvPr/>
+        </p:nvSpPr>
+        <p:spPr>
+          <a:xfrm>
+            <a:off x="731520" y="5257800"/>
+            <a:ext cx="10728655" cy="0"/>
+          </a:xfrm>
+          <a:prstGeom prst="line">
+            <a:avLst/>
+          </a:prstGeom>
+          <a:noFill/>
+          <a:ln w="12700">
+            <a:solidFill>
+              <a:srgbClr val="2B2B2A"/>
+            </a:solidFill>
+            <a:prstDash val="solid"/>
+          </a:ln>
+        </p:spPr>
+      </p:sp>
+      <p:sp>
+        <p:nvSpPr>
+          <p:cNvPr id="7" name="Text 4"/>
+          <p:cNvSpPr/>
+          <p:nvPr/>
+        </p:nvSpPr>
+        <p:spPr>
+          <a:xfrm>
+            <a:off x="731520" y="5440680"/>
+            <a:ext cx="10728655" cy="365760"/>
+          </a:xfrm>
+          <a:prstGeom prst="rect">
+            <a:avLst/>
+          </a:prstGeom>
+          <a:noFill/>
+          <a:ln/>
+        </p:spPr>
+        <p:txBody>
+          <a:bodyPr wrap="square" lIns="0" tIns="0" rIns="0" bIns="0" rtlCol="0" anchor="t"/>
+          <a:lstStyle/>
+          <a:p>
+            <a:pPr indent="0" marL="0">
+              <a:buNone/>
+            </a:pPr>
+            <a:r>
+              <a:rPr lang="en-US" sz="1200" dirty="0">
+                <a:solidFill>
+                  <a:srgbClr val="A8A29E"/>
+                </a:solidFill>
+                <a:latin typeface="Calibri" pitchFamily="34" charset="0"/>
+                <a:ea typeface="Calibri" pitchFamily="34" charset="-122"/>
+                <a:cs typeface="Calibri" pitchFamily="34" charset="-120"/>
+              </a:rPr>
+              <a:t>NewBit · Grupo D3 · Albert Chumacero · Anthony Lopez · Luis Salazar · Ingeniería de Software II · UNS · 2026-II</a:t>
+            </a:r>
+            <a:endParaRPr lang="en-US" sz="1200" dirty="0"/>
           </a:p>
         </p:txBody>
       </p:sp>

--- a/curso/semana-06-producto-unidad-1/nuestras-entregas/PPT_Producto_Unidad_1_NewBit/PPT_Producto_Unidad_1_NewBit.pptx
+++ b/curso/semana-06-producto-unidad-1/nuestras-entregas/PPT_Producto_Unidad_1_NewBit/PPT_Producto_Unidad_1_NewBit.pptx
@@ -1763,7 +1763,7 @@
           <a:p>
             <a:r>
               <a:rPr lang="en-US" dirty="0"/>
-              <a:t>Proceso 8.5: el backlog se ordena por valor, riesgo y dependencias. Tres pasos: MoSCoW, 100 puntos por integrante y dependencias. Resultado: 31 puntos en cuatro sprints.</a:t>
+              <a:t>Proceso 8.5: el backlog se ordena por valor, riesgo y dependencias. Tres pasos: MoSCoW, 100 puntos por integrante y dependencias. Resultado: 31 puntos en cuatro sprints. Al 20/10 ya están construidas las historias de los sprints 1 y 2 (15 puntos); el detalle va en la parte 4.</a:t>
             </a:r>
             <a:endParaRPr lang="en-US" dirty="0"/>
           </a:p>
@@ -1851,7 +1851,7 @@
           <a:p>
             <a:r>
               <a:rPr lang="en-US" dirty="0"/>
-              <a:t>Puño de cinco (proceso 9.2, p. 194): todos votan a la vez de 1 a 5; los extremos explican y se vota otra vez. A la derecha, el tablero del Sprint 1 con sus tareas propuestas (proceso 9.3).</a:t>
+              <a:t>Puño de cinco (proceso 9.2, p. 194): todos votan a la vez de 1 a 5; los extremos explican y se vota otra vez. A la derecha, el tablero del Sprint 1 tal como se planificó en la semana 5, con todo por hacer (proceso 9.3). Aclarar que ya avanzó: su estado de hoy está en la lámina 28.</a:t>
             </a:r>
             <a:endParaRPr lang="en-US" dirty="0"/>
           </a:p>
@@ -2291,7 +2291,7 @@
           <a:p>
             <a:r>
               <a:rPr lang="en-US" dirty="0"/>
-              <a:t>El estado de las 12 historias del backlog. Seis están hechas y esperan la aceptación del PO. HU05 agrupa los clips, pero le falta el formato de entrada del modelo temporal; se cierra junto con HU07. A la derecha, lo que exigen los criterios de terminado (FGAP070) y lo que todavía falta registrar.</a:t>
+              <a:t>El mismo tablero de la semana 5 (lámina 23), actualizado al 20/10 con las 12 historias. Seis están terminadas y esperan la aceptación del PO. La columna En prueba está vacía y no se muestra. HU05 agrupa los clips, pero le falta el formato de entrada del modelo temporal; se cierra junto con HU07. A la derecha, lo que exigen los criterios de terminado (FGAP070) y lo que todavía falta registrar.</a:t>
             </a:r>
             <a:endParaRPr lang="en-US" dirty="0"/>
           </a:p>
@@ -15728,17 +15728,17 @@
         <p:spPr>
           <a:xfrm>
             <a:off x="7086600" y="2926080"/>
-            <a:ext cx="2688336" cy="237744"/>
+            <a:ext cx="2304288" cy="237744"/>
           </a:xfrm>
           <a:prstGeom prst="rect">
             <a:avLst/>
           </a:prstGeom>
           <a:solidFill>
-            <a:srgbClr val="3E63DD"/>
+            <a:srgbClr val="2F855A"/>
           </a:solidFill>
           <a:ln w="12700">
             <a:solidFill>
-              <a:srgbClr val="3E63DD"/>
+              <a:srgbClr val="2F855A"/>
             </a:solidFill>
             <a:prstDash val="solid"/>
           </a:ln>
@@ -15752,7 +15752,7 @@
         </p:nvSpPr>
         <p:spPr>
           <a:xfrm>
-            <a:off x="9866376" y="2880360"/>
+            <a:off x="9482328" y="2880360"/>
             <a:ext cx="457200" cy="320040"/>
           </a:xfrm>
           <a:prstGeom prst="rect">
@@ -15785,102 +15785,26 @@
       </p:sp>
       <p:sp>
         <p:nvSpPr>
-          <p:cNvPr id="25" name="Text 22"/>
-          <p:cNvSpPr/>
-          <p:nvPr/>
-        </p:nvSpPr>
-        <p:spPr>
-          <a:xfrm>
-            <a:off x="7086600" y="3209544"/>
-            <a:ext cx="4389120" cy="274320"/>
-          </a:xfrm>
-          <a:prstGeom prst="rect">
-            <a:avLst/>
-          </a:prstGeom>
-          <a:noFill/>
-          <a:ln/>
-        </p:spPr>
-        <p:txBody>
-          <a:bodyPr wrap="square" lIns="0" tIns="0" rIns="0" bIns="0" rtlCol="0" anchor="t"/>
-          <a:lstStyle/>
-          <a:p>
-            <a:pPr indent="0" marL="0">
-              <a:buNone/>
-            </a:pPr>
-            <a:r>
-              <a:rPr lang="en-US" sz="1150" dirty="0">
-                <a:solidFill>
-                  <a:srgbClr val="8A8984"/>
-                </a:solidFill>
-                <a:latin typeface="Calibri" pitchFamily="34" charset="0"/>
-                <a:ea typeface="Calibri" pitchFamily="34" charset="-122"/>
-                <a:cs typeface="Calibri" pitchFamily="34" charset="-120"/>
-              </a:rPr>
-              <a:t>HU01–HU03 · subir video y detectar personas</a:t>
-            </a:r>
-            <a:endParaRPr lang="en-US" sz="1150" dirty="0"/>
-          </a:p>
-        </p:txBody>
-      </p:sp>
-      <p:sp>
-        <p:nvSpPr>
-          <p:cNvPr id="26" name="Text 23"/>
-          <p:cNvSpPr/>
-          <p:nvPr/>
-        </p:nvSpPr>
-        <p:spPr>
-          <a:xfrm>
-            <a:off x="5943600" y="3593592"/>
-            <a:ext cx="1097280" cy="320040"/>
-          </a:xfrm>
-          <a:prstGeom prst="rect">
-            <a:avLst/>
-          </a:prstGeom>
-          <a:noFill/>
-          <a:ln/>
-        </p:spPr>
-        <p:txBody>
-          <a:bodyPr wrap="square" lIns="0" tIns="0" rIns="0" bIns="0" rtlCol="0" anchor="t"/>
-          <a:lstStyle/>
-          <a:p>
-            <a:pPr indent="0" marL="0">
-              <a:buNone/>
-            </a:pPr>
-            <a:r>
-              <a:rPr lang="en-US" sz="1400" b="1" dirty="0">
-                <a:solidFill>
-                  <a:srgbClr val="1A1A1A"/>
-                </a:solidFill>
-                <a:latin typeface="Calibri" pitchFamily="34" charset="0"/>
-                <a:ea typeface="Calibri" pitchFamily="34" charset="-122"/>
-                <a:cs typeface="Calibri" pitchFamily="34" charset="-120"/>
-              </a:rPr>
-              <a:t>Sprint 2</a:t>
-            </a:r>
-            <a:endParaRPr lang="en-US" sz="1400" dirty="0"/>
-          </a:p>
-        </p:txBody>
-      </p:sp>
-      <p:sp>
-        <p:nvSpPr>
-          <p:cNvPr id="27" name="Shape 24"/>
-          <p:cNvSpPr/>
-          <p:nvPr/>
-        </p:nvSpPr>
-        <p:spPr>
-          <a:xfrm>
-            <a:off x="7086600" y="3639312"/>
-            <a:ext cx="3072384" cy="237744"/>
-          </a:xfrm>
-          <a:prstGeom prst="rect">
-            <a:avLst/>
+          <p:cNvPr id="25" name="Shape 22"/>
+          <p:cNvSpPr/>
+          <p:nvPr/>
+        </p:nvSpPr>
+        <p:spPr>
+          <a:xfrm>
+            <a:off x="10287000" y="2889504"/>
+            <a:ext cx="1143000" cy="292608"/>
+          </a:xfrm>
+          <a:prstGeom prst="roundRect">
+            <a:avLst>
+              <a:gd name="adj" fmla="val 50000"/>
+            </a:avLst>
           </a:prstGeom>
           <a:solidFill>
-            <a:srgbClr val="3E63DD"/>
+            <a:srgbClr val="EEF8F2"/>
           </a:solidFill>
           <a:ln w="12700">
             <a:solidFill>
-              <a:srgbClr val="3E63DD"/>
+              <a:srgbClr val="EEF8F2"/>
             </a:solidFill>
             <a:prstDash val="solid"/>
           </a:ln>
@@ -15888,13 +15812,155 @@
       </p:sp>
       <p:sp>
         <p:nvSpPr>
+          <p:cNvPr id="26" name="Text 23"/>
+          <p:cNvSpPr/>
+          <p:nvPr/>
+        </p:nvSpPr>
+        <p:spPr>
+          <a:xfrm>
+            <a:off x="10287000" y="2935224"/>
+            <a:ext cx="1143000" cy="219456"/>
+          </a:xfrm>
+          <a:prstGeom prst="rect">
+            <a:avLst/>
+          </a:prstGeom>
+          <a:noFill/>
+          <a:ln/>
+        </p:spPr>
+        <p:txBody>
+          <a:bodyPr wrap="square" lIns="0" tIns="0" rIns="0" bIns="0" rtlCol="0" anchor="t"/>
+          <a:lstStyle/>
+          <a:p>
+            <a:pPr algn="ctr" indent="0" marL="0">
+              <a:buNone/>
+            </a:pPr>
+            <a:r>
+              <a:rPr lang="en-US" sz="1100" b="1" dirty="0">
+                <a:solidFill>
+                  <a:srgbClr val="2F855A"/>
+                </a:solidFill>
+                <a:latin typeface="Calibri" pitchFamily="34" charset="0"/>
+                <a:ea typeface="Calibri" pitchFamily="34" charset="-122"/>
+                <a:cs typeface="Calibri" pitchFamily="34" charset="-120"/>
+              </a:rPr>
+              <a:t>Construido</a:t>
+            </a:r>
+            <a:endParaRPr lang="en-US" sz="1100" dirty="0"/>
+          </a:p>
+        </p:txBody>
+      </p:sp>
+      <p:sp>
+        <p:nvSpPr>
+          <p:cNvPr id="27" name="Text 24"/>
+          <p:cNvSpPr/>
+          <p:nvPr/>
+        </p:nvSpPr>
+        <p:spPr>
+          <a:xfrm>
+            <a:off x="7086600" y="3209544"/>
+            <a:ext cx="4389120" cy="274320"/>
+          </a:xfrm>
+          <a:prstGeom prst="rect">
+            <a:avLst/>
+          </a:prstGeom>
+          <a:noFill/>
+          <a:ln/>
+        </p:spPr>
+        <p:txBody>
+          <a:bodyPr wrap="square" lIns="0" tIns="0" rIns="0" bIns="0" rtlCol="0" anchor="t"/>
+          <a:lstStyle/>
+          <a:p>
+            <a:pPr indent="0" marL="0">
+              <a:buNone/>
+            </a:pPr>
+            <a:r>
+              <a:rPr lang="en-US" sz="1150" dirty="0">
+                <a:solidFill>
+                  <a:srgbClr val="8A8984"/>
+                </a:solidFill>
+                <a:latin typeface="Calibri" pitchFamily="34" charset="0"/>
+                <a:ea typeface="Calibri" pitchFamily="34" charset="-122"/>
+                <a:cs typeface="Calibri" pitchFamily="34" charset="-120"/>
+              </a:rPr>
+              <a:t>HU01–HU03 · subir video y detectar personas</a:t>
+            </a:r>
+            <a:endParaRPr lang="en-US" sz="1150" dirty="0"/>
+          </a:p>
+        </p:txBody>
+      </p:sp>
+      <p:sp>
+        <p:nvSpPr>
           <p:cNvPr id="28" name="Text 25"/>
           <p:cNvSpPr/>
           <p:nvPr/>
         </p:nvSpPr>
         <p:spPr>
           <a:xfrm>
-            <a:off x="10250424" y="3593592"/>
+            <a:off x="5943600" y="3593592"/>
+            <a:ext cx="1097280" cy="320040"/>
+          </a:xfrm>
+          <a:prstGeom prst="rect">
+            <a:avLst/>
+          </a:prstGeom>
+          <a:noFill/>
+          <a:ln/>
+        </p:spPr>
+        <p:txBody>
+          <a:bodyPr wrap="square" lIns="0" tIns="0" rIns="0" bIns="0" rtlCol="0" anchor="t"/>
+          <a:lstStyle/>
+          <a:p>
+            <a:pPr indent="0" marL="0">
+              <a:buNone/>
+            </a:pPr>
+            <a:r>
+              <a:rPr lang="en-US" sz="1400" b="1" dirty="0">
+                <a:solidFill>
+                  <a:srgbClr val="1A1A1A"/>
+                </a:solidFill>
+                <a:latin typeface="Calibri" pitchFamily="34" charset="0"/>
+                <a:ea typeface="Calibri" pitchFamily="34" charset="-122"/>
+                <a:cs typeface="Calibri" pitchFamily="34" charset="-120"/>
+              </a:rPr>
+              <a:t>Sprint 2</a:t>
+            </a:r>
+            <a:endParaRPr lang="en-US" sz="1400" dirty="0"/>
+          </a:p>
+        </p:txBody>
+      </p:sp>
+      <p:sp>
+        <p:nvSpPr>
+          <p:cNvPr id="29" name="Shape 26"/>
+          <p:cNvSpPr/>
+          <p:nvPr/>
+        </p:nvSpPr>
+        <p:spPr>
+          <a:xfrm>
+            <a:off x="7086600" y="3639312"/>
+            <a:ext cx="2633472" cy="237744"/>
+          </a:xfrm>
+          <a:prstGeom prst="rect">
+            <a:avLst/>
+          </a:prstGeom>
+          <a:solidFill>
+            <a:srgbClr val="2F855A"/>
+          </a:solidFill>
+          <a:ln w="12700">
+            <a:solidFill>
+              <a:srgbClr val="2F855A"/>
+            </a:solidFill>
+            <a:prstDash val="solid"/>
+          </a:ln>
+        </p:spPr>
+      </p:sp>
+      <p:sp>
+        <p:nvSpPr>
+          <p:cNvPr id="30" name="Text 27"/>
+          <p:cNvSpPr/>
+          <p:nvPr/>
+        </p:nvSpPr>
+        <p:spPr>
+          <a:xfrm>
+            <a:off x="9811512" y="3593592"/>
             <a:ext cx="457200" cy="320040"/>
           </a:xfrm>
           <a:prstGeom prst="rect">
@@ -15927,7 +15993,73 @@
       </p:sp>
       <p:sp>
         <p:nvSpPr>
-          <p:cNvPr id="29" name="Text 26"/>
+          <p:cNvPr id="31" name="Shape 28"/>
+          <p:cNvSpPr/>
+          <p:nvPr/>
+        </p:nvSpPr>
+        <p:spPr>
+          <a:xfrm>
+            <a:off x="10287000" y="3602736"/>
+            <a:ext cx="1143000" cy="292608"/>
+          </a:xfrm>
+          <a:prstGeom prst="roundRect">
+            <a:avLst>
+              <a:gd name="adj" fmla="val 50000"/>
+            </a:avLst>
+          </a:prstGeom>
+          <a:solidFill>
+            <a:srgbClr val="EEF8F2"/>
+          </a:solidFill>
+          <a:ln w="12700">
+            <a:solidFill>
+              <a:srgbClr val="EEF8F2"/>
+            </a:solidFill>
+            <a:prstDash val="solid"/>
+          </a:ln>
+        </p:spPr>
+      </p:sp>
+      <p:sp>
+        <p:nvSpPr>
+          <p:cNvPr id="32" name="Text 29"/>
+          <p:cNvSpPr/>
+          <p:nvPr/>
+        </p:nvSpPr>
+        <p:spPr>
+          <a:xfrm>
+            <a:off x="10287000" y="3648456"/>
+            <a:ext cx="1143000" cy="219456"/>
+          </a:xfrm>
+          <a:prstGeom prst="rect">
+            <a:avLst/>
+          </a:prstGeom>
+          <a:noFill/>
+          <a:ln/>
+        </p:spPr>
+        <p:txBody>
+          <a:bodyPr wrap="square" lIns="0" tIns="0" rIns="0" bIns="0" rtlCol="0" anchor="t"/>
+          <a:lstStyle/>
+          <a:p>
+            <a:pPr algn="ctr" indent="0" marL="0">
+              <a:buNone/>
+            </a:pPr>
+            <a:r>
+              <a:rPr lang="en-US" sz="1100" b="1" dirty="0">
+                <a:solidFill>
+                  <a:srgbClr val="2F855A"/>
+                </a:solidFill>
+                <a:latin typeface="Calibri" pitchFamily="34" charset="0"/>
+                <a:ea typeface="Calibri" pitchFamily="34" charset="-122"/>
+                <a:cs typeface="Calibri" pitchFamily="34" charset="-120"/>
+              </a:rPr>
+              <a:t>Construido</a:t>
+            </a:r>
+            <a:endParaRPr lang="en-US" sz="1100" dirty="0"/>
+          </a:p>
+        </p:txBody>
+      </p:sp>
+      <p:sp>
+        <p:nvSpPr>
+          <p:cNvPr id="33" name="Text 30"/>
           <p:cNvSpPr/>
           <p:nvPr/>
         </p:nvSpPr>
@@ -15966,7 +16098,7 @@
       </p:sp>
       <p:sp>
         <p:nvSpPr>
-          <p:cNvPr id="30" name="Text 27"/>
+          <p:cNvPr id="34" name="Text 31"/>
           <p:cNvSpPr/>
           <p:nvPr/>
         </p:nvSpPr>
@@ -16005,14 +16137,14 @@
       </p:sp>
       <p:sp>
         <p:nvSpPr>
-          <p:cNvPr id="31" name="Shape 28"/>
+          <p:cNvPr id="35" name="Shape 32"/>
           <p:cNvSpPr/>
           <p:nvPr/>
         </p:nvSpPr>
         <p:spPr>
           <a:xfrm>
             <a:off x="7086600" y="4352544"/>
-            <a:ext cx="3072384" cy="237744"/>
+            <a:ext cx="2633472" cy="237744"/>
           </a:xfrm>
           <a:prstGeom prst="rect">
             <a:avLst/>
@@ -16030,13 +16162,13 @@
       </p:sp>
       <p:sp>
         <p:nvSpPr>
-          <p:cNvPr id="32" name="Text 29"/>
-          <p:cNvSpPr/>
-          <p:nvPr/>
-        </p:nvSpPr>
-        <p:spPr>
-          <a:xfrm>
-            <a:off x="10250424" y="4306824"/>
+          <p:cNvPr id="36" name="Text 33"/>
+          <p:cNvSpPr/>
+          <p:nvPr/>
+        </p:nvSpPr>
+        <p:spPr>
+          <a:xfrm>
+            <a:off x="9811512" y="4306824"/>
             <a:ext cx="457200" cy="320040"/>
           </a:xfrm>
           <a:prstGeom prst="rect">
@@ -16069,7 +16201,7 @@
       </p:sp>
       <p:sp>
         <p:nvSpPr>
-          <p:cNvPr id="33" name="Text 30"/>
+          <p:cNvPr id="37" name="Text 34"/>
           <p:cNvSpPr/>
           <p:nvPr/>
         </p:nvSpPr>
@@ -16108,7 +16240,7 @@
       </p:sp>
       <p:sp>
         <p:nvSpPr>
-          <p:cNvPr id="34" name="Text 31"/>
+          <p:cNvPr id="38" name="Text 35"/>
           <p:cNvSpPr/>
           <p:nvPr/>
         </p:nvSpPr>
@@ -16147,14 +16279,14 @@
       </p:sp>
       <p:sp>
         <p:nvSpPr>
-          <p:cNvPr id="35" name="Shape 32"/>
+          <p:cNvPr id="39" name="Shape 36"/>
           <p:cNvSpPr/>
           <p:nvPr/>
         </p:nvSpPr>
         <p:spPr>
           <a:xfrm>
             <a:off x="7086600" y="5065776"/>
-            <a:ext cx="3072384" cy="237744"/>
+            <a:ext cx="2633472" cy="237744"/>
           </a:xfrm>
           <a:prstGeom prst="rect">
             <a:avLst/>
@@ -16172,13 +16304,13 @@
       </p:sp>
       <p:sp>
         <p:nvSpPr>
-          <p:cNvPr id="36" name="Text 33"/>
-          <p:cNvSpPr/>
-          <p:nvPr/>
-        </p:nvSpPr>
-        <p:spPr>
-          <a:xfrm>
-            <a:off x="10250424" y="5020056"/>
+          <p:cNvPr id="40" name="Text 37"/>
+          <p:cNvSpPr/>
+          <p:nvPr/>
+        </p:nvSpPr>
+        <p:spPr>
+          <a:xfrm>
+            <a:off x="9811512" y="5020056"/>
             <a:ext cx="457200" cy="320040"/>
           </a:xfrm>
           <a:prstGeom prst="rect">
@@ -16211,7 +16343,7 @@
       </p:sp>
       <p:sp>
         <p:nvSpPr>
-          <p:cNvPr id="37" name="Text 34"/>
+          <p:cNvPr id="41" name="Text 38"/>
           <p:cNvSpPr/>
           <p:nvPr/>
         </p:nvSpPr>
@@ -16250,7 +16382,7 @@
       </p:sp>
       <p:sp>
         <p:nvSpPr>
-          <p:cNvPr id="38" name="Text 35"/>
+          <p:cNvPr id="42" name="Text 39"/>
           <p:cNvSpPr/>
           <p:nvPr/>
         </p:nvSpPr>
@@ -16281,7 +16413,7 @@
                 <a:ea typeface="Calibri" pitchFamily="34" charset="-122"/>
                 <a:cs typeface="Calibri" pitchFamily="34" charset="-120"/>
               </a:rPr>
-              <a:t>Fuente del método: SCRUMstudy (2022), pp. 76–78 y 166–172.</a:t>
+              <a:t>Fuente del método: SCRUMstudy (2022), pp. 76–78 y 166–172. Estado al 20/10/2026; la aceptación del PO es en la revisión del sprint.</a:t>
             </a:r>
             <a:endParaRPr lang="en-US" sz="1000" dirty="0"/>
           </a:p>
@@ -16929,7 +17061,7 @@
                 <a:ea typeface="Calibri" pitchFamily="34" charset="-122"/>
                 <a:cs typeface="Calibri" pitchFamily="34" charset="-120"/>
               </a:rPr>
-              <a:t>Scrumboard del Sprint 1: por hacer, en progreso, en prueba y terminada.</a:t>
+              <a:t>Scrumboard del Sprint 1 como se planificó en la semana 5. Su estado de hoy: lámina 28.</a:t>
             </a:r>
             <a:endParaRPr lang="en-US" sz="1200" dirty="0"/>
           </a:p>
@@ -21247,7 +21379,7 @@
                 <a:ea typeface="Calibri Light" pitchFamily="34" charset="-122"/>
                 <a:cs typeface="Calibri Light" pitchFamily="34" charset="-120"/>
               </a:rPr>
-              <a:t>El tablero, hoy</a:t>
+              <a:t>El Scrumboard, hoy</a:t>
             </a:r>
             <a:endParaRPr lang="en-US" sz="3400" dirty="0"/>
           </a:p>
@@ -21379,7 +21511,7 @@
         <p:spPr>
           <a:xfrm>
             <a:off x="731520" y="1783080"/>
-            <a:ext cx="1828800" cy="274320"/>
+            <a:ext cx="2011680" cy="274320"/>
           </a:xfrm>
           <a:prstGeom prst="rect">
             <a:avLst/>
@@ -21397,13 +21529,922 @@
             <a:r>
               <a:rPr lang="en-US" sz="1100" b="1" spc="100" kern="0" dirty="0">
                 <a:solidFill>
+                  <a:srgbClr val="8A8984"/>
+                </a:solidFill>
+                <a:latin typeface="Calibri" pitchFamily="34" charset="0"/>
+                <a:ea typeface="Calibri" pitchFamily="34" charset="-122"/>
+                <a:cs typeface="Calibri" pitchFamily="34" charset="-120"/>
+              </a:rPr>
+              <a:t>POR HACER</a:t>
+            </a:r>
+            <a:endParaRPr lang="en-US" sz="1100" dirty="0"/>
+          </a:p>
+        </p:txBody>
+      </p:sp>
+      <p:sp>
+        <p:nvSpPr>
+          <p:cNvPr id="9" name="Text 6"/>
+          <p:cNvSpPr/>
+          <p:nvPr/>
+        </p:nvSpPr>
+        <p:spPr>
+          <a:xfrm>
+            <a:off x="2560320" y="1783080"/>
+            <a:ext cx="502920" cy="274320"/>
+          </a:xfrm>
+          <a:prstGeom prst="rect">
+            <a:avLst/>
+          </a:prstGeom>
+          <a:noFill/>
+          <a:ln/>
+        </p:spPr>
+        <p:txBody>
+          <a:bodyPr wrap="square" lIns="0" tIns="0" rIns="0" bIns="0" rtlCol="0" anchor="t"/>
+          <a:lstStyle/>
+          <a:p>
+            <a:pPr algn="r" indent="0" marL="0">
+              <a:buNone/>
+            </a:pPr>
+            <a:r>
+              <a:rPr lang="en-US" sz="1100" dirty="0">
+                <a:solidFill>
+                  <a:srgbClr val="8A8984"/>
+                </a:solidFill>
+                <a:latin typeface="Calibri" pitchFamily="34" charset="0"/>
+                <a:ea typeface="Calibri" pitchFamily="34" charset="-122"/>
+                <a:cs typeface="Calibri" pitchFamily="34" charset="-120"/>
+              </a:rPr>
+              <a:t>16 pts</a:t>
+            </a:r>
+            <a:endParaRPr lang="en-US" sz="1100" dirty="0"/>
+          </a:p>
+        </p:txBody>
+      </p:sp>
+      <p:sp>
+        <p:nvSpPr>
+          <p:cNvPr id="10" name="Shape 7"/>
+          <p:cNvSpPr/>
+          <p:nvPr/>
+        </p:nvSpPr>
+        <p:spPr>
+          <a:xfrm>
+            <a:off x="731520" y="2148840"/>
+            <a:ext cx="2331720" cy="475488"/>
+          </a:xfrm>
+          <a:prstGeom prst="roundRect">
+            <a:avLst>
+              <a:gd name="adj" fmla="val 15385"/>
+            </a:avLst>
+          </a:prstGeom>
+          <a:solidFill>
+            <a:srgbClr val="FFFFFF"/>
+          </a:solidFill>
+          <a:ln w="9525">
+            <a:solidFill>
+              <a:srgbClr val="E7E5E4"/>
+            </a:solidFill>
+            <a:prstDash val="solid"/>
+          </a:ln>
+        </p:spPr>
+      </p:sp>
+      <p:sp>
+        <p:nvSpPr>
+          <p:cNvPr id="11" name="Text 8"/>
+          <p:cNvSpPr/>
+          <p:nvPr/>
+        </p:nvSpPr>
+        <p:spPr>
+          <a:xfrm>
+            <a:off x="868680" y="2276856"/>
+            <a:ext cx="1920240" cy="274320"/>
+          </a:xfrm>
+          <a:prstGeom prst="rect">
+            <a:avLst/>
+          </a:prstGeom>
+          <a:noFill/>
+          <a:ln/>
+        </p:spPr>
+        <p:txBody>
+          <a:bodyPr wrap="square" lIns="0" tIns="0" rIns="0" bIns="0" rtlCol="0" anchor="t"/>
+          <a:lstStyle/>
+          <a:p>
+            <a:pPr indent="0" marL="0">
+              <a:buNone/>
+            </a:pPr>
+            <a:r>
+              <a:rPr lang="en-US" sz="1200" b="1" dirty="0">
+                <a:solidFill>
+                  <a:srgbClr val="1A1A1A"/>
+                </a:solidFill>
+                <a:latin typeface="Calibri" pitchFamily="34" charset="0"/>
+                <a:ea typeface="Calibri" pitchFamily="34" charset="-122"/>
+                <a:cs typeface="Calibri" pitchFamily="34" charset="-120"/>
+              </a:rPr>
+              <a:t>HU07  </a:t>
+            </a:r>
+            <a:pPr indent="0" marL="0">
+              <a:buNone/>
+            </a:pPr>
+            <a:r>
+              <a:rPr lang="en-US" sz="1200" dirty="0">
+                <a:solidFill>
+                  <a:srgbClr val="1A1A1A"/>
+                </a:solidFill>
+                <a:latin typeface="Calibri" pitchFamily="34" charset="0"/>
+                <a:ea typeface="Calibri" pitchFamily="34" charset="-122"/>
+                <a:cs typeface="Calibri" pitchFamily="34" charset="-120"/>
+              </a:rPr>
+              <a:t>Procesar con ConvLSTM</a:t>
+            </a:r>
+            <a:endParaRPr lang="en-US" sz="1200" dirty="0"/>
+          </a:p>
+        </p:txBody>
+      </p:sp>
+      <p:sp>
+        <p:nvSpPr>
+          <p:cNvPr id="12" name="Text 9"/>
+          <p:cNvSpPr/>
+          <p:nvPr/>
+        </p:nvSpPr>
+        <p:spPr>
+          <a:xfrm>
+            <a:off x="2697480" y="2276856"/>
+            <a:ext cx="256032" cy="274320"/>
+          </a:xfrm>
+          <a:prstGeom prst="rect">
+            <a:avLst/>
+          </a:prstGeom>
+          <a:noFill/>
+          <a:ln/>
+        </p:spPr>
+        <p:txBody>
+          <a:bodyPr wrap="square" lIns="0" tIns="0" rIns="0" bIns="0" rtlCol="0" anchor="t"/>
+          <a:lstStyle/>
+          <a:p>
+            <a:pPr algn="r" indent="0" marL="0">
+              <a:buNone/>
+            </a:pPr>
+            <a:r>
+              <a:rPr lang="en-US" sz="1200" dirty="0">
+                <a:solidFill>
+                  <a:srgbClr val="8A8984"/>
+                </a:solidFill>
+                <a:latin typeface="Calibri" pitchFamily="34" charset="0"/>
+                <a:ea typeface="Calibri" pitchFamily="34" charset="-122"/>
+                <a:cs typeface="Calibri" pitchFamily="34" charset="-120"/>
+              </a:rPr>
+              <a:t>5</a:t>
+            </a:r>
+            <a:endParaRPr lang="en-US" sz="1200" dirty="0"/>
+          </a:p>
+        </p:txBody>
+      </p:sp>
+      <p:sp>
+        <p:nvSpPr>
+          <p:cNvPr id="13" name="Shape 10"/>
+          <p:cNvSpPr/>
+          <p:nvPr/>
+        </p:nvSpPr>
+        <p:spPr>
+          <a:xfrm>
+            <a:off x="731520" y="2715768"/>
+            <a:ext cx="2331720" cy="475488"/>
+          </a:xfrm>
+          <a:prstGeom prst="roundRect">
+            <a:avLst>
+              <a:gd name="adj" fmla="val 15385"/>
+            </a:avLst>
+          </a:prstGeom>
+          <a:solidFill>
+            <a:srgbClr val="FFFFFF"/>
+          </a:solidFill>
+          <a:ln w="9525">
+            <a:solidFill>
+              <a:srgbClr val="E7E5E4"/>
+            </a:solidFill>
+            <a:prstDash val="solid"/>
+          </a:ln>
+        </p:spPr>
+      </p:sp>
+      <p:sp>
+        <p:nvSpPr>
+          <p:cNvPr id="14" name="Text 11"/>
+          <p:cNvSpPr/>
+          <p:nvPr/>
+        </p:nvSpPr>
+        <p:spPr>
+          <a:xfrm>
+            <a:off x="868680" y="2843784"/>
+            <a:ext cx="1920240" cy="274320"/>
+          </a:xfrm>
+          <a:prstGeom prst="rect">
+            <a:avLst/>
+          </a:prstGeom>
+          <a:noFill/>
+          <a:ln/>
+        </p:spPr>
+        <p:txBody>
+          <a:bodyPr wrap="square" lIns="0" tIns="0" rIns="0" bIns="0" rtlCol="0" anchor="t"/>
+          <a:lstStyle/>
+          <a:p>
+            <a:pPr indent="0" marL="0">
+              <a:buNone/>
+            </a:pPr>
+            <a:r>
+              <a:rPr lang="en-US" sz="1200" b="1" dirty="0">
+                <a:solidFill>
+                  <a:srgbClr val="1A1A1A"/>
+                </a:solidFill>
+                <a:latin typeface="Calibri" pitchFamily="34" charset="0"/>
+                <a:ea typeface="Calibri" pitchFamily="34" charset="-122"/>
+                <a:cs typeface="Calibri" pitchFamily="34" charset="-120"/>
+              </a:rPr>
+              <a:t>HU08  </a:t>
+            </a:r>
+            <a:pPr indent="0" marL="0">
+              <a:buNone/>
+            </a:pPr>
+            <a:r>
+              <a:rPr lang="en-US" sz="1200" dirty="0">
+                <a:solidFill>
+                  <a:srgbClr val="1A1A1A"/>
+                </a:solidFill>
+                <a:latin typeface="Calibri" pitchFamily="34" charset="0"/>
+                <a:ea typeface="Calibri" pitchFamily="34" charset="-122"/>
+                <a:cs typeface="Calibri" pitchFamily="34" charset="-120"/>
+              </a:rPr>
+              <a:t>Clasificar la conducta</a:t>
+            </a:r>
+            <a:endParaRPr lang="en-US" sz="1200" dirty="0"/>
+          </a:p>
+        </p:txBody>
+      </p:sp>
+      <p:sp>
+        <p:nvSpPr>
+          <p:cNvPr id="15" name="Text 12"/>
+          <p:cNvSpPr/>
+          <p:nvPr/>
+        </p:nvSpPr>
+        <p:spPr>
+          <a:xfrm>
+            <a:off x="2697480" y="2843784"/>
+            <a:ext cx="256032" cy="274320"/>
+          </a:xfrm>
+          <a:prstGeom prst="rect">
+            <a:avLst/>
+          </a:prstGeom>
+          <a:noFill/>
+          <a:ln/>
+        </p:spPr>
+        <p:txBody>
+          <a:bodyPr wrap="square" lIns="0" tIns="0" rIns="0" bIns="0" rtlCol="0" anchor="t"/>
+          <a:lstStyle/>
+          <a:p>
+            <a:pPr algn="r" indent="0" marL="0">
+              <a:buNone/>
+            </a:pPr>
+            <a:r>
+              <a:rPr lang="en-US" sz="1200" dirty="0">
+                <a:solidFill>
+                  <a:srgbClr val="8A8984"/>
+                </a:solidFill>
+                <a:latin typeface="Calibri" pitchFamily="34" charset="0"/>
+                <a:ea typeface="Calibri" pitchFamily="34" charset="-122"/>
+                <a:cs typeface="Calibri" pitchFamily="34" charset="-120"/>
+              </a:rPr>
+              <a:t>3</a:t>
+            </a:r>
+            <a:endParaRPr lang="en-US" sz="1200" dirty="0"/>
+          </a:p>
+        </p:txBody>
+      </p:sp>
+      <p:sp>
+        <p:nvSpPr>
+          <p:cNvPr id="16" name="Shape 13"/>
+          <p:cNvSpPr/>
+          <p:nvPr/>
+        </p:nvSpPr>
+        <p:spPr>
+          <a:xfrm>
+            <a:off x="731520" y="3282696"/>
+            <a:ext cx="2331720" cy="475488"/>
+          </a:xfrm>
+          <a:prstGeom prst="roundRect">
+            <a:avLst>
+              <a:gd name="adj" fmla="val 15385"/>
+            </a:avLst>
+          </a:prstGeom>
+          <a:solidFill>
+            <a:srgbClr val="FFFFFF"/>
+          </a:solidFill>
+          <a:ln w="9525">
+            <a:solidFill>
+              <a:srgbClr val="E7E5E4"/>
+            </a:solidFill>
+            <a:prstDash val="solid"/>
+          </a:ln>
+        </p:spPr>
+      </p:sp>
+      <p:sp>
+        <p:nvSpPr>
+          <p:cNvPr id="17" name="Text 14"/>
+          <p:cNvSpPr/>
+          <p:nvPr/>
+        </p:nvSpPr>
+        <p:spPr>
+          <a:xfrm>
+            <a:off x="868680" y="3410712"/>
+            <a:ext cx="1920240" cy="274320"/>
+          </a:xfrm>
+          <a:prstGeom prst="rect">
+            <a:avLst/>
+          </a:prstGeom>
+          <a:noFill/>
+          <a:ln/>
+        </p:spPr>
+        <p:txBody>
+          <a:bodyPr wrap="square" lIns="0" tIns="0" rIns="0" bIns="0" rtlCol="0" anchor="t"/>
+          <a:lstStyle/>
+          <a:p>
+            <a:pPr indent="0" marL="0">
+              <a:buNone/>
+            </a:pPr>
+            <a:r>
+              <a:rPr lang="en-US" sz="1200" b="1" dirty="0">
+                <a:solidFill>
+                  <a:srgbClr val="1A1A1A"/>
+                </a:solidFill>
+                <a:latin typeface="Calibri" pitchFamily="34" charset="0"/>
+                <a:ea typeface="Calibri" pitchFamily="34" charset="-122"/>
+                <a:cs typeface="Calibri" pitchFamily="34" charset="-120"/>
+              </a:rPr>
+              <a:t>HU09  </a:t>
+            </a:r>
+            <a:pPr indent="0" marL="0">
+              <a:buNone/>
+            </a:pPr>
+            <a:r>
+              <a:rPr lang="en-US" sz="1200" dirty="0">
+                <a:solidFill>
+                  <a:srgbClr val="1A1A1A"/>
+                </a:solidFill>
+                <a:latin typeface="Calibri" pitchFamily="34" charset="0"/>
+                <a:ea typeface="Calibri" pitchFamily="34" charset="-122"/>
+                <a:cs typeface="Calibri" pitchFamily="34" charset="-120"/>
+              </a:rPr>
+              <a:t>Recuadro de riesgo</a:t>
+            </a:r>
+            <a:endParaRPr lang="en-US" sz="1200" dirty="0"/>
+          </a:p>
+        </p:txBody>
+      </p:sp>
+      <p:sp>
+        <p:nvSpPr>
+          <p:cNvPr id="18" name="Text 15"/>
+          <p:cNvSpPr/>
+          <p:nvPr/>
+        </p:nvSpPr>
+        <p:spPr>
+          <a:xfrm>
+            <a:off x="2697480" y="3410712"/>
+            <a:ext cx="256032" cy="274320"/>
+          </a:xfrm>
+          <a:prstGeom prst="rect">
+            <a:avLst/>
+          </a:prstGeom>
+          <a:noFill/>
+          <a:ln/>
+        </p:spPr>
+        <p:txBody>
+          <a:bodyPr wrap="square" lIns="0" tIns="0" rIns="0" bIns="0" rtlCol="0" anchor="t"/>
+          <a:lstStyle/>
+          <a:p>
+            <a:pPr algn="r" indent="0" marL="0">
+              <a:buNone/>
+            </a:pPr>
+            <a:r>
+              <a:rPr lang="en-US" sz="1200" dirty="0">
+                <a:solidFill>
+                  <a:srgbClr val="8A8984"/>
+                </a:solidFill>
+                <a:latin typeface="Calibri" pitchFamily="34" charset="0"/>
+                <a:ea typeface="Calibri" pitchFamily="34" charset="-122"/>
+                <a:cs typeface="Calibri" pitchFamily="34" charset="-120"/>
+              </a:rPr>
+              <a:t>4</a:t>
+            </a:r>
+            <a:endParaRPr lang="en-US" sz="1200" dirty="0"/>
+          </a:p>
+        </p:txBody>
+      </p:sp>
+      <p:sp>
+        <p:nvSpPr>
+          <p:cNvPr id="19" name="Shape 16"/>
+          <p:cNvSpPr/>
+          <p:nvPr/>
+        </p:nvSpPr>
+        <p:spPr>
+          <a:xfrm>
+            <a:off x="731520" y="3849624"/>
+            <a:ext cx="2331720" cy="475488"/>
+          </a:xfrm>
+          <a:prstGeom prst="roundRect">
+            <a:avLst>
+              <a:gd name="adj" fmla="val 15385"/>
+            </a:avLst>
+          </a:prstGeom>
+          <a:solidFill>
+            <a:srgbClr val="FFFFFF"/>
+          </a:solidFill>
+          <a:ln w="9525">
+            <a:solidFill>
+              <a:srgbClr val="E7E5E4"/>
+            </a:solidFill>
+            <a:prstDash val="solid"/>
+          </a:ln>
+        </p:spPr>
+      </p:sp>
+      <p:sp>
+        <p:nvSpPr>
+          <p:cNvPr id="20" name="Text 17"/>
+          <p:cNvSpPr/>
+          <p:nvPr/>
+        </p:nvSpPr>
+        <p:spPr>
+          <a:xfrm>
+            <a:off x="868680" y="3977640"/>
+            <a:ext cx="1920240" cy="274320"/>
+          </a:xfrm>
+          <a:prstGeom prst="rect">
+            <a:avLst/>
+          </a:prstGeom>
+          <a:noFill/>
+          <a:ln/>
+        </p:spPr>
+        <p:txBody>
+          <a:bodyPr wrap="square" lIns="0" tIns="0" rIns="0" bIns="0" rtlCol="0" anchor="t"/>
+          <a:lstStyle/>
+          <a:p>
+            <a:pPr indent="0" marL="0">
+              <a:buNone/>
+            </a:pPr>
+            <a:r>
+              <a:rPr lang="en-US" sz="1200" b="1" dirty="0">
+                <a:solidFill>
+                  <a:srgbClr val="1A1A1A"/>
+                </a:solidFill>
+                <a:latin typeface="Calibri" pitchFamily="34" charset="0"/>
+                <a:ea typeface="Calibri" pitchFamily="34" charset="-122"/>
+                <a:cs typeface="Calibri" pitchFamily="34" charset="-120"/>
+              </a:rPr>
+              <a:t>HU10  </a:t>
+            </a:r>
+            <a:pPr indent="0" marL="0">
+              <a:buNone/>
+            </a:pPr>
+            <a:r>
+              <a:rPr lang="en-US" sz="1200" dirty="0">
+                <a:solidFill>
+                  <a:srgbClr val="1A1A1A"/>
+                </a:solidFill>
+                <a:latin typeface="Calibri" pitchFamily="34" charset="0"/>
+                <a:ea typeface="Calibri" pitchFamily="34" charset="-122"/>
+                <a:cs typeface="Calibri" pitchFamily="34" charset="-120"/>
+              </a:rPr>
+              <a:t>Alerta de riesgo</a:t>
+            </a:r>
+            <a:endParaRPr lang="en-US" sz="1200" dirty="0"/>
+          </a:p>
+        </p:txBody>
+      </p:sp>
+      <p:sp>
+        <p:nvSpPr>
+          <p:cNvPr id="21" name="Text 18"/>
+          <p:cNvSpPr/>
+          <p:nvPr/>
+        </p:nvSpPr>
+        <p:spPr>
+          <a:xfrm>
+            <a:off x="2697480" y="3977640"/>
+            <a:ext cx="256032" cy="274320"/>
+          </a:xfrm>
+          <a:prstGeom prst="rect">
+            <a:avLst/>
+          </a:prstGeom>
+          <a:noFill/>
+          <a:ln/>
+        </p:spPr>
+        <p:txBody>
+          <a:bodyPr wrap="square" lIns="0" tIns="0" rIns="0" bIns="0" rtlCol="0" anchor="t"/>
+          <a:lstStyle/>
+          <a:p>
+            <a:pPr algn="r" indent="0" marL="0">
+              <a:buNone/>
+            </a:pPr>
+            <a:r>
+              <a:rPr lang="en-US" sz="1200" dirty="0">
+                <a:solidFill>
+                  <a:srgbClr val="8A8984"/>
+                </a:solidFill>
+                <a:latin typeface="Calibri" pitchFamily="34" charset="0"/>
+                <a:ea typeface="Calibri" pitchFamily="34" charset="-122"/>
+                <a:cs typeface="Calibri" pitchFamily="34" charset="-120"/>
+              </a:rPr>
+              <a:t>2</a:t>
+            </a:r>
+            <a:endParaRPr lang="en-US" sz="1200" dirty="0"/>
+          </a:p>
+        </p:txBody>
+      </p:sp>
+      <p:sp>
+        <p:nvSpPr>
+          <p:cNvPr id="22" name="Shape 19"/>
+          <p:cNvSpPr/>
+          <p:nvPr/>
+        </p:nvSpPr>
+        <p:spPr>
+          <a:xfrm>
+            <a:off x="731520" y="4416552"/>
+            <a:ext cx="2331720" cy="475488"/>
+          </a:xfrm>
+          <a:prstGeom prst="roundRect">
+            <a:avLst>
+              <a:gd name="adj" fmla="val 15385"/>
+            </a:avLst>
+          </a:prstGeom>
+          <a:solidFill>
+            <a:srgbClr val="FFFFFF"/>
+          </a:solidFill>
+          <a:ln w="9525">
+            <a:solidFill>
+              <a:srgbClr val="E7E5E4"/>
+            </a:solidFill>
+            <a:prstDash val="solid"/>
+          </a:ln>
+        </p:spPr>
+      </p:sp>
+      <p:sp>
+        <p:nvSpPr>
+          <p:cNvPr id="23" name="Text 20"/>
+          <p:cNvSpPr/>
+          <p:nvPr/>
+        </p:nvSpPr>
+        <p:spPr>
+          <a:xfrm>
+            <a:off x="868680" y="4544568"/>
+            <a:ext cx="1920240" cy="274320"/>
+          </a:xfrm>
+          <a:prstGeom prst="rect">
+            <a:avLst/>
+          </a:prstGeom>
+          <a:noFill/>
+          <a:ln/>
+        </p:spPr>
+        <p:txBody>
+          <a:bodyPr wrap="square" lIns="0" tIns="0" rIns="0" bIns="0" rtlCol="0" anchor="t"/>
+          <a:lstStyle/>
+          <a:p>
+            <a:pPr indent="0" marL="0">
+              <a:buNone/>
+            </a:pPr>
+            <a:r>
+              <a:rPr lang="en-US" sz="1200" b="1" dirty="0">
+                <a:solidFill>
+                  <a:srgbClr val="1A1A1A"/>
+                </a:solidFill>
+                <a:latin typeface="Calibri" pitchFamily="34" charset="0"/>
+                <a:ea typeface="Calibri" pitchFamily="34" charset="-122"/>
+                <a:cs typeface="Calibri" pitchFamily="34" charset="-120"/>
+              </a:rPr>
+              <a:t>HU12  </a:t>
+            </a:r>
+            <a:pPr indent="0" marL="0">
+              <a:buNone/>
+            </a:pPr>
+            <a:r>
+              <a:rPr lang="en-US" sz="1200" dirty="0">
+                <a:solidFill>
+                  <a:srgbClr val="1A1A1A"/>
+                </a:solidFill>
+                <a:latin typeface="Calibri" pitchFamily="34" charset="0"/>
+                <a:ea typeface="Calibri" pitchFamily="34" charset="-122"/>
+                <a:cs typeface="Calibri" pitchFamily="34" charset="-120"/>
+              </a:rPr>
+              <a:t>Log de tiempos</a:t>
+            </a:r>
+            <a:endParaRPr lang="en-US" sz="1200" dirty="0"/>
+          </a:p>
+        </p:txBody>
+      </p:sp>
+      <p:sp>
+        <p:nvSpPr>
+          <p:cNvPr id="24" name="Text 21"/>
+          <p:cNvSpPr/>
+          <p:nvPr/>
+        </p:nvSpPr>
+        <p:spPr>
+          <a:xfrm>
+            <a:off x="2697480" y="4544568"/>
+            <a:ext cx="256032" cy="274320"/>
+          </a:xfrm>
+          <a:prstGeom prst="rect">
+            <a:avLst/>
+          </a:prstGeom>
+          <a:noFill/>
+          <a:ln/>
+        </p:spPr>
+        <p:txBody>
+          <a:bodyPr wrap="square" lIns="0" tIns="0" rIns="0" bIns="0" rtlCol="0" anchor="t"/>
+          <a:lstStyle/>
+          <a:p>
+            <a:pPr algn="r" indent="0" marL="0">
+              <a:buNone/>
+            </a:pPr>
+            <a:r>
+              <a:rPr lang="en-US" sz="1200" dirty="0">
+                <a:solidFill>
+                  <a:srgbClr val="8A8984"/>
+                </a:solidFill>
+                <a:latin typeface="Calibri" pitchFamily="34" charset="0"/>
+                <a:ea typeface="Calibri" pitchFamily="34" charset="-122"/>
+                <a:cs typeface="Calibri" pitchFamily="34" charset="-120"/>
+              </a:rPr>
+              <a:t>2</a:t>
+            </a:r>
+            <a:endParaRPr lang="en-US" sz="1200" dirty="0"/>
+          </a:p>
+        </p:txBody>
+      </p:sp>
+      <p:sp>
+        <p:nvSpPr>
+          <p:cNvPr id="25" name="Text 22"/>
+          <p:cNvSpPr/>
+          <p:nvPr/>
+        </p:nvSpPr>
+        <p:spPr>
+          <a:xfrm>
+            <a:off x="3200400" y="1783080"/>
+            <a:ext cx="2011680" cy="274320"/>
+          </a:xfrm>
+          <a:prstGeom prst="rect">
+            <a:avLst/>
+          </a:prstGeom>
+          <a:noFill/>
+          <a:ln/>
+        </p:spPr>
+        <p:txBody>
+          <a:bodyPr wrap="square" lIns="0" tIns="0" rIns="0" bIns="0" rtlCol="0" anchor="t"/>
+          <a:lstStyle/>
+          <a:p>
+            <a:pPr indent="0" marL="0">
+              <a:buNone/>
+            </a:pPr>
+            <a:r>
+              <a:rPr lang="en-US" sz="1100" b="1" spc="100" kern="0" dirty="0">
+                <a:solidFill>
+                  <a:srgbClr val="C2410C"/>
+                </a:solidFill>
+                <a:latin typeface="Calibri" pitchFamily="34" charset="0"/>
+                <a:ea typeface="Calibri" pitchFamily="34" charset="-122"/>
+                <a:cs typeface="Calibri" pitchFamily="34" charset="-120"/>
+              </a:rPr>
+              <a:t>EN PROGRESO</a:t>
+            </a:r>
+            <a:endParaRPr lang="en-US" sz="1100" dirty="0"/>
+          </a:p>
+        </p:txBody>
+      </p:sp>
+      <p:sp>
+        <p:nvSpPr>
+          <p:cNvPr id="26" name="Text 23"/>
+          <p:cNvSpPr/>
+          <p:nvPr/>
+        </p:nvSpPr>
+        <p:spPr>
+          <a:xfrm>
+            <a:off x="5029200" y="1783080"/>
+            <a:ext cx="502920" cy="274320"/>
+          </a:xfrm>
+          <a:prstGeom prst="rect">
+            <a:avLst/>
+          </a:prstGeom>
+          <a:noFill/>
+          <a:ln/>
+        </p:spPr>
+        <p:txBody>
+          <a:bodyPr wrap="square" lIns="0" tIns="0" rIns="0" bIns="0" rtlCol="0" anchor="t"/>
+          <a:lstStyle/>
+          <a:p>
+            <a:pPr algn="r" indent="0" marL="0">
+              <a:buNone/>
+            </a:pPr>
+            <a:r>
+              <a:rPr lang="en-US" sz="1100" dirty="0">
+                <a:solidFill>
+                  <a:srgbClr val="8A8984"/>
+                </a:solidFill>
+                <a:latin typeface="Calibri" pitchFamily="34" charset="0"/>
+                <a:ea typeface="Calibri" pitchFamily="34" charset="-122"/>
+                <a:cs typeface="Calibri" pitchFamily="34" charset="-120"/>
+              </a:rPr>
+              <a:t>3 pts</a:t>
+            </a:r>
+            <a:endParaRPr lang="en-US" sz="1100" dirty="0"/>
+          </a:p>
+        </p:txBody>
+      </p:sp>
+      <p:sp>
+        <p:nvSpPr>
+          <p:cNvPr id="27" name="Shape 24"/>
+          <p:cNvSpPr/>
+          <p:nvPr/>
+        </p:nvSpPr>
+        <p:spPr>
+          <a:xfrm>
+            <a:off x="3200400" y="2148840"/>
+            <a:ext cx="2331720" cy="475488"/>
+          </a:xfrm>
+          <a:prstGeom prst="roundRect">
+            <a:avLst>
+              <a:gd name="adj" fmla="val 15385"/>
+            </a:avLst>
+          </a:prstGeom>
+          <a:solidFill>
+            <a:srgbClr val="FFF4ED"/>
+          </a:solidFill>
+          <a:ln w="9525">
+            <a:solidFill>
+              <a:srgbClr val="F5D0BD"/>
+            </a:solidFill>
+            <a:prstDash val="solid"/>
+          </a:ln>
+        </p:spPr>
+      </p:sp>
+      <p:sp>
+        <p:nvSpPr>
+          <p:cNvPr id="28" name="Text 25"/>
+          <p:cNvSpPr/>
+          <p:nvPr/>
+        </p:nvSpPr>
+        <p:spPr>
+          <a:xfrm>
+            <a:off x="3337560" y="2276856"/>
+            <a:ext cx="1920240" cy="274320"/>
+          </a:xfrm>
+          <a:prstGeom prst="rect">
+            <a:avLst/>
+          </a:prstGeom>
+          <a:noFill/>
+          <a:ln/>
+        </p:spPr>
+        <p:txBody>
+          <a:bodyPr wrap="square" lIns="0" tIns="0" rIns="0" bIns="0" rtlCol="0" anchor="t"/>
+          <a:lstStyle/>
+          <a:p>
+            <a:pPr indent="0" marL="0">
+              <a:buNone/>
+            </a:pPr>
+            <a:r>
+              <a:rPr lang="en-US" sz="1200" b="1" dirty="0">
+                <a:solidFill>
+                  <a:srgbClr val="1A1A1A"/>
+                </a:solidFill>
+                <a:latin typeface="Calibri" pitchFamily="34" charset="0"/>
+                <a:ea typeface="Calibri" pitchFamily="34" charset="-122"/>
+                <a:cs typeface="Calibri" pitchFamily="34" charset="-120"/>
+              </a:rPr>
+              <a:t>HU05  </a:t>
+            </a:r>
+            <a:pPr indent="0" marL="0">
+              <a:buNone/>
+            </a:pPr>
+            <a:r>
+              <a:rPr lang="en-US" sz="1200" dirty="0">
+                <a:solidFill>
+                  <a:srgbClr val="1A1A1A"/>
+                </a:solidFill>
+                <a:latin typeface="Calibri" pitchFamily="34" charset="0"/>
+                <a:ea typeface="Calibri" pitchFamily="34" charset="-122"/>
+                <a:cs typeface="Calibri" pitchFamily="34" charset="-120"/>
+              </a:rPr>
+              <a:t>Agrupar en clips</a:t>
+            </a:r>
+            <a:endParaRPr lang="en-US" sz="1200" dirty="0"/>
+          </a:p>
+        </p:txBody>
+      </p:sp>
+      <p:sp>
+        <p:nvSpPr>
+          <p:cNvPr id="29" name="Text 26"/>
+          <p:cNvSpPr/>
+          <p:nvPr/>
+        </p:nvSpPr>
+        <p:spPr>
+          <a:xfrm>
+            <a:off x="5166360" y="2276856"/>
+            <a:ext cx="256032" cy="274320"/>
+          </a:xfrm>
+          <a:prstGeom prst="rect">
+            <a:avLst/>
+          </a:prstGeom>
+          <a:noFill/>
+          <a:ln/>
+        </p:spPr>
+        <p:txBody>
+          <a:bodyPr wrap="square" lIns="0" tIns="0" rIns="0" bIns="0" rtlCol="0" anchor="t"/>
+          <a:lstStyle/>
+          <a:p>
+            <a:pPr algn="r" indent="0" marL="0">
+              <a:buNone/>
+            </a:pPr>
+            <a:r>
+              <a:rPr lang="en-US" sz="1200" dirty="0">
+                <a:solidFill>
+                  <a:srgbClr val="8A8984"/>
+                </a:solidFill>
+                <a:latin typeface="Calibri" pitchFamily="34" charset="0"/>
+                <a:ea typeface="Calibri" pitchFamily="34" charset="-122"/>
+                <a:cs typeface="Calibri" pitchFamily="34" charset="-120"/>
+              </a:rPr>
+              <a:t>3</a:t>
+            </a:r>
+            <a:endParaRPr lang="en-US" sz="1200" dirty="0"/>
+          </a:p>
+        </p:txBody>
+      </p:sp>
+      <p:sp>
+        <p:nvSpPr>
+          <p:cNvPr id="30" name="Text 27"/>
+          <p:cNvSpPr/>
+          <p:nvPr/>
+        </p:nvSpPr>
+        <p:spPr>
+          <a:xfrm>
+            <a:off x="3200400" y="2743200"/>
+            <a:ext cx="2331720" cy="1097280"/>
+          </a:xfrm>
+          <a:prstGeom prst="rect">
+            <a:avLst/>
+          </a:prstGeom>
+          <a:noFill/>
+          <a:ln/>
+        </p:spPr>
+        <p:txBody>
+          <a:bodyPr wrap="square" lIns="0" tIns="0" rIns="0" bIns="0" rtlCol="0" anchor="t"/>
+          <a:lstStyle/>
+          <a:p>
+            <a:pPr indent="0" marL="0">
+              <a:buNone/>
+            </a:pPr>
+            <a:r>
+              <a:rPr lang="en-US" sz="1200" dirty="0">
+                <a:solidFill>
+                  <a:srgbClr val="57534E"/>
+                </a:solidFill>
+                <a:latin typeface="Calibri" pitchFamily="34" charset="0"/>
+                <a:ea typeface="Calibri" pitchFamily="34" charset="-122"/>
+                <a:cs typeface="Calibri" pitchFamily="34" charset="-120"/>
+              </a:rPr>
+              <a:t>Agrupa los clips; falta darles el formato de entrada del modelo temporal. Se cierra con HU07.</a:t>
+            </a:r>
+            <a:endParaRPr lang="en-US" sz="1200" dirty="0"/>
+          </a:p>
+        </p:txBody>
+      </p:sp>
+      <p:sp>
+        <p:nvSpPr>
+          <p:cNvPr id="31" name="Text 28"/>
+          <p:cNvSpPr/>
+          <p:nvPr/>
+        </p:nvSpPr>
+        <p:spPr>
+          <a:xfrm>
+            <a:off x="5669280" y="1783080"/>
+            <a:ext cx="2011680" cy="274320"/>
+          </a:xfrm>
+          <a:prstGeom prst="rect">
+            <a:avLst/>
+          </a:prstGeom>
+          <a:noFill/>
+          <a:ln/>
+        </p:spPr>
+        <p:txBody>
+          <a:bodyPr wrap="square" lIns="0" tIns="0" rIns="0" bIns="0" rtlCol="0" anchor="t"/>
+          <a:lstStyle/>
+          <a:p>
+            <a:pPr indent="0" marL="0">
+              <a:buNone/>
+            </a:pPr>
+            <a:r>
+              <a:rPr lang="en-US" sz="1100" b="1" spc="100" kern="0" dirty="0">
+                <a:solidFill>
                   <a:srgbClr val="2F855A"/>
                 </a:solidFill>
                 <a:latin typeface="Calibri" pitchFamily="34" charset="0"/>
                 <a:ea typeface="Calibri" pitchFamily="34" charset="-122"/>
                 <a:cs typeface="Calibri" pitchFamily="34" charset="-120"/>
               </a:rPr>
-              <a:t>HECHO · POR ACEPTAR</a:t>
+              <a:t>TERMINADA · POR ACEPTAR</a:t>
             </a:r>
             <a:endParaRPr lang="en-US" sz="1100" dirty="0"/>
           </a:p>
@@ -21411,14 +22452,14 @@
       </p:sp>
       <p:sp>
         <p:nvSpPr>
-          <p:cNvPr id="9" name="Text 6"/>
-          <p:cNvSpPr/>
-          <p:nvPr/>
-        </p:nvSpPr>
-        <p:spPr>
-          <a:xfrm>
-            <a:off x="2331720" y="1783080"/>
-            <a:ext cx="731520" cy="274320"/>
+          <p:cNvPr id="32" name="Text 29"/>
+          <p:cNvSpPr/>
+          <p:nvPr/>
+        </p:nvSpPr>
+        <p:spPr>
+          <a:xfrm>
+            <a:off x="7498080" y="1783080"/>
+            <a:ext cx="502920" cy="274320"/>
           </a:xfrm>
           <a:prstGeom prst="rect">
             <a:avLst/>
@@ -21450,13 +22491,13 @@
       </p:sp>
       <p:sp>
         <p:nvSpPr>
-          <p:cNvPr id="10" name="Shape 7"/>
-          <p:cNvSpPr/>
-          <p:nvPr/>
-        </p:nvSpPr>
-        <p:spPr>
-          <a:xfrm>
-            <a:off x="731520" y="2148840"/>
+          <p:cNvPr id="33" name="Shape 30"/>
+          <p:cNvSpPr/>
+          <p:nvPr/>
+        </p:nvSpPr>
+        <p:spPr>
+          <a:xfrm>
+            <a:off x="5669280" y="2148840"/>
             <a:ext cx="2331720" cy="475488"/>
           </a:xfrm>
           <a:prstGeom prst="roundRect">
@@ -21477,13 +22518,13 @@
       </p:sp>
       <p:sp>
         <p:nvSpPr>
-          <p:cNvPr id="11" name="Text 8"/>
-          <p:cNvSpPr/>
-          <p:nvPr/>
-        </p:nvSpPr>
-        <p:spPr>
-          <a:xfrm>
-            <a:off x="868680" y="2276856"/>
+          <p:cNvPr id="34" name="Text 31"/>
+          <p:cNvSpPr/>
+          <p:nvPr/>
+        </p:nvSpPr>
+        <p:spPr>
+          <a:xfrm>
+            <a:off x="5806440" y="2276856"/>
             <a:ext cx="1920240" cy="274320"/>
           </a:xfrm>
           <a:prstGeom prst="rect">
@@ -21530,13 +22571,13 @@
       </p:sp>
       <p:sp>
         <p:nvSpPr>
-          <p:cNvPr id="12" name="Text 9"/>
-          <p:cNvSpPr/>
-          <p:nvPr/>
-        </p:nvSpPr>
-        <p:spPr>
-          <a:xfrm>
-            <a:off x="2697480" y="2276856"/>
+          <p:cNvPr id="35" name="Text 32"/>
+          <p:cNvSpPr/>
+          <p:nvPr/>
+        </p:nvSpPr>
+        <p:spPr>
+          <a:xfrm>
+            <a:off x="7635240" y="2276856"/>
             <a:ext cx="256032" cy="274320"/>
           </a:xfrm>
           <a:prstGeom prst="rect">
@@ -21569,13 +22610,13 @@
       </p:sp>
       <p:sp>
         <p:nvSpPr>
-          <p:cNvPr id="13" name="Shape 10"/>
-          <p:cNvSpPr/>
-          <p:nvPr/>
-        </p:nvSpPr>
-        <p:spPr>
-          <a:xfrm>
-            <a:off x="731520" y="2715768"/>
+          <p:cNvPr id="36" name="Shape 33"/>
+          <p:cNvSpPr/>
+          <p:nvPr/>
+        </p:nvSpPr>
+        <p:spPr>
+          <a:xfrm>
+            <a:off x="5669280" y="2715768"/>
             <a:ext cx="2331720" cy="475488"/>
           </a:xfrm>
           <a:prstGeom prst="roundRect">
@@ -21596,13 +22637,13 @@
       </p:sp>
       <p:sp>
         <p:nvSpPr>
-          <p:cNvPr id="14" name="Text 11"/>
-          <p:cNvSpPr/>
-          <p:nvPr/>
-        </p:nvSpPr>
-        <p:spPr>
-          <a:xfrm>
-            <a:off x="868680" y="2843784"/>
+          <p:cNvPr id="37" name="Text 34"/>
+          <p:cNvSpPr/>
+          <p:nvPr/>
+        </p:nvSpPr>
+        <p:spPr>
+          <a:xfrm>
+            <a:off x="5806440" y="2843784"/>
             <a:ext cx="1920240" cy="274320"/>
           </a:xfrm>
           <a:prstGeom prst="rect">
@@ -21649,13 +22690,13 @@
       </p:sp>
       <p:sp>
         <p:nvSpPr>
-          <p:cNvPr id="15" name="Text 12"/>
-          <p:cNvSpPr/>
-          <p:nvPr/>
-        </p:nvSpPr>
-        <p:spPr>
-          <a:xfrm>
-            <a:off x="2697480" y="2843784"/>
+          <p:cNvPr id="38" name="Text 35"/>
+          <p:cNvSpPr/>
+          <p:nvPr/>
+        </p:nvSpPr>
+        <p:spPr>
+          <a:xfrm>
+            <a:off x="7635240" y="2843784"/>
             <a:ext cx="256032" cy="274320"/>
           </a:xfrm>
           <a:prstGeom prst="rect">
@@ -21688,13 +22729,13 @@
       </p:sp>
       <p:sp>
         <p:nvSpPr>
-          <p:cNvPr id="16" name="Shape 13"/>
-          <p:cNvSpPr/>
-          <p:nvPr/>
-        </p:nvSpPr>
-        <p:spPr>
-          <a:xfrm>
-            <a:off x="731520" y="3282696"/>
+          <p:cNvPr id="39" name="Shape 36"/>
+          <p:cNvSpPr/>
+          <p:nvPr/>
+        </p:nvSpPr>
+        <p:spPr>
+          <a:xfrm>
+            <a:off x="5669280" y="3282696"/>
             <a:ext cx="2331720" cy="475488"/>
           </a:xfrm>
           <a:prstGeom prst="roundRect">
@@ -21715,13 +22756,13 @@
       </p:sp>
       <p:sp>
         <p:nvSpPr>
-          <p:cNvPr id="17" name="Text 14"/>
-          <p:cNvSpPr/>
-          <p:nvPr/>
-        </p:nvSpPr>
-        <p:spPr>
-          <a:xfrm>
-            <a:off x="868680" y="3410712"/>
+          <p:cNvPr id="40" name="Text 37"/>
+          <p:cNvSpPr/>
+          <p:nvPr/>
+        </p:nvSpPr>
+        <p:spPr>
+          <a:xfrm>
+            <a:off x="5806440" y="3410712"/>
             <a:ext cx="1920240" cy="274320"/>
           </a:xfrm>
           <a:prstGeom prst="rect">
@@ -21768,13 +22809,13 @@
       </p:sp>
       <p:sp>
         <p:nvSpPr>
-          <p:cNvPr id="18" name="Text 15"/>
-          <p:cNvSpPr/>
-          <p:nvPr/>
-        </p:nvSpPr>
-        <p:spPr>
-          <a:xfrm>
-            <a:off x="2697480" y="3410712"/>
+          <p:cNvPr id="41" name="Text 38"/>
+          <p:cNvSpPr/>
+          <p:nvPr/>
+        </p:nvSpPr>
+        <p:spPr>
+          <a:xfrm>
+            <a:off x="7635240" y="3410712"/>
             <a:ext cx="256032" cy="274320"/>
           </a:xfrm>
           <a:prstGeom prst="rect">
@@ -21807,13 +22848,13 @@
       </p:sp>
       <p:sp>
         <p:nvSpPr>
-          <p:cNvPr id="19" name="Shape 16"/>
-          <p:cNvSpPr/>
-          <p:nvPr/>
-        </p:nvSpPr>
-        <p:spPr>
-          <a:xfrm>
-            <a:off x="731520" y="3849624"/>
+          <p:cNvPr id="42" name="Shape 39"/>
+          <p:cNvSpPr/>
+          <p:nvPr/>
+        </p:nvSpPr>
+        <p:spPr>
+          <a:xfrm>
+            <a:off x="5669280" y="3849624"/>
             <a:ext cx="2331720" cy="475488"/>
           </a:xfrm>
           <a:prstGeom prst="roundRect">
@@ -21834,13 +22875,13 @@
       </p:sp>
       <p:sp>
         <p:nvSpPr>
-          <p:cNvPr id="20" name="Text 17"/>
-          <p:cNvSpPr/>
-          <p:nvPr/>
-        </p:nvSpPr>
-        <p:spPr>
-          <a:xfrm>
-            <a:off x="868680" y="3977640"/>
+          <p:cNvPr id="43" name="Text 40"/>
+          <p:cNvSpPr/>
+          <p:nvPr/>
+        </p:nvSpPr>
+        <p:spPr>
+          <a:xfrm>
+            <a:off x="5806440" y="3977640"/>
             <a:ext cx="1920240" cy="274320"/>
           </a:xfrm>
           <a:prstGeom prst="rect">
@@ -21887,13 +22928,13 @@
       </p:sp>
       <p:sp>
         <p:nvSpPr>
-          <p:cNvPr id="21" name="Text 18"/>
-          <p:cNvSpPr/>
-          <p:nvPr/>
-        </p:nvSpPr>
-        <p:spPr>
-          <a:xfrm>
-            <a:off x="2697480" y="3977640"/>
+          <p:cNvPr id="44" name="Text 41"/>
+          <p:cNvSpPr/>
+          <p:nvPr/>
+        </p:nvSpPr>
+        <p:spPr>
+          <a:xfrm>
+            <a:off x="7635240" y="3977640"/>
             <a:ext cx="256032" cy="274320"/>
           </a:xfrm>
           <a:prstGeom prst="rect">
@@ -21926,13 +22967,13 @@
       </p:sp>
       <p:sp>
         <p:nvSpPr>
-          <p:cNvPr id="22" name="Shape 19"/>
-          <p:cNvSpPr/>
-          <p:nvPr/>
-        </p:nvSpPr>
-        <p:spPr>
-          <a:xfrm>
-            <a:off x="731520" y="4416552"/>
+          <p:cNvPr id="45" name="Shape 42"/>
+          <p:cNvSpPr/>
+          <p:nvPr/>
+        </p:nvSpPr>
+        <p:spPr>
+          <a:xfrm>
+            <a:off x="5669280" y="4416552"/>
             <a:ext cx="2331720" cy="475488"/>
           </a:xfrm>
           <a:prstGeom prst="roundRect">
@@ -21953,13 +22994,13 @@
       </p:sp>
       <p:sp>
         <p:nvSpPr>
-          <p:cNvPr id="23" name="Text 20"/>
-          <p:cNvSpPr/>
-          <p:nvPr/>
-        </p:nvSpPr>
-        <p:spPr>
-          <a:xfrm>
-            <a:off x="868680" y="4544568"/>
+          <p:cNvPr id="46" name="Text 43"/>
+          <p:cNvSpPr/>
+          <p:nvPr/>
+        </p:nvSpPr>
+        <p:spPr>
+          <a:xfrm>
+            <a:off x="5806440" y="4544568"/>
             <a:ext cx="1920240" cy="274320"/>
           </a:xfrm>
           <a:prstGeom prst="rect">
@@ -22006,13 +23047,13 @@
       </p:sp>
       <p:sp>
         <p:nvSpPr>
-          <p:cNvPr id="24" name="Text 21"/>
-          <p:cNvSpPr/>
-          <p:nvPr/>
-        </p:nvSpPr>
-        <p:spPr>
-          <a:xfrm>
-            <a:off x="2697480" y="4544568"/>
+          <p:cNvPr id="47" name="Text 44"/>
+          <p:cNvSpPr/>
+          <p:nvPr/>
+        </p:nvSpPr>
+        <p:spPr>
+          <a:xfrm>
+            <a:off x="7635240" y="4544568"/>
             <a:ext cx="256032" cy="274320"/>
           </a:xfrm>
           <a:prstGeom prst="rect">
@@ -22045,13 +23086,13 @@
       </p:sp>
       <p:sp>
         <p:nvSpPr>
-          <p:cNvPr id="25" name="Shape 22"/>
-          <p:cNvSpPr/>
-          <p:nvPr/>
-        </p:nvSpPr>
-        <p:spPr>
-          <a:xfrm>
-            <a:off x="731520" y="4983480"/>
+          <p:cNvPr id="48" name="Shape 45"/>
+          <p:cNvSpPr/>
+          <p:nvPr/>
+        </p:nvSpPr>
+        <p:spPr>
+          <a:xfrm>
+            <a:off x="5669280" y="4983480"/>
             <a:ext cx="2331720" cy="475488"/>
           </a:xfrm>
           <a:prstGeom prst="roundRect">
@@ -22072,13 +23113,13 @@
       </p:sp>
       <p:sp>
         <p:nvSpPr>
-          <p:cNvPr id="26" name="Text 23"/>
-          <p:cNvSpPr/>
-          <p:nvPr/>
-        </p:nvSpPr>
-        <p:spPr>
-          <a:xfrm>
-            <a:off x="868680" y="5111496"/>
+          <p:cNvPr id="49" name="Text 46"/>
+          <p:cNvSpPr/>
+          <p:nvPr/>
+        </p:nvSpPr>
+        <p:spPr>
+          <a:xfrm>
+            <a:off x="5806440" y="5111496"/>
             <a:ext cx="1920240" cy="274320"/>
           </a:xfrm>
           <a:prstGeom prst="rect">
@@ -22125,13 +23166,13 @@
       </p:sp>
       <p:sp>
         <p:nvSpPr>
-          <p:cNvPr id="27" name="Text 24"/>
-          <p:cNvSpPr/>
-          <p:nvPr/>
-        </p:nvSpPr>
-        <p:spPr>
-          <a:xfrm>
-            <a:off x="2697480" y="5111496"/>
+          <p:cNvPr id="50" name="Text 47"/>
+          <p:cNvSpPr/>
+          <p:nvPr/>
+        </p:nvSpPr>
+        <p:spPr>
+          <a:xfrm>
+            <a:off x="7635240" y="5111496"/>
             <a:ext cx="256032" cy="274320"/>
           </a:xfrm>
           <a:prstGeom prst="rect">
@@ -22157,915 +23198,6 @@
                 <a:cs typeface="Calibri" pitchFamily="34" charset="-120"/>
               </a:rPr>
               <a:t>1</a:t>
-            </a:r>
-            <a:endParaRPr lang="en-US" sz="1200" dirty="0"/>
-          </a:p>
-        </p:txBody>
-      </p:sp>
-      <p:sp>
-        <p:nvSpPr>
-          <p:cNvPr id="28" name="Text 25"/>
-          <p:cNvSpPr/>
-          <p:nvPr/>
-        </p:nvSpPr>
-        <p:spPr>
-          <a:xfrm>
-            <a:off x="3200400" y="1783080"/>
-            <a:ext cx="1828800" cy="274320"/>
-          </a:xfrm>
-          <a:prstGeom prst="rect">
-            <a:avLst/>
-          </a:prstGeom>
-          <a:noFill/>
-          <a:ln/>
-        </p:spPr>
-        <p:txBody>
-          <a:bodyPr wrap="square" lIns="0" tIns="0" rIns="0" bIns="0" rtlCol="0" anchor="t"/>
-          <a:lstStyle/>
-          <a:p>
-            <a:pPr indent="0" marL="0">
-              <a:buNone/>
-            </a:pPr>
-            <a:r>
-              <a:rPr lang="en-US" sz="1100" b="1" spc="100" kern="0" dirty="0">
-                <a:solidFill>
-                  <a:srgbClr val="C2410C"/>
-                </a:solidFill>
-                <a:latin typeface="Calibri" pitchFamily="34" charset="0"/>
-                <a:ea typeface="Calibri" pitchFamily="34" charset="-122"/>
-                <a:cs typeface="Calibri" pitchFamily="34" charset="-120"/>
-              </a:rPr>
-              <a:t>EN CIERRE</a:t>
-            </a:r>
-            <a:endParaRPr lang="en-US" sz="1100" dirty="0"/>
-          </a:p>
-        </p:txBody>
-      </p:sp>
-      <p:sp>
-        <p:nvSpPr>
-          <p:cNvPr id="29" name="Text 26"/>
-          <p:cNvSpPr/>
-          <p:nvPr/>
-        </p:nvSpPr>
-        <p:spPr>
-          <a:xfrm>
-            <a:off x="4800600" y="1783080"/>
-            <a:ext cx="731520" cy="274320"/>
-          </a:xfrm>
-          <a:prstGeom prst="rect">
-            <a:avLst/>
-          </a:prstGeom>
-          <a:noFill/>
-          <a:ln/>
-        </p:spPr>
-        <p:txBody>
-          <a:bodyPr wrap="square" lIns="0" tIns="0" rIns="0" bIns="0" rtlCol="0" anchor="t"/>
-          <a:lstStyle/>
-          <a:p>
-            <a:pPr algn="r" indent="0" marL="0">
-              <a:buNone/>
-            </a:pPr>
-            <a:r>
-              <a:rPr lang="en-US" sz="1100" dirty="0">
-                <a:solidFill>
-                  <a:srgbClr val="8A8984"/>
-                </a:solidFill>
-                <a:latin typeface="Calibri" pitchFamily="34" charset="0"/>
-                <a:ea typeface="Calibri" pitchFamily="34" charset="-122"/>
-                <a:cs typeface="Calibri" pitchFamily="34" charset="-120"/>
-              </a:rPr>
-              <a:t>3 pts</a:t>
-            </a:r>
-            <a:endParaRPr lang="en-US" sz="1100" dirty="0"/>
-          </a:p>
-        </p:txBody>
-      </p:sp>
-      <p:sp>
-        <p:nvSpPr>
-          <p:cNvPr id="30" name="Shape 27"/>
-          <p:cNvSpPr/>
-          <p:nvPr/>
-        </p:nvSpPr>
-        <p:spPr>
-          <a:xfrm>
-            <a:off x="3200400" y="2148840"/>
-            <a:ext cx="2331720" cy="475488"/>
-          </a:xfrm>
-          <a:prstGeom prst="roundRect">
-            <a:avLst>
-              <a:gd name="adj" fmla="val 15385"/>
-            </a:avLst>
-          </a:prstGeom>
-          <a:solidFill>
-            <a:srgbClr val="FFF4ED"/>
-          </a:solidFill>
-          <a:ln w="9525">
-            <a:solidFill>
-              <a:srgbClr val="F5D0BD"/>
-            </a:solidFill>
-            <a:prstDash val="solid"/>
-          </a:ln>
-        </p:spPr>
-      </p:sp>
-      <p:sp>
-        <p:nvSpPr>
-          <p:cNvPr id="31" name="Text 28"/>
-          <p:cNvSpPr/>
-          <p:nvPr/>
-        </p:nvSpPr>
-        <p:spPr>
-          <a:xfrm>
-            <a:off x="3337560" y="2276856"/>
-            <a:ext cx="1920240" cy="274320"/>
-          </a:xfrm>
-          <a:prstGeom prst="rect">
-            <a:avLst/>
-          </a:prstGeom>
-          <a:noFill/>
-          <a:ln/>
-        </p:spPr>
-        <p:txBody>
-          <a:bodyPr wrap="square" lIns="0" tIns="0" rIns="0" bIns="0" rtlCol="0" anchor="t"/>
-          <a:lstStyle/>
-          <a:p>
-            <a:pPr indent="0" marL="0">
-              <a:buNone/>
-            </a:pPr>
-            <a:r>
-              <a:rPr lang="en-US" sz="1200" b="1" dirty="0">
-                <a:solidFill>
-                  <a:srgbClr val="1A1A1A"/>
-                </a:solidFill>
-                <a:latin typeface="Calibri" pitchFamily="34" charset="0"/>
-                <a:ea typeface="Calibri" pitchFamily="34" charset="-122"/>
-                <a:cs typeface="Calibri" pitchFamily="34" charset="-120"/>
-              </a:rPr>
-              <a:t>HU05  </a:t>
-            </a:r>
-            <a:pPr indent="0" marL="0">
-              <a:buNone/>
-            </a:pPr>
-            <a:r>
-              <a:rPr lang="en-US" sz="1200" dirty="0">
-                <a:solidFill>
-                  <a:srgbClr val="1A1A1A"/>
-                </a:solidFill>
-                <a:latin typeface="Calibri" pitchFamily="34" charset="0"/>
-                <a:ea typeface="Calibri" pitchFamily="34" charset="-122"/>
-                <a:cs typeface="Calibri" pitchFamily="34" charset="-120"/>
-              </a:rPr>
-              <a:t>Agrupar en clips</a:t>
-            </a:r>
-            <a:endParaRPr lang="en-US" sz="1200" dirty="0"/>
-          </a:p>
-        </p:txBody>
-      </p:sp>
-      <p:sp>
-        <p:nvSpPr>
-          <p:cNvPr id="32" name="Text 29"/>
-          <p:cNvSpPr/>
-          <p:nvPr/>
-        </p:nvSpPr>
-        <p:spPr>
-          <a:xfrm>
-            <a:off x="5166360" y="2276856"/>
-            <a:ext cx="256032" cy="274320"/>
-          </a:xfrm>
-          <a:prstGeom prst="rect">
-            <a:avLst/>
-          </a:prstGeom>
-          <a:noFill/>
-          <a:ln/>
-        </p:spPr>
-        <p:txBody>
-          <a:bodyPr wrap="square" lIns="0" tIns="0" rIns="0" bIns="0" rtlCol="0" anchor="t"/>
-          <a:lstStyle/>
-          <a:p>
-            <a:pPr algn="r" indent="0" marL="0">
-              <a:buNone/>
-            </a:pPr>
-            <a:r>
-              <a:rPr lang="en-US" sz="1200" dirty="0">
-                <a:solidFill>
-                  <a:srgbClr val="8A8984"/>
-                </a:solidFill>
-                <a:latin typeface="Calibri" pitchFamily="34" charset="0"/>
-                <a:ea typeface="Calibri" pitchFamily="34" charset="-122"/>
-                <a:cs typeface="Calibri" pitchFamily="34" charset="-120"/>
-              </a:rPr>
-              <a:t>3</a:t>
-            </a:r>
-            <a:endParaRPr lang="en-US" sz="1200" dirty="0"/>
-          </a:p>
-        </p:txBody>
-      </p:sp>
-      <p:sp>
-        <p:nvSpPr>
-          <p:cNvPr id="33" name="Text 30"/>
-          <p:cNvSpPr/>
-          <p:nvPr/>
-        </p:nvSpPr>
-        <p:spPr>
-          <a:xfrm>
-            <a:off x="3200400" y="2743200"/>
-            <a:ext cx="2331720" cy="1097280"/>
-          </a:xfrm>
-          <a:prstGeom prst="rect">
-            <a:avLst/>
-          </a:prstGeom>
-          <a:noFill/>
-          <a:ln/>
-        </p:spPr>
-        <p:txBody>
-          <a:bodyPr wrap="square" lIns="0" tIns="0" rIns="0" bIns="0" rtlCol="0" anchor="t"/>
-          <a:lstStyle/>
-          <a:p>
-            <a:pPr indent="0" marL="0">
-              <a:buNone/>
-            </a:pPr>
-            <a:r>
-              <a:rPr lang="en-US" sz="1200" dirty="0">
-                <a:solidFill>
-                  <a:srgbClr val="57534E"/>
-                </a:solidFill>
-                <a:latin typeface="Calibri" pitchFamily="34" charset="0"/>
-                <a:ea typeface="Calibri" pitchFamily="34" charset="-122"/>
-                <a:cs typeface="Calibri" pitchFamily="34" charset="-120"/>
-              </a:rPr>
-              <a:t>Agrupa los clips; falta darles el formato de entrada del modelo temporal. Se cierra con HU07.</a:t>
-            </a:r>
-            <a:endParaRPr lang="en-US" sz="1200" dirty="0"/>
-          </a:p>
-        </p:txBody>
-      </p:sp>
-      <p:sp>
-        <p:nvSpPr>
-          <p:cNvPr id="34" name="Text 31"/>
-          <p:cNvSpPr/>
-          <p:nvPr/>
-        </p:nvSpPr>
-        <p:spPr>
-          <a:xfrm>
-            <a:off x="5669280" y="1783080"/>
-            <a:ext cx="1828800" cy="274320"/>
-          </a:xfrm>
-          <a:prstGeom prst="rect">
-            <a:avLst/>
-          </a:prstGeom>
-          <a:noFill/>
-          <a:ln/>
-        </p:spPr>
-        <p:txBody>
-          <a:bodyPr wrap="square" lIns="0" tIns="0" rIns="0" bIns="0" rtlCol="0" anchor="t"/>
-          <a:lstStyle/>
-          <a:p>
-            <a:pPr indent="0" marL="0">
-              <a:buNone/>
-            </a:pPr>
-            <a:r>
-              <a:rPr lang="en-US" sz="1100" b="1" spc="100" kern="0" dirty="0">
-                <a:solidFill>
-                  <a:srgbClr val="8A8984"/>
-                </a:solidFill>
-                <a:latin typeface="Calibri" pitchFamily="34" charset="0"/>
-                <a:ea typeface="Calibri" pitchFamily="34" charset="-122"/>
-                <a:cs typeface="Calibri" pitchFamily="34" charset="-120"/>
-              </a:rPr>
-              <a:t>POR HACER</a:t>
-            </a:r>
-            <a:endParaRPr lang="en-US" sz="1100" dirty="0"/>
-          </a:p>
-        </p:txBody>
-      </p:sp>
-      <p:sp>
-        <p:nvSpPr>
-          <p:cNvPr id="35" name="Text 32"/>
-          <p:cNvSpPr/>
-          <p:nvPr/>
-        </p:nvSpPr>
-        <p:spPr>
-          <a:xfrm>
-            <a:off x="7269480" y="1783080"/>
-            <a:ext cx="731520" cy="274320"/>
-          </a:xfrm>
-          <a:prstGeom prst="rect">
-            <a:avLst/>
-          </a:prstGeom>
-          <a:noFill/>
-          <a:ln/>
-        </p:spPr>
-        <p:txBody>
-          <a:bodyPr wrap="square" lIns="0" tIns="0" rIns="0" bIns="0" rtlCol="0" anchor="t"/>
-          <a:lstStyle/>
-          <a:p>
-            <a:pPr algn="r" indent="0" marL="0">
-              <a:buNone/>
-            </a:pPr>
-            <a:r>
-              <a:rPr lang="en-US" sz="1100" dirty="0">
-                <a:solidFill>
-                  <a:srgbClr val="8A8984"/>
-                </a:solidFill>
-                <a:latin typeface="Calibri" pitchFamily="34" charset="0"/>
-                <a:ea typeface="Calibri" pitchFamily="34" charset="-122"/>
-                <a:cs typeface="Calibri" pitchFamily="34" charset="-120"/>
-              </a:rPr>
-              <a:t>16 pts</a:t>
-            </a:r>
-            <a:endParaRPr lang="en-US" sz="1100" dirty="0"/>
-          </a:p>
-        </p:txBody>
-      </p:sp>
-      <p:sp>
-        <p:nvSpPr>
-          <p:cNvPr id="36" name="Shape 33"/>
-          <p:cNvSpPr/>
-          <p:nvPr/>
-        </p:nvSpPr>
-        <p:spPr>
-          <a:xfrm>
-            <a:off x="5669280" y="2148840"/>
-            <a:ext cx="2331720" cy="475488"/>
-          </a:xfrm>
-          <a:prstGeom prst="roundRect">
-            <a:avLst>
-              <a:gd name="adj" fmla="val 15385"/>
-            </a:avLst>
-          </a:prstGeom>
-          <a:solidFill>
-            <a:srgbClr val="FFFFFF"/>
-          </a:solidFill>
-          <a:ln w="9525">
-            <a:solidFill>
-              <a:srgbClr val="E7E5E4"/>
-            </a:solidFill>
-            <a:prstDash val="solid"/>
-          </a:ln>
-        </p:spPr>
-      </p:sp>
-      <p:sp>
-        <p:nvSpPr>
-          <p:cNvPr id="37" name="Text 34"/>
-          <p:cNvSpPr/>
-          <p:nvPr/>
-        </p:nvSpPr>
-        <p:spPr>
-          <a:xfrm>
-            <a:off x="5806440" y="2276856"/>
-            <a:ext cx="1920240" cy="274320"/>
-          </a:xfrm>
-          <a:prstGeom prst="rect">
-            <a:avLst/>
-          </a:prstGeom>
-          <a:noFill/>
-          <a:ln/>
-        </p:spPr>
-        <p:txBody>
-          <a:bodyPr wrap="square" lIns="0" tIns="0" rIns="0" bIns="0" rtlCol="0" anchor="t"/>
-          <a:lstStyle/>
-          <a:p>
-            <a:pPr indent="0" marL="0">
-              <a:buNone/>
-            </a:pPr>
-            <a:r>
-              <a:rPr lang="en-US" sz="1200" b="1" dirty="0">
-                <a:solidFill>
-                  <a:srgbClr val="1A1A1A"/>
-                </a:solidFill>
-                <a:latin typeface="Calibri" pitchFamily="34" charset="0"/>
-                <a:ea typeface="Calibri" pitchFamily="34" charset="-122"/>
-                <a:cs typeface="Calibri" pitchFamily="34" charset="-120"/>
-              </a:rPr>
-              <a:t>HU07  </a:t>
-            </a:r>
-            <a:pPr indent="0" marL="0">
-              <a:buNone/>
-            </a:pPr>
-            <a:r>
-              <a:rPr lang="en-US" sz="1200" dirty="0">
-                <a:solidFill>
-                  <a:srgbClr val="1A1A1A"/>
-                </a:solidFill>
-                <a:latin typeface="Calibri" pitchFamily="34" charset="0"/>
-                <a:ea typeface="Calibri" pitchFamily="34" charset="-122"/>
-                <a:cs typeface="Calibri" pitchFamily="34" charset="-120"/>
-              </a:rPr>
-              <a:t>Procesar con ConvLSTM</a:t>
-            </a:r>
-            <a:endParaRPr lang="en-US" sz="1200" dirty="0"/>
-          </a:p>
-        </p:txBody>
-      </p:sp>
-      <p:sp>
-        <p:nvSpPr>
-          <p:cNvPr id="38" name="Text 35"/>
-          <p:cNvSpPr/>
-          <p:nvPr/>
-        </p:nvSpPr>
-        <p:spPr>
-          <a:xfrm>
-            <a:off x="7635240" y="2276856"/>
-            <a:ext cx="256032" cy="274320"/>
-          </a:xfrm>
-          <a:prstGeom prst="rect">
-            <a:avLst/>
-          </a:prstGeom>
-          <a:noFill/>
-          <a:ln/>
-        </p:spPr>
-        <p:txBody>
-          <a:bodyPr wrap="square" lIns="0" tIns="0" rIns="0" bIns="0" rtlCol="0" anchor="t"/>
-          <a:lstStyle/>
-          <a:p>
-            <a:pPr algn="r" indent="0" marL="0">
-              <a:buNone/>
-            </a:pPr>
-            <a:r>
-              <a:rPr lang="en-US" sz="1200" dirty="0">
-                <a:solidFill>
-                  <a:srgbClr val="8A8984"/>
-                </a:solidFill>
-                <a:latin typeface="Calibri" pitchFamily="34" charset="0"/>
-                <a:ea typeface="Calibri" pitchFamily="34" charset="-122"/>
-                <a:cs typeface="Calibri" pitchFamily="34" charset="-120"/>
-              </a:rPr>
-              <a:t>5</a:t>
-            </a:r>
-            <a:endParaRPr lang="en-US" sz="1200" dirty="0"/>
-          </a:p>
-        </p:txBody>
-      </p:sp>
-      <p:sp>
-        <p:nvSpPr>
-          <p:cNvPr id="39" name="Shape 36"/>
-          <p:cNvSpPr/>
-          <p:nvPr/>
-        </p:nvSpPr>
-        <p:spPr>
-          <a:xfrm>
-            <a:off x="5669280" y="2715768"/>
-            <a:ext cx="2331720" cy="475488"/>
-          </a:xfrm>
-          <a:prstGeom prst="roundRect">
-            <a:avLst>
-              <a:gd name="adj" fmla="val 15385"/>
-            </a:avLst>
-          </a:prstGeom>
-          <a:solidFill>
-            <a:srgbClr val="FFFFFF"/>
-          </a:solidFill>
-          <a:ln w="9525">
-            <a:solidFill>
-              <a:srgbClr val="E7E5E4"/>
-            </a:solidFill>
-            <a:prstDash val="solid"/>
-          </a:ln>
-        </p:spPr>
-      </p:sp>
-      <p:sp>
-        <p:nvSpPr>
-          <p:cNvPr id="40" name="Text 37"/>
-          <p:cNvSpPr/>
-          <p:nvPr/>
-        </p:nvSpPr>
-        <p:spPr>
-          <a:xfrm>
-            <a:off x="5806440" y="2843784"/>
-            <a:ext cx="1920240" cy="274320"/>
-          </a:xfrm>
-          <a:prstGeom prst="rect">
-            <a:avLst/>
-          </a:prstGeom>
-          <a:noFill/>
-          <a:ln/>
-        </p:spPr>
-        <p:txBody>
-          <a:bodyPr wrap="square" lIns="0" tIns="0" rIns="0" bIns="0" rtlCol="0" anchor="t"/>
-          <a:lstStyle/>
-          <a:p>
-            <a:pPr indent="0" marL="0">
-              <a:buNone/>
-            </a:pPr>
-            <a:r>
-              <a:rPr lang="en-US" sz="1200" b="1" dirty="0">
-                <a:solidFill>
-                  <a:srgbClr val="1A1A1A"/>
-                </a:solidFill>
-                <a:latin typeface="Calibri" pitchFamily="34" charset="0"/>
-                <a:ea typeface="Calibri" pitchFamily="34" charset="-122"/>
-                <a:cs typeface="Calibri" pitchFamily="34" charset="-120"/>
-              </a:rPr>
-              <a:t>HU08  </a:t>
-            </a:r>
-            <a:pPr indent="0" marL="0">
-              <a:buNone/>
-            </a:pPr>
-            <a:r>
-              <a:rPr lang="en-US" sz="1200" dirty="0">
-                <a:solidFill>
-                  <a:srgbClr val="1A1A1A"/>
-                </a:solidFill>
-                <a:latin typeface="Calibri" pitchFamily="34" charset="0"/>
-                <a:ea typeface="Calibri" pitchFamily="34" charset="-122"/>
-                <a:cs typeface="Calibri" pitchFamily="34" charset="-120"/>
-              </a:rPr>
-              <a:t>Clasificar la conducta</a:t>
-            </a:r>
-            <a:endParaRPr lang="en-US" sz="1200" dirty="0"/>
-          </a:p>
-        </p:txBody>
-      </p:sp>
-      <p:sp>
-        <p:nvSpPr>
-          <p:cNvPr id="41" name="Text 38"/>
-          <p:cNvSpPr/>
-          <p:nvPr/>
-        </p:nvSpPr>
-        <p:spPr>
-          <a:xfrm>
-            <a:off x="7635240" y="2843784"/>
-            <a:ext cx="256032" cy="274320"/>
-          </a:xfrm>
-          <a:prstGeom prst="rect">
-            <a:avLst/>
-          </a:prstGeom>
-          <a:noFill/>
-          <a:ln/>
-        </p:spPr>
-        <p:txBody>
-          <a:bodyPr wrap="square" lIns="0" tIns="0" rIns="0" bIns="0" rtlCol="0" anchor="t"/>
-          <a:lstStyle/>
-          <a:p>
-            <a:pPr algn="r" indent="0" marL="0">
-              <a:buNone/>
-            </a:pPr>
-            <a:r>
-              <a:rPr lang="en-US" sz="1200" dirty="0">
-                <a:solidFill>
-                  <a:srgbClr val="8A8984"/>
-                </a:solidFill>
-                <a:latin typeface="Calibri" pitchFamily="34" charset="0"/>
-                <a:ea typeface="Calibri" pitchFamily="34" charset="-122"/>
-                <a:cs typeface="Calibri" pitchFamily="34" charset="-120"/>
-              </a:rPr>
-              <a:t>3</a:t>
-            </a:r>
-            <a:endParaRPr lang="en-US" sz="1200" dirty="0"/>
-          </a:p>
-        </p:txBody>
-      </p:sp>
-      <p:sp>
-        <p:nvSpPr>
-          <p:cNvPr id="42" name="Shape 39"/>
-          <p:cNvSpPr/>
-          <p:nvPr/>
-        </p:nvSpPr>
-        <p:spPr>
-          <a:xfrm>
-            <a:off x="5669280" y="3282696"/>
-            <a:ext cx="2331720" cy="475488"/>
-          </a:xfrm>
-          <a:prstGeom prst="roundRect">
-            <a:avLst>
-              <a:gd name="adj" fmla="val 15385"/>
-            </a:avLst>
-          </a:prstGeom>
-          <a:solidFill>
-            <a:srgbClr val="FFFFFF"/>
-          </a:solidFill>
-          <a:ln w="9525">
-            <a:solidFill>
-              <a:srgbClr val="E7E5E4"/>
-            </a:solidFill>
-            <a:prstDash val="solid"/>
-          </a:ln>
-        </p:spPr>
-      </p:sp>
-      <p:sp>
-        <p:nvSpPr>
-          <p:cNvPr id="43" name="Text 40"/>
-          <p:cNvSpPr/>
-          <p:nvPr/>
-        </p:nvSpPr>
-        <p:spPr>
-          <a:xfrm>
-            <a:off x="5806440" y="3410712"/>
-            <a:ext cx="1920240" cy="274320"/>
-          </a:xfrm>
-          <a:prstGeom prst="rect">
-            <a:avLst/>
-          </a:prstGeom>
-          <a:noFill/>
-          <a:ln/>
-        </p:spPr>
-        <p:txBody>
-          <a:bodyPr wrap="square" lIns="0" tIns="0" rIns="0" bIns="0" rtlCol="0" anchor="t"/>
-          <a:lstStyle/>
-          <a:p>
-            <a:pPr indent="0" marL="0">
-              <a:buNone/>
-            </a:pPr>
-            <a:r>
-              <a:rPr lang="en-US" sz="1200" b="1" dirty="0">
-                <a:solidFill>
-                  <a:srgbClr val="1A1A1A"/>
-                </a:solidFill>
-                <a:latin typeface="Calibri" pitchFamily="34" charset="0"/>
-                <a:ea typeface="Calibri" pitchFamily="34" charset="-122"/>
-                <a:cs typeface="Calibri" pitchFamily="34" charset="-120"/>
-              </a:rPr>
-              <a:t>HU09  </a:t>
-            </a:r>
-            <a:pPr indent="0" marL="0">
-              <a:buNone/>
-            </a:pPr>
-            <a:r>
-              <a:rPr lang="en-US" sz="1200" dirty="0">
-                <a:solidFill>
-                  <a:srgbClr val="1A1A1A"/>
-                </a:solidFill>
-                <a:latin typeface="Calibri" pitchFamily="34" charset="0"/>
-                <a:ea typeface="Calibri" pitchFamily="34" charset="-122"/>
-                <a:cs typeface="Calibri" pitchFamily="34" charset="-120"/>
-              </a:rPr>
-              <a:t>Recuadro de riesgo</a:t>
-            </a:r>
-            <a:endParaRPr lang="en-US" sz="1200" dirty="0"/>
-          </a:p>
-        </p:txBody>
-      </p:sp>
-      <p:sp>
-        <p:nvSpPr>
-          <p:cNvPr id="44" name="Text 41"/>
-          <p:cNvSpPr/>
-          <p:nvPr/>
-        </p:nvSpPr>
-        <p:spPr>
-          <a:xfrm>
-            <a:off x="7635240" y="3410712"/>
-            <a:ext cx="256032" cy="274320"/>
-          </a:xfrm>
-          <a:prstGeom prst="rect">
-            <a:avLst/>
-          </a:prstGeom>
-          <a:noFill/>
-          <a:ln/>
-        </p:spPr>
-        <p:txBody>
-          <a:bodyPr wrap="square" lIns="0" tIns="0" rIns="0" bIns="0" rtlCol="0" anchor="t"/>
-          <a:lstStyle/>
-          <a:p>
-            <a:pPr algn="r" indent="0" marL="0">
-              <a:buNone/>
-            </a:pPr>
-            <a:r>
-              <a:rPr lang="en-US" sz="1200" dirty="0">
-                <a:solidFill>
-                  <a:srgbClr val="8A8984"/>
-                </a:solidFill>
-                <a:latin typeface="Calibri" pitchFamily="34" charset="0"/>
-                <a:ea typeface="Calibri" pitchFamily="34" charset="-122"/>
-                <a:cs typeface="Calibri" pitchFamily="34" charset="-120"/>
-              </a:rPr>
-              <a:t>4</a:t>
-            </a:r>
-            <a:endParaRPr lang="en-US" sz="1200" dirty="0"/>
-          </a:p>
-        </p:txBody>
-      </p:sp>
-      <p:sp>
-        <p:nvSpPr>
-          <p:cNvPr id="45" name="Shape 42"/>
-          <p:cNvSpPr/>
-          <p:nvPr/>
-        </p:nvSpPr>
-        <p:spPr>
-          <a:xfrm>
-            <a:off x="5669280" y="3849624"/>
-            <a:ext cx="2331720" cy="475488"/>
-          </a:xfrm>
-          <a:prstGeom prst="roundRect">
-            <a:avLst>
-              <a:gd name="adj" fmla="val 15385"/>
-            </a:avLst>
-          </a:prstGeom>
-          <a:solidFill>
-            <a:srgbClr val="FFFFFF"/>
-          </a:solidFill>
-          <a:ln w="9525">
-            <a:solidFill>
-              <a:srgbClr val="E7E5E4"/>
-            </a:solidFill>
-            <a:prstDash val="solid"/>
-          </a:ln>
-        </p:spPr>
-      </p:sp>
-      <p:sp>
-        <p:nvSpPr>
-          <p:cNvPr id="46" name="Text 43"/>
-          <p:cNvSpPr/>
-          <p:nvPr/>
-        </p:nvSpPr>
-        <p:spPr>
-          <a:xfrm>
-            <a:off x="5806440" y="3977640"/>
-            <a:ext cx="1920240" cy="274320"/>
-          </a:xfrm>
-          <a:prstGeom prst="rect">
-            <a:avLst/>
-          </a:prstGeom>
-          <a:noFill/>
-          <a:ln/>
-        </p:spPr>
-        <p:txBody>
-          <a:bodyPr wrap="square" lIns="0" tIns="0" rIns="0" bIns="0" rtlCol="0" anchor="t"/>
-          <a:lstStyle/>
-          <a:p>
-            <a:pPr indent="0" marL="0">
-              <a:buNone/>
-            </a:pPr>
-            <a:r>
-              <a:rPr lang="en-US" sz="1200" b="1" dirty="0">
-                <a:solidFill>
-                  <a:srgbClr val="1A1A1A"/>
-                </a:solidFill>
-                <a:latin typeface="Calibri" pitchFamily="34" charset="0"/>
-                <a:ea typeface="Calibri" pitchFamily="34" charset="-122"/>
-                <a:cs typeface="Calibri" pitchFamily="34" charset="-120"/>
-              </a:rPr>
-              <a:t>HU10  </a:t>
-            </a:r>
-            <a:pPr indent="0" marL="0">
-              <a:buNone/>
-            </a:pPr>
-            <a:r>
-              <a:rPr lang="en-US" sz="1200" dirty="0">
-                <a:solidFill>
-                  <a:srgbClr val="1A1A1A"/>
-                </a:solidFill>
-                <a:latin typeface="Calibri" pitchFamily="34" charset="0"/>
-                <a:ea typeface="Calibri" pitchFamily="34" charset="-122"/>
-                <a:cs typeface="Calibri" pitchFamily="34" charset="-120"/>
-              </a:rPr>
-              <a:t>Alerta de riesgo</a:t>
-            </a:r>
-            <a:endParaRPr lang="en-US" sz="1200" dirty="0"/>
-          </a:p>
-        </p:txBody>
-      </p:sp>
-      <p:sp>
-        <p:nvSpPr>
-          <p:cNvPr id="47" name="Text 44"/>
-          <p:cNvSpPr/>
-          <p:nvPr/>
-        </p:nvSpPr>
-        <p:spPr>
-          <a:xfrm>
-            <a:off x="7635240" y="3977640"/>
-            <a:ext cx="256032" cy="274320"/>
-          </a:xfrm>
-          <a:prstGeom prst="rect">
-            <a:avLst/>
-          </a:prstGeom>
-          <a:noFill/>
-          <a:ln/>
-        </p:spPr>
-        <p:txBody>
-          <a:bodyPr wrap="square" lIns="0" tIns="0" rIns="0" bIns="0" rtlCol="0" anchor="t"/>
-          <a:lstStyle/>
-          <a:p>
-            <a:pPr algn="r" indent="0" marL="0">
-              <a:buNone/>
-            </a:pPr>
-            <a:r>
-              <a:rPr lang="en-US" sz="1200" dirty="0">
-                <a:solidFill>
-                  <a:srgbClr val="8A8984"/>
-                </a:solidFill>
-                <a:latin typeface="Calibri" pitchFamily="34" charset="0"/>
-                <a:ea typeface="Calibri" pitchFamily="34" charset="-122"/>
-                <a:cs typeface="Calibri" pitchFamily="34" charset="-120"/>
-              </a:rPr>
-              <a:t>2</a:t>
-            </a:r>
-            <a:endParaRPr lang="en-US" sz="1200" dirty="0"/>
-          </a:p>
-        </p:txBody>
-      </p:sp>
-      <p:sp>
-        <p:nvSpPr>
-          <p:cNvPr id="48" name="Shape 45"/>
-          <p:cNvSpPr/>
-          <p:nvPr/>
-        </p:nvSpPr>
-        <p:spPr>
-          <a:xfrm>
-            <a:off x="5669280" y="4416552"/>
-            <a:ext cx="2331720" cy="475488"/>
-          </a:xfrm>
-          <a:prstGeom prst="roundRect">
-            <a:avLst>
-              <a:gd name="adj" fmla="val 15385"/>
-            </a:avLst>
-          </a:prstGeom>
-          <a:solidFill>
-            <a:srgbClr val="FFFFFF"/>
-          </a:solidFill>
-          <a:ln w="9525">
-            <a:solidFill>
-              <a:srgbClr val="E7E5E4"/>
-            </a:solidFill>
-            <a:prstDash val="solid"/>
-          </a:ln>
-        </p:spPr>
-      </p:sp>
-      <p:sp>
-        <p:nvSpPr>
-          <p:cNvPr id="49" name="Text 46"/>
-          <p:cNvSpPr/>
-          <p:nvPr/>
-        </p:nvSpPr>
-        <p:spPr>
-          <a:xfrm>
-            <a:off x="5806440" y="4544568"/>
-            <a:ext cx="1920240" cy="274320"/>
-          </a:xfrm>
-          <a:prstGeom prst="rect">
-            <a:avLst/>
-          </a:prstGeom>
-          <a:noFill/>
-          <a:ln/>
-        </p:spPr>
-        <p:txBody>
-          <a:bodyPr wrap="square" lIns="0" tIns="0" rIns="0" bIns="0" rtlCol="0" anchor="t"/>
-          <a:lstStyle/>
-          <a:p>
-            <a:pPr indent="0" marL="0">
-              <a:buNone/>
-            </a:pPr>
-            <a:r>
-              <a:rPr lang="en-US" sz="1200" b="1" dirty="0">
-                <a:solidFill>
-                  <a:srgbClr val="1A1A1A"/>
-                </a:solidFill>
-                <a:latin typeface="Calibri" pitchFamily="34" charset="0"/>
-                <a:ea typeface="Calibri" pitchFamily="34" charset="-122"/>
-                <a:cs typeface="Calibri" pitchFamily="34" charset="-120"/>
-              </a:rPr>
-              <a:t>HU12  </a:t>
-            </a:r>
-            <a:pPr indent="0" marL="0">
-              <a:buNone/>
-            </a:pPr>
-            <a:r>
-              <a:rPr lang="en-US" sz="1200" dirty="0">
-                <a:solidFill>
-                  <a:srgbClr val="1A1A1A"/>
-                </a:solidFill>
-                <a:latin typeface="Calibri" pitchFamily="34" charset="0"/>
-                <a:ea typeface="Calibri" pitchFamily="34" charset="-122"/>
-                <a:cs typeface="Calibri" pitchFamily="34" charset="-120"/>
-              </a:rPr>
-              <a:t>Log de tiempos</a:t>
-            </a:r>
-            <a:endParaRPr lang="en-US" sz="1200" dirty="0"/>
-          </a:p>
-        </p:txBody>
-      </p:sp>
-      <p:sp>
-        <p:nvSpPr>
-          <p:cNvPr id="50" name="Text 47"/>
-          <p:cNvSpPr/>
-          <p:nvPr/>
-        </p:nvSpPr>
-        <p:spPr>
-          <a:xfrm>
-            <a:off x="7635240" y="4544568"/>
-            <a:ext cx="256032" cy="274320"/>
-          </a:xfrm>
-          <a:prstGeom prst="rect">
-            <a:avLst/>
-          </a:prstGeom>
-          <a:noFill/>
-          <a:ln/>
-        </p:spPr>
-        <p:txBody>
-          <a:bodyPr wrap="square" lIns="0" tIns="0" rIns="0" bIns="0" rtlCol="0" anchor="t"/>
-          <a:lstStyle/>
-          <a:p>
-            <a:pPr algn="r" indent="0" marL="0">
-              <a:buNone/>
-            </a:pPr>
-            <a:r>
-              <a:rPr lang="en-US" sz="1200" dirty="0">
-                <a:solidFill>
-                  <a:srgbClr val="8A8984"/>
-                </a:solidFill>
-                <a:latin typeface="Calibri" pitchFamily="34" charset="0"/>
-                <a:ea typeface="Calibri" pitchFamily="34" charset="-122"/>
-                <a:cs typeface="Calibri" pitchFamily="34" charset="-120"/>
-              </a:rPr>
-              <a:t>2</a:t>
             </a:r>
             <a:endParaRPr lang="en-US" sz="1200" dirty="0"/>
           </a:p>
